--- a/docs/public/course-assets/course-pptx/in-007.pptx
+++ b/docs/public/course-assets/course-pptx/in-007.pptx
@@ -2,25 +2,25 @@
 <file path=ppt/presentation.xml><?xml version="1.0" encoding="utf-8"?>
 <p:presentation xmlns:p="http://schemas.openxmlformats.org/presentationml/2006/main">
   <p:sldMasterIdLst>
-    <p:sldMasterId xmlns:r="http://schemas.openxmlformats.org/officeDocument/2006/relationships" id="2147483648" r:id="R2f89636f008a4016"/>
+    <p:sldMasterId xmlns:r="http://schemas.openxmlformats.org/officeDocument/2006/relationships" id="2147483648" r:id="R05af24c07d1b4d70"/>
   </p:sldMasterIdLst>
   <p:notesMasterIdLst>
-    <p:notesMasterId xmlns:r="http://schemas.openxmlformats.org/officeDocument/2006/relationships" r:id="R9408e8d678c14b28"/>
+    <p:notesMasterId xmlns:r="http://schemas.openxmlformats.org/officeDocument/2006/relationships" r:id="R8028e2534113415d"/>
   </p:notesMasterIdLst>
   <p:sldIdLst>
-    <p:sldId xmlns:r="http://schemas.openxmlformats.org/officeDocument/2006/relationships" id="256" r:id="R23ed44c14433483b"/>
-    <p:sldId xmlns:r="http://schemas.openxmlformats.org/officeDocument/2006/relationships" id="257" r:id="R50664dfb84f042fa"/>
-    <p:sldId xmlns:r="http://schemas.openxmlformats.org/officeDocument/2006/relationships" id="258" r:id="R3df0da5975ec48e5"/>
-    <p:sldId xmlns:r="http://schemas.openxmlformats.org/officeDocument/2006/relationships" id="259" r:id="R3dd90eefc7294805"/>
-    <p:sldId xmlns:r="http://schemas.openxmlformats.org/officeDocument/2006/relationships" id="260" r:id="Rf3741d4c3c844457"/>
-    <p:sldId xmlns:r="http://schemas.openxmlformats.org/officeDocument/2006/relationships" id="261" r:id="R4980395ce1a14c0c"/>
-    <p:sldId xmlns:r="http://schemas.openxmlformats.org/officeDocument/2006/relationships" id="262" r:id="Re13ecb770262490d"/>
-    <p:sldId xmlns:r="http://schemas.openxmlformats.org/officeDocument/2006/relationships" id="263" r:id="R3b8fb2dd7a334d87"/>
-    <p:sldId xmlns:r="http://schemas.openxmlformats.org/officeDocument/2006/relationships" id="264" r:id="R12f9f4e483a84ee3"/>
-    <p:sldId xmlns:r="http://schemas.openxmlformats.org/officeDocument/2006/relationships" id="265" r:id="R319c5b07337e4a43"/>
-    <p:sldId xmlns:r="http://schemas.openxmlformats.org/officeDocument/2006/relationships" id="266" r:id="R743d5eaeb4fa40a6"/>
-    <p:sldId xmlns:r="http://schemas.openxmlformats.org/officeDocument/2006/relationships" id="267" r:id="R9023598390284a09"/>
-    <p:sldId xmlns:r="http://schemas.openxmlformats.org/officeDocument/2006/relationships" id="268" r:id="R9d840b9e649e4bcf"/>
+    <p:sldId xmlns:r="http://schemas.openxmlformats.org/officeDocument/2006/relationships" id="256" r:id="R1324f075917a4fc4"/>
+    <p:sldId xmlns:r="http://schemas.openxmlformats.org/officeDocument/2006/relationships" id="257" r:id="R8800269018de4830"/>
+    <p:sldId xmlns:r="http://schemas.openxmlformats.org/officeDocument/2006/relationships" id="258" r:id="Rf1ed8e7e709d4e1b"/>
+    <p:sldId xmlns:r="http://schemas.openxmlformats.org/officeDocument/2006/relationships" id="259" r:id="R7b8402a10ed34b7a"/>
+    <p:sldId xmlns:r="http://schemas.openxmlformats.org/officeDocument/2006/relationships" id="260" r:id="R8cea6065ccd7467e"/>
+    <p:sldId xmlns:r="http://schemas.openxmlformats.org/officeDocument/2006/relationships" id="261" r:id="R9c5ec442ced846a9"/>
+    <p:sldId xmlns:r="http://schemas.openxmlformats.org/officeDocument/2006/relationships" id="262" r:id="R4dc76891fd7443ec"/>
+    <p:sldId xmlns:r="http://schemas.openxmlformats.org/officeDocument/2006/relationships" id="263" r:id="Rfd66e8b6fbe746d6"/>
+    <p:sldId xmlns:r="http://schemas.openxmlformats.org/officeDocument/2006/relationships" id="264" r:id="R75d5d9bf164b484b"/>
+    <p:sldId xmlns:r="http://schemas.openxmlformats.org/officeDocument/2006/relationships" id="265" r:id="R7e0cbd76d9e04eb5"/>
+    <p:sldId xmlns:r="http://schemas.openxmlformats.org/officeDocument/2006/relationships" id="266" r:id="R32f7a98b5d224862"/>
+    <p:sldId xmlns:r="http://schemas.openxmlformats.org/officeDocument/2006/relationships" id="267" r:id="Rcdf0c223abf34ff7"/>
+    <p:sldId xmlns:r="http://schemas.openxmlformats.org/officeDocument/2006/relationships" id="268" r:id="R83a9021e69264c64"/>
   </p:sldIdLst>
   <p:sldSz cx="12192000" cy="6858000"/>
   <p:notesSz cx="6858000" cy="9144000"/>
@@ -1405,7 +1405,7 @@
   </p:cSld>
   <p:clrMap bg1="lt1" tx1="dk1" bg2="lt2" tx2="dk2" accent1="accent1" accent2="accent2" accent3="accent3" accent4="accent4" accent5="accent5" accent6="accent6" hlink="hlink" folHlink="folHlink"/>
   <p:sldLayoutIdLst>
-    <p:sldLayoutId xmlns:r="http://schemas.openxmlformats.org/officeDocument/2006/relationships" id="2147483649" r:id="Refbfc27d080f46c5"/>
+    <p:sldLayoutId xmlns:r="http://schemas.openxmlformats.org/officeDocument/2006/relationships" id="2147483649" r:id="Rf4c4ee244707450d"/>
   </p:sldLayoutIdLst>
   <p:txStyles>
     <p:titleStyle>
@@ -1956,7 +1956,7 @@
           <p:cNvPr id="1" name="cover-rule">
             <a:extLst xmlns:a="http://schemas.openxmlformats.org/drawingml/2006/main">
               <a:ext uri="{FF2B5EF4-FFF2-40B4-BE49-F238E27FC236}">
-                <a16:creationId xmlns:a16="http://schemas.microsoft.com/office/drawing/2014/main" id="{F88FF52A-1CB7-42E3-8536-CC500F475CFC}"/>
+                <a16:creationId xmlns:a16="http://schemas.microsoft.com/office/drawing/2014/main" id="{AA650C24-B782-4311-BF45-BE27986D2893}"/>
               </a:ext>
             </a:extLst>
           </p:cNvPr>
@@ -1989,7 +1989,7 @@
           <p:cNvPr id="2" name="cover-ring-1">
             <a:extLst xmlns:a="http://schemas.openxmlformats.org/drawingml/2006/main">
               <a:ext uri="{FF2B5EF4-FFF2-40B4-BE49-F238E27FC236}">
-                <a16:creationId xmlns:a16="http://schemas.microsoft.com/office/drawing/2014/main" id="{AB5C7883-3EE6-42B6-94ED-DDDBD5027878}"/>
+                <a16:creationId xmlns:a16="http://schemas.microsoft.com/office/drawing/2014/main" id="{7D28A65F-C2AF-42C5-BF04-4196ED938ADB}"/>
               </a:ext>
             </a:extLst>
           </p:cNvPr>
@@ -2020,7 +2020,7 @@
           <p:cNvPr id="3" name="cover-ring-2">
             <a:extLst xmlns:a="http://schemas.openxmlformats.org/drawingml/2006/main">
               <a:ext uri="{FF2B5EF4-FFF2-40B4-BE49-F238E27FC236}">
-                <a16:creationId xmlns:a16="http://schemas.microsoft.com/office/drawing/2014/main" id="{9235E230-064A-4250-9198-98DFA899A7C1}"/>
+                <a16:creationId xmlns:a16="http://schemas.microsoft.com/office/drawing/2014/main" id="{013D5876-A6AD-4EB7-ADAE-33DA2B7CCFF8}"/>
               </a:ext>
             </a:extLst>
           </p:cNvPr>
@@ -2051,7 +2051,7 @@
           <p:cNvPr id="4" name="cover-core">
             <a:extLst xmlns:a="http://schemas.openxmlformats.org/drawingml/2006/main">
               <a:ext uri="{FF2B5EF4-FFF2-40B4-BE49-F238E27FC236}">
-                <a16:creationId xmlns:a16="http://schemas.microsoft.com/office/drawing/2014/main" id="{D55D2F3B-F1E8-4938-BCD3-10AF0967DA0D}"/>
+                <a16:creationId xmlns:a16="http://schemas.microsoft.com/office/drawing/2014/main" id="{1D097F7C-5B0D-495C-B499-C270507C195B}"/>
               </a:ext>
             </a:extLst>
           </p:cNvPr>
@@ -2084,7 +2084,7 @@
           <p:cNvPr id="5" name="cover-line-1">
             <a:extLst xmlns:a="http://schemas.openxmlformats.org/drawingml/2006/main">
               <a:ext uri="{FF2B5EF4-FFF2-40B4-BE49-F238E27FC236}">
-                <a16:creationId xmlns:a16="http://schemas.microsoft.com/office/drawing/2014/main" id="{6FF4F628-4C96-4082-B71C-C870F97B028E}"/>
+                <a16:creationId xmlns:a16="http://schemas.microsoft.com/office/drawing/2014/main" id="{FDA63848-258E-46E2-BEB8-71B20AC69A3E}"/>
               </a:ext>
             </a:extLst>
           </p:cNvPr>
@@ -2115,7 +2115,7 @@
           <p:cNvPr id="6" name="cover-line-2">
             <a:extLst xmlns:a="http://schemas.openxmlformats.org/drawingml/2006/main">
               <a:ext uri="{FF2B5EF4-FFF2-40B4-BE49-F238E27FC236}">
-                <a16:creationId xmlns:a16="http://schemas.microsoft.com/office/drawing/2014/main" id="{974851D2-983B-4D1F-AD3E-1EDA9E29BEB0}"/>
+                <a16:creationId xmlns:a16="http://schemas.microsoft.com/office/drawing/2014/main" id="{628491F3-5815-48A9-B18D-4392B599612E}"/>
               </a:ext>
             </a:extLst>
           </p:cNvPr>
@@ -2146,7 +2146,7 @@
           <p:cNvPr id="7" name="cover-eyebrow">
             <a:extLst xmlns:a="http://schemas.openxmlformats.org/drawingml/2006/main">
               <a:ext uri="{FF2B5EF4-FFF2-40B4-BE49-F238E27FC236}">
-                <a16:creationId xmlns:a16="http://schemas.microsoft.com/office/drawing/2014/main" id="{D1CFE6DA-C702-4750-A392-7864003ED980}"/>
+                <a16:creationId xmlns:a16="http://schemas.microsoft.com/office/drawing/2014/main" id="{CF1C3BB0-299D-4A1C-8DF0-70B62294B021}"/>
               </a:ext>
             </a:extLst>
           </p:cNvPr>
@@ -2204,7 +2204,7 @@
           <p:cNvPr id="8" name="cover-title">
             <a:extLst xmlns:a="http://schemas.openxmlformats.org/drawingml/2006/main">
               <a:ext uri="{FF2B5EF4-FFF2-40B4-BE49-F238E27FC236}">
-                <a16:creationId xmlns:a16="http://schemas.microsoft.com/office/drawing/2014/main" id="{B6A8CF33-4792-43C3-9CDE-21B68627F770}"/>
+                <a16:creationId xmlns:a16="http://schemas.microsoft.com/office/drawing/2014/main" id="{0A8EB917-A19E-4164-9904-4DB1F00ED6F9}"/>
               </a:ext>
             </a:extLst>
           </p:cNvPr>
@@ -2262,7 +2262,7 @@
           <p:cNvPr id="9" name="cover-subtitle">
             <a:extLst xmlns:a="http://schemas.openxmlformats.org/drawingml/2006/main">
               <a:ext uri="{FF2B5EF4-FFF2-40B4-BE49-F238E27FC236}">
-                <a16:creationId xmlns:a16="http://schemas.microsoft.com/office/drawing/2014/main" id="{00DC82D3-36AA-402A-A2DC-34985036489A}"/>
+                <a16:creationId xmlns:a16="http://schemas.microsoft.com/office/drawing/2014/main" id="{8C523DE0-499A-4B44-A9BD-7F93C10416F5}"/>
               </a:ext>
             </a:extLst>
           </p:cNvPr>
@@ -2324,7 +2324,7 @@
           <p:cNvPr id="10" name="cover-lead">
             <a:extLst xmlns:a="http://schemas.openxmlformats.org/drawingml/2006/main">
               <a:ext uri="{FF2B5EF4-FFF2-40B4-BE49-F238E27FC236}">
-                <a16:creationId xmlns:a16="http://schemas.microsoft.com/office/drawing/2014/main" id="{066DD42E-48D9-40AD-A38D-E9F484E1B747}"/>
+                <a16:creationId xmlns:a16="http://schemas.microsoft.com/office/drawing/2014/main" id="{CB301B1F-BEB0-4839-9777-DE4B5D882E17}"/>
               </a:ext>
             </a:extLst>
           </p:cNvPr>
@@ -2372,7 +2372,7 @@
                 <a:ea typeface="PingFang SC"/>
                 <a:cs typeface="PingFang SC"/>
               </a:rPr>
-              <a:t>火灾应急响应首先关注救援、控制危险和保护人员；火灾调查则在符合法定程序的前提下，保存和审查现场资料，重建事件过程并评价不同原因假设。两项工作会共享时间、位置和处置记录，但目的…</a:t>
+              <a:t>火灾应急响应首先关注救援、控制危险和保护人员；火灾调查则在符合法定程序的前提下；保存和审查现场资料；重建事件过程并评价不同原因假设；两项工作会共享时间、位置和处置记录</a:t>
             </a:r>
           </a:p>
         </p:txBody>
@@ -2382,7 +2382,7 @@
           <p:cNvPr id="11" name="cover-course">
             <a:extLst xmlns:a="http://schemas.openxmlformats.org/drawingml/2006/main">
               <a:ext uri="{FF2B5EF4-FFF2-40B4-BE49-F238E27FC236}">
-                <a16:creationId xmlns:a16="http://schemas.microsoft.com/office/drawing/2014/main" id="{03F42832-FD4E-4CE4-8DEC-D1E931D6C659}"/>
+                <a16:creationId xmlns:a16="http://schemas.microsoft.com/office/drawing/2014/main" id="{7602FF88-43AF-4368-BE4D-D001F891FAE2}"/>
               </a:ext>
             </a:extLst>
           </p:cNvPr>
@@ -2440,7 +2440,7 @@
           <p:cNvPr id="12" name="cover-id">
             <a:extLst xmlns:a="http://schemas.openxmlformats.org/drawingml/2006/main">
               <a:ext uri="{FF2B5EF4-FFF2-40B4-BE49-F238E27FC236}">
-                <a16:creationId xmlns:a16="http://schemas.microsoft.com/office/drawing/2014/main" id="{65027B9B-AE71-4859-9950-E4EA0AD2807E}"/>
+                <a16:creationId xmlns:a16="http://schemas.microsoft.com/office/drawing/2014/main" id="{2F400D2F-6A00-4D25-A977-5F7285CC8187}"/>
               </a:ext>
             </a:extLst>
           </p:cNvPr>
@@ -2496,7 +2496,7 @@
     </p:spTree>
     <p:extLst>
       <p:ext uri="{BB962C8B-B14F-4D97-AF65-F5344CB8AC3E}">
-        <p14:creationId xmlns:p14="http://schemas.microsoft.com/office/powerpoint/2010/main" val="387320717"/>
+        <p14:creationId xmlns:p14="http://schemas.microsoft.com/office/powerpoint/2010/main" val="1473810188"/>
       </p:ext>
     </p:extLst>
   </p:cSld>
@@ -2527,7 +2527,7 @@
           <p:cNvPr id="1" name="s10-rule">
             <a:extLst xmlns:a="http://schemas.openxmlformats.org/drawingml/2006/main">
               <a:ext uri="{FF2B5EF4-FFF2-40B4-BE49-F238E27FC236}">
-                <a16:creationId xmlns:a16="http://schemas.microsoft.com/office/drawing/2014/main" id="{6822C616-3986-429B-B1F6-6C827F01266E}"/>
+                <a16:creationId xmlns:a16="http://schemas.microsoft.com/office/drawing/2014/main" id="{4ED11A0C-15D7-494A-B969-6815E8E2505C}"/>
               </a:ext>
             </a:extLst>
           </p:cNvPr>
@@ -2560,7 +2560,7 @@
           <p:cNvPr id="2" name="s10-eyebrow">
             <a:extLst xmlns:a="http://schemas.openxmlformats.org/drawingml/2006/main">
               <a:ext uri="{FF2B5EF4-FFF2-40B4-BE49-F238E27FC236}">
-                <a16:creationId xmlns:a16="http://schemas.microsoft.com/office/drawing/2014/main" id="{130F2295-0BD2-45BE-A91B-A2109557B158}"/>
+                <a16:creationId xmlns:a16="http://schemas.microsoft.com/office/drawing/2014/main" id="{F150821B-9C13-4F68-8E01-A33B2F326D3D}"/>
               </a:ext>
             </a:extLst>
           </p:cNvPr>
@@ -2618,7 +2618,7 @@
           <p:cNvPr id="3" name="s10-title">
             <a:extLst xmlns:a="http://schemas.openxmlformats.org/drawingml/2006/main">
               <a:ext uri="{FF2B5EF4-FFF2-40B4-BE49-F238E27FC236}">
-                <a16:creationId xmlns:a16="http://schemas.microsoft.com/office/drawing/2014/main" id="{781BA4D6-4848-4D1A-9FD5-1F754853D40E}"/>
+                <a16:creationId xmlns:a16="http://schemas.microsoft.com/office/drawing/2014/main" id="{9D1260AC-7B2C-4563-B913-DF686A339D9B}"/>
               </a:ext>
             </a:extLst>
           </p:cNvPr>
@@ -2666,7 +2666,7 @@
                 <a:ea typeface="PingFang SC"/>
                 <a:cs typeface="PingFang SC"/>
               </a:rPr>
-              <a:t>三维现场模型的正确用法必须经过边界验证</a:t>
+              <a:t>三维模型辅助复查，不能替代原始测量</a:t>
             </a:r>
           </a:p>
         </p:txBody>
@@ -2676,7 +2676,7 @@
           <p:cNvPr id="4" name="s10-footer">
             <a:extLst xmlns:a="http://schemas.openxmlformats.org/drawingml/2006/main">
               <a:ext uri="{FF2B5EF4-FFF2-40B4-BE49-F238E27FC236}">
-                <a16:creationId xmlns:a16="http://schemas.microsoft.com/office/drawing/2014/main" id="{D9959842-2169-4644-820D-344C7FA4AFE9}"/>
+                <a16:creationId xmlns:a16="http://schemas.microsoft.com/office/drawing/2014/main" id="{923DBEFC-25BD-4989-9BA0-FC67817BFB28}"/>
               </a:ext>
             </a:extLst>
           </p:cNvPr>
@@ -2707,7 +2707,7 @@
           <p:cNvPr id="5" name="s10-identity">
             <a:extLst xmlns:a="http://schemas.openxmlformats.org/drawingml/2006/main">
               <a:ext uri="{FF2B5EF4-FFF2-40B4-BE49-F238E27FC236}">
-                <a16:creationId xmlns:a16="http://schemas.microsoft.com/office/drawing/2014/main" id="{5B55ADF6-EAFD-44DE-B73B-A0470B882BBD}"/>
+                <a16:creationId xmlns:a16="http://schemas.microsoft.com/office/drawing/2014/main" id="{37A5BF39-A7DA-4A45-A380-CA7F9D46F52C}"/>
               </a:ext>
             </a:extLst>
           </p:cNvPr>
@@ -2765,7 +2765,7 @@
           <p:cNvPr id="6" name="case-title">
             <a:extLst xmlns:a="http://schemas.openxmlformats.org/drawingml/2006/main">
               <a:ext uri="{FF2B5EF4-FFF2-40B4-BE49-F238E27FC236}">
-                <a16:creationId xmlns:a16="http://schemas.microsoft.com/office/drawing/2014/main" id="{3B2D25C1-60D8-44E2-AF1A-0A0ADE316B3C}"/>
+                <a16:creationId xmlns:a16="http://schemas.microsoft.com/office/drawing/2014/main" id="{F23987E3-43D2-4013-807C-0A80009984DC}"/>
               </a:ext>
             </a:extLst>
           </p:cNvPr>
@@ -2829,7 +2829,7 @@
           <p:cNvPr id="7" name="case-row-0">
             <a:extLst xmlns:a="http://schemas.openxmlformats.org/drawingml/2006/main">
               <a:ext uri="{FF2B5EF4-FFF2-40B4-BE49-F238E27FC236}">
-                <a16:creationId xmlns:a16="http://schemas.microsoft.com/office/drawing/2014/main" id="{F6FC2EDE-C790-4957-ABC1-C1EA43BADA7C}"/>
+                <a16:creationId xmlns:a16="http://schemas.microsoft.com/office/drawing/2014/main" id="{C3F8933D-8F5D-41CB-A72A-3C2F2900A8B0}"/>
               </a:ext>
             </a:extLst>
           </p:cNvPr>
@@ -2893,7 +2893,7 @@
           <p:cNvPr id="8" name="case-row-1">
             <a:extLst xmlns:a="http://schemas.openxmlformats.org/drawingml/2006/main">
               <a:ext uri="{FF2B5EF4-FFF2-40B4-BE49-F238E27FC236}">
-                <a16:creationId xmlns:a16="http://schemas.microsoft.com/office/drawing/2014/main" id="{F1943004-B0AB-49CC-8B3E-CFB424154E26}"/>
+                <a16:creationId xmlns:a16="http://schemas.microsoft.com/office/drawing/2014/main" id="{7DCA836F-7AAF-4369-AA8E-184020C026B7}"/>
               </a:ext>
             </a:extLst>
           </p:cNvPr>
@@ -2957,7 +2957,7 @@
           <p:cNvPr id="9" name="case-row-2">
             <a:extLst xmlns:a="http://schemas.openxmlformats.org/drawingml/2006/main">
               <a:ext uri="{FF2B5EF4-FFF2-40B4-BE49-F238E27FC236}">
-                <a16:creationId xmlns:a16="http://schemas.microsoft.com/office/drawing/2014/main" id="{4DD9852F-BABA-4F1F-9148-67DB99696BAA}"/>
+                <a16:creationId xmlns:a16="http://schemas.microsoft.com/office/drawing/2014/main" id="{2FB68341-0FA0-4D75-9626-B161D86AA831}"/>
               </a:ext>
             </a:extLst>
           </p:cNvPr>
@@ -2981,7 +2981,7 @@
           </a:solidFill>
           <a:ln xmlns:a="http://schemas.openxmlformats.org/drawingml/2006/main" w="9525">
             <a:solidFill>
-              <a:srgbClr val="E5783F"/>
+              <a:srgbClr val="9A3F16"/>
             </a:solidFill>
             <a:prstDash val="solid"/>
           </a:ln>
@@ -3021,7 +3021,7 @@
           <p:cNvPr id="10" name="s10-takeaway-rule">
             <a:extLst xmlns:a="http://schemas.openxmlformats.org/drawingml/2006/main">
               <a:ext uri="{FF2B5EF4-FFF2-40B4-BE49-F238E27FC236}">
-                <a16:creationId xmlns:a16="http://schemas.microsoft.com/office/drawing/2014/main" id="{165EBE31-A4AD-4A64-96DF-107AB0FC055E}"/>
+                <a16:creationId xmlns:a16="http://schemas.microsoft.com/office/drawing/2014/main" id="{211551A7-FC11-4E02-B248-0161774A77EA}"/>
               </a:ext>
             </a:extLst>
           </p:cNvPr>
@@ -3054,7 +3054,7 @@
           <p:cNvPr id="11" name="s10-takeaway">
             <a:extLst xmlns:a="http://schemas.openxmlformats.org/drawingml/2006/main">
               <a:ext uri="{FF2B5EF4-FFF2-40B4-BE49-F238E27FC236}">
-                <a16:creationId xmlns:a16="http://schemas.microsoft.com/office/drawing/2014/main" id="{1A833392-A81A-4652-89A6-FECA3E4B29CE}"/>
+                <a16:creationId xmlns:a16="http://schemas.microsoft.com/office/drawing/2014/main" id="{5A6E33DF-3157-4B05-B559-9360AE050BCA}"/>
               </a:ext>
             </a:extLst>
           </p:cNvPr>
@@ -3102,7 +3102,7 @@
                 <a:ea typeface="PingFang SC"/>
                 <a:cs typeface="PingFang SC"/>
               </a:rPr>
-              <a:t>三维现场模型的正确用法必须经过边界验证</a:t>
+              <a:t>三维模型辅助复查，不能替代原始测量</a:t>
             </a:r>
           </a:p>
         </p:txBody>
@@ -3110,7 +3110,7 @@
     </p:spTree>
     <p:extLst>
       <p:ext uri="{BB962C8B-B14F-4D97-AF65-F5344CB8AC3E}">
-        <p14:creationId xmlns:p14="http://schemas.microsoft.com/office/powerpoint/2010/main" val="608517570"/>
+        <p14:creationId xmlns:p14="http://schemas.microsoft.com/office/powerpoint/2010/main" val="1584199371"/>
       </p:ext>
     </p:extLst>
   </p:cSld>
@@ -3141,7 +3141,7 @@
           <p:cNvPr id="1" name="s11-rule">
             <a:extLst xmlns:a="http://schemas.openxmlformats.org/drawingml/2006/main">
               <a:ext uri="{FF2B5EF4-FFF2-40B4-BE49-F238E27FC236}">
-                <a16:creationId xmlns:a16="http://schemas.microsoft.com/office/drawing/2014/main" id="{A0C7F4A7-5664-4EFC-9E8B-13AE4E356B0F}"/>
+                <a16:creationId xmlns:a16="http://schemas.microsoft.com/office/drawing/2014/main" id="{6F9BEF43-0B3F-4D1C-AD6D-97B81F320E11}"/>
               </a:ext>
             </a:extLst>
           </p:cNvPr>
@@ -3174,7 +3174,7 @@
           <p:cNvPr id="2" name="s11-eyebrow">
             <a:extLst xmlns:a="http://schemas.openxmlformats.org/drawingml/2006/main">
               <a:ext uri="{FF2B5EF4-FFF2-40B4-BE49-F238E27FC236}">
-                <a16:creationId xmlns:a16="http://schemas.microsoft.com/office/drawing/2014/main" id="{6620120D-9A59-4DDA-8CBF-9DED96C17EB3}"/>
+                <a16:creationId xmlns:a16="http://schemas.microsoft.com/office/drawing/2014/main" id="{5247D96B-B11A-4D83-9369-97CFC4EDD0E4}"/>
               </a:ext>
             </a:extLst>
           </p:cNvPr>
@@ -3232,7 +3232,7 @@
           <p:cNvPr id="3" name="s11-title">
             <a:extLst xmlns:a="http://schemas.openxmlformats.org/drawingml/2006/main">
               <a:ext uri="{FF2B5EF4-FFF2-40B4-BE49-F238E27FC236}">
-                <a16:creationId xmlns:a16="http://schemas.microsoft.com/office/drawing/2014/main" id="{BA691619-E230-4432-95BE-065D3ADBDE55}"/>
+                <a16:creationId xmlns:a16="http://schemas.microsoft.com/office/drawing/2014/main" id="{D5D61672-3BB1-49F0-830C-C17059A4B7CF}"/>
               </a:ext>
             </a:extLst>
           </p:cNvPr>
@@ -3280,7 +3280,7 @@
                 <a:ea typeface="PingFang SC"/>
                 <a:cs typeface="PingFang SC"/>
               </a:rPr>
-              <a:t>把方法落实为可验证的行动</a:t>
+              <a:t>应急与火灾调查：一次可验收练习</a:t>
             </a:r>
           </a:p>
         </p:txBody>
@@ -3290,7 +3290,7 @@
           <p:cNvPr id="4" name="s11-footer">
             <a:extLst xmlns:a="http://schemas.openxmlformats.org/drawingml/2006/main">
               <a:ext uri="{FF2B5EF4-FFF2-40B4-BE49-F238E27FC236}">
-                <a16:creationId xmlns:a16="http://schemas.microsoft.com/office/drawing/2014/main" id="{BF5A74F4-CEB7-40EA-B960-75C433D71038}"/>
+                <a16:creationId xmlns:a16="http://schemas.microsoft.com/office/drawing/2014/main" id="{D7B76D0C-39D2-48B2-B1E2-B6D38F3C2EA5}"/>
               </a:ext>
             </a:extLst>
           </p:cNvPr>
@@ -3321,7 +3321,7 @@
           <p:cNvPr id="5" name="s11-identity">
             <a:extLst xmlns:a="http://schemas.openxmlformats.org/drawingml/2006/main">
               <a:ext uri="{FF2B5EF4-FFF2-40B4-BE49-F238E27FC236}">
-                <a16:creationId xmlns:a16="http://schemas.microsoft.com/office/drawing/2014/main" id="{194C8F04-C63E-483A-BF53-80F9A9A493DD}"/>
+                <a16:creationId xmlns:a16="http://schemas.microsoft.com/office/drawing/2014/main" id="{78C7B410-9220-4649-915F-35335903006E}"/>
               </a:ext>
             </a:extLst>
           </p:cNvPr>
@@ -3379,7 +3379,7 @@
           <p:cNvPr id="6" name="practice-circle-0">
             <a:extLst xmlns:a="http://schemas.openxmlformats.org/drawingml/2006/main">
               <a:ext uri="{FF2B5EF4-FFF2-40B4-BE49-F238E27FC236}">
-                <a16:creationId xmlns:a16="http://schemas.microsoft.com/office/drawing/2014/main" id="{DA77EEC2-5C86-44B4-BD67-7AB8EB74F428}"/>
+                <a16:creationId xmlns:a16="http://schemas.microsoft.com/office/drawing/2014/main" id="{2275E827-27E4-422B-A96C-78B9D247BF30}"/>
               </a:ext>
             </a:extLst>
           </p:cNvPr>
@@ -3412,7 +3412,7 @@
           <p:cNvPr id="7" name="practice-number-0">
             <a:extLst xmlns:a="http://schemas.openxmlformats.org/drawingml/2006/main">
               <a:ext uri="{FF2B5EF4-FFF2-40B4-BE49-F238E27FC236}">
-                <a16:creationId xmlns:a16="http://schemas.microsoft.com/office/drawing/2014/main" id="{FF0FF843-F80E-4A28-9DC2-E6AC2B8555A3}"/>
+                <a16:creationId xmlns:a16="http://schemas.microsoft.com/office/drawing/2014/main" id="{1C18E4A5-EFC4-4344-B98B-6EB81068DFE3}"/>
               </a:ext>
             </a:extLst>
           </p:cNvPr>
@@ -3470,7 +3470,7 @@
           <p:cNvPr id="8" name="practice-item-0">
             <a:extLst xmlns:a="http://schemas.openxmlformats.org/drawingml/2006/main">
               <a:ext uri="{FF2B5EF4-FFF2-40B4-BE49-F238E27FC236}">
-                <a16:creationId xmlns:a16="http://schemas.microsoft.com/office/drawing/2014/main" id="{1FFD2DFF-957D-4C91-A316-4DF42DF7111E}"/>
+                <a16:creationId xmlns:a16="http://schemas.microsoft.com/office/drawing/2014/main" id="{5E27C023-BDBC-4FFE-A492-FE4DDAD79EAB}"/>
               </a:ext>
             </a:extLst>
           </p:cNvPr>
@@ -3534,7 +3534,7 @@
           <p:cNvPr id="9" name="practice-connector-0">
             <a:extLst xmlns:a="http://schemas.openxmlformats.org/drawingml/2006/main">
               <a:ext uri="{FF2B5EF4-FFF2-40B4-BE49-F238E27FC236}">
-                <a16:creationId xmlns:a16="http://schemas.microsoft.com/office/drawing/2014/main" id="{DAAE15EB-2C01-48F6-84D3-46DFA24E88CD}"/>
+                <a16:creationId xmlns:a16="http://schemas.microsoft.com/office/drawing/2014/main" id="{B621C5D7-22A7-4B4A-9DE3-38CD5C4E6AD7}"/>
               </a:ext>
             </a:extLst>
           </p:cNvPr>
@@ -3554,7 +3554,7 @@
           <a:noFill xmlns:a="http://schemas.openxmlformats.org/drawingml/2006/main"/>
           <a:ln xmlns:a="http://schemas.openxmlformats.org/drawingml/2006/main" w="28575">
             <a:solidFill>
-              <a:srgbClr val="E5783F"/>
+              <a:srgbClr val="9A3F16"/>
             </a:solidFill>
             <a:prstDash val="solid"/>
           </a:ln>
@@ -3565,7 +3565,7 @@
           <p:cNvPr id="10" name="practice-circle-1">
             <a:extLst xmlns:a="http://schemas.openxmlformats.org/drawingml/2006/main">
               <a:ext uri="{FF2B5EF4-FFF2-40B4-BE49-F238E27FC236}">
-                <a16:creationId xmlns:a16="http://schemas.microsoft.com/office/drawing/2014/main" id="{7847E2EB-232F-49D6-A335-58278E47F0E3}"/>
+                <a16:creationId xmlns:a16="http://schemas.microsoft.com/office/drawing/2014/main" id="{05D15C96-C95D-43EE-85EE-180B09FB30D2}"/>
               </a:ext>
             </a:extLst>
           </p:cNvPr>
@@ -3598,7 +3598,7 @@
           <p:cNvPr id="11" name="practice-number-1">
             <a:extLst xmlns:a="http://schemas.openxmlformats.org/drawingml/2006/main">
               <a:ext uri="{FF2B5EF4-FFF2-40B4-BE49-F238E27FC236}">
-                <a16:creationId xmlns:a16="http://schemas.microsoft.com/office/drawing/2014/main" id="{61F01D62-3653-4033-8376-C6D00E03A4D6}"/>
+                <a16:creationId xmlns:a16="http://schemas.microsoft.com/office/drawing/2014/main" id="{7E6E25C8-C258-4361-8DDE-7CE230AA65CE}"/>
               </a:ext>
             </a:extLst>
           </p:cNvPr>
@@ -3656,7 +3656,7 @@
           <p:cNvPr id="12" name="practice-item-1">
             <a:extLst xmlns:a="http://schemas.openxmlformats.org/drawingml/2006/main">
               <a:ext uri="{FF2B5EF4-FFF2-40B4-BE49-F238E27FC236}">
-                <a16:creationId xmlns:a16="http://schemas.microsoft.com/office/drawing/2014/main" id="{B2F2FFF2-FB29-45F0-BC07-85210C19B87A}"/>
+                <a16:creationId xmlns:a16="http://schemas.microsoft.com/office/drawing/2014/main" id="{D10A0A92-96A8-4E5B-BDD1-62A500491267}"/>
               </a:ext>
             </a:extLst>
           </p:cNvPr>
@@ -3720,7 +3720,7 @@
           <p:cNvPr id="13" name="practice-connector-1">
             <a:extLst xmlns:a="http://schemas.openxmlformats.org/drawingml/2006/main">
               <a:ext uri="{FF2B5EF4-FFF2-40B4-BE49-F238E27FC236}">
-                <a16:creationId xmlns:a16="http://schemas.microsoft.com/office/drawing/2014/main" id="{8BB2D465-33BC-4DAF-B38E-E7FCFF42E293}"/>
+                <a16:creationId xmlns:a16="http://schemas.microsoft.com/office/drawing/2014/main" id="{DC5B2F78-D733-4921-8831-0A3D02FB616F}"/>
               </a:ext>
             </a:extLst>
           </p:cNvPr>
@@ -3740,7 +3740,7 @@
           <a:noFill xmlns:a="http://schemas.openxmlformats.org/drawingml/2006/main"/>
           <a:ln xmlns:a="http://schemas.openxmlformats.org/drawingml/2006/main" w="28575">
             <a:solidFill>
-              <a:srgbClr val="E5783F"/>
+              <a:srgbClr val="9A3F16"/>
             </a:solidFill>
             <a:prstDash val="solid"/>
           </a:ln>
@@ -3751,7 +3751,7 @@
           <p:cNvPr id="14" name="practice-circle-2">
             <a:extLst xmlns:a="http://schemas.openxmlformats.org/drawingml/2006/main">
               <a:ext uri="{FF2B5EF4-FFF2-40B4-BE49-F238E27FC236}">
-                <a16:creationId xmlns:a16="http://schemas.microsoft.com/office/drawing/2014/main" id="{397812C0-0BCB-44AA-8D67-61B22FFB61FF}"/>
+                <a16:creationId xmlns:a16="http://schemas.microsoft.com/office/drawing/2014/main" id="{212F72CC-F383-4C88-AC0F-8D7BA6DE7656}"/>
               </a:ext>
             </a:extLst>
           </p:cNvPr>
@@ -3769,7 +3769,7 @@
             <a:avLst/>
           </a:prstGeom>
           <a:solidFill xmlns:a="http://schemas.openxmlformats.org/drawingml/2006/main">
-            <a:srgbClr val="E5783F"/>
+            <a:srgbClr val="9A3F16"/>
           </a:solidFill>
           <a:ln xmlns:a="http://schemas.openxmlformats.org/drawingml/2006/main" w="28575">
             <a:solidFill>
@@ -3784,7 +3784,7 @@
           <p:cNvPr id="15" name="practice-number-2">
             <a:extLst xmlns:a="http://schemas.openxmlformats.org/drawingml/2006/main">
               <a:ext uri="{FF2B5EF4-FFF2-40B4-BE49-F238E27FC236}">
-                <a16:creationId xmlns:a16="http://schemas.microsoft.com/office/drawing/2014/main" id="{4AE81E3F-1ABE-467E-9C6F-002AF8B4231D}"/>
+                <a16:creationId xmlns:a16="http://schemas.microsoft.com/office/drawing/2014/main" id="{509E28A3-309C-4DD8-A2DA-BD7ECE7DBC2E}"/>
               </a:ext>
             </a:extLst>
           </p:cNvPr>
@@ -3842,7 +3842,7 @@
           <p:cNvPr id="16" name="practice-item-2">
             <a:extLst xmlns:a="http://schemas.openxmlformats.org/drawingml/2006/main">
               <a:ext uri="{FF2B5EF4-FFF2-40B4-BE49-F238E27FC236}">
-                <a16:creationId xmlns:a16="http://schemas.microsoft.com/office/drawing/2014/main" id="{C766563A-2051-44C7-BD2F-5B04D96D2F14}"/>
+                <a16:creationId xmlns:a16="http://schemas.microsoft.com/office/drawing/2014/main" id="{F89D0188-33E0-483C-B563-F0DE8CEFFB8C}"/>
               </a:ext>
             </a:extLst>
           </p:cNvPr>
@@ -3866,7 +3866,7 @@
           </a:solidFill>
           <a:ln xmlns:a="http://schemas.openxmlformats.org/drawingml/2006/main" w="19050">
             <a:solidFill>
-              <a:srgbClr val="E5783F"/>
+              <a:srgbClr val="9A3F16"/>
             </a:solidFill>
             <a:prstDash val="solid"/>
           </a:ln>
@@ -3904,7 +3904,7 @@
     </p:spTree>
     <p:extLst>
       <p:ext uri="{BB962C8B-B14F-4D97-AF65-F5344CB8AC3E}">
-        <p14:creationId xmlns:p14="http://schemas.microsoft.com/office/powerpoint/2010/main" val="1301700460"/>
+        <p14:creationId xmlns:p14="http://schemas.microsoft.com/office/powerpoint/2010/main" val="551050193"/>
       </p:ext>
     </p:extLst>
   </p:cSld>
@@ -3935,7 +3935,7 @@
           <p:cNvPr id="1" name="s12-rule">
             <a:extLst xmlns:a="http://schemas.openxmlformats.org/drawingml/2006/main">
               <a:ext uri="{FF2B5EF4-FFF2-40B4-BE49-F238E27FC236}">
-                <a16:creationId xmlns:a16="http://schemas.microsoft.com/office/drawing/2014/main" id="{D9FB541A-50AC-4E3D-A03E-BD6902F897D7}"/>
+                <a16:creationId xmlns:a16="http://schemas.microsoft.com/office/drawing/2014/main" id="{D87E0179-8749-4DCE-97C3-4903EC32B3C4}"/>
               </a:ext>
             </a:extLst>
           </p:cNvPr>
@@ -3968,7 +3968,7 @@
           <p:cNvPr id="2" name="s12-eyebrow">
             <a:extLst xmlns:a="http://schemas.openxmlformats.org/drawingml/2006/main">
               <a:ext uri="{FF2B5EF4-FFF2-40B4-BE49-F238E27FC236}">
-                <a16:creationId xmlns:a16="http://schemas.microsoft.com/office/drawing/2014/main" id="{9272027B-2ED0-4A7A-B3DE-C34B75D3C455}"/>
+                <a16:creationId xmlns:a16="http://schemas.microsoft.com/office/drawing/2014/main" id="{9321AC41-6D5C-43CC-82B4-2B02590319E2}"/>
               </a:ext>
             </a:extLst>
           </p:cNvPr>
@@ -4026,7 +4026,7 @@
           <p:cNvPr id="3" name="s12-title">
             <a:extLst xmlns:a="http://schemas.openxmlformats.org/drawingml/2006/main">
               <a:ext uri="{FF2B5EF4-FFF2-40B4-BE49-F238E27FC236}">
-                <a16:creationId xmlns:a16="http://schemas.microsoft.com/office/drawing/2014/main" id="{F327F5A5-58BF-4B44-BB55-948A3D095436}"/>
+                <a16:creationId xmlns:a16="http://schemas.microsoft.com/office/drawing/2014/main" id="{AFA9426B-4E9E-4E04-98AD-84E7A950A3A8}"/>
               </a:ext>
             </a:extLst>
           </p:cNvPr>
@@ -4074,7 +4074,7 @@
                 <a:ea typeface="PingFang SC"/>
                 <a:cs typeface="PingFang SC"/>
               </a:rPr>
-              <a:t>带走三条可复用的判断原则</a:t>
+              <a:t>应急与火灾调查：判断时先抓住三点</a:t>
             </a:r>
           </a:p>
         </p:txBody>
@@ -4084,7 +4084,7 @@
           <p:cNvPr id="4" name="s12-footer">
             <a:extLst xmlns:a="http://schemas.openxmlformats.org/drawingml/2006/main">
               <a:ext uri="{FF2B5EF4-FFF2-40B4-BE49-F238E27FC236}">
-                <a16:creationId xmlns:a16="http://schemas.microsoft.com/office/drawing/2014/main" id="{FDC827DF-3BC4-49B1-B195-B5BF90820CEF}"/>
+                <a16:creationId xmlns:a16="http://schemas.microsoft.com/office/drawing/2014/main" id="{EC9AC3BE-58A6-4AF8-9766-A862B631504F}"/>
               </a:ext>
             </a:extLst>
           </p:cNvPr>
@@ -4115,7 +4115,7 @@
           <p:cNvPr id="5" name="s12-identity">
             <a:extLst xmlns:a="http://schemas.openxmlformats.org/drawingml/2006/main">
               <a:ext uri="{FF2B5EF4-FFF2-40B4-BE49-F238E27FC236}">
-                <a16:creationId xmlns:a16="http://schemas.microsoft.com/office/drawing/2014/main" id="{D00E929B-CBB8-439C-BD63-3832AB229042}"/>
+                <a16:creationId xmlns:a16="http://schemas.microsoft.com/office/drawing/2014/main" id="{0B76B3C7-1AAB-4C0F-97E4-07E857C0E7CF}"/>
               </a:ext>
             </a:extLst>
           </p:cNvPr>
@@ -4173,7 +4173,7 @@
           <p:cNvPr id="6" name="recap-circle-0">
             <a:extLst xmlns:a="http://schemas.openxmlformats.org/drawingml/2006/main">
               <a:ext uri="{FF2B5EF4-FFF2-40B4-BE49-F238E27FC236}">
-                <a16:creationId xmlns:a16="http://schemas.microsoft.com/office/drawing/2014/main" id="{EF74861A-12E9-41A7-B519-F2F065776C83}"/>
+                <a16:creationId xmlns:a16="http://schemas.microsoft.com/office/drawing/2014/main" id="{22A98955-7D76-48BA-8640-9780B1DE0C08}"/>
               </a:ext>
             </a:extLst>
           </p:cNvPr>
@@ -4206,7 +4206,7 @@
           <p:cNvPr id="7" name="recap-number-0">
             <a:extLst xmlns:a="http://schemas.openxmlformats.org/drawingml/2006/main">
               <a:ext uri="{FF2B5EF4-FFF2-40B4-BE49-F238E27FC236}">
-                <a16:creationId xmlns:a16="http://schemas.microsoft.com/office/drawing/2014/main" id="{44D79C30-C467-47D7-92D4-CA16D65F56B1}"/>
+                <a16:creationId xmlns:a16="http://schemas.microsoft.com/office/drawing/2014/main" id="{CC3FAFDC-FD45-466E-92D8-2A6422E09F60}"/>
               </a:ext>
             </a:extLst>
           </p:cNvPr>
@@ -4264,7 +4264,7 @@
           <p:cNvPr id="8" name="recap-item-0">
             <a:extLst xmlns:a="http://schemas.openxmlformats.org/drawingml/2006/main">
               <a:ext uri="{FF2B5EF4-FFF2-40B4-BE49-F238E27FC236}">
-                <a16:creationId xmlns:a16="http://schemas.microsoft.com/office/drawing/2014/main" id="{9271F525-25B9-4DEF-9B64-0670ED843265}"/>
+                <a16:creationId xmlns:a16="http://schemas.microsoft.com/office/drawing/2014/main" id="{2C05DEF1-0254-4255-B8B3-9B07ADEF7402}"/>
               </a:ext>
             </a:extLst>
           </p:cNvPr>
@@ -4328,7 +4328,7 @@
           <p:cNvPr id="9" name="recap-connector-0">
             <a:extLst xmlns:a="http://schemas.openxmlformats.org/drawingml/2006/main">
               <a:ext uri="{FF2B5EF4-FFF2-40B4-BE49-F238E27FC236}">
-                <a16:creationId xmlns:a16="http://schemas.microsoft.com/office/drawing/2014/main" id="{08D85940-191C-4E8F-A85D-6DE969DBED66}"/>
+                <a16:creationId xmlns:a16="http://schemas.microsoft.com/office/drawing/2014/main" id="{68FA5811-7216-41E3-A3C2-39562C302BC2}"/>
               </a:ext>
             </a:extLst>
           </p:cNvPr>
@@ -4348,7 +4348,7 @@
           <a:noFill xmlns:a="http://schemas.openxmlformats.org/drawingml/2006/main"/>
           <a:ln xmlns:a="http://schemas.openxmlformats.org/drawingml/2006/main" w="28575">
             <a:solidFill>
-              <a:srgbClr val="E5783F"/>
+              <a:srgbClr val="9A3F16"/>
             </a:solidFill>
             <a:prstDash val="solid"/>
           </a:ln>
@@ -4359,7 +4359,7 @@
           <p:cNvPr id="10" name="recap-circle-1">
             <a:extLst xmlns:a="http://schemas.openxmlformats.org/drawingml/2006/main">
               <a:ext uri="{FF2B5EF4-FFF2-40B4-BE49-F238E27FC236}">
-                <a16:creationId xmlns:a16="http://schemas.microsoft.com/office/drawing/2014/main" id="{80E6F348-85BA-43CB-AD77-C84CB2F95EA6}"/>
+                <a16:creationId xmlns:a16="http://schemas.microsoft.com/office/drawing/2014/main" id="{BB21BACC-FD9B-4D04-BA5E-5D10566A15F1}"/>
               </a:ext>
             </a:extLst>
           </p:cNvPr>
@@ -4392,7 +4392,7 @@
           <p:cNvPr id="11" name="recap-number-1">
             <a:extLst xmlns:a="http://schemas.openxmlformats.org/drawingml/2006/main">
               <a:ext uri="{FF2B5EF4-FFF2-40B4-BE49-F238E27FC236}">
-                <a16:creationId xmlns:a16="http://schemas.microsoft.com/office/drawing/2014/main" id="{CE44810F-C33E-4BB5-A79D-48CA573E146A}"/>
+                <a16:creationId xmlns:a16="http://schemas.microsoft.com/office/drawing/2014/main" id="{4CC3FF8A-4952-4CFF-986F-9BFA89A1F9EF}"/>
               </a:ext>
             </a:extLst>
           </p:cNvPr>
@@ -4450,7 +4450,7 @@
           <p:cNvPr id="12" name="recap-item-1">
             <a:extLst xmlns:a="http://schemas.openxmlformats.org/drawingml/2006/main">
               <a:ext uri="{FF2B5EF4-FFF2-40B4-BE49-F238E27FC236}">
-                <a16:creationId xmlns:a16="http://schemas.microsoft.com/office/drawing/2014/main" id="{66483BF1-1188-43D0-A5A6-F7F77035E49F}"/>
+                <a16:creationId xmlns:a16="http://schemas.microsoft.com/office/drawing/2014/main" id="{401A7D78-0F69-45A3-A103-3BC6265E145D}"/>
               </a:ext>
             </a:extLst>
           </p:cNvPr>
@@ -4504,7 +4504,7 @@
                 <a:ea typeface="PingFang SC"/>
                 <a:cs typeface="PingFang SC"/>
               </a:rPr>
-              <a:t>调查容易出现确认偏差：一旦形成最初印象，后续只寻找支持它的证据</a:t>
+              <a:t>竞争性假设能降低调查中的确认偏差</a:t>
             </a:r>
           </a:p>
         </p:txBody>
@@ -4514,7 +4514,7 @@
           <p:cNvPr id="13" name="recap-connector-1">
             <a:extLst xmlns:a="http://schemas.openxmlformats.org/drawingml/2006/main">
               <a:ext uri="{FF2B5EF4-FFF2-40B4-BE49-F238E27FC236}">
-                <a16:creationId xmlns:a16="http://schemas.microsoft.com/office/drawing/2014/main" id="{ACC0CCC1-87E1-419A-83D9-D489B6DAD8B7}"/>
+                <a16:creationId xmlns:a16="http://schemas.microsoft.com/office/drawing/2014/main" id="{477CC031-872E-4477-AB2B-8928E73C83EC}"/>
               </a:ext>
             </a:extLst>
           </p:cNvPr>
@@ -4534,7 +4534,7 @@
           <a:noFill xmlns:a="http://schemas.openxmlformats.org/drawingml/2006/main"/>
           <a:ln xmlns:a="http://schemas.openxmlformats.org/drawingml/2006/main" w="28575">
             <a:solidFill>
-              <a:srgbClr val="E5783F"/>
+              <a:srgbClr val="9A3F16"/>
             </a:solidFill>
             <a:prstDash val="solid"/>
           </a:ln>
@@ -4545,7 +4545,7 @@
           <p:cNvPr id="14" name="recap-circle-2">
             <a:extLst xmlns:a="http://schemas.openxmlformats.org/drawingml/2006/main">
               <a:ext uri="{FF2B5EF4-FFF2-40B4-BE49-F238E27FC236}">
-                <a16:creationId xmlns:a16="http://schemas.microsoft.com/office/drawing/2014/main" id="{889D66D4-5CD1-4134-B573-7D6D6A8BFBF6}"/>
+                <a16:creationId xmlns:a16="http://schemas.microsoft.com/office/drawing/2014/main" id="{AADF0C70-DC17-4AA1-AB9D-0A6C424A5B1B}"/>
               </a:ext>
             </a:extLst>
           </p:cNvPr>
@@ -4563,7 +4563,7 @@
             <a:avLst/>
           </a:prstGeom>
           <a:solidFill xmlns:a="http://schemas.openxmlformats.org/drawingml/2006/main">
-            <a:srgbClr val="E5783F"/>
+            <a:srgbClr val="9A3F16"/>
           </a:solidFill>
           <a:ln xmlns:a="http://schemas.openxmlformats.org/drawingml/2006/main" w="28575">
             <a:solidFill>
@@ -4578,7 +4578,7 @@
           <p:cNvPr id="15" name="recap-number-2">
             <a:extLst xmlns:a="http://schemas.openxmlformats.org/drawingml/2006/main">
               <a:ext uri="{FF2B5EF4-FFF2-40B4-BE49-F238E27FC236}">
-                <a16:creationId xmlns:a16="http://schemas.microsoft.com/office/drawing/2014/main" id="{60BFDE48-B9AF-4D9F-875E-4F089A552D03}"/>
+                <a16:creationId xmlns:a16="http://schemas.microsoft.com/office/drawing/2014/main" id="{1086BA19-899C-4B64-B324-2949A9CB0A79}"/>
               </a:ext>
             </a:extLst>
           </p:cNvPr>
@@ -4636,7 +4636,7 @@
           <p:cNvPr id="16" name="recap-item-2">
             <a:extLst xmlns:a="http://schemas.openxmlformats.org/drawingml/2006/main">
               <a:ext uri="{FF2B5EF4-FFF2-40B4-BE49-F238E27FC236}">
-                <a16:creationId xmlns:a16="http://schemas.microsoft.com/office/drawing/2014/main" id="{222390C2-C87E-46C5-8B31-5BCCCB362D64}"/>
+                <a16:creationId xmlns:a16="http://schemas.microsoft.com/office/drawing/2014/main" id="{CF7F8541-15CB-4C28-A386-41F276E12E9C}"/>
               </a:ext>
             </a:extLst>
           </p:cNvPr>
@@ -4660,7 +4660,7 @@
           </a:solidFill>
           <a:ln xmlns:a="http://schemas.openxmlformats.org/drawingml/2006/main" w="19050">
             <a:solidFill>
-              <a:srgbClr val="E5783F"/>
+              <a:srgbClr val="9A3F16"/>
             </a:solidFill>
             <a:prstDash val="solid"/>
           </a:ln>
@@ -4690,7 +4690,7 @@
                 <a:ea typeface="PingFang SC"/>
                 <a:cs typeface="PingFang SC"/>
               </a:rPr>
-              <a:t>AI 可以生成材料目录、时间线草稿、规范检索结果、假设矩阵和报告结构</a:t>
+              <a:t>AI 可以整理材料，但不能替调查人员定案</a:t>
             </a:r>
           </a:p>
         </p:txBody>
@@ -4698,7 +4698,7 @@
     </p:spTree>
     <p:extLst>
       <p:ext uri="{BB962C8B-B14F-4D97-AF65-F5344CB8AC3E}">
-        <p14:creationId xmlns:p14="http://schemas.microsoft.com/office/powerpoint/2010/main" val="2022876312"/>
+        <p14:creationId xmlns:p14="http://schemas.microsoft.com/office/powerpoint/2010/main" val="333371484"/>
       </p:ext>
     </p:extLst>
   </p:cSld>
@@ -4729,7 +4729,7 @@
           <p:cNvPr id="1" name="s13-rule">
             <a:extLst xmlns:a="http://schemas.openxmlformats.org/drawingml/2006/main">
               <a:ext uri="{FF2B5EF4-FFF2-40B4-BE49-F238E27FC236}">
-                <a16:creationId xmlns:a16="http://schemas.microsoft.com/office/drawing/2014/main" id="{DF253647-B4E6-47B2-AF75-DA1EAF2734D9}"/>
+                <a16:creationId xmlns:a16="http://schemas.microsoft.com/office/drawing/2014/main" id="{E94EC1EA-3431-4008-AF71-837ED0BE1002}"/>
               </a:ext>
             </a:extLst>
           </p:cNvPr>
@@ -4762,7 +4762,7 @@
           <p:cNvPr id="2" name="s13-eyebrow">
             <a:extLst xmlns:a="http://schemas.openxmlformats.org/drawingml/2006/main">
               <a:ext uri="{FF2B5EF4-FFF2-40B4-BE49-F238E27FC236}">
-                <a16:creationId xmlns:a16="http://schemas.microsoft.com/office/drawing/2014/main" id="{5D026674-8A0D-40D4-BAB5-42493B126A26}"/>
+                <a16:creationId xmlns:a16="http://schemas.microsoft.com/office/drawing/2014/main" id="{69D5733B-70D2-4F16-A496-344DCB46BADD}"/>
               </a:ext>
             </a:extLst>
           </p:cNvPr>
@@ -4820,7 +4820,7 @@
           <p:cNvPr id="3" name="s13-title">
             <a:extLst xmlns:a="http://schemas.openxmlformats.org/drawingml/2006/main">
               <a:ext uri="{FF2B5EF4-FFF2-40B4-BE49-F238E27FC236}">
-                <a16:creationId xmlns:a16="http://schemas.microsoft.com/office/drawing/2014/main" id="{BFC276ED-1A26-433A-A37A-D50DB40F9CC1}"/>
+                <a16:creationId xmlns:a16="http://schemas.microsoft.com/office/drawing/2014/main" id="{3D04A006-95CB-466B-945C-48EC89AD3370}"/>
               </a:ext>
             </a:extLst>
           </p:cNvPr>
@@ -4868,7 +4868,7 @@
                 <a:ea typeface="PingFang SC"/>
                 <a:cs typeface="PingFang SC"/>
               </a:rPr>
-              <a:t>从公开重制课件回到可核对的学习资料</a:t>
+              <a:t>应急与火灾调查：依据、边界与延伸</a:t>
             </a:r>
           </a:p>
         </p:txBody>
@@ -4878,7 +4878,7 @@
           <p:cNvPr id="4" name="s13-footer">
             <a:extLst xmlns:a="http://schemas.openxmlformats.org/drawingml/2006/main">
               <a:ext uri="{FF2B5EF4-FFF2-40B4-BE49-F238E27FC236}">
-                <a16:creationId xmlns:a16="http://schemas.microsoft.com/office/drawing/2014/main" id="{D0E3FB64-C9D7-490B-8047-32F054BD85AF}"/>
+                <a16:creationId xmlns:a16="http://schemas.microsoft.com/office/drawing/2014/main" id="{CF53A0F8-B212-4530-8C50-1A17F827970C}"/>
               </a:ext>
             </a:extLst>
           </p:cNvPr>
@@ -4909,7 +4909,7 @@
           <p:cNvPr id="5" name="s13-identity">
             <a:extLst xmlns:a="http://schemas.openxmlformats.org/drawingml/2006/main">
               <a:ext uri="{FF2B5EF4-FFF2-40B4-BE49-F238E27FC236}">
-                <a16:creationId xmlns:a16="http://schemas.microsoft.com/office/drawing/2014/main" id="{B8903828-09A6-4EC4-932D-757183224C74}"/>
+                <a16:creationId xmlns:a16="http://schemas.microsoft.com/office/drawing/2014/main" id="{DE3A9FB3-5C74-498C-8B21-8FAC238FBAD3}"/>
               </a:ext>
             </a:extLst>
           </p:cNvPr>
@@ -4967,7 +4967,7 @@
           <p:cNvPr id="6" name="source-0">
             <a:extLst xmlns:a="http://schemas.openxmlformats.org/drawingml/2006/main">
               <a:ext uri="{FF2B5EF4-FFF2-40B4-BE49-F238E27FC236}">
-                <a16:creationId xmlns:a16="http://schemas.microsoft.com/office/drawing/2014/main" id="{6ABC0D22-2C41-454C-A3E0-A9903ACF82D9}"/>
+                <a16:creationId xmlns:a16="http://schemas.microsoft.com/office/drawing/2014/main" id="{8FDD991C-434D-4C53-84DB-772774D5043E}"/>
               </a:ext>
             </a:extLst>
           </p:cNvPr>
@@ -4991,7 +4991,7 @@
           </a:solidFill>
           <a:ln xmlns:a="http://schemas.openxmlformats.org/drawingml/2006/main" w="9525">
             <a:solidFill>
-              <a:srgbClr val="E5783F"/>
+              <a:srgbClr val="9A3F16"/>
             </a:solidFill>
             <a:prstDash val="solid"/>
           </a:ln>
@@ -5031,7 +5031,7 @@
           <p:cNvPr id="7" name="source-1">
             <a:extLst xmlns:a="http://schemas.openxmlformats.org/drawingml/2006/main">
               <a:ext uri="{FF2B5EF4-FFF2-40B4-BE49-F238E27FC236}">
-                <a16:creationId xmlns:a16="http://schemas.microsoft.com/office/drawing/2014/main" id="{95ED727A-3C53-4405-9D5C-C1516535C33F}"/>
+                <a16:creationId xmlns:a16="http://schemas.microsoft.com/office/drawing/2014/main" id="{8EB0ABD4-8575-4DEA-9549-E9866A8D6981}"/>
               </a:ext>
             </a:extLst>
           </p:cNvPr>
@@ -5095,7 +5095,7 @@
           <p:cNvPr id="8" name="source-2">
             <a:extLst xmlns:a="http://schemas.openxmlformats.org/drawingml/2006/main">
               <a:ext uri="{FF2B5EF4-FFF2-40B4-BE49-F238E27FC236}">
-                <a16:creationId xmlns:a16="http://schemas.microsoft.com/office/drawing/2014/main" id="{8C4C246F-5F56-49ED-9B71-795301B4B846}"/>
+                <a16:creationId xmlns:a16="http://schemas.microsoft.com/office/drawing/2014/main" id="{43EFA6DF-8C58-4074-9F32-2EB8CC80286B}"/>
               </a:ext>
             </a:extLst>
           </p:cNvPr>
@@ -5159,7 +5159,7 @@
           <p:cNvPr id="9" name="source-3">
             <a:extLst xmlns:a="http://schemas.openxmlformats.org/drawingml/2006/main">
               <a:ext uri="{FF2B5EF4-FFF2-40B4-BE49-F238E27FC236}">
-                <a16:creationId xmlns:a16="http://schemas.microsoft.com/office/drawing/2014/main" id="{323CFE2A-7CD3-4C9C-AEC6-FBBB8FF60389}"/>
+                <a16:creationId xmlns:a16="http://schemas.microsoft.com/office/drawing/2014/main" id="{E82E5717-7225-46CE-9143-02A41633CE30}"/>
               </a:ext>
             </a:extLst>
           </p:cNvPr>
@@ -5223,7 +5223,7 @@
           <p:cNvPr id="10" name="s13-takeaway-rule">
             <a:extLst xmlns:a="http://schemas.openxmlformats.org/drawingml/2006/main">
               <a:ext uri="{FF2B5EF4-FFF2-40B4-BE49-F238E27FC236}">
-                <a16:creationId xmlns:a16="http://schemas.microsoft.com/office/drawing/2014/main" id="{53DB6AF5-C513-4DEC-A026-7C72ECD21BAC}"/>
+                <a16:creationId xmlns:a16="http://schemas.microsoft.com/office/drawing/2014/main" id="{B8297984-A6F4-4A8B-A5D1-385889B7CAD7}"/>
               </a:ext>
             </a:extLst>
           </p:cNvPr>
@@ -5256,7 +5256,7 @@
           <p:cNvPr id="11" name="s13-takeaway">
             <a:extLst xmlns:a="http://schemas.openxmlformats.org/drawingml/2006/main">
               <a:ext uri="{FF2B5EF4-FFF2-40B4-BE49-F238E27FC236}">
-                <a16:creationId xmlns:a16="http://schemas.microsoft.com/office/drawing/2014/main" id="{015A0129-2CCF-4BA5-9876-5584363D0B34}"/>
+                <a16:creationId xmlns:a16="http://schemas.microsoft.com/office/drawing/2014/main" id="{C023C50B-C970-4CF5-82A9-72D0A9173A4C}"/>
               </a:ext>
             </a:extLst>
           </p:cNvPr>
@@ -5312,7 +5312,7 @@
     </p:spTree>
     <p:extLst>
       <p:ext uri="{BB962C8B-B14F-4D97-AF65-F5344CB8AC3E}">
-        <p14:creationId xmlns:p14="http://schemas.microsoft.com/office/powerpoint/2010/main" val="1871618160"/>
+        <p14:creationId xmlns:p14="http://schemas.microsoft.com/office/powerpoint/2010/main" val="761913994"/>
       </p:ext>
     </p:extLst>
   </p:cSld>
@@ -5343,7 +5343,7 @@
           <p:cNvPr id="1" name="s2-rule">
             <a:extLst xmlns:a="http://schemas.openxmlformats.org/drawingml/2006/main">
               <a:ext uri="{FF2B5EF4-FFF2-40B4-BE49-F238E27FC236}">
-                <a16:creationId xmlns:a16="http://schemas.microsoft.com/office/drawing/2014/main" id="{E5379681-405D-4EAB-82D9-A05A02FC6CFB}"/>
+                <a16:creationId xmlns:a16="http://schemas.microsoft.com/office/drawing/2014/main" id="{D7319F38-83F1-442A-A546-4923E1D1F684}"/>
               </a:ext>
             </a:extLst>
           </p:cNvPr>
@@ -5376,7 +5376,7 @@
           <p:cNvPr id="2" name="s2-eyebrow">
             <a:extLst xmlns:a="http://schemas.openxmlformats.org/drawingml/2006/main">
               <a:ext uri="{FF2B5EF4-FFF2-40B4-BE49-F238E27FC236}">
-                <a16:creationId xmlns:a16="http://schemas.microsoft.com/office/drawing/2014/main" id="{836F04E2-522A-4B82-8DAC-FB675B2916AD}"/>
+                <a16:creationId xmlns:a16="http://schemas.microsoft.com/office/drawing/2014/main" id="{349E6488-B57B-4060-964A-8AFDAAB3BFF4}"/>
               </a:ext>
             </a:extLst>
           </p:cNvPr>
@@ -5434,7 +5434,7 @@
           <p:cNvPr id="3" name="s2-title">
             <a:extLst xmlns:a="http://schemas.openxmlformats.org/drawingml/2006/main">
               <a:ext uri="{FF2B5EF4-FFF2-40B4-BE49-F238E27FC236}">
-                <a16:creationId xmlns:a16="http://schemas.microsoft.com/office/drawing/2014/main" id="{53EC8BB8-BB42-4DC8-86F7-073FE235469D}"/>
+                <a16:creationId xmlns:a16="http://schemas.microsoft.com/office/drawing/2014/main" id="{33651363-9FEF-47BD-980A-A04665698399}"/>
               </a:ext>
             </a:extLst>
           </p:cNvPr>
@@ -5482,7 +5482,7 @@
                 <a:ea typeface="PingFang SC"/>
                 <a:cs typeface="PingFang SC"/>
               </a:rPr>
-              <a:t>学完这一节，你能完成这些判断与行动</a:t>
+              <a:t>应急与火灾调查：4项学习结果</a:t>
             </a:r>
           </a:p>
         </p:txBody>
@@ -5492,7 +5492,7 @@
           <p:cNvPr id="4" name="s2-footer">
             <a:extLst xmlns:a="http://schemas.openxmlformats.org/drawingml/2006/main">
               <a:ext uri="{FF2B5EF4-FFF2-40B4-BE49-F238E27FC236}">
-                <a16:creationId xmlns:a16="http://schemas.microsoft.com/office/drawing/2014/main" id="{07041927-3B26-4E57-81A2-47921C194D3D}"/>
+                <a16:creationId xmlns:a16="http://schemas.microsoft.com/office/drawing/2014/main" id="{8C9A3628-548D-4A92-8438-F3533AD2AB27}"/>
               </a:ext>
             </a:extLst>
           </p:cNvPr>
@@ -5523,7 +5523,7 @@
           <p:cNvPr id="5" name="s2-identity">
             <a:extLst xmlns:a="http://schemas.openxmlformats.org/drawingml/2006/main">
               <a:ext uri="{FF2B5EF4-FFF2-40B4-BE49-F238E27FC236}">
-                <a16:creationId xmlns:a16="http://schemas.microsoft.com/office/drawing/2014/main" id="{AC90A4A9-EB59-4672-B43C-901CDB52769B}"/>
+                <a16:creationId xmlns:a16="http://schemas.microsoft.com/office/drawing/2014/main" id="{F8830BC6-2709-4B84-9A4B-F00363634738}"/>
               </a:ext>
             </a:extLst>
           </p:cNvPr>
@@ -5581,7 +5581,7 @@
           <p:cNvPr id="6" name="objective-1">
             <a:extLst xmlns:a="http://schemas.openxmlformats.org/drawingml/2006/main">
               <a:ext uri="{FF2B5EF4-FFF2-40B4-BE49-F238E27FC236}">
-                <a16:creationId xmlns:a16="http://schemas.microsoft.com/office/drawing/2014/main" id="{78894A25-2B6F-4F59-8B1E-031C69DE3B62}"/>
+                <a16:creationId xmlns:a16="http://schemas.microsoft.com/office/drawing/2014/main" id="{5F96A398-F34F-4D72-93EB-97A6369389CF}"/>
               </a:ext>
             </a:extLst>
           </p:cNvPr>
@@ -5668,7 +5668,7 @@
           <p:cNvPr id="7" name="objective-2">
             <a:extLst xmlns:a="http://schemas.openxmlformats.org/drawingml/2006/main">
               <a:ext uri="{FF2B5EF4-FFF2-40B4-BE49-F238E27FC236}">
-                <a16:creationId xmlns:a16="http://schemas.microsoft.com/office/drawing/2014/main" id="{ACD06A94-F237-4513-A1B8-964BBEAA2EF3}"/>
+                <a16:creationId xmlns:a16="http://schemas.microsoft.com/office/drawing/2014/main" id="{37400C4B-8756-4B88-BDB5-10AFE196E081}"/>
               </a:ext>
             </a:extLst>
           </p:cNvPr>
@@ -5755,7 +5755,7 @@
           <p:cNvPr id="8" name="objective-3">
             <a:extLst xmlns:a="http://schemas.openxmlformats.org/drawingml/2006/main">
               <a:ext uri="{FF2B5EF4-FFF2-40B4-BE49-F238E27FC236}">
-                <a16:creationId xmlns:a16="http://schemas.microsoft.com/office/drawing/2014/main" id="{B0F13EF6-C3D7-4AFB-930D-3946F5C580B1}"/>
+                <a16:creationId xmlns:a16="http://schemas.microsoft.com/office/drawing/2014/main" id="{0E72F2F3-8F86-4F1C-AAE0-8D498A658506}"/>
               </a:ext>
             </a:extLst>
           </p:cNvPr>
@@ -5842,7 +5842,7 @@
           <p:cNvPr id="9" name="objective-4">
             <a:extLst xmlns:a="http://schemas.openxmlformats.org/drawingml/2006/main">
               <a:ext uri="{FF2B5EF4-FFF2-40B4-BE49-F238E27FC236}">
-                <a16:creationId xmlns:a16="http://schemas.microsoft.com/office/drawing/2014/main" id="{FF68AAA3-296C-4814-BDA1-4833D22CBC0C}"/>
+                <a16:creationId xmlns:a16="http://schemas.microsoft.com/office/drawing/2014/main" id="{1ABB918C-EC01-4276-A84D-B02E3158009B}"/>
               </a:ext>
             </a:extLst>
           </p:cNvPr>
@@ -5866,7 +5866,7 @@
           </a:solidFill>
           <a:ln xmlns:a="http://schemas.openxmlformats.org/drawingml/2006/main" w="19050">
             <a:solidFill>
-              <a:srgbClr val="E5783F"/>
+              <a:srgbClr val="9A3F16"/>
             </a:solidFill>
             <a:prstDash val="solid"/>
           </a:ln>
@@ -5927,7 +5927,7 @@
     </p:spTree>
     <p:extLst>
       <p:ext uri="{BB962C8B-B14F-4D97-AF65-F5344CB8AC3E}">
-        <p14:creationId xmlns:p14="http://schemas.microsoft.com/office/powerpoint/2010/main" val="1838490462"/>
+        <p14:creationId xmlns:p14="http://schemas.microsoft.com/office/powerpoint/2010/main" val="463845016"/>
       </p:ext>
     </p:extLst>
   </p:cSld>
@@ -5958,7 +5958,7 @@
           <p:cNvPr id="1" name="s3-rule">
             <a:extLst xmlns:a="http://schemas.openxmlformats.org/drawingml/2006/main">
               <a:ext uri="{FF2B5EF4-FFF2-40B4-BE49-F238E27FC236}">
-                <a16:creationId xmlns:a16="http://schemas.microsoft.com/office/drawing/2014/main" id="{F6396084-8BC0-4809-8624-EF2BDA6C9391}"/>
+                <a16:creationId xmlns:a16="http://schemas.microsoft.com/office/drawing/2014/main" id="{97B0A401-40AF-4536-8829-02CCB756A99D}"/>
               </a:ext>
             </a:extLst>
           </p:cNvPr>
@@ -5991,7 +5991,7 @@
           <p:cNvPr id="2" name="s3-eyebrow">
             <a:extLst xmlns:a="http://schemas.openxmlformats.org/drawingml/2006/main">
               <a:ext uri="{FF2B5EF4-FFF2-40B4-BE49-F238E27FC236}">
-                <a16:creationId xmlns:a16="http://schemas.microsoft.com/office/drawing/2014/main" id="{40D3A2DD-C281-4E13-BC9F-4A2CBCF54E3C}"/>
+                <a16:creationId xmlns:a16="http://schemas.microsoft.com/office/drawing/2014/main" id="{DF4939DC-9C7F-4BAE-B145-95B4662EF3B8}"/>
               </a:ext>
             </a:extLst>
           </p:cNvPr>
@@ -6049,7 +6049,7 @@
           <p:cNvPr id="3" name="s3-title">
             <a:extLst xmlns:a="http://schemas.openxmlformats.org/drawingml/2006/main">
               <a:ext uri="{FF2B5EF4-FFF2-40B4-BE49-F238E27FC236}">
-                <a16:creationId xmlns:a16="http://schemas.microsoft.com/office/drawing/2014/main" id="{5BF7310B-3251-4687-A529-D6DBE84A5E44}"/>
+                <a16:creationId xmlns:a16="http://schemas.microsoft.com/office/drawing/2014/main" id="{4123A2E1-FD96-4268-B741-3FAF1F832D3F}"/>
               </a:ext>
             </a:extLst>
           </p:cNvPr>
@@ -6107,7 +6107,7 @@
           <p:cNvPr id="4" name="s3-footer">
             <a:extLst xmlns:a="http://schemas.openxmlformats.org/drawingml/2006/main">
               <a:ext uri="{FF2B5EF4-FFF2-40B4-BE49-F238E27FC236}">
-                <a16:creationId xmlns:a16="http://schemas.microsoft.com/office/drawing/2014/main" id="{5549221B-AD75-4B8C-ABF7-5893B5C6E88E}"/>
+                <a16:creationId xmlns:a16="http://schemas.microsoft.com/office/drawing/2014/main" id="{1AEBDE60-13CC-48D1-8258-25AC18C93CDA}"/>
               </a:ext>
             </a:extLst>
           </p:cNvPr>
@@ -6138,7 +6138,7 @@
           <p:cNvPr id="5" name="s3-identity">
             <a:extLst xmlns:a="http://schemas.openxmlformats.org/drawingml/2006/main">
               <a:ext uri="{FF2B5EF4-FFF2-40B4-BE49-F238E27FC236}">
-                <a16:creationId xmlns:a16="http://schemas.microsoft.com/office/drawing/2014/main" id="{1FCDC332-248C-48CB-8E1F-FE3D85D97E6B}"/>
+                <a16:creationId xmlns:a16="http://schemas.microsoft.com/office/drawing/2014/main" id="{4D2B8D70-6066-4020-95E4-351B1EBDF89B}"/>
               </a:ext>
             </a:extLst>
           </p:cNvPr>
@@ -6196,7 +6196,7 @@
           <p:cNvPr id="6" name="core-no-0">
             <a:extLst xmlns:a="http://schemas.openxmlformats.org/drawingml/2006/main">
               <a:ext uri="{FF2B5EF4-FFF2-40B4-BE49-F238E27FC236}">
-                <a16:creationId xmlns:a16="http://schemas.microsoft.com/office/drawing/2014/main" id="{F4E1137C-AAEC-4F8A-A2EA-AAF2DC8BFFB8}"/>
+                <a16:creationId xmlns:a16="http://schemas.microsoft.com/office/drawing/2014/main" id="{3745E178-1044-46D7-BB9F-B94E90AB0936}"/>
               </a:ext>
             </a:extLst>
           </p:cNvPr>
@@ -6228,7 +6228,7 @@
             <a:pPr algn="l">
               <a:defRPr sz="2250" b="1">
                 <a:solidFill>
-                  <a:srgbClr val="E5783F"/>
+                  <a:srgbClr val="9A3F16"/>
                 </a:solidFill>
                 <a:latin typeface="PingFang SC"/>
                 <a:ea typeface="PingFang SC"/>
@@ -6238,7 +6238,7 @@
             <a:r>
               <a:rPr sz="2250" b="1">
                 <a:solidFill>
-                  <a:srgbClr val="E5783F"/>
+                  <a:srgbClr val="9A3F16"/>
                 </a:solidFill>
                 <a:latin typeface="PingFang SC"/>
                 <a:ea typeface="PingFang SC"/>
@@ -6254,7 +6254,7 @@
           <p:cNvPr id="7" name="core-label-0">
             <a:extLst xmlns:a="http://schemas.openxmlformats.org/drawingml/2006/main">
               <a:ext uri="{FF2B5EF4-FFF2-40B4-BE49-F238E27FC236}">
-                <a16:creationId xmlns:a16="http://schemas.microsoft.com/office/drawing/2014/main" id="{3EF211B3-6879-47D5-9D6A-A4052790B476}"/>
+                <a16:creationId xmlns:a16="http://schemas.microsoft.com/office/drawing/2014/main" id="{C32082DF-AC39-4BF3-889F-76BB2BE90C49}"/>
               </a:ext>
             </a:extLst>
           </p:cNvPr>
@@ -6312,7 +6312,7 @@
           <p:cNvPr id="8" name="core-body-0">
             <a:extLst xmlns:a="http://schemas.openxmlformats.org/drawingml/2006/main">
               <a:ext uri="{FF2B5EF4-FFF2-40B4-BE49-F238E27FC236}">
-                <a16:creationId xmlns:a16="http://schemas.microsoft.com/office/drawing/2014/main" id="{AFB23AEC-B6C8-4DE5-94EA-EED651492ED2}"/>
+                <a16:creationId xmlns:a16="http://schemas.microsoft.com/office/drawing/2014/main" id="{262F3CE2-B4BD-4640-8A72-21CA53E6DA75}"/>
               </a:ext>
             </a:extLst>
           </p:cNvPr>
@@ -6336,7 +6336,7 @@
           </a:solidFill>
           <a:ln xmlns:a="http://schemas.openxmlformats.org/drawingml/2006/main" w="19050">
             <a:solidFill>
-              <a:srgbClr val="E5783F"/>
+              <a:srgbClr val="9A3F16"/>
             </a:solidFill>
             <a:prstDash val="solid"/>
           </a:ln>
@@ -6366,7 +6366,7 @@
                 <a:ea typeface="PingFang SC"/>
                 <a:cs typeface="PingFang SC"/>
               </a:rPr>
-              <a:t>调查资料可能包括现场照片、视频、平面图、测量与点云、物证、烧损痕迹、报警和设备日志、消防处置记录、气象资料以及询问笔录。每类材料都有观察边界：照片受视角和曝光影响，日志可能有时钟误差…</a:t>
+              <a:t>调查资料可能包括现场照片、视频、平面图、测量与点云、物证、烧损痕迹、报警和设备日志、消防处置记录、气象资料以及询问笔录；每类材料都有观察边界；照片受视角和曝光影响；日志可能有时钟误差</a:t>
             </a:r>
           </a:p>
         </p:txBody>
@@ -6376,7 +6376,7 @@
           <p:cNvPr id="9" name="core-no-1">
             <a:extLst xmlns:a="http://schemas.openxmlformats.org/drawingml/2006/main">
               <a:ext uri="{FF2B5EF4-FFF2-40B4-BE49-F238E27FC236}">
-                <a16:creationId xmlns:a16="http://schemas.microsoft.com/office/drawing/2014/main" id="{97B9ABAE-D833-4C0D-8A5D-68EBD374845D}"/>
+                <a16:creationId xmlns:a16="http://schemas.microsoft.com/office/drawing/2014/main" id="{C929BF70-ADCA-4BFB-8A49-BA2EC108E9B1}"/>
               </a:ext>
             </a:extLst>
           </p:cNvPr>
@@ -6408,7 +6408,7 @@
             <a:pPr algn="l">
               <a:defRPr sz="2250" b="1">
                 <a:solidFill>
-                  <a:srgbClr val="E5783F"/>
+                  <a:srgbClr val="9A3F16"/>
                 </a:solidFill>
                 <a:latin typeface="PingFang SC"/>
                 <a:ea typeface="PingFang SC"/>
@@ -6418,7 +6418,7 @@
             <a:r>
               <a:rPr sz="2250" b="1">
                 <a:solidFill>
-                  <a:srgbClr val="E5783F"/>
+                  <a:srgbClr val="9A3F16"/>
                 </a:solidFill>
                 <a:latin typeface="PingFang SC"/>
                 <a:ea typeface="PingFang SC"/>
@@ -6434,7 +6434,7 @@
           <p:cNvPr id="10" name="core-body-1">
             <a:extLst xmlns:a="http://schemas.openxmlformats.org/drawingml/2006/main">
               <a:ext uri="{FF2B5EF4-FFF2-40B4-BE49-F238E27FC236}">
-                <a16:creationId xmlns:a16="http://schemas.microsoft.com/office/drawing/2014/main" id="{56DEE0E9-BA65-457A-8C3B-8DFE46DE4E18}"/>
+                <a16:creationId xmlns:a16="http://schemas.microsoft.com/office/drawing/2014/main" id="{BACC257E-62F0-4472-995B-307ED6B0D5F9}"/>
               </a:ext>
             </a:extLst>
           </p:cNvPr>
@@ -6488,7 +6488,7 @@
                 <a:ea typeface="PingFang SC"/>
                 <a:cs typeface="PingFang SC"/>
               </a:rPr>
-              <a:t>采集时应记录唯一标识、时间、位置、采集人、设备、方法和现场状态，区分原始文件、工作副本和模型生成内容。数字资料可使用校验值帮助发现后续变化；实物资料则按适用程序记录封存、移交和检查…</a:t>
+              <a:t>采集时应记录唯一标识、时间、位置、采集人、设备、方法和现场状态；区分原始文件、工作副本和模型生成内容；数字资料可使用校验值帮助发现后续变化；实物资料则按适用程序记录封存、移交和检查</a:t>
             </a:r>
           </a:p>
         </p:txBody>
@@ -6498,7 +6498,7 @@
           <p:cNvPr id="11" name="core-no-2">
             <a:extLst xmlns:a="http://schemas.openxmlformats.org/drawingml/2006/main">
               <a:ext uri="{FF2B5EF4-FFF2-40B4-BE49-F238E27FC236}">
-                <a16:creationId xmlns:a16="http://schemas.microsoft.com/office/drawing/2014/main" id="{02220DFD-94EC-4EAE-83B8-DAE86CC8B07A}"/>
+                <a16:creationId xmlns:a16="http://schemas.microsoft.com/office/drawing/2014/main" id="{FA8F150A-0AE2-4372-AA5F-0790BE4629D7}"/>
               </a:ext>
             </a:extLst>
           </p:cNvPr>
@@ -6530,7 +6530,7 @@
             <a:pPr algn="l">
               <a:defRPr sz="2250" b="1">
                 <a:solidFill>
-                  <a:srgbClr val="E5783F"/>
+                  <a:srgbClr val="9A3F16"/>
                 </a:solidFill>
                 <a:latin typeface="PingFang SC"/>
                 <a:ea typeface="PingFang SC"/>
@@ -6540,7 +6540,7 @@
             <a:r>
               <a:rPr sz="2250" b="1">
                 <a:solidFill>
-                  <a:srgbClr val="E5783F"/>
+                  <a:srgbClr val="9A3F16"/>
                 </a:solidFill>
                 <a:latin typeface="PingFang SC"/>
                 <a:ea typeface="PingFang SC"/>
@@ -6556,7 +6556,7 @@
           <p:cNvPr id="12" name="core-body-2">
             <a:extLst xmlns:a="http://schemas.openxmlformats.org/drawingml/2006/main">
               <a:ext uri="{FF2B5EF4-FFF2-40B4-BE49-F238E27FC236}">
-                <a16:creationId xmlns:a16="http://schemas.microsoft.com/office/drawing/2014/main" id="{494BE5C2-CF6F-4712-9774-BDB4949B5404}"/>
+                <a16:creationId xmlns:a16="http://schemas.microsoft.com/office/drawing/2014/main" id="{28D10E85-3E08-4578-BC9A-927934F691F9}"/>
               </a:ext>
             </a:extLst>
           </p:cNvPr>
@@ -6620,7 +6620,7 @@
           <p:cNvPr id="13" name="s3-takeaway-rule">
             <a:extLst xmlns:a="http://schemas.openxmlformats.org/drawingml/2006/main">
               <a:ext uri="{FF2B5EF4-FFF2-40B4-BE49-F238E27FC236}">
-                <a16:creationId xmlns:a16="http://schemas.microsoft.com/office/drawing/2014/main" id="{B282B284-A96A-4716-839F-091972D7A417}"/>
+                <a16:creationId xmlns:a16="http://schemas.microsoft.com/office/drawing/2014/main" id="{816D207B-378F-4C55-A915-4C50DAE92B46}"/>
               </a:ext>
             </a:extLst>
           </p:cNvPr>
@@ -6653,7 +6653,7 @@
           <p:cNvPr id="14" name="s3-takeaway">
             <a:extLst xmlns:a="http://schemas.openxmlformats.org/drawingml/2006/main">
               <a:ext uri="{FF2B5EF4-FFF2-40B4-BE49-F238E27FC236}">
-                <a16:creationId xmlns:a16="http://schemas.microsoft.com/office/drawing/2014/main" id="{952890D9-A9D4-47AF-BF18-112C7F1236C6}"/>
+                <a16:creationId xmlns:a16="http://schemas.microsoft.com/office/drawing/2014/main" id="{33618CBE-FD62-4993-88FB-3DE8CF21A6AE}"/>
               </a:ext>
             </a:extLst>
           </p:cNvPr>
@@ -6709,7 +6709,7 @@
     </p:spTree>
     <p:extLst>
       <p:ext uri="{BB962C8B-B14F-4D97-AF65-F5344CB8AC3E}">
-        <p14:creationId xmlns:p14="http://schemas.microsoft.com/office/powerpoint/2010/main" val="173484328"/>
+        <p14:creationId xmlns:p14="http://schemas.microsoft.com/office/powerpoint/2010/main" val="386267557"/>
       </p:ext>
     </p:extLst>
   </p:cSld>
@@ -6740,7 +6740,7 @@
           <p:cNvPr id="1" name="s4-rule">
             <a:extLst xmlns:a="http://schemas.openxmlformats.org/drawingml/2006/main">
               <a:ext uri="{FF2B5EF4-FFF2-40B4-BE49-F238E27FC236}">
-                <a16:creationId xmlns:a16="http://schemas.microsoft.com/office/drawing/2014/main" id="{6C053381-D74A-4D8D-9DB7-37C32D51334F}"/>
+                <a16:creationId xmlns:a16="http://schemas.microsoft.com/office/drawing/2014/main" id="{9B918281-8BCC-4F1A-808B-9BA18C33575C}"/>
               </a:ext>
             </a:extLst>
           </p:cNvPr>
@@ -6773,7 +6773,7 @@
           <p:cNvPr id="2" name="s4-eyebrow">
             <a:extLst xmlns:a="http://schemas.openxmlformats.org/drawingml/2006/main">
               <a:ext uri="{FF2B5EF4-FFF2-40B4-BE49-F238E27FC236}">
-                <a16:creationId xmlns:a16="http://schemas.microsoft.com/office/drawing/2014/main" id="{3D6E9BFE-D1CD-4710-9228-436031E2C4D2}"/>
+                <a16:creationId xmlns:a16="http://schemas.microsoft.com/office/drawing/2014/main" id="{B0AB4DBC-0C5E-47C2-9BC4-FD1813428AE1}"/>
               </a:ext>
             </a:extLst>
           </p:cNvPr>
@@ -6831,7 +6831,7 @@
           <p:cNvPr id="3" name="s4-title">
             <a:extLst xmlns:a="http://schemas.openxmlformats.org/drawingml/2006/main">
               <a:ext uri="{FF2B5EF4-FFF2-40B4-BE49-F238E27FC236}">
-                <a16:creationId xmlns:a16="http://schemas.microsoft.com/office/drawing/2014/main" id="{9290365E-4A46-4EF7-8E91-3ED54220CD42}"/>
+                <a16:creationId xmlns:a16="http://schemas.microsoft.com/office/drawing/2014/main" id="{9D982BED-79A1-43D0-BA15-1FD4DC83B3D4}"/>
               </a:ext>
             </a:extLst>
           </p:cNvPr>
@@ -6889,7 +6889,7 @@
           <p:cNvPr id="4" name="s4-footer">
             <a:extLst xmlns:a="http://schemas.openxmlformats.org/drawingml/2006/main">
               <a:ext uri="{FF2B5EF4-FFF2-40B4-BE49-F238E27FC236}">
-                <a16:creationId xmlns:a16="http://schemas.microsoft.com/office/drawing/2014/main" id="{B2F4AB6C-9637-474F-B31A-19F8BF868D1F}"/>
+                <a16:creationId xmlns:a16="http://schemas.microsoft.com/office/drawing/2014/main" id="{4299F310-0C01-4272-9C62-3651554E8FE4}"/>
               </a:ext>
             </a:extLst>
           </p:cNvPr>
@@ -6920,7 +6920,7 @@
           <p:cNvPr id="5" name="s4-identity">
             <a:extLst xmlns:a="http://schemas.openxmlformats.org/drawingml/2006/main">
               <a:ext uri="{FF2B5EF4-FFF2-40B4-BE49-F238E27FC236}">
-                <a16:creationId xmlns:a16="http://schemas.microsoft.com/office/drawing/2014/main" id="{A8FB2505-CD72-4585-A966-60C898847E8E}"/>
+                <a16:creationId xmlns:a16="http://schemas.microsoft.com/office/drawing/2014/main" id="{84AA8E83-BEE0-403F-B904-3576F82712FF}"/>
               </a:ext>
             </a:extLst>
           </p:cNvPr>
@@ -6978,7 +6978,7 @@
           <p:cNvPr id="6" name="core-no-0">
             <a:extLst xmlns:a="http://schemas.openxmlformats.org/drawingml/2006/main">
               <a:ext uri="{FF2B5EF4-FFF2-40B4-BE49-F238E27FC236}">
-                <a16:creationId xmlns:a16="http://schemas.microsoft.com/office/drawing/2014/main" id="{DBFC8189-9C08-49BF-A152-674D1ECEDAC3}"/>
+                <a16:creationId xmlns:a16="http://schemas.microsoft.com/office/drawing/2014/main" id="{E1711B1C-D09B-4BA3-9D4C-3921B48579F1}"/>
               </a:ext>
             </a:extLst>
           </p:cNvPr>
@@ -7010,7 +7010,7 @@
             <a:pPr algn="l">
               <a:defRPr sz="2250" b="1">
                 <a:solidFill>
-                  <a:srgbClr val="E5783F"/>
+                  <a:srgbClr val="9A3F16"/>
                 </a:solidFill>
                 <a:latin typeface="PingFang SC"/>
                 <a:ea typeface="PingFang SC"/>
@@ -7020,7 +7020,7 @@
             <a:r>
               <a:rPr sz="2250" b="1">
                 <a:solidFill>
-                  <a:srgbClr val="E5783F"/>
+                  <a:srgbClr val="9A3F16"/>
                 </a:solidFill>
                 <a:latin typeface="PingFang SC"/>
                 <a:ea typeface="PingFang SC"/>
@@ -7036,7 +7036,7 @@
           <p:cNvPr id="7" name="core-label-0">
             <a:extLst xmlns:a="http://schemas.openxmlformats.org/drawingml/2006/main">
               <a:ext uri="{FF2B5EF4-FFF2-40B4-BE49-F238E27FC236}">
-                <a16:creationId xmlns:a16="http://schemas.microsoft.com/office/drawing/2014/main" id="{FE9C694E-B57A-4D3F-BAE7-8EC429151B22}"/>
+                <a16:creationId xmlns:a16="http://schemas.microsoft.com/office/drawing/2014/main" id="{0608C283-0DE5-45D9-A9AD-9C7683D3781D}"/>
               </a:ext>
             </a:extLst>
           </p:cNvPr>
@@ -7094,7 +7094,7 @@
           <p:cNvPr id="8" name="core-body-0">
             <a:extLst xmlns:a="http://schemas.openxmlformats.org/drawingml/2006/main">
               <a:ext uri="{FF2B5EF4-FFF2-40B4-BE49-F238E27FC236}">
-                <a16:creationId xmlns:a16="http://schemas.microsoft.com/office/drawing/2014/main" id="{0F3B2B41-DE9F-4A41-9EA5-B9C7B4A36D89}"/>
+                <a16:creationId xmlns:a16="http://schemas.microsoft.com/office/drawing/2014/main" id="{347EE22B-2387-47EC-89A0-662E099C5318}"/>
               </a:ext>
             </a:extLst>
           </p:cNvPr>
@@ -7118,7 +7118,7 @@
           </a:solidFill>
           <a:ln xmlns:a="http://schemas.openxmlformats.org/drawingml/2006/main" w="19050">
             <a:solidFill>
-              <a:srgbClr val="E5783F"/>
+              <a:srgbClr val="9A3F16"/>
             </a:solidFill>
             <a:prstDash val="solid"/>
           </a:ln>
@@ -7158,7 +7158,7 @@
           <p:cNvPr id="9" name="core-no-1">
             <a:extLst xmlns:a="http://schemas.openxmlformats.org/drawingml/2006/main">
               <a:ext uri="{FF2B5EF4-FFF2-40B4-BE49-F238E27FC236}">
-                <a16:creationId xmlns:a16="http://schemas.microsoft.com/office/drawing/2014/main" id="{1FE1393F-FEE7-4390-B75B-64330BAAAF10}"/>
+                <a16:creationId xmlns:a16="http://schemas.microsoft.com/office/drawing/2014/main" id="{5A5163EA-D5AD-4768-A3F2-723AD494AA24}"/>
               </a:ext>
             </a:extLst>
           </p:cNvPr>
@@ -7190,7 +7190,7 @@
             <a:pPr algn="l">
               <a:defRPr sz="2250" b="1">
                 <a:solidFill>
-                  <a:srgbClr val="E5783F"/>
+                  <a:srgbClr val="9A3F16"/>
                 </a:solidFill>
                 <a:latin typeface="PingFang SC"/>
                 <a:ea typeface="PingFang SC"/>
@@ -7200,7 +7200,7 @@
             <a:r>
               <a:rPr sz="2250" b="1">
                 <a:solidFill>
-                  <a:srgbClr val="E5783F"/>
+                  <a:srgbClr val="9A3F16"/>
                 </a:solidFill>
                 <a:latin typeface="PingFang SC"/>
                 <a:ea typeface="PingFang SC"/>
@@ -7216,7 +7216,7 @@
           <p:cNvPr id="10" name="core-body-1">
             <a:extLst xmlns:a="http://schemas.openxmlformats.org/drawingml/2006/main">
               <a:ext uri="{FF2B5EF4-FFF2-40B4-BE49-F238E27FC236}">
-                <a16:creationId xmlns:a16="http://schemas.microsoft.com/office/drawing/2014/main" id="{018C830B-76DE-4C24-9194-03BAA37C4228}"/>
+                <a16:creationId xmlns:a16="http://schemas.microsoft.com/office/drawing/2014/main" id="{3D59FC69-5645-4418-BE1B-B0A8C3F3AE3B}"/>
               </a:ext>
             </a:extLst>
           </p:cNvPr>
@@ -7270,7 +7270,7 @@
                 <a:ea typeface="PingFang SC"/>
                 <a:cs typeface="PingFang SC"/>
               </a:rPr>
-              <a:t>调查笔记要区分四类信息：直接记录的事实、由工具提取的内容、专家解释和仍待验证的推断。模型生成的摘要不得改变这种区分。若一条结论同时依赖多个资料，应分别列明支持关系；如果资料来源不明…</a:t>
+              <a:t>调查笔记要区分四类信息；直接记录的事实、由工具提取的内容、专家解释和仍待验证的推断；模型生成的摘要不得改变这种区分；若一条结论同时依赖多个资料；应分别列明支持关系</a:t>
             </a:r>
           </a:p>
         </p:txBody>
@@ -7280,7 +7280,7 @@
           <p:cNvPr id="11" name="core-no-2">
             <a:extLst xmlns:a="http://schemas.openxmlformats.org/drawingml/2006/main">
               <a:ext uri="{FF2B5EF4-FFF2-40B4-BE49-F238E27FC236}">
-                <a16:creationId xmlns:a16="http://schemas.microsoft.com/office/drawing/2014/main" id="{70368D8F-5F4E-480A-854E-F56FB4550C09}"/>
+                <a16:creationId xmlns:a16="http://schemas.microsoft.com/office/drawing/2014/main" id="{220C622E-49F7-4B4E-A62A-665E966C4C5C}"/>
               </a:ext>
             </a:extLst>
           </p:cNvPr>
@@ -7312,7 +7312,7 @@
             <a:pPr algn="l">
               <a:defRPr sz="2250" b="1">
                 <a:solidFill>
-                  <a:srgbClr val="E5783F"/>
+                  <a:srgbClr val="9A3F16"/>
                 </a:solidFill>
                 <a:latin typeface="PingFang SC"/>
                 <a:ea typeface="PingFang SC"/>
@@ -7322,7 +7322,7 @@
             <a:r>
               <a:rPr sz="2250" b="1">
                 <a:solidFill>
-                  <a:srgbClr val="E5783F"/>
+                  <a:srgbClr val="9A3F16"/>
                 </a:solidFill>
                 <a:latin typeface="PingFang SC"/>
                 <a:ea typeface="PingFang SC"/>
@@ -7338,7 +7338,7 @@
           <p:cNvPr id="12" name="core-body-2">
             <a:extLst xmlns:a="http://schemas.openxmlformats.org/drawingml/2006/main">
               <a:ext uri="{FF2B5EF4-FFF2-40B4-BE49-F238E27FC236}">
-                <a16:creationId xmlns:a16="http://schemas.microsoft.com/office/drawing/2014/main" id="{98184CB6-F33E-4ED9-82B2-4D68CAB470AB}"/>
+                <a16:creationId xmlns:a16="http://schemas.microsoft.com/office/drawing/2014/main" id="{6F97FB47-1C1C-47E9-AEF3-317B70A7C429}"/>
               </a:ext>
             </a:extLst>
           </p:cNvPr>
@@ -7402,7 +7402,7 @@
           <p:cNvPr id="13" name="s4-takeaway-rule">
             <a:extLst xmlns:a="http://schemas.openxmlformats.org/drawingml/2006/main">
               <a:ext uri="{FF2B5EF4-FFF2-40B4-BE49-F238E27FC236}">
-                <a16:creationId xmlns:a16="http://schemas.microsoft.com/office/drawing/2014/main" id="{07923895-21C4-4C51-ACFA-7DA91993EECF}"/>
+                <a16:creationId xmlns:a16="http://schemas.microsoft.com/office/drawing/2014/main" id="{630FD230-EC46-416E-B5F8-0A75399C5D45}"/>
               </a:ext>
             </a:extLst>
           </p:cNvPr>
@@ -7435,7 +7435,7 @@
           <p:cNvPr id="14" name="s4-takeaway">
             <a:extLst xmlns:a="http://schemas.openxmlformats.org/drawingml/2006/main">
               <a:ext uri="{FF2B5EF4-FFF2-40B4-BE49-F238E27FC236}">
-                <a16:creationId xmlns:a16="http://schemas.microsoft.com/office/drawing/2014/main" id="{757ECAA9-8A48-464A-9381-11661B670426}"/>
+                <a16:creationId xmlns:a16="http://schemas.microsoft.com/office/drawing/2014/main" id="{508D2A26-54B2-4DBA-B7C3-9D7DA756E3A9}"/>
               </a:ext>
             </a:extLst>
           </p:cNvPr>
@@ -7491,7 +7491,7 @@
     </p:spTree>
     <p:extLst>
       <p:ext uri="{BB962C8B-B14F-4D97-AF65-F5344CB8AC3E}">
-        <p14:creationId xmlns:p14="http://schemas.microsoft.com/office/powerpoint/2010/main" val="502840066"/>
+        <p14:creationId xmlns:p14="http://schemas.microsoft.com/office/powerpoint/2010/main" val="1600347831"/>
       </p:ext>
     </p:extLst>
   </p:cSld>
@@ -7522,7 +7522,7 @@
           <p:cNvPr id="1" name="s5-rule">
             <a:extLst xmlns:a="http://schemas.openxmlformats.org/drawingml/2006/main">
               <a:ext uri="{FF2B5EF4-FFF2-40B4-BE49-F238E27FC236}">
-                <a16:creationId xmlns:a16="http://schemas.microsoft.com/office/drawing/2014/main" id="{D226AEAD-1A52-4CAE-BB73-682FA70BD6CC}"/>
+                <a16:creationId xmlns:a16="http://schemas.microsoft.com/office/drawing/2014/main" id="{0F819020-BAB9-4EA1-BC42-AAAFD557A313}"/>
               </a:ext>
             </a:extLst>
           </p:cNvPr>
@@ -7555,7 +7555,7 @@
           <p:cNvPr id="2" name="s5-eyebrow">
             <a:extLst xmlns:a="http://schemas.openxmlformats.org/drawingml/2006/main">
               <a:ext uri="{FF2B5EF4-FFF2-40B4-BE49-F238E27FC236}">
-                <a16:creationId xmlns:a16="http://schemas.microsoft.com/office/drawing/2014/main" id="{B60A657F-85A9-458B-AC3D-B95C003D5FDB}"/>
+                <a16:creationId xmlns:a16="http://schemas.microsoft.com/office/drawing/2014/main" id="{B77EB407-3179-438D-A36C-263582745BE4}"/>
               </a:ext>
             </a:extLst>
           </p:cNvPr>
@@ -7613,7 +7613,7 @@
           <p:cNvPr id="3" name="s5-title">
             <a:extLst xmlns:a="http://schemas.openxmlformats.org/drawingml/2006/main">
               <a:ext uri="{FF2B5EF4-FFF2-40B4-BE49-F238E27FC236}">
-                <a16:creationId xmlns:a16="http://schemas.microsoft.com/office/drawing/2014/main" id="{299024BF-21ED-4B3D-B53F-F5EDD321E78B}"/>
+                <a16:creationId xmlns:a16="http://schemas.microsoft.com/office/drawing/2014/main" id="{7E0F1462-D8FB-4FEF-97A5-29EFBDAC148B}"/>
               </a:ext>
             </a:extLst>
           </p:cNvPr>
@@ -7638,7 +7638,7 @@
         </p:spPr>
         <p:txBody>
           <a:bodyPr xmlns:a="http://schemas.openxmlformats.org/drawingml/2006/main" lIns="0" tIns="0" rIns="0" bIns="0" anchor="ctr">
-            <a:normAutofit fontScale="81381"/>
+            <a:normAutofit fontScale="100000"/>
           </a:bodyPr>
           <a:lstStyle xmlns:a="http://schemas.openxmlformats.org/drawingml/2006/main"/>
           <a:p xmlns:a="http://schemas.openxmlformats.org/drawingml/2006/main">
@@ -7661,7 +7661,7 @@
                 <a:ea typeface="PingFang SC"/>
                 <a:cs typeface="PingFang SC"/>
               </a:rPr>
-              <a:t>调查容易出现确认偏差：一旦形成最初印象，后续只寻找支持它的证据</a:t>
+              <a:t>竞争性假设能降低调查中的确认偏差</a:t>
             </a:r>
           </a:p>
         </p:txBody>
@@ -7671,7 +7671,7 @@
           <p:cNvPr id="4" name="s5-footer">
             <a:extLst xmlns:a="http://schemas.openxmlformats.org/drawingml/2006/main">
               <a:ext uri="{FF2B5EF4-FFF2-40B4-BE49-F238E27FC236}">
-                <a16:creationId xmlns:a16="http://schemas.microsoft.com/office/drawing/2014/main" id="{4C41D60F-198D-425A-B18B-859BE73C4583}"/>
+                <a16:creationId xmlns:a16="http://schemas.microsoft.com/office/drawing/2014/main" id="{C4443941-60FF-46AF-B256-2D4C32D045FE}"/>
               </a:ext>
             </a:extLst>
           </p:cNvPr>
@@ -7702,7 +7702,7 @@
           <p:cNvPr id="5" name="s5-identity">
             <a:extLst xmlns:a="http://schemas.openxmlformats.org/drawingml/2006/main">
               <a:ext uri="{FF2B5EF4-FFF2-40B4-BE49-F238E27FC236}">
-                <a16:creationId xmlns:a16="http://schemas.microsoft.com/office/drawing/2014/main" id="{25137998-B0C6-47B8-A678-BEA365D4E6EF}"/>
+                <a16:creationId xmlns:a16="http://schemas.microsoft.com/office/drawing/2014/main" id="{7A2AB1C2-84C9-4EC2-B0FC-E6A0056E1782}"/>
               </a:ext>
             </a:extLst>
           </p:cNvPr>
@@ -7760,7 +7760,7 @@
           <p:cNvPr id="6" name="core-no-0">
             <a:extLst xmlns:a="http://schemas.openxmlformats.org/drawingml/2006/main">
               <a:ext uri="{FF2B5EF4-FFF2-40B4-BE49-F238E27FC236}">
-                <a16:creationId xmlns:a16="http://schemas.microsoft.com/office/drawing/2014/main" id="{48FE4568-536D-48DD-8293-9B7CFD7F5623}"/>
+                <a16:creationId xmlns:a16="http://schemas.microsoft.com/office/drawing/2014/main" id="{66FBBA08-604B-46DE-8243-A1BA5F8767A3}"/>
               </a:ext>
             </a:extLst>
           </p:cNvPr>
@@ -7792,7 +7792,7 @@
             <a:pPr algn="l">
               <a:defRPr sz="2250" b="1">
                 <a:solidFill>
-                  <a:srgbClr val="E5783F"/>
+                  <a:srgbClr val="9A3F16"/>
                 </a:solidFill>
                 <a:latin typeface="PingFang SC"/>
                 <a:ea typeface="PingFang SC"/>
@@ -7802,7 +7802,7 @@
             <a:r>
               <a:rPr sz="2250" b="1">
                 <a:solidFill>
-                  <a:srgbClr val="E5783F"/>
+                  <a:srgbClr val="9A3F16"/>
                 </a:solidFill>
                 <a:latin typeface="PingFang SC"/>
                 <a:ea typeface="PingFang SC"/>
@@ -7818,7 +7818,7 @@
           <p:cNvPr id="7" name="core-label-0">
             <a:extLst xmlns:a="http://schemas.openxmlformats.org/drawingml/2006/main">
               <a:ext uri="{FF2B5EF4-FFF2-40B4-BE49-F238E27FC236}">
-                <a16:creationId xmlns:a16="http://schemas.microsoft.com/office/drawing/2014/main" id="{3CE2B7E6-B49D-4AA2-AE87-468ADF25C5B0}"/>
+                <a16:creationId xmlns:a16="http://schemas.microsoft.com/office/drawing/2014/main" id="{7F590117-9022-4A2F-BA42-6E351A86C175}"/>
               </a:ext>
             </a:extLst>
           </p:cNvPr>
@@ -7876,7 +7876,7 @@
           <p:cNvPr id="8" name="core-body-0">
             <a:extLst xmlns:a="http://schemas.openxmlformats.org/drawingml/2006/main">
               <a:ext uri="{FF2B5EF4-FFF2-40B4-BE49-F238E27FC236}">
-                <a16:creationId xmlns:a16="http://schemas.microsoft.com/office/drawing/2014/main" id="{9B316BA7-812C-4685-A997-834523F80971}"/>
+                <a16:creationId xmlns:a16="http://schemas.microsoft.com/office/drawing/2014/main" id="{D58E831D-5497-4BA7-9918-DF4156F999DE}"/>
               </a:ext>
             </a:extLst>
           </p:cNvPr>
@@ -7900,14 +7900,14 @@
           </a:solidFill>
           <a:ln xmlns:a="http://schemas.openxmlformats.org/drawingml/2006/main" w="19050">
             <a:solidFill>
-              <a:srgbClr val="E5783F"/>
+              <a:srgbClr val="9A3F16"/>
             </a:solidFill>
             <a:prstDash val="solid"/>
           </a:ln>
         </p:spPr>
         <p:txBody>
           <a:bodyPr xmlns:a="http://schemas.openxmlformats.org/drawingml/2006/main" lIns="152400" tIns="133350" rIns="152400" bIns="133350" anchor="ctr">
-            <a:normAutofit fontScale="85261"/>
+            <a:normAutofit fontScale="97443"/>
           </a:bodyPr>
           <a:lstStyle xmlns:a="http://schemas.openxmlformats.org/drawingml/2006/main"/>
           <a:p xmlns:a="http://schemas.openxmlformats.org/drawingml/2006/main">
@@ -7930,7 +7930,7 @@
                 <a:ea typeface="PingFang SC"/>
                 <a:cs typeface="PingFang SC"/>
               </a:rPr>
-              <a:t>调查容易出现确认偏差：一旦形成最初印象，后续只寻找支持它的证据。更稳妥的方法是维护多个可检验假设，例如不同的起火区域、点燃来源或传播路径。每个假设都列出它能解释的现象、无法解释的现象、反证…</a:t>
+              <a:t>调查容易出现确认偏差；一旦形成最初印象，后续只寻找支持它的证据；更稳妥的方法是维护多个可检验假设；例如不同的起火区域、点燃来源或传播路径</a:t>
             </a:r>
           </a:p>
         </p:txBody>
@@ -7940,7 +7940,7 @@
           <p:cNvPr id="9" name="core-no-1">
             <a:extLst xmlns:a="http://schemas.openxmlformats.org/drawingml/2006/main">
               <a:ext uri="{FF2B5EF4-FFF2-40B4-BE49-F238E27FC236}">
-                <a16:creationId xmlns:a16="http://schemas.microsoft.com/office/drawing/2014/main" id="{C102A5A3-D3FC-4772-B4FF-B7E1C094A265}"/>
+                <a16:creationId xmlns:a16="http://schemas.microsoft.com/office/drawing/2014/main" id="{A04E1F5C-65D3-4BE3-A434-49183EBCEA92}"/>
               </a:ext>
             </a:extLst>
           </p:cNvPr>
@@ -7972,7 +7972,7 @@
             <a:pPr algn="l">
               <a:defRPr sz="2250" b="1">
                 <a:solidFill>
-                  <a:srgbClr val="E5783F"/>
+                  <a:srgbClr val="9A3F16"/>
                 </a:solidFill>
                 <a:latin typeface="PingFang SC"/>
                 <a:ea typeface="PingFang SC"/>
@@ -7982,7 +7982,7 @@
             <a:r>
               <a:rPr sz="2250" b="1">
                 <a:solidFill>
-                  <a:srgbClr val="E5783F"/>
+                  <a:srgbClr val="9A3F16"/>
                 </a:solidFill>
                 <a:latin typeface="PingFang SC"/>
                 <a:ea typeface="PingFang SC"/>
@@ -7998,7 +7998,7 @@
           <p:cNvPr id="10" name="core-body-1">
             <a:extLst xmlns:a="http://schemas.openxmlformats.org/drawingml/2006/main">
               <a:ext uri="{FF2B5EF4-FFF2-40B4-BE49-F238E27FC236}">
-                <a16:creationId xmlns:a16="http://schemas.microsoft.com/office/drawing/2014/main" id="{5383FD3D-4A50-4FC6-8CD1-0B1F65E007A3}"/>
+                <a16:creationId xmlns:a16="http://schemas.microsoft.com/office/drawing/2014/main" id="{C86C1F75-5901-42F6-B242-E6611C91EDED}"/>
               </a:ext>
             </a:extLst>
           </p:cNvPr>
@@ -8052,7 +8052,7 @@
                 <a:ea typeface="PingFang SC"/>
                 <a:cs typeface="PingFang SC"/>
               </a:rPr>
-              <a:t>AI 可以按固定结构整理假设矩阵，发现某项证据被重复使用，或提示两个叙述在时间上冲突。但模型不应凭语言相似度给某个原因“投票”，也不能把没有数据支撑的概率包装成科学结论…</a:t>
+              <a:t>AI 可以按固定结构整理假设矩阵；发现某项证据被重复使用；或提示两个叙述在时间上冲突；但模型不应凭语言相似度给某个原因“投票”；也不能把没有数据支撑的概率包装成科学结论</a:t>
             </a:r>
           </a:p>
         </p:txBody>
@@ -8062,7 +8062,7 @@
           <p:cNvPr id="11" name="core-no-2">
             <a:extLst xmlns:a="http://schemas.openxmlformats.org/drawingml/2006/main">
               <a:ext uri="{FF2B5EF4-FFF2-40B4-BE49-F238E27FC236}">
-                <a16:creationId xmlns:a16="http://schemas.microsoft.com/office/drawing/2014/main" id="{0F23CBB5-1D4C-47BE-82AA-EB5CF973C997}"/>
+                <a16:creationId xmlns:a16="http://schemas.microsoft.com/office/drawing/2014/main" id="{4D0CB2DE-33F3-41D1-872C-EE361F4CB893}"/>
               </a:ext>
             </a:extLst>
           </p:cNvPr>
@@ -8094,7 +8094,7 @@
             <a:pPr algn="l">
               <a:defRPr sz="2250" b="1">
                 <a:solidFill>
-                  <a:srgbClr val="E5783F"/>
+                  <a:srgbClr val="9A3F16"/>
                 </a:solidFill>
                 <a:latin typeface="PingFang SC"/>
                 <a:ea typeface="PingFang SC"/>
@@ -8104,7 +8104,7 @@
             <a:r>
               <a:rPr sz="2250" b="1">
                 <a:solidFill>
-                  <a:srgbClr val="E5783F"/>
+                  <a:srgbClr val="9A3F16"/>
                 </a:solidFill>
                 <a:latin typeface="PingFang SC"/>
                 <a:ea typeface="PingFang SC"/>
@@ -8120,7 +8120,7 @@
           <p:cNvPr id="12" name="core-body-2">
             <a:extLst xmlns:a="http://schemas.openxmlformats.org/drawingml/2006/main">
               <a:ext uri="{FF2B5EF4-FFF2-40B4-BE49-F238E27FC236}">
-                <a16:creationId xmlns:a16="http://schemas.microsoft.com/office/drawing/2014/main" id="{703A295C-0B8A-4A5F-B3D6-509BE41D88F9}"/>
+                <a16:creationId xmlns:a16="http://schemas.microsoft.com/office/drawing/2014/main" id="{4D47A1C0-521E-463A-8C70-F52B9716F767}"/>
               </a:ext>
             </a:extLst>
           </p:cNvPr>
@@ -8184,7 +8184,7 @@
           <p:cNvPr id="13" name="s5-takeaway-rule">
             <a:extLst xmlns:a="http://schemas.openxmlformats.org/drawingml/2006/main">
               <a:ext uri="{FF2B5EF4-FFF2-40B4-BE49-F238E27FC236}">
-                <a16:creationId xmlns:a16="http://schemas.microsoft.com/office/drawing/2014/main" id="{34A3196A-0913-4FE9-BDCF-C7F5146E099F}"/>
+                <a16:creationId xmlns:a16="http://schemas.microsoft.com/office/drawing/2014/main" id="{FFE24082-8DB4-48E5-A70E-A725F43BC93D}"/>
               </a:ext>
             </a:extLst>
           </p:cNvPr>
@@ -8217,7 +8217,7 @@
           <p:cNvPr id="14" name="s5-takeaway">
             <a:extLst xmlns:a="http://schemas.openxmlformats.org/drawingml/2006/main">
               <a:ext uri="{FF2B5EF4-FFF2-40B4-BE49-F238E27FC236}">
-                <a16:creationId xmlns:a16="http://schemas.microsoft.com/office/drawing/2014/main" id="{E233D1A8-3BDF-4896-AA0B-6CDFD2C25620}"/>
+                <a16:creationId xmlns:a16="http://schemas.microsoft.com/office/drawing/2014/main" id="{EF44B32F-D4E2-44A5-AE64-1AA7EE48E1DE}"/>
               </a:ext>
             </a:extLst>
           </p:cNvPr>
@@ -8265,7 +8265,7 @@
                 <a:ea typeface="PingFang SC"/>
                 <a:cs typeface="PingFang SC"/>
               </a:rPr>
-              <a:t>调查容易出现确认偏差：一旦形成最初印象，后续只寻找支持它的证据</a:t>
+              <a:t>竞争性假设能降低调查中的确认偏差</a:t>
             </a:r>
           </a:p>
         </p:txBody>
@@ -8273,7 +8273,7 @@
     </p:spTree>
     <p:extLst>
       <p:ext uri="{BB962C8B-B14F-4D97-AF65-F5344CB8AC3E}">
-        <p14:creationId xmlns:p14="http://schemas.microsoft.com/office/powerpoint/2010/main" val="958441788"/>
+        <p14:creationId xmlns:p14="http://schemas.microsoft.com/office/powerpoint/2010/main" val="733167035"/>
       </p:ext>
     </p:extLst>
   </p:cSld>
@@ -8304,7 +8304,7 @@
           <p:cNvPr id="1" name="s6-rule">
             <a:extLst xmlns:a="http://schemas.openxmlformats.org/drawingml/2006/main">
               <a:ext uri="{FF2B5EF4-FFF2-40B4-BE49-F238E27FC236}">
-                <a16:creationId xmlns:a16="http://schemas.microsoft.com/office/drawing/2014/main" id="{8681015C-C89E-4634-8859-3A08A79A4BD7}"/>
+                <a16:creationId xmlns:a16="http://schemas.microsoft.com/office/drawing/2014/main" id="{FBD85670-CB22-4B89-8098-D2A89E423EB9}"/>
               </a:ext>
             </a:extLst>
           </p:cNvPr>
@@ -8337,7 +8337,7 @@
           <p:cNvPr id="2" name="s6-eyebrow">
             <a:extLst xmlns:a="http://schemas.openxmlformats.org/drawingml/2006/main">
               <a:ext uri="{FF2B5EF4-FFF2-40B4-BE49-F238E27FC236}">
-                <a16:creationId xmlns:a16="http://schemas.microsoft.com/office/drawing/2014/main" id="{2FEDA34C-5533-4377-8A22-AB4FDD11552F}"/>
+                <a16:creationId xmlns:a16="http://schemas.microsoft.com/office/drawing/2014/main" id="{2454254C-AEC0-4960-995D-00A6006639D9}"/>
               </a:ext>
             </a:extLst>
           </p:cNvPr>
@@ -8395,7 +8395,7 @@
           <p:cNvPr id="3" name="s6-title">
             <a:extLst xmlns:a="http://schemas.openxmlformats.org/drawingml/2006/main">
               <a:ext uri="{FF2B5EF4-FFF2-40B4-BE49-F238E27FC236}">
-                <a16:creationId xmlns:a16="http://schemas.microsoft.com/office/drawing/2014/main" id="{20477E09-B03B-4349-9A48-823C317E5347}"/>
+                <a16:creationId xmlns:a16="http://schemas.microsoft.com/office/drawing/2014/main" id="{90467884-DBCA-4862-BB6E-AB5F43750F66}"/>
               </a:ext>
             </a:extLst>
           </p:cNvPr>
@@ -8453,7 +8453,7 @@
           <p:cNvPr id="4" name="s6-footer">
             <a:extLst xmlns:a="http://schemas.openxmlformats.org/drawingml/2006/main">
               <a:ext uri="{FF2B5EF4-FFF2-40B4-BE49-F238E27FC236}">
-                <a16:creationId xmlns:a16="http://schemas.microsoft.com/office/drawing/2014/main" id="{1D8E6B59-FC15-4C71-9636-960D07FDE9D9}"/>
+                <a16:creationId xmlns:a16="http://schemas.microsoft.com/office/drawing/2014/main" id="{F2B56863-4FAC-4C10-A5D9-01B8BF3CE453}"/>
               </a:ext>
             </a:extLst>
           </p:cNvPr>
@@ -8484,7 +8484,7 @@
           <p:cNvPr id="5" name="s6-identity">
             <a:extLst xmlns:a="http://schemas.openxmlformats.org/drawingml/2006/main">
               <a:ext uri="{FF2B5EF4-FFF2-40B4-BE49-F238E27FC236}">
-                <a16:creationId xmlns:a16="http://schemas.microsoft.com/office/drawing/2014/main" id="{0CB90575-4CF7-47AC-B80F-A932EB1D8960}"/>
+                <a16:creationId xmlns:a16="http://schemas.microsoft.com/office/drawing/2014/main" id="{10DCE5F1-0C86-458B-B9BE-EE3243506EAE}"/>
               </a:ext>
             </a:extLst>
           </p:cNvPr>
@@ -8542,7 +8542,7 @@
           <p:cNvPr id="6" name="core-no-0">
             <a:extLst xmlns:a="http://schemas.openxmlformats.org/drawingml/2006/main">
               <a:ext uri="{FF2B5EF4-FFF2-40B4-BE49-F238E27FC236}">
-                <a16:creationId xmlns:a16="http://schemas.microsoft.com/office/drawing/2014/main" id="{060F5D70-B330-43AE-A17D-4D006127E4CF}"/>
+                <a16:creationId xmlns:a16="http://schemas.microsoft.com/office/drawing/2014/main" id="{EEB96980-D8C6-4F64-B388-D8DFACE87BAF}"/>
               </a:ext>
             </a:extLst>
           </p:cNvPr>
@@ -8574,7 +8574,7 @@
             <a:pPr algn="l">
               <a:defRPr sz="2250" b="1">
                 <a:solidFill>
-                  <a:srgbClr val="E5783F"/>
+                  <a:srgbClr val="9A3F16"/>
                 </a:solidFill>
                 <a:latin typeface="PingFang SC"/>
                 <a:ea typeface="PingFang SC"/>
@@ -8584,7 +8584,7 @@
             <a:r>
               <a:rPr sz="2250" b="1">
                 <a:solidFill>
-                  <a:srgbClr val="E5783F"/>
+                  <a:srgbClr val="9A3F16"/>
                 </a:solidFill>
                 <a:latin typeface="PingFang SC"/>
                 <a:ea typeface="PingFang SC"/>
@@ -8600,7 +8600,7 @@
           <p:cNvPr id="7" name="core-label-0">
             <a:extLst xmlns:a="http://schemas.openxmlformats.org/drawingml/2006/main">
               <a:ext uri="{FF2B5EF4-FFF2-40B4-BE49-F238E27FC236}">
-                <a16:creationId xmlns:a16="http://schemas.microsoft.com/office/drawing/2014/main" id="{2DEF9F53-F9E8-45C0-956B-F31AE183673F}"/>
+                <a16:creationId xmlns:a16="http://schemas.microsoft.com/office/drawing/2014/main" id="{2FAB96B2-8225-45FF-8AF7-988A47BC60F9}"/>
               </a:ext>
             </a:extLst>
           </p:cNvPr>
@@ -8658,7 +8658,7 @@
           <p:cNvPr id="8" name="core-body-0">
             <a:extLst xmlns:a="http://schemas.openxmlformats.org/drawingml/2006/main">
               <a:ext uri="{FF2B5EF4-FFF2-40B4-BE49-F238E27FC236}">
-                <a16:creationId xmlns:a16="http://schemas.microsoft.com/office/drawing/2014/main" id="{C238A282-22CA-4875-8B72-6D02BAF20539}"/>
+                <a16:creationId xmlns:a16="http://schemas.microsoft.com/office/drawing/2014/main" id="{FB146F57-572A-41CD-A0EB-4703A0C30650}"/>
               </a:ext>
             </a:extLst>
           </p:cNvPr>
@@ -8682,7 +8682,7 @@
           </a:solidFill>
           <a:ln xmlns:a="http://schemas.openxmlformats.org/drawingml/2006/main" w="19050">
             <a:solidFill>
-              <a:srgbClr val="E5783F"/>
+              <a:srgbClr val="9A3F16"/>
             </a:solidFill>
             <a:prstDash val="solid"/>
           </a:ln>
@@ -8712,7 +8712,7 @@
                 <a:ea typeface="PingFang SC"/>
                 <a:cs typeface="PingFang SC"/>
               </a:rPr>
-              <a:t>检索库可以包含现行法律法规、调查程序、消防和电气技术资料、设备说明以及经过审查的案例。每条资料应标明发布机构、版本、有效状态、适用范围和具体位置。历史案例能提示排查方向…</a:t>
+              <a:t>检索库可以包含现行法律法规、调查程序、消防和电气技术资料、设备说明以及经过审查的案例；每条资料应标明发布机构、版本、有效状态、适用范围和具体位置；历史案例能提示排查方向</a:t>
             </a:r>
           </a:p>
         </p:txBody>
@@ -8722,7 +8722,7 @@
           <p:cNvPr id="9" name="core-no-1">
             <a:extLst xmlns:a="http://schemas.openxmlformats.org/drawingml/2006/main">
               <a:ext uri="{FF2B5EF4-FFF2-40B4-BE49-F238E27FC236}">
-                <a16:creationId xmlns:a16="http://schemas.microsoft.com/office/drawing/2014/main" id="{91FE1389-13DB-4655-AF38-2CAF4CBE2339}"/>
+                <a16:creationId xmlns:a16="http://schemas.microsoft.com/office/drawing/2014/main" id="{7D2C3892-B102-4939-B5BA-D11AFBC9B478}"/>
               </a:ext>
             </a:extLst>
           </p:cNvPr>
@@ -8754,7 +8754,7 @@
             <a:pPr algn="l">
               <a:defRPr sz="2250" b="1">
                 <a:solidFill>
-                  <a:srgbClr val="E5783F"/>
+                  <a:srgbClr val="9A3F16"/>
                 </a:solidFill>
                 <a:latin typeface="PingFang SC"/>
                 <a:ea typeface="PingFang SC"/>
@@ -8764,7 +8764,7 @@
             <a:r>
               <a:rPr sz="2250" b="1">
                 <a:solidFill>
-                  <a:srgbClr val="E5783F"/>
+                  <a:srgbClr val="9A3F16"/>
                 </a:solidFill>
                 <a:latin typeface="PingFang SC"/>
                 <a:ea typeface="PingFang SC"/>
@@ -8780,7 +8780,7 @@
           <p:cNvPr id="10" name="core-body-1">
             <a:extLst xmlns:a="http://schemas.openxmlformats.org/drawingml/2006/main">
               <a:ext uri="{FF2B5EF4-FFF2-40B4-BE49-F238E27FC236}">
-                <a16:creationId xmlns:a16="http://schemas.microsoft.com/office/drawing/2014/main" id="{2F82E1E4-35E9-47FE-812F-CE3C59377638}"/>
+                <a16:creationId xmlns:a16="http://schemas.microsoft.com/office/drawing/2014/main" id="{A7596855-093A-4B23-BA86-00E3DB879782}"/>
               </a:ext>
             </a:extLst>
           </p:cNvPr>
@@ -8834,7 +8834,7 @@
                 <a:ea typeface="PingFang SC"/>
                 <a:cs typeface="PingFang SC"/>
               </a:rPr>
-              <a:t>模型可能引用失效条款、混淆不同地区规则，或从一段技术说明推导出原文没有的结论。调查人员必须核对原文，必要时由消防、电气、材料、结构或其他领域专家复核。专家意见也应说明依据、方法…</a:t>
+              <a:t>模型可能引用失效条款、混淆不同地区规则；或从一段技术说明推导出原文没有的结论；调查人员必须核对原文；必要时由消防、电气、材料、结构或其他领域专家复核</a:t>
             </a:r>
           </a:p>
         </p:txBody>
@@ -8844,7 +8844,7 @@
           <p:cNvPr id="11" name="s6-takeaway-rule">
             <a:extLst xmlns:a="http://schemas.openxmlformats.org/drawingml/2006/main">
               <a:ext uri="{FF2B5EF4-FFF2-40B4-BE49-F238E27FC236}">
-                <a16:creationId xmlns:a16="http://schemas.microsoft.com/office/drawing/2014/main" id="{940288C8-FB8E-4A6A-84D0-9BB3827A0DC8}"/>
+                <a16:creationId xmlns:a16="http://schemas.microsoft.com/office/drawing/2014/main" id="{A8AF7098-F843-491A-872F-82BDE0EB14A2}"/>
               </a:ext>
             </a:extLst>
           </p:cNvPr>
@@ -8877,7 +8877,7 @@
           <p:cNvPr id="12" name="s6-takeaway">
             <a:extLst xmlns:a="http://schemas.openxmlformats.org/drawingml/2006/main">
               <a:ext uri="{FF2B5EF4-FFF2-40B4-BE49-F238E27FC236}">
-                <a16:creationId xmlns:a16="http://schemas.microsoft.com/office/drawing/2014/main" id="{12D20FD4-ED0F-4021-BC16-D07EEEA1FC43}"/>
+                <a16:creationId xmlns:a16="http://schemas.microsoft.com/office/drawing/2014/main" id="{256FC2D8-E0B9-4F0D-9D18-0C83B6B087B4}"/>
               </a:ext>
             </a:extLst>
           </p:cNvPr>
@@ -8933,7 +8933,7 @@
     </p:spTree>
     <p:extLst>
       <p:ext uri="{BB962C8B-B14F-4D97-AF65-F5344CB8AC3E}">
-        <p14:creationId xmlns:p14="http://schemas.microsoft.com/office/powerpoint/2010/main" val="600684810"/>
+        <p14:creationId xmlns:p14="http://schemas.microsoft.com/office/powerpoint/2010/main" val="2052484003"/>
       </p:ext>
     </p:extLst>
   </p:cSld>
@@ -8964,7 +8964,7 @@
           <p:cNvPr id="1" name="s7-rule">
             <a:extLst xmlns:a="http://schemas.openxmlformats.org/drawingml/2006/main">
               <a:ext uri="{FF2B5EF4-FFF2-40B4-BE49-F238E27FC236}">
-                <a16:creationId xmlns:a16="http://schemas.microsoft.com/office/drawing/2014/main" id="{4A1038C2-BDF0-41E3-BD41-BF40AEAF03BE}"/>
+                <a16:creationId xmlns:a16="http://schemas.microsoft.com/office/drawing/2014/main" id="{32C05868-E6EE-4674-808B-5D774739E137}"/>
               </a:ext>
             </a:extLst>
           </p:cNvPr>
@@ -8997,7 +8997,7 @@
           <p:cNvPr id="2" name="s7-eyebrow">
             <a:extLst xmlns:a="http://schemas.openxmlformats.org/drawingml/2006/main">
               <a:ext uri="{FF2B5EF4-FFF2-40B4-BE49-F238E27FC236}">
-                <a16:creationId xmlns:a16="http://schemas.microsoft.com/office/drawing/2014/main" id="{BE4D0806-9C9D-420C-9870-94E134B7BD1D}"/>
+                <a16:creationId xmlns:a16="http://schemas.microsoft.com/office/drawing/2014/main" id="{FB9E83B1-FD0D-4390-A60C-EB953CDD5C0D}"/>
               </a:ext>
             </a:extLst>
           </p:cNvPr>
@@ -9055,7 +9055,7 @@
           <p:cNvPr id="3" name="s7-title">
             <a:extLst xmlns:a="http://schemas.openxmlformats.org/drawingml/2006/main">
               <a:ext uri="{FF2B5EF4-FFF2-40B4-BE49-F238E27FC236}">
-                <a16:creationId xmlns:a16="http://schemas.microsoft.com/office/drawing/2014/main" id="{0799B02A-B88A-4AA8-AE66-F78DEDA086C7}"/>
+                <a16:creationId xmlns:a16="http://schemas.microsoft.com/office/drawing/2014/main" id="{73CC64EC-F116-4F74-A1DA-C6E071709C19}"/>
               </a:ext>
             </a:extLst>
           </p:cNvPr>
@@ -9113,7 +9113,7 @@
           <p:cNvPr id="4" name="s7-footer">
             <a:extLst xmlns:a="http://schemas.openxmlformats.org/drawingml/2006/main">
               <a:ext uri="{FF2B5EF4-FFF2-40B4-BE49-F238E27FC236}">
-                <a16:creationId xmlns:a16="http://schemas.microsoft.com/office/drawing/2014/main" id="{C2EE6802-2DF2-4478-B311-5827F6BC91B1}"/>
+                <a16:creationId xmlns:a16="http://schemas.microsoft.com/office/drawing/2014/main" id="{F3BFFF7D-178F-4785-9473-8BD0CCE90D3D}"/>
               </a:ext>
             </a:extLst>
           </p:cNvPr>
@@ -9144,7 +9144,7 @@
           <p:cNvPr id="5" name="s7-identity">
             <a:extLst xmlns:a="http://schemas.openxmlformats.org/drawingml/2006/main">
               <a:ext uri="{FF2B5EF4-FFF2-40B4-BE49-F238E27FC236}">
-                <a16:creationId xmlns:a16="http://schemas.microsoft.com/office/drawing/2014/main" id="{70747E93-E189-4B01-BD67-0C39F78F2DB6}"/>
+                <a16:creationId xmlns:a16="http://schemas.microsoft.com/office/drawing/2014/main" id="{6897E520-D3DA-4B9E-BC9D-34465DC5C605}"/>
               </a:ext>
             </a:extLst>
           </p:cNvPr>
@@ -9202,7 +9202,7 @@
           <p:cNvPr id="6" name="core-no-0">
             <a:extLst xmlns:a="http://schemas.openxmlformats.org/drawingml/2006/main">
               <a:ext uri="{FF2B5EF4-FFF2-40B4-BE49-F238E27FC236}">
-                <a16:creationId xmlns:a16="http://schemas.microsoft.com/office/drawing/2014/main" id="{38A4D660-A976-4BD3-A803-701EDA24ACCC}"/>
+                <a16:creationId xmlns:a16="http://schemas.microsoft.com/office/drawing/2014/main" id="{CB6B08B7-E387-49AC-BF63-D9CCA65995F8}"/>
               </a:ext>
             </a:extLst>
           </p:cNvPr>
@@ -9234,7 +9234,7 @@
             <a:pPr algn="l">
               <a:defRPr sz="2250" b="1">
                 <a:solidFill>
-                  <a:srgbClr val="E5783F"/>
+                  <a:srgbClr val="9A3F16"/>
                 </a:solidFill>
                 <a:latin typeface="PingFang SC"/>
                 <a:ea typeface="PingFang SC"/>
@@ -9244,7 +9244,7 @@
             <a:r>
               <a:rPr sz="2250" b="1">
                 <a:solidFill>
-                  <a:srgbClr val="E5783F"/>
+                  <a:srgbClr val="9A3F16"/>
                 </a:solidFill>
                 <a:latin typeface="PingFang SC"/>
                 <a:ea typeface="PingFang SC"/>
@@ -9260,7 +9260,7 @@
           <p:cNvPr id="7" name="core-label-0">
             <a:extLst xmlns:a="http://schemas.openxmlformats.org/drawingml/2006/main">
               <a:ext uri="{FF2B5EF4-FFF2-40B4-BE49-F238E27FC236}">
-                <a16:creationId xmlns:a16="http://schemas.microsoft.com/office/drawing/2014/main" id="{8713F0AC-030B-49D7-A929-CC3230A55E3B}"/>
+                <a16:creationId xmlns:a16="http://schemas.microsoft.com/office/drawing/2014/main" id="{2FEAA9C7-5ED6-4F7A-B1B2-9C46AB9AF92E}"/>
               </a:ext>
             </a:extLst>
           </p:cNvPr>
@@ -9318,7 +9318,7 @@
           <p:cNvPr id="8" name="core-body-0">
             <a:extLst xmlns:a="http://schemas.openxmlformats.org/drawingml/2006/main">
               <a:ext uri="{FF2B5EF4-FFF2-40B4-BE49-F238E27FC236}">
-                <a16:creationId xmlns:a16="http://schemas.microsoft.com/office/drawing/2014/main" id="{BCBECDE9-C472-4B22-B9AD-926C5D41D677}"/>
+                <a16:creationId xmlns:a16="http://schemas.microsoft.com/office/drawing/2014/main" id="{A9DB78C5-4A5C-4D3A-9F8A-CE293E51B207}"/>
               </a:ext>
             </a:extLst>
           </p:cNvPr>
@@ -9342,7 +9342,7 @@
           </a:solidFill>
           <a:ln xmlns:a="http://schemas.openxmlformats.org/drawingml/2006/main" w="19050">
             <a:solidFill>
-              <a:srgbClr val="E5783F"/>
+              <a:srgbClr val="9A3F16"/>
             </a:solidFill>
             <a:prstDash val="solid"/>
           </a:ln>
@@ -9382,7 +9382,7 @@
           <p:cNvPr id="9" name="core-no-1">
             <a:extLst xmlns:a="http://schemas.openxmlformats.org/drawingml/2006/main">
               <a:ext uri="{FF2B5EF4-FFF2-40B4-BE49-F238E27FC236}">
-                <a16:creationId xmlns:a16="http://schemas.microsoft.com/office/drawing/2014/main" id="{03A002B9-BCC5-4D12-AC18-FFB586B8BDBD}"/>
+                <a16:creationId xmlns:a16="http://schemas.microsoft.com/office/drawing/2014/main" id="{C340660F-E6C5-41C5-9F31-59AEA86E2580}"/>
               </a:ext>
             </a:extLst>
           </p:cNvPr>
@@ -9414,7 +9414,7 @@
             <a:pPr algn="l">
               <a:defRPr sz="2250" b="1">
                 <a:solidFill>
-                  <a:srgbClr val="E5783F"/>
+                  <a:srgbClr val="9A3F16"/>
                 </a:solidFill>
                 <a:latin typeface="PingFang SC"/>
                 <a:ea typeface="PingFang SC"/>
@@ -9424,7 +9424,7 @@
             <a:r>
               <a:rPr sz="2250" b="1">
                 <a:solidFill>
-                  <a:srgbClr val="E5783F"/>
+                  <a:srgbClr val="9A3F16"/>
                 </a:solidFill>
                 <a:latin typeface="PingFang SC"/>
                 <a:ea typeface="PingFang SC"/>
@@ -9440,7 +9440,7 @@
           <p:cNvPr id="10" name="core-body-1">
             <a:extLst xmlns:a="http://schemas.openxmlformats.org/drawingml/2006/main">
               <a:ext uri="{FF2B5EF4-FFF2-40B4-BE49-F238E27FC236}">
-                <a16:creationId xmlns:a16="http://schemas.microsoft.com/office/drawing/2014/main" id="{36242546-080F-46D4-B151-915D22C711F5}"/>
+                <a16:creationId xmlns:a16="http://schemas.microsoft.com/office/drawing/2014/main" id="{F6172F92-98E7-4D07-8DEC-23B459C25F7B}"/>
               </a:ext>
             </a:extLst>
           </p:cNvPr>
@@ -9494,7 +9494,7 @@
                 <a:ea typeface="PingFang SC"/>
                 <a:cs typeface="PingFang SC"/>
               </a:rPr>
-              <a:t>评测集应包含模糊影像、损坏文件、时钟不一致、同名对象、矛盾笔录和恶意指令，观察系统会不会编造缺失内容或泄露受限信息。高风险错误要单独统计，不能被大量简单样本的平均分掩盖。模型或资料库更新后…</a:t>
+              <a:t>评测集应包含模糊影像、损坏文件、时钟不一致、同名对象、矛盾笔录和恶意指令；观察系统会不会编造缺失内容或泄露受限信息；高风险错误要单独统计；不能被大量简单样本的平均分掩盖；模型或资料库更新后</a:t>
             </a:r>
           </a:p>
         </p:txBody>
@@ -9504,7 +9504,7 @@
           <p:cNvPr id="11" name="s7-takeaway-rule">
             <a:extLst xmlns:a="http://schemas.openxmlformats.org/drawingml/2006/main">
               <a:ext uri="{FF2B5EF4-FFF2-40B4-BE49-F238E27FC236}">
-                <a16:creationId xmlns:a16="http://schemas.microsoft.com/office/drawing/2014/main" id="{67F165C4-255E-40DF-A2BA-964E30D2F822}"/>
+                <a16:creationId xmlns:a16="http://schemas.microsoft.com/office/drawing/2014/main" id="{378A2A31-4C7A-4EEA-8490-5FEAEB8AF43E}"/>
               </a:ext>
             </a:extLst>
           </p:cNvPr>
@@ -9537,7 +9537,7 @@
           <p:cNvPr id="12" name="s7-takeaway">
             <a:extLst xmlns:a="http://schemas.openxmlformats.org/drawingml/2006/main">
               <a:ext uri="{FF2B5EF4-FFF2-40B4-BE49-F238E27FC236}">
-                <a16:creationId xmlns:a16="http://schemas.microsoft.com/office/drawing/2014/main" id="{65D899A1-B93C-4BD2-9221-71E5199F6D89}"/>
+                <a16:creationId xmlns:a16="http://schemas.microsoft.com/office/drawing/2014/main" id="{A9617D83-AE08-4DB7-BDBF-765D46B1F39F}"/>
               </a:ext>
             </a:extLst>
           </p:cNvPr>
@@ -9593,7 +9593,7 @@
     </p:spTree>
     <p:extLst>
       <p:ext uri="{BB962C8B-B14F-4D97-AF65-F5344CB8AC3E}">
-        <p14:creationId xmlns:p14="http://schemas.microsoft.com/office/powerpoint/2010/main" val="138927415"/>
+        <p14:creationId xmlns:p14="http://schemas.microsoft.com/office/powerpoint/2010/main" val="797014853"/>
       </p:ext>
     </p:extLst>
   </p:cSld>
@@ -9624,7 +9624,7 @@
           <p:cNvPr id="1" name="s8-rule">
             <a:extLst xmlns:a="http://schemas.openxmlformats.org/drawingml/2006/main">
               <a:ext uri="{FF2B5EF4-FFF2-40B4-BE49-F238E27FC236}">
-                <a16:creationId xmlns:a16="http://schemas.microsoft.com/office/drawing/2014/main" id="{E9305FEF-34F1-44AE-890B-765213B32006}"/>
+                <a16:creationId xmlns:a16="http://schemas.microsoft.com/office/drawing/2014/main" id="{32C8D795-0E2E-4761-A691-54EF64F44B96}"/>
               </a:ext>
             </a:extLst>
           </p:cNvPr>
@@ -9657,7 +9657,7 @@
           <p:cNvPr id="2" name="s8-eyebrow">
             <a:extLst xmlns:a="http://schemas.openxmlformats.org/drawingml/2006/main">
               <a:ext uri="{FF2B5EF4-FFF2-40B4-BE49-F238E27FC236}">
-                <a16:creationId xmlns:a16="http://schemas.microsoft.com/office/drawing/2014/main" id="{26DEC602-F86E-4955-8C76-47FE8C6F9329}"/>
+                <a16:creationId xmlns:a16="http://schemas.microsoft.com/office/drawing/2014/main" id="{F8C18FD0-CFE9-46D6-B4E2-7ECCC47EC150}"/>
               </a:ext>
             </a:extLst>
           </p:cNvPr>
@@ -9715,7 +9715,7 @@
           <p:cNvPr id="3" name="s8-title">
             <a:extLst xmlns:a="http://schemas.openxmlformats.org/drawingml/2006/main">
               <a:ext uri="{FF2B5EF4-FFF2-40B4-BE49-F238E27FC236}">
-                <a16:creationId xmlns:a16="http://schemas.microsoft.com/office/drawing/2014/main" id="{FD8F5607-8DB2-4988-B785-B65E445EF6A8}"/>
+                <a16:creationId xmlns:a16="http://schemas.microsoft.com/office/drawing/2014/main" id="{1A488A12-788E-4B81-B3C3-4B2F31B9148D}"/>
               </a:ext>
             </a:extLst>
           </p:cNvPr>
@@ -9740,7 +9740,7 @@
         </p:spPr>
         <p:txBody>
           <a:bodyPr xmlns:a="http://schemas.openxmlformats.org/drawingml/2006/main" lIns="0" tIns="0" rIns="0" bIns="0" anchor="ctr">
-            <a:normAutofit fontScale="78165"/>
+            <a:normAutofit fontScale="100000"/>
           </a:bodyPr>
           <a:lstStyle xmlns:a="http://schemas.openxmlformats.org/drawingml/2006/main"/>
           <a:p xmlns:a="http://schemas.openxmlformats.org/drawingml/2006/main">
@@ -9763,7 +9763,7 @@
                 <a:ea typeface="PingFang SC"/>
                 <a:cs typeface="PingFang SC"/>
               </a:rPr>
-              <a:t>AI 可以生成材料目录、时间线草稿、规范检索结果、假设矩阵和报告结构</a:t>
+              <a:t>AI 可以整理材料，但不能替调查人员定案</a:t>
             </a:r>
           </a:p>
         </p:txBody>
@@ -9773,7 +9773,7 @@
           <p:cNvPr id="4" name="s8-footer">
             <a:extLst xmlns:a="http://schemas.openxmlformats.org/drawingml/2006/main">
               <a:ext uri="{FF2B5EF4-FFF2-40B4-BE49-F238E27FC236}">
-                <a16:creationId xmlns:a16="http://schemas.microsoft.com/office/drawing/2014/main" id="{62B1DB25-CDEF-4CAE-B729-1AAC6785BFE6}"/>
+                <a16:creationId xmlns:a16="http://schemas.microsoft.com/office/drawing/2014/main" id="{3D5E6DB8-C4C7-4761-B5F6-7B7246FBD1E2}"/>
               </a:ext>
             </a:extLst>
           </p:cNvPr>
@@ -9804,7 +9804,7 @@
           <p:cNvPr id="5" name="s8-identity">
             <a:extLst xmlns:a="http://schemas.openxmlformats.org/drawingml/2006/main">
               <a:ext uri="{FF2B5EF4-FFF2-40B4-BE49-F238E27FC236}">
-                <a16:creationId xmlns:a16="http://schemas.microsoft.com/office/drawing/2014/main" id="{88902A0D-D244-465E-A619-61272390831E}"/>
+                <a16:creationId xmlns:a16="http://schemas.microsoft.com/office/drawing/2014/main" id="{481B30DB-18D0-44B5-A9B1-394AEA0306DA}"/>
               </a:ext>
             </a:extLst>
           </p:cNvPr>
@@ -9862,7 +9862,7 @@
           <p:cNvPr id="6" name="core-no-0">
             <a:extLst xmlns:a="http://schemas.openxmlformats.org/drawingml/2006/main">
               <a:ext uri="{FF2B5EF4-FFF2-40B4-BE49-F238E27FC236}">
-                <a16:creationId xmlns:a16="http://schemas.microsoft.com/office/drawing/2014/main" id="{8115AC8A-3832-43A8-BAB4-FF1FCF01F2A7}"/>
+                <a16:creationId xmlns:a16="http://schemas.microsoft.com/office/drawing/2014/main" id="{91C32C6A-39D5-4F96-9553-1F64B492ACBF}"/>
               </a:ext>
             </a:extLst>
           </p:cNvPr>
@@ -9894,7 +9894,7 @@
             <a:pPr algn="l">
               <a:defRPr sz="2250" b="1">
                 <a:solidFill>
-                  <a:srgbClr val="E5783F"/>
+                  <a:srgbClr val="9A3F16"/>
                 </a:solidFill>
                 <a:latin typeface="PingFang SC"/>
                 <a:ea typeface="PingFang SC"/>
@@ -9904,7 +9904,7 @@
             <a:r>
               <a:rPr sz="2250" b="1">
                 <a:solidFill>
-                  <a:srgbClr val="E5783F"/>
+                  <a:srgbClr val="9A3F16"/>
                 </a:solidFill>
                 <a:latin typeface="PingFang SC"/>
                 <a:ea typeface="PingFang SC"/>
@@ -9920,7 +9920,7 @@
           <p:cNvPr id="7" name="core-label-0">
             <a:extLst xmlns:a="http://schemas.openxmlformats.org/drawingml/2006/main">
               <a:ext uri="{FF2B5EF4-FFF2-40B4-BE49-F238E27FC236}">
-                <a16:creationId xmlns:a16="http://schemas.microsoft.com/office/drawing/2014/main" id="{CF360512-CA23-43A9-94A9-D4215137049A}"/>
+                <a16:creationId xmlns:a16="http://schemas.microsoft.com/office/drawing/2014/main" id="{430476DE-7273-494A-A67C-8357CBE46D15}"/>
               </a:ext>
             </a:extLst>
           </p:cNvPr>
@@ -9978,7 +9978,7 @@
           <p:cNvPr id="8" name="core-body-0">
             <a:extLst xmlns:a="http://schemas.openxmlformats.org/drawingml/2006/main">
               <a:ext uri="{FF2B5EF4-FFF2-40B4-BE49-F238E27FC236}">
-                <a16:creationId xmlns:a16="http://schemas.microsoft.com/office/drawing/2014/main" id="{FDAC441A-2A9B-41C4-9DF2-3E4E7C210A75}"/>
+                <a16:creationId xmlns:a16="http://schemas.microsoft.com/office/drawing/2014/main" id="{5CB29D2B-4CB0-43D6-830D-1FBFF3BC91DD}"/>
               </a:ext>
             </a:extLst>
           </p:cNvPr>
@@ -10002,7 +10002,7 @@
           </a:solidFill>
           <a:ln xmlns:a="http://schemas.openxmlformats.org/drawingml/2006/main" w="19050">
             <a:solidFill>
-              <a:srgbClr val="E5783F"/>
+              <a:srgbClr val="9A3F16"/>
             </a:solidFill>
             <a:prstDash val="solid"/>
           </a:ln>
@@ -10032,7 +10032,7 @@
                 <a:ea typeface="PingFang SC"/>
                 <a:cs typeface="PingFang SC"/>
               </a:rPr>
-              <a:t>AI 可以生成材料目录、时间线草稿、规范检索结果、假设矩阵和报告结构，但不应宣布起火原因、证据效力、责任主体或案件结论。调查人员按照权限和程序审查原始资料、开展必要实验与询问、听取专业意见…</a:t>
+              <a:t>AI 可以生成材料目录、时间线草稿、规范检索结果、假设矩阵和报告结构；但不应宣布起火原因、证据效力、责任主体或案件结论；调查人员按照权限和程序审查原始资料、开展必要实验与询问、听取专业意见</a:t>
             </a:r>
           </a:p>
         </p:txBody>
@@ -10042,7 +10042,7 @@
           <p:cNvPr id="9" name="core-no-1">
             <a:extLst xmlns:a="http://schemas.openxmlformats.org/drawingml/2006/main">
               <a:ext uri="{FF2B5EF4-FFF2-40B4-BE49-F238E27FC236}">
-                <a16:creationId xmlns:a16="http://schemas.microsoft.com/office/drawing/2014/main" id="{CF84D00E-B24E-47AD-9761-13DC0E9D8EE8}"/>
+                <a16:creationId xmlns:a16="http://schemas.microsoft.com/office/drawing/2014/main" id="{EDCF5C9D-B120-4555-8026-BD9196F25E6F}"/>
               </a:ext>
             </a:extLst>
           </p:cNvPr>
@@ -10074,7 +10074,7 @@
             <a:pPr algn="l">
               <a:defRPr sz="2250" b="1">
                 <a:solidFill>
-                  <a:srgbClr val="E5783F"/>
+                  <a:srgbClr val="9A3F16"/>
                 </a:solidFill>
                 <a:latin typeface="PingFang SC"/>
                 <a:ea typeface="PingFang SC"/>
@@ -10084,7 +10084,7 @@
             <a:r>
               <a:rPr sz="2250" b="1">
                 <a:solidFill>
-                  <a:srgbClr val="E5783F"/>
+                  <a:srgbClr val="9A3F16"/>
                 </a:solidFill>
                 <a:latin typeface="PingFang SC"/>
                 <a:ea typeface="PingFang SC"/>
@@ -10100,7 +10100,7 @@
           <p:cNvPr id="10" name="core-body-1">
             <a:extLst xmlns:a="http://schemas.openxmlformats.org/drawingml/2006/main">
               <a:ext uri="{FF2B5EF4-FFF2-40B4-BE49-F238E27FC236}">
-                <a16:creationId xmlns:a16="http://schemas.microsoft.com/office/drawing/2014/main" id="{8AC74BC5-A78B-48D3-A2F0-811CD7F49CDC}"/>
+                <a16:creationId xmlns:a16="http://schemas.microsoft.com/office/drawing/2014/main" id="{E4F763FF-BDA4-4B1F-8A1F-14298579B061}"/>
               </a:ext>
             </a:extLst>
           </p:cNvPr>
@@ -10164,7 +10164,7 @@
           <p:cNvPr id="11" name="s8-takeaway-rule">
             <a:extLst xmlns:a="http://schemas.openxmlformats.org/drawingml/2006/main">
               <a:ext uri="{FF2B5EF4-FFF2-40B4-BE49-F238E27FC236}">
-                <a16:creationId xmlns:a16="http://schemas.microsoft.com/office/drawing/2014/main" id="{DCEAA05D-5E8E-4FCD-AFF5-3039DFEDB8F9}"/>
+                <a16:creationId xmlns:a16="http://schemas.microsoft.com/office/drawing/2014/main" id="{3A422834-D97C-45EC-B99E-76B081E1D925}"/>
               </a:ext>
             </a:extLst>
           </p:cNvPr>
@@ -10197,7 +10197,7 @@
           <p:cNvPr id="12" name="s8-takeaway">
             <a:extLst xmlns:a="http://schemas.openxmlformats.org/drawingml/2006/main">
               <a:ext uri="{FF2B5EF4-FFF2-40B4-BE49-F238E27FC236}">
-                <a16:creationId xmlns:a16="http://schemas.microsoft.com/office/drawing/2014/main" id="{86A6DD07-FF61-4945-946F-756990522289}"/>
+                <a16:creationId xmlns:a16="http://schemas.microsoft.com/office/drawing/2014/main" id="{F807B896-1216-451B-BB70-20FD6E2ACA6B}"/>
               </a:ext>
             </a:extLst>
           </p:cNvPr>
@@ -10245,7 +10245,7 @@
                 <a:ea typeface="PingFang SC"/>
                 <a:cs typeface="PingFang SC"/>
               </a:rPr>
-              <a:t>AI 可以生成材料目录、时间线草稿、规范检索结果、假设矩阵和报告结构</a:t>
+              <a:t>AI 可以整理材料，但不能替调查人员定案</a:t>
             </a:r>
           </a:p>
         </p:txBody>
@@ -10253,7 +10253,7 @@
     </p:spTree>
     <p:extLst>
       <p:ext uri="{BB962C8B-B14F-4D97-AF65-F5344CB8AC3E}">
-        <p14:creationId xmlns:p14="http://schemas.microsoft.com/office/powerpoint/2010/main" val="496226413"/>
+        <p14:creationId xmlns:p14="http://schemas.microsoft.com/office/powerpoint/2010/main" val="1576025265"/>
       </p:ext>
     </p:extLst>
   </p:cSld>
@@ -10284,7 +10284,7 @@
           <p:cNvPr id="1" name="s9-rule">
             <a:extLst xmlns:a="http://schemas.openxmlformats.org/drawingml/2006/main">
               <a:ext uri="{FF2B5EF4-FFF2-40B4-BE49-F238E27FC236}">
-                <a16:creationId xmlns:a16="http://schemas.microsoft.com/office/drawing/2014/main" id="{96DF2986-F636-4677-B699-07758BE488DE}"/>
+                <a16:creationId xmlns:a16="http://schemas.microsoft.com/office/drawing/2014/main" id="{66DD5158-1B4B-4916-9ABB-A3D10202B729}"/>
               </a:ext>
             </a:extLst>
           </p:cNvPr>
@@ -10317,7 +10317,7 @@
           <p:cNvPr id="2" name="s9-eyebrow">
             <a:extLst xmlns:a="http://schemas.openxmlformats.org/drawingml/2006/main">
               <a:ext uri="{FF2B5EF4-FFF2-40B4-BE49-F238E27FC236}">
-                <a16:creationId xmlns:a16="http://schemas.microsoft.com/office/drawing/2014/main" id="{1BC9FD07-6EF8-49CB-BEAB-012171BBC075}"/>
+                <a16:creationId xmlns:a16="http://schemas.microsoft.com/office/drawing/2014/main" id="{2BDBB9F7-D843-4B8F-B796-566EBC87D177}"/>
               </a:ext>
             </a:extLst>
           </p:cNvPr>
@@ -10375,7 +10375,7 @@
           <p:cNvPr id="3" name="s9-title">
             <a:extLst xmlns:a="http://schemas.openxmlformats.org/drawingml/2006/main">
               <a:ext uri="{FF2B5EF4-FFF2-40B4-BE49-F238E27FC236}">
-                <a16:creationId xmlns:a16="http://schemas.microsoft.com/office/drawing/2014/main" id="{E4F0C2FB-CBB1-497E-AEE7-DA9216E9B1AB}"/>
+                <a16:creationId xmlns:a16="http://schemas.microsoft.com/office/drawing/2014/main" id="{402D8BE0-EE79-424F-84E9-2036CF074B24}"/>
               </a:ext>
             </a:extLst>
           </p:cNvPr>
@@ -10423,7 +10423,7 @@
                 <a:ea typeface="PingFang SC"/>
                 <a:cs typeface="PingFang SC"/>
               </a:rPr>
-              <a:t>两个起火区域假设的材料矩阵必须经过边界验证</a:t>
+              <a:t>竞争性假设必须同时记录支持证据与反证</a:t>
             </a:r>
           </a:p>
         </p:txBody>
@@ -10433,7 +10433,7 @@
           <p:cNvPr id="4" name="s9-footer">
             <a:extLst xmlns:a="http://schemas.openxmlformats.org/drawingml/2006/main">
               <a:ext uri="{FF2B5EF4-FFF2-40B4-BE49-F238E27FC236}">
-                <a16:creationId xmlns:a16="http://schemas.microsoft.com/office/drawing/2014/main" id="{2A5774D8-C611-4B10-A9B5-91CF5CE69841}"/>
+                <a16:creationId xmlns:a16="http://schemas.microsoft.com/office/drawing/2014/main" id="{D935802A-3003-41A4-A7A5-1D41A44A9B22}"/>
               </a:ext>
             </a:extLst>
           </p:cNvPr>
@@ -10464,7 +10464,7 @@
           <p:cNvPr id="5" name="s9-identity">
             <a:extLst xmlns:a="http://schemas.openxmlformats.org/drawingml/2006/main">
               <a:ext uri="{FF2B5EF4-FFF2-40B4-BE49-F238E27FC236}">
-                <a16:creationId xmlns:a16="http://schemas.microsoft.com/office/drawing/2014/main" id="{D90C45C3-FEA0-46D4-A1B4-BE0178CC377A}"/>
+                <a16:creationId xmlns:a16="http://schemas.microsoft.com/office/drawing/2014/main" id="{A3557155-E2C9-463F-BBB8-94AC9B113AEC}"/>
               </a:ext>
             </a:extLst>
           </p:cNvPr>
@@ -10522,7 +10522,7 @@
           <p:cNvPr id="6" name="case-title">
             <a:extLst xmlns:a="http://schemas.openxmlformats.org/drawingml/2006/main">
               <a:ext uri="{FF2B5EF4-FFF2-40B4-BE49-F238E27FC236}">
-                <a16:creationId xmlns:a16="http://schemas.microsoft.com/office/drawing/2014/main" id="{5FEB9D22-9568-4245-957E-04EEF0A07371}"/>
+                <a16:creationId xmlns:a16="http://schemas.microsoft.com/office/drawing/2014/main" id="{ED3AA0A0-9378-48AC-A9FE-6B1D48F4D27C}"/>
               </a:ext>
             </a:extLst>
           </p:cNvPr>
@@ -10586,23 +10586,23 @@
           <p:cNvPr id="7" name="case-row-0">
             <a:extLst xmlns:a="http://schemas.openxmlformats.org/drawingml/2006/main">
               <a:ext uri="{FF2B5EF4-FFF2-40B4-BE49-F238E27FC236}">
-                <a16:creationId xmlns:a16="http://schemas.microsoft.com/office/drawing/2014/main" id="{6B5889FB-FDB4-46DB-8D31-26BA03921296}"/>
-              </a:ext>
-            </a:extLst>
-          </p:cNvPr>
-          <p:cNvSpPr>
-            <a:spLocks xmlns:a="http://schemas.openxmlformats.org/drawingml/2006/main" noGrp="1"/>
-          </p:cNvSpPr>
-          <p:nvPr/>
-        </p:nvSpPr>
-        <p:spPr>
-          <a:xfrm xmlns:a="http://schemas.openxmlformats.org/drawingml/2006/main">
-            <a:off x="4286250" y="2228850"/>
-            <a:ext cx="6534150" cy="1238250"/>
+                <a16:creationId xmlns:a16="http://schemas.microsoft.com/office/drawing/2014/main" id="{E425D2D7-D65F-4003-8F08-3909892749FE}"/>
+              </a:ext>
+            </a:extLst>
+          </p:cNvPr>
+          <p:cNvSpPr>
+            <a:spLocks xmlns:a="http://schemas.openxmlformats.org/drawingml/2006/main" noGrp="1"/>
+          </p:cNvSpPr>
+          <p:nvPr/>
+        </p:nvSpPr>
+        <p:spPr>
+          <a:xfrm xmlns:a="http://schemas.openxmlformats.org/drawingml/2006/main">
+            <a:off x="4286250" y="2038350"/>
+            <a:ext cx="6534150" cy="514350"/>
           </a:xfrm>
           <a:prstGeom xmlns:a="http://schemas.openxmlformats.org/drawingml/2006/main" prst="roundRect">
             <a:avLst>
-              <a:gd name="adj" fmla="val 10000"/>
+              <a:gd name="adj" fmla="val 24074"/>
             </a:avLst>
           </a:prstGeom>
           <a:solidFill xmlns:a="http://schemas.openxmlformats.org/drawingml/2006/main">
@@ -10617,7 +10617,7 @@
         </p:spPr>
         <p:txBody>
           <a:bodyPr xmlns:a="http://schemas.openxmlformats.org/drawingml/2006/main" lIns="152400" tIns="133350" rIns="152400" bIns="133350" anchor="ctr">
-            <a:normAutofit fontScale="100000"/>
+            <a:normAutofit fontScale="72956"/>
           </a:bodyPr>
           <a:lstStyle xmlns:a="http://schemas.openxmlformats.org/drawingml/2006/main"/>
           <a:p xmlns:a="http://schemas.openxmlformats.org/drawingml/2006/main">
@@ -10650,23 +10650,151 @@
           <p:cNvPr id="8" name="case-row-1">
             <a:extLst xmlns:a="http://schemas.openxmlformats.org/drawingml/2006/main">
               <a:ext uri="{FF2B5EF4-FFF2-40B4-BE49-F238E27FC236}">
-                <a16:creationId xmlns:a16="http://schemas.microsoft.com/office/drawing/2014/main" id="{58CA83EF-F277-4889-A550-8E7F9A0FFDF7}"/>
-              </a:ext>
-            </a:extLst>
-          </p:cNvPr>
-          <p:cNvSpPr>
-            <a:spLocks xmlns:a="http://schemas.openxmlformats.org/drawingml/2006/main" noGrp="1"/>
-          </p:cNvSpPr>
-          <p:nvPr/>
-        </p:nvSpPr>
-        <p:spPr>
-          <a:xfrm xmlns:a="http://schemas.openxmlformats.org/drawingml/2006/main">
-            <a:off x="4286250" y="3714750"/>
-            <a:ext cx="6534150" cy="1238250"/>
+                <a16:creationId xmlns:a16="http://schemas.microsoft.com/office/drawing/2014/main" id="{1B58708B-33C7-4426-A791-3B496CCA3143}"/>
+              </a:ext>
+            </a:extLst>
+          </p:cNvPr>
+          <p:cNvSpPr>
+            <a:spLocks xmlns:a="http://schemas.openxmlformats.org/drawingml/2006/main" noGrp="1"/>
+          </p:cNvSpPr>
+          <p:nvPr/>
+        </p:nvSpPr>
+        <p:spPr>
+          <a:xfrm xmlns:a="http://schemas.openxmlformats.org/drawingml/2006/main">
+            <a:off x="4286250" y="2667000"/>
+            <a:ext cx="6534150" cy="514350"/>
           </a:xfrm>
           <a:prstGeom xmlns:a="http://schemas.openxmlformats.org/drawingml/2006/main" prst="roundRect">
             <a:avLst>
-              <a:gd name="adj" fmla="val 10000"/>
+              <a:gd name="adj" fmla="val 24074"/>
+            </a:avLst>
+          </a:prstGeom>
+          <a:solidFill xmlns:a="http://schemas.openxmlformats.org/drawingml/2006/main">
+            <a:srgbClr val="FFFFFF"/>
+          </a:solidFill>
+          <a:ln xmlns:a="http://schemas.openxmlformats.org/drawingml/2006/main" w="9525">
+            <a:solidFill>
+              <a:srgbClr val="D8E0E8"/>
+            </a:solidFill>
+            <a:prstDash val="solid"/>
+          </a:ln>
+        </p:spPr>
+        <p:txBody>
+          <a:bodyPr xmlns:a="http://schemas.openxmlformats.org/drawingml/2006/main" lIns="152400" tIns="133350" rIns="152400" bIns="133350" anchor="ctr">
+            <a:normAutofit fontScale="72956"/>
+          </a:bodyPr>
+          <a:lstStyle xmlns:a="http://schemas.openxmlformats.org/drawingml/2006/main"/>
+          <a:p xmlns:a="http://schemas.openxmlformats.org/drawingml/2006/main">
+            <a:pPr algn="l">
+              <a:defRPr sz="1575" b="0">
+                <a:solidFill>
+                  <a:srgbClr val="10233F"/>
+                </a:solidFill>
+                <a:latin typeface="PingFang SC"/>
+                <a:ea typeface="PingFang SC"/>
+                <a:cs typeface="PingFang SC"/>
+              </a:defRPr>
+            </a:pPr>
+            <a:r>
+              <a:rPr sz="1575" b="0">
+                <a:solidFill>
+                  <a:srgbClr val="10233F"/>
+                </a:solidFill>
+                <a:latin typeface="PingFang SC"/>
+                <a:ea typeface="PingFang SC"/>
+                <a:cs typeface="PingFang SC"/>
+              </a:rPr>
+              <a:t>材料｜调查组拥有不同时间拍摄的照片、设备日志、处置记录和多份询问笔录</a:t>
+            </a:r>
+          </a:p>
+        </p:txBody>
+      </p:sp>
+      <p:sp>
+        <p:nvSpPr>
+          <p:cNvPr id="9" name="case-row-2">
+            <a:extLst xmlns:a="http://schemas.openxmlformats.org/drawingml/2006/main">
+              <a:ext uri="{FF2B5EF4-FFF2-40B4-BE49-F238E27FC236}">
+                <a16:creationId xmlns:a16="http://schemas.microsoft.com/office/drawing/2014/main" id="{F0FFD8F8-BA54-4BE9-91E7-5E85E1F94935}"/>
+              </a:ext>
+            </a:extLst>
+          </p:cNvPr>
+          <p:cNvSpPr>
+            <a:spLocks xmlns:a="http://schemas.openxmlformats.org/drawingml/2006/main" noGrp="1"/>
+          </p:cNvSpPr>
+          <p:nvPr/>
+        </p:nvSpPr>
+        <p:spPr>
+          <a:xfrm xmlns:a="http://schemas.openxmlformats.org/drawingml/2006/main">
+            <a:off x="4286250" y="3295650"/>
+            <a:ext cx="6534150" cy="514350"/>
+          </a:xfrm>
+          <a:prstGeom xmlns:a="http://schemas.openxmlformats.org/drawingml/2006/main" prst="roundRect">
+            <a:avLst>
+              <a:gd name="adj" fmla="val 24074"/>
+            </a:avLst>
+          </a:prstGeom>
+          <a:solidFill xmlns:a="http://schemas.openxmlformats.org/drawingml/2006/main">
+            <a:srgbClr val="FFFFFF"/>
+          </a:solidFill>
+          <a:ln xmlns:a="http://schemas.openxmlformats.org/drawingml/2006/main" w="9525">
+            <a:solidFill>
+              <a:srgbClr val="D8E0E8"/>
+            </a:solidFill>
+            <a:prstDash val="solid"/>
+          </a:ln>
+        </p:spPr>
+        <p:txBody>
+          <a:bodyPr xmlns:a="http://schemas.openxmlformats.org/drawingml/2006/main" lIns="152400" tIns="133350" rIns="152400" bIns="133350" anchor="ctr">
+            <a:normAutofit fontScale="66940"/>
+          </a:bodyPr>
+          <a:lstStyle xmlns:a="http://schemas.openxmlformats.org/drawingml/2006/main"/>
+          <a:p xmlns:a="http://schemas.openxmlformats.org/drawingml/2006/main">
+            <a:pPr algn="l">
+              <a:defRPr sz="1575" b="0">
+                <a:solidFill>
+                  <a:srgbClr val="10233F"/>
+                </a:solidFill>
+                <a:latin typeface="PingFang SC"/>
+                <a:ea typeface="PingFang SC"/>
+                <a:cs typeface="PingFang SC"/>
+              </a:defRPr>
+            </a:pPr>
+            <a:r>
+              <a:rPr sz="1575" b="0">
+                <a:solidFill>
+                  <a:srgbClr val="10233F"/>
+                </a:solidFill>
+                <a:latin typeface="PingFang SC"/>
+                <a:ea typeface="PingFang SC"/>
+                <a:cs typeface="PingFang SC"/>
+              </a:rPr>
+              <a:t>整理｜系统按两个候选区域分别列出支持现象、矛盾证据、时间缺口和待核资料，并把每一项链接回原件</a:t>
+            </a:r>
+          </a:p>
+        </p:txBody>
+      </p:sp>
+      <p:sp>
+        <p:nvSpPr>
+          <p:cNvPr id="10" name="case-row-3">
+            <a:extLst xmlns:a="http://schemas.openxmlformats.org/drawingml/2006/main">
+              <a:ext uri="{FF2B5EF4-FFF2-40B4-BE49-F238E27FC236}">
+                <a16:creationId xmlns:a16="http://schemas.microsoft.com/office/drawing/2014/main" id="{F1D8BE0C-D693-42E5-BEE4-00A1E044F105}"/>
+              </a:ext>
+            </a:extLst>
+          </p:cNvPr>
+          <p:cNvSpPr>
+            <a:spLocks xmlns:a="http://schemas.openxmlformats.org/drawingml/2006/main" noGrp="1"/>
+          </p:cNvSpPr>
+          <p:nvPr/>
+        </p:nvSpPr>
+        <p:spPr>
+          <a:xfrm xmlns:a="http://schemas.openxmlformats.org/drawingml/2006/main">
+            <a:off x="4286250" y="3924300"/>
+            <a:ext cx="6534150" cy="514350"/>
+          </a:xfrm>
+          <a:prstGeom xmlns:a="http://schemas.openxmlformats.org/drawingml/2006/main" prst="roundRect">
+            <a:avLst>
+              <a:gd name="adj" fmla="val 24074"/>
             </a:avLst>
           </a:prstGeom>
           <a:solidFill xmlns:a="http://schemas.openxmlformats.org/drawingml/2006/main">
@@ -10674,14 +10802,14 @@
           </a:solidFill>
           <a:ln xmlns:a="http://schemas.openxmlformats.org/drawingml/2006/main" w="9525">
             <a:solidFill>
-              <a:srgbClr val="E5783F"/>
+              <a:srgbClr val="9A3F16"/>
             </a:solidFill>
             <a:prstDash val="solid"/>
           </a:ln>
         </p:spPr>
         <p:txBody>
           <a:bodyPr xmlns:a="http://schemas.openxmlformats.org/drawingml/2006/main" lIns="152400" tIns="133350" rIns="152400" bIns="133350" anchor="ctr">
-            <a:normAutofit fontScale="100000"/>
+            <a:normAutofit fontScale="72956"/>
           </a:bodyPr>
           <a:lstStyle xmlns:a="http://schemas.openxmlformats.org/drawingml/2006/main"/>
           <a:p xmlns:a="http://schemas.openxmlformats.org/drawingml/2006/main">
@@ -10704,17 +10832,17 @@
                 <a:ea typeface="PingFang SC"/>
                 <a:cs typeface="PingFang SC"/>
               </a:rPr>
-              <a:t>验证｜验收“两个起火区域假设的材料矩阵”时，要同时记录适用场景、证据来源、失败条件与人工责任</a:t>
-            </a:r>
-          </a:p>
-        </p:txBody>
-      </p:sp>
-      <p:sp>
-        <p:nvSpPr>
-          <p:cNvPr id="9" name="s9-takeaway-rule">
-            <a:extLst xmlns:a="http://schemas.openxmlformats.org/drawingml/2006/main">
-              <a:ext uri="{FF2B5EF4-FFF2-40B4-BE49-F238E27FC236}">
-                <a16:creationId xmlns:a16="http://schemas.microsoft.com/office/drawing/2014/main" id="{929A8D76-3B71-449A-A8F3-301FC77BA865}"/>
+              <a:t>复核｜调查人员检查时钟误差、视角限制和资料取得过程，请相应领域专家解释关键设备状态</a:t>
+            </a:r>
+          </a:p>
+        </p:txBody>
+      </p:sp>
+      <p:sp>
+        <p:nvSpPr>
+          <p:cNvPr id="11" name="s9-takeaway-rule">
+            <a:extLst xmlns:a="http://schemas.openxmlformats.org/drawingml/2006/main">
+              <a:ext uri="{FF2B5EF4-FFF2-40B4-BE49-F238E27FC236}">
+                <a16:creationId xmlns:a16="http://schemas.microsoft.com/office/drawing/2014/main" id="{29CE3A3B-5706-45F5-B782-0FABDC358789}"/>
               </a:ext>
             </a:extLst>
           </p:cNvPr>
@@ -10744,10 +10872,10 @@
       </p:sp>
       <p:sp>
         <p:nvSpPr>
-          <p:cNvPr id="10" name="s9-takeaway">
-            <a:extLst xmlns:a="http://schemas.openxmlformats.org/drawingml/2006/main">
-              <a:ext uri="{FF2B5EF4-FFF2-40B4-BE49-F238E27FC236}">
-                <a16:creationId xmlns:a16="http://schemas.microsoft.com/office/drawing/2014/main" id="{F7C72598-1BA7-4AAE-B74D-856429BC4D31}"/>
+          <p:cNvPr id="12" name="s9-takeaway">
+            <a:extLst xmlns:a="http://schemas.openxmlformats.org/drawingml/2006/main">
+              <a:ext uri="{FF2B5EF4-FFF2-40B4-BE49-F238E27FC236}">
+                <a16:creationId xmlns:a16="http://schemas.microsoft.com/office/drawing/2014/main" id="{EE8BDBD0-085D-4745-BC72-969DD398766E}"/>
               </a:ext>
             </a:extLst>
           </p:cNvPr>
@@ -10795,7 +10923,7 @@
                 <a:ea typeface="PingFang SC"/>
                 <a:cs typeface="PingFang SC"/>
               </a:rPr>
-              <a:t>两个起火区域假设的材料矩阵必须经过边界验证</a:t>
+              <a:t>竞争性假设必须同时记录支持证据与反证</a:t>
             </a:r>
           </a:p>
         </p:txBody>
@@ -10803,7 +10931,7 @@
     </p:spTree>
     <p:extLst>
       <p:ext uri="{BB962C8B-B14F-4D97-AF65-F5344CB8AC3E}">
-        <p14:creationId xmlns:p14="http://schemas.microsoft.com/office/powerpoint/2010/main" val="1604539514"/>
+        <p14:creationId xmlns:p14="http://schemas.microsoft.com/office/powerpoint/2010/main" val="1450618927"/>
       </p:ext>
     </p:extLst>
   </p:cSld>

--- a/docs/public/course-assets/course-pptx/in-007.pptx
+++ b/docs/public/course-assets/course-pptx/in-007.pptx
@@ -2,25 +2,25 @@
 <file path=ppt/presentation.xml><?xml version="1.0" encoding="utf-8"?>
 <p:presentation xmlns:p="http://schemas.openxmlformats.org/presentationml/2006/main">
   <p:sldMasterIdLst>
-    <p:sldMasterId xmlns:r="http://schemas.openxmlformats.org/officeDocument/2006/relationships" id="2147483648" r:id="R05af24c07d1b4d70"/>
+    <p:sldMasterId xmlns:r="http://schemas.openxmlformats.org/officeDocument/2006/relationships" id="2147483648" r:id="Rd055bc7731e9407f"/>
   </p:sldMasterIdLst>
   <p:notesMasterIdLst>
-    <p:notesMasterId xmlns:r="http://schemas.openxmlformats.org/officeDocument/2006/relationships" r:id="R8028e2534113415d"/>
+    <p:notesMasterId xmlns:r="http://schemas.openxmlformats.org/officeDocument/2006/relationships" r:id="R731686b1e1804987"/>
   </p:notesMasterIdLst>
   <p:sldIdLst>
-    <p:sldId xmlns:r="http://schemas.openxmlformats.org/officeDocument/2006/relationships" id="256" r:id="R1324f075917a4fc4"/>
-    <p:sldId xmlns:r="http://schemas.openxmlformats.org/officeDocument/2006/relationships" id="257" r:id="R8800269018de4830"/>
-    <p:sldId xmlns:r="http://schemas.openxmlformats.org/officeDocument/2006/relationships" id="258" r:id="Rf1ed8e7e709d4e1b"/>
-    <p:sldId xmlns:r="http://schemas.openxmlformats.org/officeDocument/2006/relationships" id="259" r:id="R7b8402a10ed34b7a"/>
-    <p:sldId xmlns:r="http://schemas.openxmlformats.org/officeDocument/2006/relationships" id="260" r:id="R8cea6065ccd7467e"/>
-    <p:sldId xmlns:r="http://schemas.openxmlformats.org/officeDocument/2006/relationships" id="261" r:id="R9c5ec442ced846a9"/>
-    <p:sldId xmlns:r="http://schemas.openxmlformats.org/officeDocument/2006/relationships" id="262" r:id="R4dc76891fd7443ec"/>
-    <p:sldId xmlns:r="http://schemas.openxmlformats.org/officeDocument/2006/relationships" id="263" r:id="Rfd66e8b6fbe746d6"/>
-    <p:sldId xmlns:r="http://schemas.openxmlformats.org/officeDocument/2006/relationships" id="264" r:id="R75d5d9bf164b484b"/>
-    <p:sldId xmlns:r="http://schemas.openxmlformats.org/officeDocument/2006/relationships" id="265" r:id="R7e0cbd76d9e04eb5"/>
-    <p:sldId xmlns:r="http://schemas.openxmlformats.org/officeDocument/2006/relationships" id="266" r:id="R32f7a98b5d224862"/>
-    <p:sldId xmlns:r="http://schemas.openxmlformats.org/officeDocument/2006/relationships" id="267" r:id="Rcdf0c223abf34ff7"/>
-    <p:sldId xmlns:r="http://schemas.openxmlformats.org/officeDocument/2006/relationships" id="268" r:id="R83a9021e69264c64"/>
+    <p:sldId xmlns:r="http://schemas.openxmlformats.org/officeDocument/2006/relationships" id="256" r:id="R69eda4879cd14997"/>
+    <p:sldId xmlns:r="http://schemas.openxmlformats.org/officeDocument/2006/relationships" id="257" r:id="R047acbfe00984f40"/>
+    <p:sldId xmlns:r="http://schemas.openxmlformats.org/officeDocument/2006/relationships" id="258" r:id="Rd4887ba569224819"/>
+    <p:sldId xmlns:r="http://schemas.openxmlformats.org/officeDocument/2006/relationships" id="259" r:id="R55de444514fe4126"/>
+    <p:sldId xmlns:r="http://schemas.openxmlformats.org/officeDocument/2006/relationships" id="260" r:id="R6b262a59c663408b"/>
+    <p:sldId xmlns:r="http://schemas.openxmlformats.org/officeDocument/2006/relationships" id="261" r:id="R504d6f36af544514"/>
+    <p:sldId xmlns:r="http://schemas.openxmlformats.org/officeDocument/2006/relationships" id="262" r:id="Ra474323502ea4752"/>
+    <p:sldId xmlns:r="http://schemas.openxmlformats.org/officeDocument/2006/relationships" id="263" r:id="R16851b450d634f41"/>
+    <p:sldId xmlns:r="http://schemas.openxmlformats.org/officeDocument/2006/relationships" id="264" r:id="Re29532358e814e80"/>
+    <p:sldId xmlns:r="http://schemas.openxmlformats.org/officeDocument/2006/relationships" id="265" r:id="Rb3e50e81ef6c4dc6"/>
+    <p:sldId xmlns:r="http://schemas.openxmlformats.org/officeDocument/2006/relationships" id="266" r:id="R067046a6ced14aaa"/>
+    <p:sldId xmlns:r="http://schemas.openxmlformats.org/officeDocument/2006/relationships" id="267" r:id="R44663af97e474162"/>
+    <p:sldId xmlns:r="http://schemas.openxmlformats.org/officeDocument/2006/relationships" id="268" r:id="Rbf801409bd4e4989"/>
   </p:sldIdLst>
   <p:sldSz cx="12192000" cy="6858000"/>
   <p:notesSz cx="6858000" cy="9144000"/>
@@ -1405,7 +1405,7 @@
   </p:cSld>
   <p:clrMap bg1="lt1" tx1="dk1" bg2="lt2" tx2="dk2" accent1="accent1" accent2="accent2" accent3="accent3" accent4="accent4" accent5="accent5" accent6="accent6" hlink="hlink" folHlink="folHlink"/>
   <p:sldLayoutIdLst>
-    <p:sldLayoutId xmlns:r="http://schemas.openxmlformats.org/officeDocument/2006/relationships" id="2147483649" r:id="Rf4c4ee244707450d"/>
+    <p:sldLayoutId xmlns:r="http://schemas.openxmlformats.org/officeDocument/2006/relationships" id="2147483649" r:id="Rfe6d05acd30546e0"/>
   </p:sldLayoutIdLst>
   <p:txStyles>
     <p:titleStyle>
@@ -1956,7 +1956,7 @@
           <p:cNvPr id="1" name="cover-rule">
             <a:extLst xmlns:a="http://schemas.openxmlformats.org/drawingml/2006/main">
               <a:ext uri="{FF2B5EF4-FFF2-40B4-BE49-F238E27FC236}">
-                <a16:creationId xmlns:a16="http://schemas.microsoft.com/office/drawing/2014/main" id="{AA650C24-B782-4311-BF45-BE27986D2893}"/>
+                <a16:creationId xmlns:a16="http://schemas.microsoft.com/office/drawing/2014/main" id="{66A43FAA-553D-4B53-BBAD-FFE0C7B5854B}"/>
               </a:ext>
             </a:extLst>
           </p:cNvPr>
@@ -1989,7 +1989,7 @@
           <p:cNvPr id="2" name="cover-ring-1">
             <a:extLst xmlns:a="http://schemas.openxmlformats.org/drawingml/2006/main">
               <a:ext uri="{FF2B5EF4-FFF2-40B4-BE49-F238E27FC236}">
-                <a16:creationId xmlns:a16="http://schemas.microsoft.com/office/drawing/2014/main" id="{7D28A65F-C2AF-42C5-BF04-4196ED938ADB}"/>
+                <a16:creationId xmlns:a16="http://schemas.microsoft.com/office/drawing/2014/main" id="{E55382D8-BF5A-4337-81DE-4CC5937B1E7A}"/>
               </a:ext>
             </a:extLst>
           </p:cNvPr>
@@ -2020,7 +2020,7 @@
           <p:cNvPr id="3" name="cover-ring-2">
             <a:extLst xmlns:a="http://schemas.openxmlformats.org/drawingml/2006/main">
               <a:ext uri="{FF2B5EF4-FFF2-40B4-BE49-F238E27FC236}">
-                <a16:creationId xmlns:a16="http://schemas.microsoft.com/office/drawing/2014/main" id="{013D5876-A6AD-4EB7-ADAE-33DA2B7CCFF8}"/>
+                <a16:creationId xmlns:a16="http://schemas.microsoft.com/office/drawing/2014/main" id="{4FF69F5C-C389-40F5-A091-06675C2C5043}"/>
               </a:ext>
             </a:extLst>
           </p:cNvPr>
@@ -2051,7 +2051,7 @@
           <p:cNvPr id="4" name="cover-core">
             <a:extLst xmlns:a="http://schemas.openxmlformats.org/drawingml/2006/main">
               <a:ext uri="{FF2B5EF4-FFF2-40B4-BE49-F238E27FC236}">
-                <a16:creationId xmlns:a16="http://schemas.microsoft.com/office/drawing/2014/main" id="{1D097F7C-5B0D-495C-B499-C270507C195B}"/>
+                <a16:creationId xmlns:a16="http://schemas.microsoft.com/office/drawing/2014/main" id="{FC34ED9F-EEEE-43BF-94B4-7EE537BB877E}"/>
               </a:ext>
             </a:extLst>
           </p:cNvPr>
@@ -2084,7 +2084,7 @@
           <p:cNvPr id="5" name="cover-line-1">
             <a:extLst xmlns:a="http://schemas.openxmlformats.org/drawingml/2006/main">
               <a:ext uri="{FF2B5EF4-FFF2-40B4-BE49-F238E27FC236}">
-                <a16:creationId xmlns:a16="http://schemas.microsoft.com/office/drawing/2014/main" id="{FDA63848-258E-46E2-BEB8-71B20AC69A3E}"/>
+                <a16:creationId xmlns:a16="http://schemas.microsoft.com/office/drawing/2014/main" id="{3D8F4B5A-DB69-44F5-ABC8-8A51325E8C2D}"/>
               </a:ext>
             </a:extLst>
           </p:cNvPr>
@@ -2115,7 +2115,7 @@
           <p:cNvPr id="6" name="cover-line-2">
             <a:extLst xmlns:a="http://schemas.openxmlformats.org/drawingml/2006/main">
               <a:ext uri="{FF2B5EF4-FFF2-40B4-BE49-F238E27FC236}">
-                <a16:creationId xmlns:a16="http://schemas.microsoft.com/office/drawing/2014/main" id="{628491F3-5815-48A9-B18D-4392B599612E}"/>
+                <a16:creationId xmlns:a16="http://schemas.microsoft.com/office/drawing/2014/main" id="{559ABDDE-3E9E-4132-8440-672DE10A669B}"/>
               </a:ext>
             </a:extLst>
           </p:cNvPr>
@@ -2146,7 +2146,7 @@
           <p:cNvPr id="7" name="cover-eyebrow">
             <a:extLst xmlns:a="http://schemas.openxmlformats.org/drawingml/2006/main">
               <a:ext uri="{FF2B5EF4-FFF2-40B4-BE49-F238E27FC236}">
-                <a16:creationId xmlns:a16="http://schemas.microsoft.com/office/drawing/2014/main" id="{CF1C3BB0-299D-4A1C-8DF0-70B62294B021}"/>
+                <a16:creationId xmlns:a16="http://schemas.microsoft.com/office/drawing/2014/main" id="{87D19195-759C-4C1C-A996-A4B208ACEE75}"/>
               </a:ext>
             </a:extLst>
           </p:cNvPr>
@@ -2204,7 +2204,7 @@
           <p:cNvPr id="8" name="cover-title">
             <a:extLst xmlns:a="http://schemas.openxmlformats.org/drawingml/2006/main">
               <a:ext uri="{FF2B5EF4-FFF2-40B4-BE49-F238E27FC236}">
-                <a16:creationId xmlns:a16="http://schemas.microsoft.com/office/drawing/2014/main" id="{0A8EB917-A19E-4164-9904-4DB1F00ED6F9}"/>
+                <a16:creationId xmlns:a16="http://schemas.microsoft.com/office/drawing/2014/main" id="{547FF459-DAC0-4CB9-9D2E-584B056C7E40}"/>
               </a:ext>
             </a:extLst>
           </p:cNvPr>
@@ -2262,7 +2262,7 @@
           <p:cNvPr id="9" name="cover-subtitle">
             <a:extLst xmlns:a="http://schemas.openxmlformats.org/drawingml/2006/main">
               <a:ext uri="{FF2B5EF4-FFF2-40B4-BE49-F238E27FC236}">
-                <a16:creationId xmlns:a16="http://schemas.microsoft.com/office/drawing/2014/main" id="{8C523DE0-499A-4B44-A9BD-7F93C10416F5}"/>
+                <a16:creationId xmlns:a16="http://schemas.microsoft.com/office/drawing/2014/main" id="{18B2AE95-800D-4A8A-AE4B-4C01247A3344}"/>
               </a:ext>
             </a:extLst>
           </p:cNvPr>
@@ -2324,7 +2324,7 @@
           <p:cNvPr id="10" name="cover-lead">
             <a:extLst xmlns:a="http://schemas.openxmlformats.org/drawingml/2006/main">
               <a:ext uri="{FF2B5EF4-FFF2-40B4-BE49-F238E27FC236}">
-                <a16:creationId xmlns:a16="http://schemas.microsoft.com/office/drawing/2014/main" id="{CB301B1F-BEB0-4839-9777-DE4B5D882E17}"/>
+                <a16:creationId xmlns:a16="http://schemas.microsoft.com/office/drawing/2014/main" id="{900AE851-D897-4878-BC45-8A8C60194348}"/>
               </a:ext>
             </a:extLst>
           </p:cNvPr>
@@ -2382,7 +2382,7 @@
           <p:cNvPr id="11" name="cover-course">
             <a:extLst xmlns:a="http://schemas.openxmlformats.org/drawingml/2006/main">
               <a:ext uri="{FF2B5EF4-FFF2-40B4-BE49-F238E27FC236}">
-                <a16:creationId xmlns:a16="http://schemas.microsoft.com/office/drawing/2014/main" id="{7602FF88-43AF-4368-BE4D-D001F891FAE2}"/>
+                <a16:creationId xmlns:a16="http://schemas.microsoft.com/office/drawing/2014/main" id="{FA74DC26-3E4B-4DD2-AC37-F43B1E36682B}"/>
               </a:ext>
             </a:extLst>
           </p:cNvPr>
@@ -2440,7 +2440,7 @@
           <p:cNvPr id="12" name="cover-id">
             <a:extLst xmlns:a="http://schemas.openxmlformats.org/drawingml/2006/main">
               <a:ext uri="{FF2B5EF4-FFF2-40B4-BE49-F238E27FC236}">
-                <a16:creationId xmlns:a16="http://schemas.microsoft.com/office/drawing/2014/main" id="{2F400D2F-6A00-4D25-A977-5F7285CC8187}"/>
+                <a16:creationId xmlns:a16="http://schemas.microsoft.com/office/drawing/2014/main" id="{47D77E87-D400-4945-8B8D-975DD77E2869}"/>
               </a:ext>
             </a:extLst>
           </p:cNvPr>
@@ -2496,7 +2496,7 @@
     </p:spTree>
     <p:extLst>
       <p:ext uri="{BB962C8B-B14F-4D97-AF65-F5344CB8AC3E}">
-        <p14:creationId xmlns:p14="http://schemas.microsoft.com/office/powerpoint/2010/main" val="1473810188"/>
+        <p14:creationId xmlns:p14="http://schemas.microsoft.com/office/powerpoint/2010/main" val="521987869"/>
       </p:ext>
     </p:extLst>
   </p:cSld>
@@ -2527,7 +2527,7 @@
           <p:cNvPr id="1" name="s10-rule">
             <a:extLst xmlns:a="http://schemas.openxmlformats.org/drawingml/2006/main">
               <a:ext uri="{FF2B5EF4-FFF2-40B4-BE49-F238E27FC236}">
-                <a16:creationId xmlns:a16="http://schemas.microsoft.com/office/drawing/2014/main" id="{4ED11A0C-15D7-494A-B969-6815E8E2505C}"/>
+                <a16:creationId xmlns:a16="http://schemas.microsoft.com/office/drawing/2014/main" id="{40836A4B-9359-4E1B-A5B9-2228371B5D31}"/>
               </a:ext>
             </a:extLst>
           </p:cNvPr>
@@ -2560,7 +2560,7 @@
           <p:cNvPr id="2" name="s10-eyebrow">
             <a:extLst xmlns:a="http://schemas.openxmlformats.org/drawingml/2006/main">
               <a:ext uri="{FF2B5EF4-FFF2-40B4-BE49-F238E27FC236}">
-                <a16:creationId xmlns:a16="http://schemas.microsoft.com/office/drawing/2014/main" id="{F150821B-9C13-4F68-8E01-A33B2F326D3D}"/>
+                <a16:creationId xmlns:a16="http://schemas.microsoft.com/office/drawing/2014/main" id="{66088AC1-4153-4286-9DD4-232F334FDA97}"/>
               </a:ext>
             </a:extLst>
           </p:cNvPr>
@@ -2618,7 +2618,7 @@
           <p:cNvPr id="3" name="s10-title">
             <a:extLst xmlns:a="http://schemas.openxmlformats.org/drawingml/2006/main">
               <a:ext uri="{FF2B5EF4-FFF2-40B4-BE49-F238E27FC236}">
-                <a16:creationId xmlns:a16="http://schemas.microsoft.com/office/drawing/2014/main" id="{9D1260AC-7B2C-4563-B913-DF686A339D9B}"/>
+                <a16:creationId xmlns:a16="http://schemas.microsoft.com/office/drawing/2014/main" id="{1349335B-A2F0-4895-8B0A-53438C4C7E46}"/>
               </a:ext>
             </a:extLst>
           </p:cNvPr>
@@ -2676,7 +2676,7 @@
           <p:cNvPr id="4" name="s10-footer">
             <a:extLst xmlns:a="http://schemas.openxmlformats.org/drawingml/2006/main">
               <a:ext uri="{FF2B5EF4-FFF2-40B4-BE49-F238E27FC236}">
-                <a16:creationId xmlns:a16="http://schemas.microsoft.com/office/drawing/2014/main" id="{923DBEFC-25BD-4989-9BA0-FC67817BFB28}"/>
+                <a16:creationId xmlns:a16="http://schemas.microsoft.com/office/drawing/2014/main" id="{DE971FBC-85D9-4DC3-BDBF-4DF718B9D97E}"/>
               </a:ext>
             </a:extLst>
           </p:cNvPr>
@@ -2707,7 +2707,7 @@
           <p:cNvPr id="5" name="s10-identity">
             <a:extLst xmlns:a="http://schemas.openxmlformats.org/drawingml/2006/main">
               <a:ext uri="{FF2B5EF4-FFF2-40B4-BE49-F238E27FC236}">
-                <a16:creationId xmlns:a16="http://schemas.microsoft.com/office/drawing/2014/main" id="{37A5BF39-A7DA-4A45-A380-CA7F9D46F52C}"/>
+                <a16:creationId xmlns:a16="http://schemas.microsoft.com/office/drawing/2014/main" id="{7F71E4F0-0044-4DAF-81FD-2AD6FDF6A5D4}"/>
               </a:ext>
             </a:extLst>
           </p:cNvPr>
@@ -2765,7 +2765,7 @@
           <p:cNvPr id="6" name="case-title">
             <a:extLst xmlns:a="http://schemas.openxmlformats.org/drawingml/2006/main">
               <a:ext uri="{FF2B5EF4-FFF2-40B4-BE49-F238E27FC236}">
-                <a16:creationId xmlns:a16="http://schemas.microsoft.com/office/drawing/2014/main" id="{F23987E3-43D2-4013-807C-0A80009984DC}"/>
+                <a16:creationId xmlns:a16="http://schemas.microsoft.com/office/drawing/2014/main" id="{51F280FA-C8D5-4AB6-B39B-D993C69210A4}"/>
               </a:ext>
             </a:extLst>
           </p:cNvPr>
@@ -2829,7 +2829,7 @@
           <p:cNvPr id="7" name="case-row-0">
             <a:extLst xmlns:a="http://schemas.openxmlformats.org/drawingml/2006/main">
               <a:ext uri="{FF2B5EF4-FFF2-40B4-BE49-F238E27FC236}">
-                <a16:creationId xmlns:a16="http://schemas.microsoft.com/office/drawing/2014/main" id="{C3F8933D-8F5D-41CB-A72A-3C2F2900A8B0}"/>
+                <a16:creationId xmlns:a16="http://schemas.microsoft.com/office/drawing/2014/main" id="{4BAA34F3-B7EC-4C31-BA03-F7E35CB10CDA}"/>
               </a:ext>
             </a:extLst>
           </p:cNvPr>
@@ -2893,7 +2893,7 @@
           <p:cNvPr id="8" name="case-row-1">
             <a:extLst xmlns:a="http://schemas.openxmlformats.org/drawingml/2006/main">
               <a:ext uri="{FF2B5EF4-FFF2-40B4-BE49-F238E27FC236}">
-                <a16:creationId xmlns:a16="http://schemas.microsoft.com/office/drawing/2014/main" id="{7DCA836F-7AAF-4369-AA8E-184020C026B7}"/>
+                <a16:creationId xmlns:a16="http://schemas.microsoft.com/office/drawing/2014/main" id="{675C7957-2D4D-4A3B-AAE2-638B2E8C4E71}"/>
               </a:ext>
             </a:extLst>
           </p:cNvPr>
@@ -2957,7 +2957,7 @@
           <p:cNvPr id="9" name="case-row-2">
             <a:extLst xmlns:a="http://schemas.openxmlformats.org/drawingml/2006/main">
               <a:ext uri="{FF2B5EF4-FFF2-40B4-BE49-F238E27FC236}">
-                <a16:creationId xmlns:a16="http://schemas.microsoft.com/office/drawing/2014/main" id="{2FB68341-0FA0-4D75-9626-B161D86AA831}"/>
+                <a16:creationId xmlns:a16="http://schemas.microsoft.com/office/drawing/2014/main" id="{160DFF53-7037-48AA-8B89-418C4EE969A6}"/>
               </a:ext>
             </a:extLst>
           </p:cNvPr>
@@ -3021,7 +3021,7 @@
           <p:cNvPr id="10" name="s10-takeaway-rule">
             <a:extLst xmlns:a="http://schemas.openxmlformats.org/drawingml/2006/main">
               <a:ext uri="{FF2B5EF4-FFF2-40B4-BE49-F238E27FC236}">
-                <a16:creationId xmlns:a16="http://schemas.microsoft.com/office/drawing/2014/main" id="{211551A7-FC11-4E02-B248-0161774A77EA}"/>
+                <a16:creationId xmlns:a16="http://schemas.microsoft.com/office/drawing/2014/main" id="{EA2B8B16-754D-48DF-AA8B-19725E8E9E9C}"/>
               </a:ext>
             </a:extLst>
           </p:cNvPr>
@@ -3054,7 +3054,7 @@
           <p:cNvPr id="11" name="s10-takeaway">
             <a:extLst xmlns:a="http://schemas.openxmlformats.org/drawingml/2006/main">
               <a:ext uri="{FF2B5EF4-FFF2-40B4-BE49-F238E27FC236}">
-                <a16:creationId xmlns:a16="http://schemas.microsoft.com/office/drawing/2014/main" id="{5A6E33DF-3157-4B05-B559-9360AE050BCA}"/>
+                <a16:creationId xmlns:a16="http://schemas.microsoft.com/office/drawing/2014/main" id="{5E3297AD-C6D7-496E-A555-08CC5C91F6FF}"/>
               </a:ext>
             </a:extLst>
           </p:cNvPr>
@@ -3110,7 +3110,7 @@
     </p:spTree>
     <p:extLst>
       <p:ext uri="{BB962C8B-B14F-4D97-AF65-F5344CB8AC3E}">
-        <p14:creationId xmlns:p14="http://schemas.microsoft.com/office/powerpoint/2010/main" val="1584199371"/>
+        <p14:creationId xmlns:p14="http://schemas.microsoft.com/office/powerpoint/2010/main" val="1254543212"/>
       </p:ext>
     </p:extLst>
   </p:cSld>
@@ -3141,7 +3141,7 @@
           <p:cNvPr id="1" name="s11-rule">
             <a:extLst xmlns:a="http://schemas.openxmlformats.org/drawingml/2006/main">
               <a:ext uri="{FF2B5EF4-FFF2-40B4-BE49-F238E27FC236}">
-                <a16:creationId xmlns:a16="http://schemas.microsoft.com/office/drawing/2014/main" id="{6F9BEF43-0B3F-4D1C-AD6D-97B81F320E11}"/>
+                <a16:creationId xmlns:a16="http://schemas.microsoft.com/office/drawing/2014/main" id="{E178C7D4-A4C6-41D9-832C-FE646BA6F21B}"/>
               </a:ext>
             </a:extLst>
           </p:cNvPr>
@@ -3174,7 +3174,7 @@
           <p:cNvPr id="2" name="s11-eyebrow">
             <a:extLst xmlns:a="http://schemas.openxmlformats.org/drawingml/2006/main">
               <a:ext uri="{FF2B5EF4-FFF2-40B4-BE49-F238E27FC236}">
-                <a16:creationId xmlns:a16="http://schemas.microsoft.com/office/drawing/2014/main" id="{5247D96B-B11A-4D83-9369-97CFC4EDD0E4}"/>
+                <a16:creationId xmlns:a16="http://schemas.microsoft.com/office/drawing/2014/main" id="{842DFB4C-2676-4441-8012-814B5DE2E440}"/>
               </a:ext>
             </a:extLst>
           </p:cNvPr>
@@ -3232,7 +3232,7 @@
           <p:cNvPr id="3" name="s11-title">
             <a:extLst xmlns:a="http://schemas.openxmlformats.org/drawingml/2006/main">
               <a:ext uri="{FF2B5EF4-FFF2-40B4-BE49-F238E27FC236}">
-                <a16:creationId xmlns:a16="http://schemas.microsoft.com/office/drawing/2014/main" id="{D5D61672-3BB1-49F0-830C-C17059A4B7CF}"/>
+                <a16:creationId xmlns:a16="http://schemas.microsoft.com/office/drawing/2014/main" id="{11C178DD-BC19-4C7B-A912-4C67906A536D}"/>
               </a:ext>
             </a:extLst>
           </p:cNvPr>
@@ -3290,7 +3290,7 @@
           <p:cNvPr id="4" name="s11-footer">
             <a:extLst xmlns:a="http://schemas.openxmlformats.org/drawingml/2006/main">
               <a:ext uri="{FF2B5EF4-FFF2-40B4-BE49-F238E27FC236}">
-                <a16:creationId xmlns:a16="http://schemas.microsoft.com/office/drawing/2014/main" id="{D7B76D0C-39D2-48B2-B1E2-B6D38F3C2EA5}"/>
+                <a16:creationId xmlns:a16="http://schemas.microsoft.com/office/drawing/2014/main" id="{B0684A78-52FF-4E71-B007-C8BF38A2C2F9}"/>
               </a:ext>
             </a:extLst>
           </p:cNvPr>
@@ -3321,7 +3321,7 @@
           <p:cNvPr id="5" name="s11-identity">
             <a:extLst xmlns:a="http://schemas.openxmlformats.org/drawingml/2006/main">
               <a:ext uri="{FF2B5EF4-FFF2-40B4-BE49-F238E27FC236}">
-                <a16:creationId xmlns:a16="http://schemas.microsoft.com/office/drawing/2014/main" id="{78C7B410-9220-4649-915F-35335903006E}"/>
+                <a16:creationId xmlns:a16="http://schemas.microsoft.com/office/drawing/2014/main" id="{C536AE5C-F882-4C59-AE94-82AE00FAA09E}"/>
               </a:ext>
             </a:extLst>
           </p:cNvPr>
@@ -3379,7 +3379,7 @@
           <p:cNvPr id="6" name="practice-circle-0">
             <a:extLst xmlns:a="http://schemas.openxmlformats.org/drawingml/2006/main">
               <a:ext uri="{FF2B5EF4-FFF2-40B4-BE49-F238E27FC236}">
-                <a16:creationId xmlns:a16="http://schemas.microsoft.com/office/drawing/2014/main" id="{2275E827-27E4-422B-A96C-78B9D247BF30}"/>
+                <a16:creationId xmlns:a16="http://schemas.microsoft.com/office/drawing/2014/main" id="{CEF0C33D-9849-4F56-AE8C-9F159296E927}"/>
               </a:ext>
             </a:extLst>
           </p:cNvPr>
@@ -3412,7 +3412,7 @@
           <p:cNvPr id="7" name="practice-number-0">
             <a:extLst xmlns:a="http://schemas.openxmlformats.org/drawingml/2006/main">
               <a:ext uri="{FF2B5EF4-FFF2-40B4-BE49-F238E27FC236}">
-                <a16:creationId xmlns:a16="http://schemas.microsoft.com/office/drawing/2014/main" id="{1C18E4A5-EFC4-4344-B98B-6EB81068DFE3}"/>
+                <a16:creationId xmlns:a16="http://schemas.microsoft.com/office/drawing/2014/main" id="{3FC68463-58C2-4DE7-A87E-679DCA64B6E3}"/>
               </a:ext>
             </a:extLst>
           </p:cNvPr>
@@ -3470,7 +3470,7 @@
           <p:cNvPr id="8" name="practice-item-0">
             <a:extLst xmlns:a="http://schemas.openxmlformats.org/drawingml/2006/main">
               <a:ext uri="{FF2B5EF4-FFF2-40B4-BE49-F238E27FC236}">
-                <a16:creationId xmlns:a16="http://schemas.microsoft.com/office/drawing/2014/main" id="{5E27C023-BDBC-4FFE-A492-FE4DDAD79EAB}"/>
+                <a16:creationId xmlns:a16="http://schemas.microsoft.com/office/drawing/2014/main" id="{702424C7-3ECA-4D86-9DD9-285AB2AB0A2D}"/>
               </a:ext>
             </a:extLst>
           </p:cNvPr>
@@ -3534,7 +3534,7 @@
           <p:cNvPr id="9" name="practice-connector-0">
             <a:extLst xmlns:a="http://schemas.openxmlformats.org/drawingml/2006/main">
               <a:ext uri="{FF2B5EF4-FFF2-40B4-BE49-F238E27FC236}">
-                <a16:creationId xmlns:a16="http://schemas.microsoft.com/office/drawing/2014/main" id="{B621C5D7-22A7-4B4A-9DE3-38CD5C4E6AD7}"/>
+                <a16:creationId xmlns:a16="http://schemas.microsoft.com/office/drawing/2014/main" id="{55254519-40C8-4DCE-8B73-31E1E6623333}"/>
               </a:ext>
             </a:extLst>
           </p:cNvPr>
@@ -3565,7 +3565,7 @@
           <p:cNvPr id="10" name="practice-circle-1">
             <a:extLst xmlns:a="http://schemas.openxmlformats.org/drawingml/2006/main">
               <a:ext uri="{FF2B5EF4-FFF2-40B4-BE49-F238E27FC236}">
-                <a16:creationId xmlns:a16="http://schemas.microsoft.com/office/drawing/2014/main" id="{05D15C96-C95D-43EE-85EE-180B09FB30D2}"/>
+                <a16:creationId xmlns:a16="http://schemas.microsoft.com/office/drawing/2014/main" id="{34312F95-419E-4A09-AEE9-91906873F819}"/>
               </a:ext>
             </a:extLst>
           </p:cNvPr>
@@ -3598,7 +3598,7 @@
           <p:cNvPr id="11" name="practice-number-1">
             <a:extLst xmlns:a="http://schemas.openxmlformats.org/drawingml/2006/main">
               <a:ext uri="{FF2B5EF4-FFF2-40B4-BE49-F238E27FC236}">
-                <a16:creationId xmlns:a16="http://schemas.microsoft.com/office/drawing/2014/main" id="{7E6E25C8-C258-4361-8DDE-7CE230AA65CE}"/>
+                <a16:creationId xmlns:a16="http://schemas.microsoft.com/office/drawing/2014/main" id="{1CCEF89E-C8F3-4E1D-ACA1-C8C04E9906E8}"/>
               </a:ext>
             </a:extLst>
           </p:cNvPr>
@@ -3656,7 +3656,7 @@
           <p:cNvPr id="12" name="practice-item-1">
             <a:extLst xmlns:a="http://schemas.openxmlformats.org/drawingml/2006/main">
               <a:ext uri="{FF2B5EF4-FFF2-40B4-BE49-F238E27FC236}">
-                <a16:creationId xmlns:a16="http://schemas.microsoft.com/office/drawing/2014/main" id="{D10A0A92-96A8-4E5B-BDD1-62A500491267}"/>
+                <a16:creationId xmlns:a16="http://schemas.microsoft.com/office/drawing/2014/main" id="{459237E2-F8F8-4553-AD90-1D36E370D4D8}"/>
               </a:ext>
             </a:extLst>
           </p:cNvPr>
@@ -3720,7 +3720,7 @@
           <p:cNvPr id="13" name="practice-connector-1">
             <a:extLst xmlns:a="http://schemas.openxmlformats.org/drawingml/2006/main">
               <a:ext uri="{FF2B5EF4-FFF2-40B4-BE49-F238E27FC236}">
-                <a16:creationId xmlns:a16="http://schemas.microsoft.com/office/drawing/2014/main" id="{DC5B2F78-D733-4921-8831-0A3D02FB616F}"/>
+                <a16:creationId xmlns:a16="http://schemas.microsoft.com/office/drawing/2014/main" id="{98585AA0-C323-4A3D-B691-6332FE8DD0A7}"/>
               </a:ext>
             </a:extLst>
           </p:cNvPr>
@@ -3751,7 +3751,7 @@
           <p:cNvPr id="14" name="practice-circle-2">
             <a:extLst xmlns:a="http://schemas.openxmlformats.org/drawingml/2006/main">
               <a:ext uri="{FF2B5EF4-FFF2-40B4-BE49-F238E27FC236}">
-                <a16:creationId xmlns:a16="http://schemas.microsoft.com/office/drawing/2014/main" id="{212F72CC-F383-4C88-AC0F-8D7BA6DE7656}"/>
+                <a16:creationId xmlns:a16="http://schemas.microsoft.com/office/drawing/2014/main" id="{4429F6BF-D5EC-41F0-A6E5-441CF52C8501}"/>
               </a:ext>
             </a:extLst>
           </p:cNvPr>
@@ -3784,7 +3784,7 @@
           <p:cNvPr id="15" name="practice-number-2">
             <a:extLst xmlns:a="http://schemas.openxmlformats.org/drawingml/2006/main">
               <a:ext uri="{FF2B5EF4-FFF2-40B4-BE49-F238E27FC236}">
-                <a16:creationId xmlns:a16="http://schemas.microsoft.com/office/drawing/2014/main" id="{509E28A3-309C-4DD8-A2DA-BD7ECE7DBC2E}"/>
+                <a16:creationId xmlns:a16="http://schemas.microsoft.com/office/drawing/2014/main" id="{84ACC647-E1E1-4CA7-891E-F93BBE813896}"/>
               </a:ext>
             </a:extLst>
           </p:cNvPr>
@@ -3842,7 +3842,7 @@
           <p:cNvPr id="16" name="practice-item-2">
             <a:extLst xmlns:a="http://schemas.openxmlformats.org/drawingml/2006/main">
               <a:ext uri="{FF2B5EF4-FFF2-40B4-BE49-F238E27FC236}">
-                <a16:creationId xmlns:a16="http://schemas.microsoft.com/office/drawing/2014/main" id="{F89D0188-33E0-483C-B563-F0DE8CEFFB8C}"/>
+                <a16:creationId xmlns:a16="http://schemas.microsoft.com/office/drawing/2014/main" id="{33E0D4B5-3DD7-4F93-B6B7-8893F8F55420}"/>
               </a:ext>
             </a:extLst>
           </p:cNvPr>
@@ -3904,7 +3904,7 @@
     </p:spTree>
     <p:extLst>
       <p:ext uri="{BB962C8B-B14F-4D97-AF65-F5344CB8AC3E}">
-        <p14:creationId xmlns:p14="http://schemas.microsoft.com/office/powerpoint/2010/main" val="551050193"/>
+        <p14:creationId xmlns:p14="http://schemas.microsoft.com/office/powerpoint/2010/main" val="1947542321"/>
       </p:ext>
     </p:extLst>
   </p:cSld>
@@ -3935,7 +3935,7 @@
           <p:cNvPr id="1" name="s12-rule">
             <a:extLst xmlns:a="http://schemas.openxmlformats.org/drawingml/2006/main">
               <a:ext uri="{FF2B5EF4-FFF2-40B4-BE49-F238E27FC236}">
-                <a16:creationId xmlns:a16="http://schemas.microsoft.com/office/drawing/2014/main" id="{D87E0179-8749-4DCE-97C3-4903EC32B3C4}"/>
+                <a16:creationId xmlns:a16="http://schemas.microsoft.com/office/drawing/2014/main" id="{44A790FD-FC76-413D-B9A6-B5E7D92DD8B6}"/>
               </a:ext>
             </a:extLst>
           </p:cNvPr>
@@ -3968,7 +3968,7 @@
           <p:cNvPr id="2" name="s12-eyebrow">
             <a:extLst xmlns:a="http://schemas.openxmlformats.org/drawingml/2006/main">
               <a:ext uri="{FF2B5EF4-FFF2-40B4-BE49-F238E27FC236}">
-                <a16:creationId xmlns:a16="http://schemas.microsoft.com/office/drawing/2014/main" id="{9321AC41-6D5C-43CC-82B4-2B02590319E2}"/>
+                <a16:creationId xmlns:a16="http://schemas.microsoft.com/office/drawing/2014/main" id="{66798D57-9424-4AB5-82C2-2597B87251CA}"/>
               </a:ext>
             </a:extLst>
           </p:cNvPr>
@@ -4026,7 +4026,7 @@
           <p:cNvPr id="3" name="s12-title">
             <a:extLst xmlns:a="http://schemas.openxmlformats.org/drawingml/2006/main">
               <a:ext uri="{FF2B5EF4-FFF2-40B4-BE49-F238E27FC236}">
-                <a16:creationId xmlns:a16="http://schemas.microsoft.com/office/drawing/2014/main" id="{AFA9426B-4E9E-4E04-98AD-84E7A950A3A8}"/>
+                <a16:creationId xmlns:a16="http://schemas.microsoft.com/office/drawing/2014/main" id="{A3AB164E-7A9B-4C48-BD37-16F43FA3BE90}"/>
               </a:ext>
             </a:extLst>
           </p:cNvPr>
@@ -4084,7 +4084,7 @@
           <p:cNvPr id="4" name="s12-footer">
             <a:extLst xmlns:a="http://schemas.openxmlformats.org/drawingml/2006/main">
               <a:ext uri="{FF2B5EF4-FFF2-40B4-BE49-F238E27FC236}">
-                <a16:creationId xmlns:a16="http://schemas.microsoft.com/office/drawing/2014/main" id="{EC9AC3BE-58A6-4AF8-9766-A862B631504F}"/>
+                <a16:creationId xmlns:a16="http://schemas.microsoft.com/office/drawing/2014/main" id="{18519D85-5996-4B0A-B9F6-AE04A8781A62}"/>
               </a:ext>
             </a:extLst>
           </p:cNvPr>
@@ -4115,7 +4115,7 @@
           <p:cNvPr id="5" name="s12-identity">
             <a:extLst xmlns:a="http://schemas.openxmlformats.org/drawingml/2006/main">
               <a:ext uri="{FF2B5EF4-FFF2-40B4-BE49-F238E27FC236}">
-                <a16:creationId xmlns:a16="http://schemas.microsoft.com/office/drawing/2014/main" id="{0B76B3C7-1AAB-4C0F-97E4-07E857C0E7CF}"/>
+                <a16:creationId xmlns:a16="http://schemas.microsoft.com/office/drawing/2014/main" id="{54095003-1873-4715-9F69-A8220B8C3568}"/>
               </a:ext>
             </a:extLst>
           </p:cNvPr>
@@ -4173,7 +4173,7 @@
           <p:cNvPr id="6" name="recap-circle-0">
             <a:extLst xmlns:a="http://schemas.openxmlformats.org/drawingml/2006/main">
               <a:ext uri="{FF2B5EF4-FFF2-40B4-BE49-F238E27FC236}">
-                <a16:creationId xmlns:a16="http://schemas.microsoft.com/office/drawing/2014/main" id="{22A98955-7D76-48BA-8640-9780B1DE0C08}"/>
+                <a16:creationId xmlns:a16="http://schemas.microsoft.com/office/drawing/2014/main" id="{23768B9B-2E70-48E1-AF26-0A9793C8BBE3}"/>
               </a:ext>
             </a:extLst>
           </p:cNvPr>
@@ -4206,7 +4206,7 @@
           <p:cNvPr id="7" name="recap-number-0">
             <a:extLst xmlns:a="http://schemas.openxmlformats.org/drawingml/2006/main">
               <a:ext uri="{FF2B5EF4-FFF2-40B4-BE49-F238E27FC236}">
-                <a16:creationId xmlns:a16="http://schemas.microsoft.com/office/drawing/2014/main" id="{CC3FAFDC-FD45-466E-92D8-2A6422E09F60}"/>
+                <a16:creationId xmlns:a16="http://schemas.microsoft.com/office/drawing/2014/main" id="{B4342F6E-AC07-484B-A845-6F08DA27950F}"/>
               </a:ext>
             </a:extLst>
           </p:cNvPr>
@@ -4264,7 +4264,7 @@
           <p:cNvPr id="8" name="recap-item-0">
             <a:extLst xmlns:a="http://schemas.openxmlformats.org/drawingml/2006/main">
               <a:ext uri="{FF2B5EF4-FFF2-40B4-BE49-F238E27FC236}">
-                <a16:creationId xmlns:a16="http://schemas.microsoft.com/office/drawing/2014/main" id="{2C05DEF1-0254-4255-B8B3-9B07ADEF7402}"/>
+                <a16:creationId xmlns:a16="http://schemas.microsoft.com/office/drawing/2014/main" id="{9A3783DF-10C2-4BC6-9B0F-ECD2FA23359E}"/>
               </a:ext>
             </a:extLst>
           </p:cNvPr>
@@ -4328,7 +4328,7 @@
           <p:cNvPr id="9" name="recap-connector-0">
             <a:extLst xmlns:a="http://schemas.openxmlformats.org/drawingml/2006/main">
               <a:ext uri="{FF2B5EF4-FFF2-40B4-BE49-F238E27FC236}">
-                <a16:creationId xmlns:a16="http://schemas.microsoft.com/office/drawing/2014/main" id="{68FA5811-7216-41E3-A3C2-39562C302BC2}"/>
+                <a16:creationId xmlns:a16="http://schemas.microsoft.com/office/drawing/2014/main" id="{5A632A45-D872-43EE-9AD9-68D73B6DE44F}"/>
               </a:ext>
             </a:extLst>
           </p:cNvPr>
@@ -4359,7 +4359,7 @@
           <p:cNvPr id="10" name="recap-circle-1">
             <a:extLst xmlns:a="http://schemas.openxmlformats.org/drawingml/2006/main">
               <a:ext uri="{FF2B5EF4-FFF2-40B4-BE49-F238E27FC236}">
-                <a16:creationId xmlns:a16="http://schemas.microsoft.com/office/drawing/2014/main" id="{BB21BACC-FD9B-4D04-BA5E-5D10566A15F1}"/>
+                <a16:creationId xmlns:a16="http://schemas.microsoft.com/office/drawing/2014/main" id="{1D5A5255-B714-4C9F-A10C-CA79688B071F}"/>
               </a:ext>
             </a:extLst>
           </p:cNvPr>
@@ -4392,7 +4392,7 @@
           <p:cNvPr id="11" name="recap-number-1">
             <a:extLst xmlns:a="http://schemas.openxmlformats.org/drawingml/2006/main">
               <a:ext uri="{FF2B5EF4-FFF2-40B4-BE49-F238E27FC236}">
-                <a16:creationId xmlns:a16="http://schemas.microsoft.com/office/drawing/2014/main" id="{4CC3FF8A-4952-4CFF-986F-9BFA89A1F9EF}"/>
+                <a16:creationId xmlns:a16="http://schemas.microsoft.com/office/drawing/2014/main" id="{8E5BB373-26BA-4423-BF10-B0710DC83FE2}"/>
               </a:ext>
             </a:extLst>
           </p:cNvPr>
@@ -4450,7 +4450,7 @@
           <p:cNvPr id="12" name="recap-item-1">
             <a:extLst xmlns:a="http://schemas.openxmlformats.org/drawingml/2006/main">
               <a:ext uri="{FF2B5EF4-FFF2-40B4-BE49-F238E27FC236}">
-                <a16:creationId xmlns:a16="http://schemas.microsoft.com/office/drawing/2014/main" id="{401A7D78-0F69-45A3-A103-3BC6265E145D}"/>
+                <a16:creationId xmlns:a16="http://schemas.microsoft.com/office/drawing/2014/main" id="{10174014-3846-401A-9271-15705CA296BC}"/>
               </a:ext>
             </a:extLst>
           </p:cNvPr>
@@ -4514,7 +4514,7 @@
           <p:cNvPr id="13" name="recap-connector-1">
             <a:extLst xmlns:a="http://schemas.openxmlformats.org/drawingml/2006/main">
               <a:ext uri="{FF2B5EF4-FFF2-40B4-BE49-F238E27FC236}">
-                <a16:creationId xmlns:a16="http://schemas.microsoft.com/office/drawing/2014/main" id="{477CC031-872E-4477-AB2B-8928E73C83EC}"/>
+                <a16:creationId xmlns:a16="http://schemas.microsoft.com/office/drawing/2014/main" id="{48448536-2A31-4745-95B0-AB364A4329BC}"/>
               </a:ext>
             </a:extLst>
           </p:cNvPr>
@@ -4545,7 +4545,7 @@
           <p:cNvPr id="14" name="recap-circle-2">
             <a:extLst xmlns:a="http://schemas.openxmlformats.org/drawingml/2006/main">
               <a:ext uri="{FF2B5EF4-FFF2-40B4-BE49-F238E27FC236}">
-                <a16:creationId xmlns:a16="http://schemas.microsoft.com/office/drawing/2014/main" id="{AADF0C70-DC17-4AA1-AB9D-0A6C424A5B1B}"/>
+                <a16:creationId xmlns:a16="http://schemas.microsoft.com/office/drawing/2014/main" id="{EBB8662B-A0B5-4AC7-9B1C-4E640CAFCAF4}"/>
               </a:ext>
             </a:extLst>
           </p:cNvPr>
@@ -4578,7 +4578,7 @@
           <p:cNvPr id="15" name="recap-number-2">
             <a:extLst xmlns:a="http://schemas.openxmlformats.org/drawingml/2006/main">
               <a:ext uri="{FF2B5EF4-FFF2-40B4-BE49-F238E27FC236}">
-                <a16:creationId xmlns:a16="http://schemas.microsoft.com/office/drawing/2014/main" id="{1086BA19-899C-4B64-B324-2949A9CB0A79}"/>
+                <a16:creationId xmlns:a16="http://schemas.microsoft.com/office/drawing/2014/main" id="{9666C7C9-F1B9-4ABF-9226-1A6D6C8586B7}"/>
               </a:ext>
             </a:extLst>
           </p:cNvPr>
@@ -4636,7 +4636,7 @@
           <p:cNvPr id="16" name="recap-item-2">
             <a:extLst xmlns:a="http://schemas.openxmlformats.org/drawingml/2006/main">
               <a:ext uri="{FF2B5EF4-FFF2-40B4-BE49-F238E27FC236}">
-                <a16:creationId xmlns:a16="http://schemas.microsoft.com/office/drawing/2014/main" id="{CF7F8541-15CB-4C28-A386-41F276E12E9C}"/>
+                <a16:creationId xmlns:a16="http://schemas.microsoft.com/office/drawing/2014/main" id="{D1D2F281-3A67-4879-BB1D-CE52098F330E}"/>
               </a:ext>
             </a:extLst>
           </p:cNvPr>
@@ -4698,7 +4698,7 @@
     </p:spTree>
     <p:extLst>
       <p:ext uri="{BB962C8B-B14F-4D97-AF65-F5344CB8AC3E}">
-        <p14:creationId xmlns:p14="http://schemas.microsoft.com/office/powerpoint/2010/main" val="333371484"/>
+        <p14:creationId xmlns:p14="http://schemas.microsoft.com/office/powerpoint/2010/main" val="2040564062"/>
       </p:ext>
     </p:extLst>
   </p:cSld>
@@ -4729,7 +4729,7 @@
           <p:cNvPr id="1" name="s13-rule">
             <a:extLst xmlns:a="http://schemas.openxmlformats.org/drawingml/2006/main">
               <a:ext uri="{FF2B5EF4-FFF2-40B4-BE49-F238E27FC236}">
-                <a16:creationId xmlns:a16="http://schemas.microsoft.com/office/drawing/2014/main" id="{E94EC1EA-3431-4008-AF71-837ED0BE1002}"/>
+                <a16:creationId xmlns:a16="http://schemas.microsoft.com/office/drawing/2014/main" id="{46ECC264-A1BE-4B4D-BAEE-398BDC64DCB8}"/>
               </a:ext>
             </a:extLst>
           </p:cNvPr>
@@ -4762,7 +4762,7 @@
           <p:cNvPr id="2" name="s13-eyebrow">
             <a:extLst xmlns:a="http://schemas.openxmlformats.org/drawingml/2006/main">
               <a:ext uri="{FF2B5EF4-FFF2-40B4-BE49-F238E27FC236}">
-                <a16:creationId xmlns:a16="http://schemas.microsoft.com/office/drawing/2014/main" id="{69D5733B-70D2-4F16-A496-344DCB46BADD}"/>
+                <a16:creationId xmlns:a16="http://schemas.microsoft.com/office/drawing/2014/main" id="{22C6C075-AC29-4FA4-83F8-08F202B2D4BF}"/>
               </a:ext>
             </a:extLst>
           </p:cNvPr>
@@ -4820,7 +4820,7 @@
           <p:cNvPr id="3" name="s13-title">
             <a:extLst xmlns:a="http://schemas.openxmlformats.org/drawingml/2006/main">
               <a:ext uri="{FF2B5EF4-FFF2-40B4-BE49-F238E27FC236}">
-                <a16:creationId xmlns:a16="http://schemas.microsoft.com/office/drawing/2014/main" id="{3D04A006-95CB-466B-945C-48EC89AD3370}"/>
+                <a16:creationId xmlns:a16="http://schemas.microsoft.com/office/drawing/2014/main" id="{F8979948-758C-45C3-B75B-EB862923394C}"/>
               </a:ext>
             </a:extLst>
           </p:cNvPr>
@@ -4878,7 +4878,7 @@
           <p:cNvPr id="4" name="s13-footer">
             <a:extLst xmlns:a="http://schemas.openxmlformats.org/drawingml/2006/main">
               <a:ext uri="{FF2B5EF4-FFF2-40B4-BE49-F238E27FC236}">
-                <a16:creationId xmlns:a16="http://schemas.microsoft.com/office/drawing/2014/main" id="{CF53A0F8-B212-4530-8C50-1A17F827970C}"/>
+                <a16:creationId xmlns:a16="http://schemas.microsoft.com/office/drawing/2014/main" id="{0247A2A2-644C-4EC2-A024-4CB7F3460A10}"/>
               </a:ext>
             </a:extLst>
           </p:cNvPr>
@@ -4909,7 +4909,7 @@
           <p:cNvPr id="5" name="s13-identity">
             <a:extLst xmlns:a="http://schemas.openxmlformats.org/drawingml/2006/main">
               <a:ext uri="{FF2B5EF4-FFF2-40B4-BE49-F238E27FC236}">
-                <a16:creationId xmlns:a16="http://schemas.microsoft.com/office/drawing/2014/main" id="{DE3A9FB3-5C74-498C-8B21-8FAC238FBAD3}"/>
+                <a16:creationId xmlns:a16="http://schemas.microsoft.com/office/drawing/2014/main" id="{38D91BCD-3F87-49BD-A926-DE2005DDDBB7}"/>
               </a:ext>
             </a:extLst>
           </p:cNvPr>
@@ -4967,7 +4967,7 @@
           <p:cNvPr id="6" name="source-0">
             <a:extLst xmlns:a="http://schemas.openxmlformats.org/drawingml/2006/main">
               <a:ext uri="{FF2B5EF4-FFF2-40B4-BE49-F238E27FC236}">
-                <a16:creationId xmlns:a16="http://schemas.microsoft.com/office/drawing/2014/main" id="{8FDD991C-434D-4C53-84DB-772774D5043E}"/>
+                <a16:creationId xmlns:a16="http://schemas.microsoft.com/office/drawing/2014/main" id="{BC47DB9A-75EB-40D8-A0EE-F03A39E0F469}"/>
               </a:ext>
             </a:extLst>
           </p:cNvPr>
@@ -5031,7 +5031,7 @@
           <p:cNvPr id="7" name="source-1">
             <a:extLst xmlns:a="http://schemas.openxmlformats.org/drawingml/2006/main">
               <a:ext uri="{FF2B5EF4-FFF2-40B4-BE49-F238E27FC236}">
-                <a16:creationId xmlns:a16="http://schemas.microsoft.com/office/drawing/2014/main" id="{8EB0ABD4-8575-4DEA-9549-E9866A8D6981}"/>
+                <a16:creationId xmlns:a16="http://schemas.microsoft.com/office/drawing/2014/main" id="{5529C0FC-881E-4051-B663-FD06B5F8B3CE}"/>
               </a:ext>
             </a:extLst>
           </p:cNvPr>
@@ -5095,7 +5095,7 @@
           <p:cNvPr id="8" name="source-2">
             <a:extLst xmlns:a="http://schemas.openxmlformats.org/drawingml/2006/main">
               <a:ext uri="{FF2B5EF4-FFF2-40B4-BE49-F238E27FC236}">
-                <a16:creationId xmlns:a16="http://schemas.microsoft.com/office/drawing/2014/main" id="{43EFA6DF-8C58-4074-9F32-2EB8CC80286B}"/>
+                <a16:creationId xmlns:a16="http://schemas.microsoft.com/office/drawing/2014/main" id="{EA2552B5-A863-4F3A-A353-3FC620011AED}"/>
               </a:ext>
             </a:extLst>
           </p:cNvPr>
@@ -5159,7 +5159,7 @@
           <p:cNvPr id="9" name="source-3">
             <a:extLst xmlns:a="http://schemas.openxmlformats.org/drawingml/2006/main">
               <a:ext uri="{FF2B5EF4-FFF2-40B4-BE49-F238E27FC236}">
-                <a16:creationId xmlns:a16="http://schemas.microsoft.com/office/drawing/2014/main" id="{E82E5717-7225-46CE-9143-02A41633CE30}"/>
+                <a16:creationId xmlns:a16="http://schemas.microsoft.com/office/drawing/2014/main" id="{5E382958-3AA2-4D96-8D75-9BF474A1C15F}"/>
               </a:ext>
             </a:extLst>
           </p:cNvPr>
@@ -5223,7 +5223,7 @@
           <p:cNvPr id="10" name="s13-takeaway-rule">
             <a:extLst xmlns:a="http://schemas.openxmlformats.org/drawingml/2006/main">
               <a:ext uri="{FF2B5EF4-FFF2-40B4-BE49-F238E27FC236}">
-                <a16:creationId xmlns:a16="http://schemas.microsoft.com/office/drawing/2014/main" id="{B8297984-A6F4-4A8B-A5D1-385889B7CAD7}"/>
+                <a16:creationId xmlns:a16="http://schemas.microsoft.com/office/drawing/2014/main" id="{D006659D-F784-49EE-990F-DA93D2DA776C}"/>
               </a:ext>
             </a:extLst>
           </p:cNvPr>
@@ -5256,7 +5256,7 @@
           <p:cNvPr id="11" name="s13-takeaway">
             <a:extLst xmlns:a="http://schemas.openxmlformats.org/drawingml/2006/main">
               <a:ext uri="{FF2B5EF4-FFF2-40B4-BE49-F238E27FC236}">
-                <a16:creationId xmlns:a16="http://schemas.microsoft.com/office/drawing/2014/main" id="{C023C50B-C970-4CF5-82A9-72D0A9173A4C}"/>
+                <a16:creationId xmlns:a16="http://schemas.microsoft.com/office/drawing/2014/main" id="{73061E9F-244D-46C1-BEF4-668AE80F398C}"/>
               </a:ext>
             </a:extLst>
           </p:cNvPr>
@@ -5281,7 +5281,7 @@
         </p:spPr>
         <p:txBody>
           <a:bodyPr xmlns:a="http://schemas.openxmlformats.org/drawingml/2006/main" lIns="0" tIns="0" rIns="0" bIns="0" anchor="ctr">
-            <a:normAutofit fontScale="100000"/>
+            <a:normAutofit fontScale="95911"/>
           </a:bodyPr>
           <a:lstStyle xmlns:a="http://schemas.openxmlformats.org/drawingml/2006/main"/>
           <a:p xmlns:a="http://schemas.openxmlformats.org/drawingml/2006/main">
@@ -5304,7 +5304,7 @@
                 <a:ea typeface="PingFang SC"/>
                 <a:cs typeface="PingFang SC"/>
               </a:rPr>
-              <a:t>公开幻灯片只使用课程原创文字与原生图形；完整论证、链接和事实边界请见本节讲义。</a:t>
+              <a:t>课程精编页用于讲授主线；播放器中的“原课件”模式保留团队 PowerPoint 精选页、真实图片和可播放视频。</a:t>
             </a:r>
           </a:p>
         </p:txBody>
@@ -5312,7 +5312,7 @@
     </p:spTree>
     <p:extLst>
       <p:ext uri="{BB962C8B-B14F-4D97-AF65-F5344CB8AC3E}">
-        <p14:creationId xmlns:p14="http://schemas.microsoft.com/office/powerpoint/2010/main" val="761913994"/>
+        <p14:creationId xmlns:p14="http://schemas.microsoft.com/office/powerpoint/2010/main" val="1049902733"/>
       </p:ext>
     </p:extLst>
   </p:cSld>
@@ -5343,7 +5343,7 @@
           <p:cNvPr id="1" name="s2-rule">
             <a:extLst xmlns:a="http://schemas.openxmlformats.org/drawingml/2006/main">
               <a:ext uri="{FF2B5EF4-FFF2-40B4-BE49-F238E27FC236}">
-                <a16:creationId xmlns:a16="http://schemas.microsoft.com/office/drawing/2014/main" id="{D7319F38-83F1-442A-A546-4923E1D1F684}"/>
+                <a16:creationId xmlns:a16="http://schemas.microsoft.com/office/drawing/2014/main" id="{D4C89945-DA8A-4781-B9EF-EEA137CF15AD}"/>
               </a:ext>
             </a:extLst>
           </p:cNvPr>
@@ -5376,7 +5376,7 @@
           <p:cNvPr id="2" name="s2-eyebrow">
             <a:extLst xmlns:a="http://schemas.openxmlformats.org/drawingml/2006/main">
               <a:ext uri="{FF2B5EF4-FFF2-40B4-BE49-F238E27FC236}">
-                <a16:creationId xmlns:a16="http://schemas.microsoft.com/office/drawing/2014/main" id="{349E6488-B57B-4060-964A-8AFDAAB3BFF4}"/>
+                <a16:creationId xmlns:a16="http://schemas.microsoft.com/office/drawing/2014/main" id="{6B017284-FDAB-4A3B-9ADF-6E35E2BC8ACF}"/>
               </a:ext>
             </a:extLst>
           </p:cNvPr>
@@ -5434,7 +5434,7 @@
           <p:cNvPr id="3" name="s2-title">
             <a:extLst xmlns:a="http://schemas.openxmlformats.org/drawingml/2006/main">
               <a:ext uri="{FF2B5EF4-FFF2-40B4-BE49-F238E27FC236}">
-                <a16:creationId xmlns:a16="http://schemas.microsoft.com/office/drawing/2014/main" id="{33651363-9FEF-47BD-980A-A04665698399}"/>
+                <a16:creationId xmlns:a16="http://schemas.microsoft.com/office/drawing/2014/main" id="{0CC01FD2-DC21-459C-8D6C-FC3B3C00CAB1}"/>
               </a:ext>
             </a:extLst>
           </p:cNvPr>
@@ -5492,7 +5492,7 @@
           <p:cNvPr id="4" name="s2-footer">
             <a:extLst xmlns:a="http://schemas.openxmlformats.org/drawingml/2006/main">
               <a:ext uri="{FF2B5EF4-FFF2-40B4-BE49-F238E27FC236}">
-                <a16:creationId xmlns:a16="http://schemas.microsoft.com/office/drawing/2014/main" id="{8C9A3628-548D-4A92-8438-F3533AD2AB27}"/>
+                <a16:creationId xmlns:a16="http://schemas.microsoft.com/office/drawing/2014/main" id="{E2F846AF-6BC3-439F-9151-3A4C1B07F873}"/>
               </a:ext>
             </a:extLst>
           </p:cNvPr>
@@ -5523,7 +5523,7 @@
           <p:cNvPr id="5" name="s2-identity">
             <a:extLst xmlns:a="http://schemas.openxmlformats.org/drawingml/2006/main">
               <a:ext uri="{FF2B5EF4-FFF2-40B4-BE49-F238E27FC236}">
-                <a16:creationId xmlns:a16="http://schemas.microsoft.com/office/drawing/2014/main" id="{F8830BC6-2709-4B84-9A4B-F00363634738}"/>
+                <a16:creationId xmlns:a16="http://schemas.microsoft.com/office/drawing/2014/main" id="{A34EF1B9-0176-4D07-B4D5-4A4C56EC694A}"/>
               </a:ext>
             </a:extLst>
           </p:cNvPr>
@@ -5581,7 +5581,7 @@
           <p:cNvPr id="6" name="objective-1">
             <a:extLst xmlns:a="http://schemas.openxmlformats.org/drawingml/2006/main">
               <a:ext uri="{FF2B5EF4-FFF2-40B4-BE49-F238E27FC236}">
-                <a16:creationId xmlns:a16="http://schemas.microsoft.com/office/drawing/2014/main" id="{5F96A398-F34F-4D72-93EB-97A6369389CF}"/>
+                <a16:creationId xmlns:a16="http://schemas.microsoft.com/office/drawing/2014/main" id="{5EB53291-DDAB-4A06-BA7B-263C07485A9D}"/>
               </a:ext>
             </a:extLst>
           </p:cNvPr>
@@ -5668,7 +5668,7 @@
           <p:cNvPr id="7" name="objective-2">
             <a:extLst xmlns:a="http://schemas.openxmlformats.org/drawingml/2006/main">
               <a:ext uri="{FF2B5EF4-FFF2-40B4-BE49-F238E27FC236}">
-                <a16:creationId xmlns:a16="http://schemas.microsoft.com/office/drawing/2014/main" id="{37400C4B-8756-4B88-BDB5-10AFE196E081}"/>
+                <a16:creationId xmlns:a16="http://schemas.microsoft.com/office/drawing/2014/main" id="{3BF5DEC7-C5FF-4302-9964-32099C5CA865}"/>
               </a:ext>
             </a:extLst>
           </p:cNvPr>
@@ -5755,7 +5755,7 @@
           <p:cNvPr id="8" name="objective-3">
             <a:extLst xmlns:a="http://schemas.openxmlformats.org/drawingml/2006/main">
               <a:ext uri="{FF2B5EF4-FFF2-40B4-BE49-F238E27FC236}">
-                <a16:creationId xmlns:a16="http://schemas.microsoft.com/office/drawing/2014/main" id="{0E72F2F3-8F86-4F1C-AAE0-8D498A658506}"/>
+                <a16:creationId xmlns:a16="http://schemas.microsoft.com/office/drawing/2014/main" id="{AFE15D78-51F7-4B2C-A38F-5E37E575C522}"/>
               </a:ext>
             </a:extLst>
           </p:cNvPr>
@@ -5842,7 +5842,7 @@
           <p:cNvPr id="9" name="objective-4">
             <a:extLst xmlns:a="http://schemas.openxmlformats.org/drawingml/2006/main">
               <a:ext uri="{FF2B5EF4-FFF2-40B4-BE49-F238E27FC236}">
-                <a16:creationId xmlns:a16="http://schemas.microsoft.com/office/drawing/2014/main" id="{1ABB918C-EC01-4276-A84D-B02E3158009B}"/>
+                <a16:creationId xmlns:a16="http://schemas.microsoft.com/office/drawing/2014/main" id="{6BBE103E-C19F-4E4F-A9EE-8B83F5A928FE}"/>
               </a:ext>
             </a:extLst>
           </p:cNvPr>
@@ -5927,7 +5927,7 @@
     </p:spTree>
     <p:extLst>
       <p:ext uri="{BB962C8B-B14F-4D97-AF65-F5344CB8AC3E}">
-        <p14:creationId xmlns:p14="http://schemas.microsoft.com/office/powerpoint/2010/main" val="463845016"/>
+        <p14:creationId xmlns:p14="http://schemas.microsoft.com/office/powerpoint/2010/main" val="469943402"/>
       </p:ext>
     </p:extLst>
   </p:cSld>
@@ -5958,7 +5958,7 @@
           <p:cNvPr id="1" name="s3-rule">
             <a:extLst xmlns:a="http://schemas.openxmlformats.org/drawingml/2006/main">
               <a:ext uri="{FF2B5EF4-FFF2-40B4-BE49-F238E27FC236}">
-                <a16:creationId xmlns:a16="http://schemas.microsoft.com/office/drawing/2014/main" id="{97B0A401-40AF-4536-8829-02CCB756A99D}"/>
+                <a16:creationId xmlns:a16="http://schemas.microsoft.com/office/drawing/2014/main" id="{683A7831-AE26-47CA-85B9-0638E7DC0CF9}"/>
               </a:ext>
             </a:extLst>
           </p:cNvPr>
@@ -5991,7 +5991,7 @@
           <p:cNvPr id="2" name="s3-eyebrow">
             <a:extLst xmlns:a="http://schemas.openxmlformats.org/drawingml/2006/main">
               <a:ext uri="{FF2B5EF4-FFF2-40B4-BE49-F238E27FC236}">
-                <a16:creationId xmlns:a16="http://schemas.microsoft.com/office/drawing/2014/main" id="{DF4939DC-9C7F-4BAE-B145-95B4662EF3B8}"/>
+                <a16:creationId xmlns:a16="http://schemas.microsoft.com/office/drawing/2014/main" id="{61D16E35-117E-431F-B62F-208444F0673C}"/>
               </a:ext>
             </a:extLst>
           </p:cNvPr>
@@ -6049,7 +6049,7 @@
           <p:cNvPr id="3" name="s3-title">
             <a:extLst xmlns:a="http://schemas.openxmlformats.org/drawingml/2006/main">
               <a:ext uri="{FF2B5EF4-FFF2-40B4-BE49-F238E27FC236}">
-                <a16:creationId xmlns:a16="http://schemas.microsoft.com/office/drawing/2014/main" id="{4123A2E1-FD96-4268-B741-3FAF1F832D3F}"/>
+                <a16:creationId xmlns:a16="http://schemas.microsoft.com/office/drawing/2014/main" id="{35C36E37-F349-4557-971B-CCE5D97499C8}"/>
               </a:ext>
             </a:extLst>
           </p:cNvPr>
@@ -6107,7 +6107,7 @@
           <p:cNvPr id="4" name="s3-footer">
             <a:extLst xmlns:a="http://schemas.openxmlformats.org/drawingml/2006/main">
               <a:ext uri="{FF2B5EF4-FFF2-40B4-BE49-F238E27FC236}">
-                <a16:creationId xmlns:a16="http://schemas.microsoft.com/office/drawing/2014/main" id="{1AEBDE60-13CC-48D1-8258-25AC18C93CDA}"/>
+                <a16:creationId xmlns:a16="http://schemas.microsoft.com/office/drawing/2014/main" id="{C8ADF6E7-F582-4981-9D78-667E4A0DEECD}"/>
               </a:ext>
             </a:extLst>
           </p:cNvPr>
@@ -6138,7 +6138,7 @@
           <p:cNvPr id="5" name="s3-identity">
             <a:extLst xmlns:a="http://schemas.openxmlformats.org/drawingml/2006/main">
               <a:ext uri="{FF2B5EF4-FFF2-40B4-BE49-F238E27FC236}">
-                <a16:creationId xmlns:a16="http://schemas.microsoft.com/office/drawing/2014/main" id="{4D2B8D70-6066-4020-95E4-351B1EBDF89B}"/>
+                <a16:creationId xmlns:a16="http://schemas.microsoft.com/office/drawing/2014/main" id="{61E84B42-3AB7-4DF1-A6D1-B08665488E42}"/>
               </a:ext>
             </a:extLst>
           </p:cNvPr>
@@ -6196,7 +6196,7 @@
           <p:cNvPr id="6" name="core-no-0">
             <a:extLst xmlns:a="http://schemas.openxmlformats.org/drawingml/2006/main">
               <a:ext uri="{FF2B5EF4-FFF2-40B4-BE49-F238E27FC236}">
-                <a16:creationId xmlns:a16="http://schemas.microsoft.com/office/drawing/2014/main" id="{3745E178-1044-46D7-BB9F-B94E90AB0936}"/>
+                <a16:creationId xmlns:a16="http://schemas.microsoft.com/office/drawing/2014/main" id="{6A6976FA-4764-4398-B2EF-60B7EBCB94AC}"/>
               </a:ext>
             </a:extLst>
           </p:cNvPr>
@@ -6254,7 +6254,7 @@
           <p:cNvPr id="7" name="core-label-0">
             <a:extLst xmlns:a="http://schemas.openxmlformats.org/drawingml/2006/main">
               <a:ext uri="{FF2B5EF4-FFF2-40B4-BE49-F238E27FC236}">
-                <a16:creationId xmlns:a16="http://schemas.microsoft.com/office/drawing/2014/main" id="{C32082DF-AC39-4BF3-889F-76BB2BE90C49}"/>
+                <a16:creationId xmlns:a16="http://schemas.microsoft.com/office/drawing/2014/main" id="{8FF6495B-C2C0-49E5-A52B-B400789CF265}"/>
               </a:ext>
             </a:extLst>
           </p:cNvPr>
@@ -6312,7 +6312,7 @@
           <p:cNvPr id="8" name="core-body-0">
             <a:extLst xmlns:a="http://schemas.openxmlformats.org/drawingml/2006/main">
               <a:ext uri="{FF2B5EF4-FFF2-40B4-BE49-F238E27FC236}">
-                <a16:creationId xmlns:a16="http://schemas.microsoft.com/office/drawing/2014/main" id="{262F3CE2-B4BD-4640-8A72-21CA53E6DA75}"/>
+                <a16:creationId xmlns:a16="http://schemas.microsoft.com/office/drawing/2014/main" id="{306BDD0D-F3FC-43FA-BC2E-B02A74046498}"/>
               </a:ext>
             </a:extLst>
           </p:cNvPr>
@@ -6376,7 +6376,7 @@
           <p:cNvPr id="9" name="core-no-1">
             <a:extLst xmlns:a="http://schemas.openxmlformats.org/drawingml/2006/main">
               <a:ext uri="{FF2B5EF4-FFF2-40B4-BE49-F238E27FC236}">
-                <a16:creationId xmlns:a16="http://schemas.microsoft.com/office/drawing/2014/main" id="{C929BF70-ADCA-4BFB-8A49-BA2EC108E9B1}"/>
+                <a16:creationId xmlns:a16="http://schemas.microsoft.com/office/drawing/2014/main" id="{61C1B24E-76C1-4836-9D0D-10609DF35A54}"/>
               </a:ext>
             </a:extLst>
           </p:cNvPr>
@@ -6434,7 +6434,7 @@
           <p:cNvPr id="10" name="core-body-1">
             <a:extLst xmlns:a="http://schemas.openxmlformats.org/drawingml/2006/main">
               <a:ext uri="{FF2B5EF4-FFF2-40B4-BE49-F238E27FC236}">
-                <a16:creationId xmlns:a16="http://schemas.microsoft.com/office/drawing/2014/main" id="{BACC257E-62F0-4472-995B-307ED6B0D5F9}"/>
+                <a16:creationId xmlns:a16="http://schemas.microsoft.com/office/drawing/2014/main" id="{195F6E22-FC1D-45E2-8E8A-DA7819B2340F}"/>
               </a:ext>
             </a:extLst>
           </p:cNvPr>
@@ -6498,7 +6498,7 @@
           <p:cNvPr id="11" name="core-no-2">
             <a:extLst xmlns:a="http://schemas.openxmlformats.org/drawingml/2006/main">
               <a:ext uri="{FF2B5EF4-FFF2-40B4-BE49-F238E27FC236}">
-                <a16:creationId xmlns:a16="http://schemas.microsoft.com/office/drawing/2014/main" id="{FA8F150A-0AE2-4372-AA5F-0790BE4629D7}"/>
+                <a16:creationId xmlns:a16="http://schemas.microsoft.com/office/drawing/2014/main" id="{600A4BC6-EC8D-4AE5-A106-823407BBA71E}"/>
               </a:ext>
             </a:extLst>
           </p:cNvPr>
@@ -6556,7 +6556,7 @@
           <p:cNvPr id="12" name="core-body-2">
             <a:extLst xmlns:a="http://schemas.openxmlformats.org/drawingml/2006/main">
               <a:ext uri="{FF2B5EF4-FFF2-40B4-BE49-F238E27FC236}">
-                <a16:creationId xmlns:a16="http://schemas.microsoft.com/office/drawing/2014/main" id="{28D10E85-3E08-4578-BC9A-927934F691F9}"/>
+                <a16:creationId xmlns:a16="http://schemas.microsoft.com/office/drawing/2014/main" id="{7C84FB07-6AAA-4572-9001-682CFD89F0EA}"/>
               </a:ext>
             </a:extLst>
           </p:cNvPr>
@@ -6620,7 +6620,7 @@
           <p:cNvPr id="13" name="s3-takeaway-rule">
             <a:extLst xmlns:a="http://schemas.openxmlformats.org/drawingml/2006/main">
               <a:ext uri="{FF2B5EF4-FFF2-40B4-BE49-F238E27FC236}">
-                <a16:creationId xmlns:a16="http://schemas.microsoft.com/office/drawing/2014/main" id="{816D207B-378F-4C55-A915-4C50DAE92B46}"/>
+                <a16:creationId xmlns:a16="http://schemas.microsoft.com/office/drawing/2014/main" id="{001725ED-5BDB-4C97-BA5C-B443D164F9C1}"/>
               </a:ext>
             </a:extLst>
           </p:cNvPr>
@@ -6653,7 +6653,7 @@
           <p:cNvPr id="14" name="s3-takeaway">
             <a:extLst xmlns:a="http://schemas.openxmlformats.org/drawingml/2006/main">
               <a:ext uri="{FF2B5EF4-FFF2-40B4-BE49-F238E27FC236}">
-                <a16:creationId xmlns:a16="http://schemas.microsoft.com/office/drawing/2014/main" id="{33618CBE-FD62-4993-88FB-3DE8CF21A6AE}"/>
+                <a16:creationId xmlns:a16="http://schemas.microsoft.com/office/drawing/2014/main" id="{55B8BAB1-3CB8-43D6-86E1-29C73B26FDE3}"/>
               </a:ext>
             </a:extLst>
           </p:cNvPr>
@@ -6709,7 +6709,7 @@
     </p:spTree>
     <p:extLst>
       <p:ext uri="{BB962C8B-B14F-4D97-AF65-F5344CB8AC3E}">
-        <p14:creationId xmlns:p14="http://schemas.microsoft.com/office/powerpoint/2010/main" val="386267557"/>
+        <p14:creationId xmlns:p14="http://schemas.microsoft.com/office/powerpoint/2010/main" val="579959492"/>
       </p:ext>
     </p:extLst>
   </p:cSld>
@@ -6740,7 +6740,7 @@
           <p:cNvPr id="1" name="s4-rule">
             <a:extLst xmlns:a="http://schemas.openxmlformats.org/drawingml/2006/main">
               <a:ext uri="{FF2B5EF4-FFF2-40B4-BE49-F238E27FC236}">
-                <a16:creationId xmlns:a16="http://schemas.microsoft.com/office/drawing/2014/main" id="{9B918281-8BCC-4F1A-808B-9BA18C33575C}"/>
+                <a16:creationId xmlns:a16="http://schemas.microsoft.com/office/drawing/2014/main" id="{2509F538-FBA6-48A8-A9E6-6D6F05754C91}"/>
               </a:ext>
             </a:extLst>
           </p:cNvPr>
@@ -6773,7 +6773,7 @@
           <p:cNvPr id="2" name="s4-eyebrow">
             <a:extLst xmlns:a="http://schemas.openxmlformats.org/drawingml/2006/main">
               <a:ext uri="{FF2B5EF4-FFF2-40B4-BE49-F238E27FC236}">
-                <a16:creationId xmlns:a16="http://schemas.microsoft.com/office/drawing/2014/main" id="{B0AB4DBC-0C5E-47C2-9BC4-FD1813428AE1}"/>
+                <a16:creationId xmlns:a16="http://schemas.microsoft.com/office/drawing/2014/main" id="{18DBF00E-2F59-4E2C-B9F2-4B5FAAAA6F18}"/>
               </a:ext>
             </a:extLst>
           </p:cNvPr>
@@ -6831,7 +6831,7 @@
           <p:cNvPr id="3" name="s4-title">
             <a:extLst xmlns:a="http://schemas.openxmlformats.org/drawingml/2006/main">
               <a:ext uri="{FF2B5EF4-FFF2-40B4-BE49-F238E27FC236}">
-                <a16:creationId xmlns:a16="http://schemas.microsoft.com/office/drawing/2014/main" id="{9D982BED-79A1-43D0-BA15-1FD4DC83B3D4}"/>
+                <a16:creationId xmlns:a16="http://schemas.microsoft.com/office/drawing/2014/main" id="{44E36AC7-0602-4AB2-B2A7-16A26EC693DA}"/>
               </a:ext>
             </a:extLst>
           </p:cNvPr>
@@ -6889,7 +6889,7 @@
           <p:cNvPr id="4" name="s4-footer">
             <a:extLst xmlns:a="http://schemas.openxmlformats.org/drawingml/2006/main">
               <a:ext uri="{FF2B5EF4-FFF2-40B4-BE49-F238E27FC236}">
-                <a16:creationId xmlns:a16="http://schemas.microsoft.com/office/drawing/2014/main" id="{4299F310-0C01-4272-9C62-3651554E8FE4}"/>
+                <a16:creationId xmlns:a16="http://schemas.microsoft.com/office/drawing/2014/main" id="{8C059569-851B-45E6-83D9-701B4334A7F8}"/>
               </a:ext>
             </a:extLst>
           </p:cNvPr>
@@ -6920,7 +6920,7 @@
           <p:cNvPr id="5" name="s4-identity">
             <a:extLst xmlns:a="http://schemas.openxmlformats.org/drawingml/2006/main">
               <a:ext uri="{FF2B5EF4-FFF2-40B4-BE49-F238E27FC236}">
-                <a16:creationId xmlns:a16="http://schemas.microsoft.com/office/drawing/2014/main" id="{84AA8E83-BEE0-403F-B904-3576F82712FF}"/>
+                <a16:creationId xmlns:a16="http://schemas.microsoft.com/office/drawing/2014/main" id="{407E0E5B-B921-49FB-9632-85FDCDA45FC1}"/>
               </a:ext>
             </a:extLst>
           </p:cNvPr>
@@ -6978,7 +6978,7 @@
           <p:cNvPr id="6" name="core-no-0">
             <a:extLst xmlns:a="http://schemas.openxmlformats.org/drawingml/2006/main">
               <a:ext uri="{FF2B5EF4-FFF2-40B4-BE49-F238E27FC236}">
-                <a16:creationId xmlns:a16="http://schemas.microsoft.com/office/drawing/2014/main" id="{E1711B1C-D09B-4BA3-9D4C-3921B48579F1}"/>
+                <a16:creationId xmlns:a16="http://schemas.microsoft.com/office/drawing/2014/main" id="{B1239DFD-6EBB-4AB7-BBFC-C39F20E16D3E}"/>
               </a:ext>
             </a:extLst>
           </p:cNvPr>
@@ -7036,7 +7036,7 @@
           <p:cNvPr id="7" name="core-label-0">
             <a:extLst xmlns:a="http://schemas.openxmlformats.org/drawingml/2006/main">
               <a:ext uri="{FF2B5EF4-FFF2-40B4-BE49-F238E27FC236}">
-                <a16:creationId xmlns:a16="http://schemas.microsoft.com/office/drawing/2014/main" id="{0608C283-0DE5-45D9-A9AD-9C7683D3781D}"/>
+                <a16:creationId xmlns:a16="http://schemas.microsoft.com/office/drawing/2014/main" id="{0FE936A8-0DAC-46E8-B85B-EB26CE3FB51F}"/>
               </a:ext>
             </a:extLst>
           </p:cNvPr>
@@ -7094,7 +7094,7 @@
           <p:cNvPr id="8" name="core-body-0">
             <a:extLst xmlns:a="http://schemas.openxmlformats.org/drawingml/2006/main">
               <a:ext uri="{FF2B5EF4-FFF2-40B4-BE49-F238E27FC236}">
-                <a16:creationId xmlns:a16="http://schemas.microsoft.com/office/drawing/2014/main" id="{347EE22B-2387-47EC-89A0-662E099C5318}"/>
+                <a16:creationId xmlns:a16="http://schemas.microsoft.com/office/drawing/2014/main" id="{98B17069-32EC-4E17-A761-E35BB31D3201}"/>
               </a:ext>
             </a:extLst>
           </p:cNvPr>
@@ -7158,7 +7158,7 @@
           <p:cNvPr id="9" name="core-no-1">
             <a:extLst xmlns:a="http://schemas.openxmlformats.org/drawingml/2006/main">
               <a:ext uri="{FF2B5EF4-FFF2-40B4-BE49-F238E27FC236}">
-                <a16:creationId xmlns:a16="http://schemas.microsoft.com/office/drawing/2014/main" id="{5A5163EA-D5AD-4768-A3F2-723AD494AA24}"/>
+                <a16:creationId xmlns:a16="http://schemas.microsoft.com/office/drawing/2014/main" id="{E2B74B3E-24BE-4EEC-9AAA-A4A376CED91C}"/>
               </a:ext>
             </a:extLst>
           </p:cNvPr>
@@ -7216,7 +7216,7 @@
           <p:cNvPr id="10" name="core-body-1">
             <a:extLst xmlns:a="http://schemas.openxmlformats.org/drawingml/2006/main">
               <a:ext uri="{FF2B5EF4-FFF2-40B4-BE49-F238E27FC236}">
-                <a16:creationId xmlns:a16="http://schemas.microsoft.com/office/drawing/2014/main" id="{3D59FC69-5645-4418-BE1B-B0A8C3F3AE3B}"/>
+                <a16:creationId xmlns:a16="http://schemas.microsoft.com/office/drawing/2014/main" id="{8DAC47D4-B884-481A-92FD-8254084BF922}"/>
               </a:ext>
             </a:extLst>
           </p:cNvPr>
@@ -7280,7 +7280,7 @@
           <p:cNvPr id="11" name="core-no-2">
             <a:extLst xmlns:a="http://schemas.openxmlformats.org/drawingml/2006/main">
               <a:ext uri="{FF2B5EF4-FFF2-40B4-BE49-F238E27FC236}">
-                <a16:creationId xmlns:a16="http://schemas.microsoft.com/office/drawing/2014/main" id="{220C622E-49F7-4B4E-A62A-665E966C4C5C}"/>
+                <a16:creationId xmlns:a16="http://schemas.microsoft.com/office/drawing/2014/main" id="{8E3FB378-8F83-4B41-BB4A-1211B5B795E6}"/>
               </a:ext>
             </a:extLst>
           </p:cNvPr>
@@ -7338,7 +7338,7 @@
           <p:cNvPr id="12" name="core-body-2">
             <a:extLst xmlns:a="http://schemas.openxmlformats.org/drawingml/2006/main">
               <a:ext uri="{FF2B5EF4-FFF2-40B4-BE49-F238E27FC236}">
-                <a16:creationId xmlns:a16="http://schemas.microsoft.com/office/drawing/2014/main" id="{6F97FB47-1C1C-47E9-AEF3-317B70A7C429}"/>
+                <a16:creationId xmlns:a16="http://schemas.microsoft.com/office/drawing/2014/main" id="{42F1B84F-635A-4AE9-8A94-4C4CE00BA183}"/>
               </a:ext>
             </a:extLst>
           </p:cNvPr>
@@ -7402,7 +7402,7 @@
           <p:cNvPr id="13" name="s4-takeaway-rule">
             <a:extLst xmlns:a="http://schemas.openxmlformats.org/drawingml/2006/main">
               <a:ext uri="{FF2B5EF4-FFF2-40B4-BE49-F238E27FC236}">
-                <a16:creationId xmlns:a16="http://schemas.microsoft.com/office/drawing/2014/main" id="{630FD230-EC46-416E-B5F8-0A75399C5D45}"/>
+                <a16:creationId xmlns:a16="http://schemas.microsoft.com/office/drawing/2014/main" id="{03E8D1AB-ACE1-4387-9608-AE6B1CD4F636}"/>
               </a:ext>
             </a:extLst>
           </p:cNvPr>
@@ -7435,7 +7435,7 @@
           <p:cNvPr id="14" name="s4-takeaway">
             <a:extLst xmlns:a="http://schemas.openxmlformats.org/drawingml/2006/main">
               <a:ext uri="{FF2B5EF4-FFF2-40B4-BE49-F238E27FC236}">
-                <a16:creationId xmlns:a16="http://schemas.microsoft.com/office/drawing/2014/main" id="{508D2A26-54B2-4DBA-B7C3-9D7DA756E3A9}"/>
+                <a16:creationId xmlns:a16="http://schemas.microsoft.com/office/drawing/2014/main" id="{2A4659F3-7E46-4FBB-9824-A1CD822FFAC9}"/>
               </a:ext>
             </a:extLst>
           </p:cNvPr>
@@ -7491,7 +7491,7 @@
     </p:spTree>
     <p:extLst>
       <p:ext uri="{BB962C8B-B14F-4D97-AF65-F5344CB8AC3E}">
-        <p14:creationId xmlns:p14="http://schemas.microsoft.com/office/powerpoint/2010/main" val="1600347831"/>
+        <p14:creationId xmlns:p14="http://schemas.microsoft.com/office/powerpoint/2010/main" val="737765194"/>
       </p:ext>
     </p:extLst>
   </p:cSld>
@@ -7522,7 +7522,7 @@
           <p:cNvPr id="1" name="s5-rule">
             <a:extLst xmlns:a="http://schemas.openxmlformats.org/drawingml/2006/main">
               <a:ext uri="{FF2B5EF4-FFF2-40B4-BE49-F238E27FC236}">
-                <a16:creationId xmlns:a16="http://schemas.microsoft.com/office/drawing/2014/main" id="{0F819020-BAB9-4EA1-BC42-AAAFD557A313}"/>
+                <a16:creationId xmlns:a16="http://schemas.microsoft.com/office/drawing/2014/main" id="{518E1F10-94BC-420C-B55A-2191D7B196C2}"/>
               </a:ext>
             </a:extLst>
           </p:cNvPr>
@@ -7555,7 +7555,7 @@
           <p:cNvPr id="2" name="s5-eyebrow">
             <a:extLst xmlns:a="http://schemas.openxmlformats.org/drawingml/2006/main">
               <a:ext uri="{FF2B5EF4-FFF2-40B4-BE49-F238E27FC236}">
-                <a16:creationId xmlns:a16="http://schemas.microsoft.com/office/drawing/2014/main" id="{B77EB407-3179-438D-A36C-263582745BE4}"/>
+                <a16:creationId xmlns:a16="http://schemas.microsoft.com/office/drawing/2014/main" id="{150689A9-8E37-4CDC-A640-2D3E41DCC30E}"/>
               </a:ext>
             </a:extLst>
           </p:cNvPr>
@@ -7613,7 +7613,7 @@
           <p:cNvPr id="3" name="s5-title">
             <a:extLst xmlns:a="http://schemas.openxmlformats.org/drawingml/2006/main">
               <a:ext uri="{FF2B5EF4-FFF2-40B4-BE49-F238E27FC236}">
-                <a16:creationId xmlns:a16="http://schemas.microsoft.com/office/drawing/2014/main" id="{7E0F1462-D8FB-4FEF-97A5-29EFBDAC148B}"/>
+                <a16:creationId xmlns:a16="http://schemas.microsoft.com/office/drawing/2014/main" id="{AB9461A1-ED92-4F62-BDD9-3C0CB1720645}"/>
               </a:ext>
             </a:extLst>
           </p:cNvPr>
@@ -7671,7 +7671,7 @@
           <p:cNvPr id="4" name="s5-footer">
             <a:extLst xmlns:a="http://schemas.openxmlformats.org/drawingml/2006/main">
               <a:ext uri="{FF2B5EF4-FFF2-40B4-BE49-F238E27FC236}">
-                <a16:creationId xmlns:a16="http://schemas.microsoft.com/office/drawing/2014/main" id="{C4443941-60FF-46AF-B256-2D4C32D045FE}"/>
+                <a16:creationId xmlns:a16="http://schemas.microsoft.com/office/drawing/2014/main" id="{2FEF9942-C569-4823-9A8D-AD8AC3B5CA0F}"/>
               </a:ext>
             </a:extLst>
           </p:cNvPr>
@@ -7702,7 +7702,7 @@
           <p:cNvPr id="5" name="s5-identity">
             <a:extLst xmlns:a="http://schemas.openxmlformats.org/drawingml/2006/main">
               <a:ext uri="{FF2B5EF4-FFF2-40B4-BE49-F238E27FC236}">
-                <a16:creationId xmlns:a16="http://schemas.microsoft.com/office/drawing/2014/main" id="{7A2AB1C2-84C9-4EC2-B0FC-E6A0056E1782}"/>
+                <a16:creationId xmlns:a16="http://schemas.microsoft.com/office/drawing/2014/main" id="{6DD5B527-C5A9-42C6-837A-5CAB2E735C06}"/>
               </a:ext>
             </a:extLst>
           </p:cNvPr>
@@ -7760,7 +7760,7 @@
           <p:cNvPr id="6" name="core-no-0">
             <a:extLst xmlns:a="http://schemas.openxmlformats.org/drawingml/2006/main">
               <a:ext uri="{FF2B5EF4-FFF2-40B4-BE49-F238E27FC236}">
-                <a16:creationId xmlns:a16="http://schemas.microsoft.com/office/drawing/2014/main" id="{66FBBA08-604B-46DE-8243-A1BA5F8767A3}"/>
+                <a16:creationId xmlns:a16="http://schemas.microsoft.com/office/drawing/2014/main" id="{A1D8B50B-1E2F-47F8-874C-0079F39CF087}"/>
               </a:ext>
             </a:extLst>
           </p:cNvPr>
@@ -7818,7 +7818,7 @@
           <p:cNvPr id="7" name="core-label-0">
             <a:extLst xmlns:a="http://schemas.openxmlformats.org/drawingml/2006/main">
               <a:ext uri="{FF2B5EF4-FFF2-40B4-BE49-F238E27FC236}">
-                <a16:creationId xmlns:a16="http://schemas.microsoft.com/office/drawing/2014/main" id="{7F590117-9022-4A2F-BA42-6E351A86C175}"/>
+                <a16:creationId xmlns:a16="http://schemas.microsoft.com/office/drawing/2014/main" id="{BA3E5125-54CA-4060-90EB-A30B96B71C8E}"/>
               </a:ext>
             </a:extLst>
           </p:cNvPr>
@@ -7876,7 +7876,7 @@
           <p:cNvPr id="8" name="core-body-0">
             <a:extLst xmlns:a="http://schemas.openxmlformats.org/drawingml/2006/main">
               <a:ext uri="{FF2B5EF4-FFF2-40B4-BE49-F238E27FC236}">
-                <a16:creationId xmlns:a16="http://schemas.microsoft.com/office/drawing/2014/main" id="{D58E831D-5497-4BA7-9918-DF4156F999DE}"/>
+                <a16:creationId xmlns:a16="http://schemas.microsoft.com/office/drawing/2014/main" id="{588F29C2-D2E2-471F-AFFE-91E25B54908A}"/>
               </a:ext>
             </a:extLst>
           </p:cNvPr>
@@ -7940,7 +7940,7 @@
           <p:cNvPr id="9" name="core-no-1">
             <a:extLst xmlns:a="http://schemas.openxmlformats.org/drawingml/2006/main">
               <a:ext uri="{FF2B5EF4-FFF2-40B4-BE49-F238E27FC236}">
-                <a16:creationId xmlns:a16="http://schemas.microsoft.com/office/drawing/2014/main" id="{A04E1F5C-65D3-4BE3-A434-49183EBCEA92}"/>
+                <a16:creationId xmlns:a16="http://schemas.microsoft.com/office/drawing/2014/main" id="{E0B600E2-4CC4-4602-950C-198E22AEBAF7}"/>
               </a:ext>
             </a:extLst>
           </p:cNvPr>
@@ -7998,7 +7998,7 @@
           <p:cNvPr id="10" name="core-body-1">
             <a:extLst xmlns:a="http://schemas.openxmlformats.org/drawingml/2006/main">
               <a:ext uri="{FF2B5EF4-FFF2-40B4-BE49-F238E27FC236}">
-                <a16:creationId xmlns:a16="http://schemas.microsoft.com/office/drawing/2014/main" id="{C86C1F75-5901-42F6-B242-E6611C91EDED}"/>
+                <a16:creationId xmlns:a16="http://schemas.microsoft.com/office/drawing/2014/main" id="{0E46B13D-4389-48FE-92FE-35DEF0D1C381}"/>
               </a:ext>
             </a:extLst>
           </p:cNvPr>
@@ -8062,7 +8062,7 @@
           <p:cNvPr id="11" name="core-no-2">
             <a:extLst xmlns:a="http://schemas.openxmlformats.org/drawingml/2006/main">
               <a:ext uri="{FF2B5EF4-FFF2-40B4-BE49-F238E27FC236}">
-                <a16:creationId xmlns:a16="http://schemas.microsoft.com/office/drawing/2014/main" id="{4D0CB2DE-33F3-41D1-872C-EE361F4CB893}"/>
+                <a16:creationId xmlns:a16="http://schemas.microsoft.com/office/drawing/2014/main" id="{514D963C-143D-45CB-ACDF-BBA21A62BB34}"/>
               </a:ext>
             </a:extLst>
           </p:cNvPr>
@@ -8120,7 +8120,7 @@
           <p:cNvPr id="12" name="core-body-2">
             <a:extLst xmlns:a="http://schemas.openxmlformats.org/drawingml/2006/main">
               <a:ext uri="{FF2B5EF4-FFF2-40B4-BE49-F238E27FC236}">
-                <a16:creationId xmlns:a16="http://schemas.microsoft.com/office/drawing/2014/main" id="{4D47A1C0-521E-463A-8C70-F52B9716F767}"/>
+                <a16:creationId xmlns:a16="http://schemas.microsoft.com/office/drawing/2014/main" id="{B9F32DC7-5FF4-4917-9211-2AD4E62E4960}"/>
               </a:ext>
             </a:extLst>
           </p:cNvPr>
@@ -8184,7 +8184,7 @@
           <p:cNvPr id="13" name="s5-takeaway-rule">
             <a:extLst xmlns:a="http://schemas.openxmlformats.org/drawingml/2006/main">
               <a:ext uri="{FF2B5EF4-FFF2-40B4-BE49-F238E27FC236}">
-                <a16:creationId xmlns:a16="http://schemas.microsoft.com/office/drawing/2014/main" id="{FFE24082-8DB4-48E5-A70E-A725F43BC93D}"/>
+                <a16:creationId xmlns:a16="http://schemas.microsoft.com/office/drawing/2014/main" id="{5F8ACC17-7511-4702-9BB2-21C4626BBF4D}"/>
               </a:ext>
             </a:extLst>
           </p:cNvPr>
@@ -8217,7 +8217,7 @@
           <p:cNvPr id="14" name="s5-takeaway">
             <a:extLst xmlns:a="http://schemas.openxmlformats.org/drawingml/2006/main">
               <a:ext uri="{FF2B5EF4-FFF2-40B4-BE49-F238E27FC236}">
-                <a16:creationId xmlns:a16="http://schemas.microsoft.com/office/drawing/2014/main" id="{EF44B32F-D4E2-44A5-AE64-1AA7EE48E1DE}"/>
+                <a16:creationId xmlns:a16="http://schemas.microsoft.com/office/drawing/2014/main" id="{B2D0230D-AF0C-4AF5-8DA8-0D4BB1196F05}"/>
               </a:ext>
             </a:extLst>
           </p:cNvPr>
@@ -8273,7 +8273,7 @@
     </p:spTree>
     <p:extLst>
       <p:ext uri="{BB962C8B-B14F-4D97-AF65-F5344CB8AC3E}">
-        <p14:creationId xmlns:p14="http://schemas.microsoft.com/office/powerpoint/2010/main" val="733167035"/>
+        <p14:creationId xmlns:p14="http://schemas.microsoft.com/office/powerpoint/2010/main" val="676032961"/>
       </p:ext>
     </p:extLst>
   </p:cSld>
@@ -8304,7 +8304,7 @@
           <p:cNvPr id="1" name="s6-rule">
             <a:extLst xmlns:a="http://schemas.openxmlformats.org/drawingml/2006/main">
               <a:ext uri="{FF2B5EF4-FFF2-40B4-BE49-F238E27FC236}">
-                <a16:creationId xmlns:a16="http://schemas.microsoft.com/office/drawing/2014/main" id="{FBD85670-CB22-4B89-8098-D2A89E423EB9}"/>
+                <a16:creationId xmlns:a16="http://schemas.microsoft.com/office/drawing/2014/main" id="{5437260C-CDD5-429A-8474-62F31D01B4B6}"/>
               </a:ext>
             </a:extLst>
           </p:cNvPr>
@@ -8337,7 +8337,7 @@
           <p:cNvPr id="2" name="s6-eyebrow">
             <a:extLst xmlns:a="http://schemas.openxmlformats.org/drawingml/2006/main">
               <a:ext uri="{FF2B5EF4-FFF2-40B4-BE49-F238E27FC236}">
-                <a16:creationId xmlns:a16="http://schemas.microsoft.com/office/drawing/2014/main" id="{2454254C-AEC0-4960-995D-00A6006639D9}"/>
+                <a16:creationId xmlns:a16="http://schemas.microsoft.com/office/drawing/2014/main" id="{10D30776-082B-4C65-B44B-B2A8965D6E56}"/>
               </a:ext>
             </a:extLst>
           </p:cNvPr>
@@ -8395,7 +8395,7 @@
           <p:cNvPr id="3" name="s6-title">
             <a:extLst xmlns:a="http://schemas.openxmlformats.org/drawingml/2006/main">
               <a:ext uri="{FF2B5EF4-FFF2-40B4-BE49-F238E27FC236}">
-                <a16:creationId xmlns:a16="http://schemas.microsoft.com/office/drawing/2014/main" id="{90467884-DBCA-4862-BB6E-AB5F43750F66}"/>
+                <a16:creationId xmlns:a16="http://schemas.microsoft.com/office/drawing/2014/main" id="{BC863C86-71BC-4AD9-AB10-82B0DEB2B87F}"/>
               </a:ext>
             </a:extLst>
           </p:cNvPr>
@@ -8453,7 +8453,7 @@
           <p:cNvPr id="4" name="s6-footer">
             <a:extLst xmlns:a="http://schemas.openxmlformats.org/drawingml/2006/main">
               <a:ext uri="{FF2B5EF4-FFF2-40B4-BE49-F238E27FC236}">
-                <a16:creationId xmlns:a16="http://schemas.microsoft.com/office/drawing/2014/main" id="{F2B56863-4FAC-4C10-A5D9-01B8BF3CE453}"/>
+                <a16:creationId xmlns:a16="http://schemas.microsoft.com/office/drawing/2014/main" id="{C9C16B2D-BDB8-48FF-8BB0-344699575FA3}"/>
               </a:ext>
             </a:extLst>
           </p:cNvPr>
@@ -8484,7 +8484,7 @@
           <p:cNvPr id="5" name="s6-identity">
             <a:extLst xmlns:a="http://schemas.openxmlformats.org/drawingml/2006/main">
               <a:ext uri="{FF2B5EF4-FFF2-40B4-BE49-F238E27FC236}">
-                <a16:creationId xmlns:a16="http://schemas.microsoft.com/office/drawing/2014/main" id="{10DCE5F1-0C86-458B-B9BE-EE3243506EAE}"/>
+                <a16:creationId xmlns:a16="http://schemas.microsoft.com/office/drawing/2014/main" id="{F6524161-F360-43D8-AC86-FFC1E5FDB55F}"/>
               </a:ext>
             </a:extLst>
           </p:cNvPr>
@@ -8542,7 +8542,7 @@
           <p:cNvPr id="6" name="core-no-0">
             <a:extLst xmlns:a="http://schemas.openxmlformats.org/drawingml/2006/main">
               <a:ext uri="{FF2B5EF4-FFF2-40B4-BE49-F238E27FC236}">
-                <a16:creationId xmlns:a16="http://schemas.microsoft.com/office/drawing/2014/main" id="{EEB96980-D8C6-4F64-B388-D8DFACE87BAF}"/>
+                <a16:creationId xmlns:a16="http://schemas.microsoft.com/office/drawing/2014/main" id="{8330CAD9-BFFB-4B6A-A90B-31039CF9D027}"/>
               </a:ext>
             </a:extLst>
           </p:cNvPr>
@@ -8600,7 +8600,7 @@
           <p:cNvPr id="7" name="core-label-0">
             <a:extLst xmlns:a="http://schemas.openxmlformats.org/drawingml/2006/main">
               <a:ext uri="{FF2B5EF4-FFF2-40B4-BE49-F238E27FC236}">
-                <a16:creationId xmlns:a16="http://schemas.microsoft.com/office/drawing/2014/main" id="{2FAB96B2-8225-45FF-8AF7-988A47BC60F9}"/>
+                <a16:creationId xmlns:a16="http://schemas.microsoft.com/office/drawing/2014/main" id="{AFD167ED-9914-4BA9-BC6E-C82C943180FD}"/>
               </a:ext>
             </a:extLst>
           </p:cNvPr>
@@ -8658,7 +8658,7 @@
           <p:cNvPr id="8" name="core-body-0">
             <a:extLst xmlns:a="http://schemas.openxmlformats.org/drawingml/2006/main">
               <a:ext uri="{FF2B5EF4-FFF2-40B4-BE49-F238E27FC236}">
-                <a16:creationId xmlns:a16="http://schemas.microsoft.com/office/drawing/2014/main" id="{FB146F57-572A-41CD-A0EB-4703A0C30650}"/>
+                <a16:creationId xmlns:a16="http://schemas.microsoft.com/office/drawing/2014/main" id="{DDE0F7F9-230C-4A80-9E1F-860B6F1211EB}"/>
               </a:ext>
             </a:extLst>
           </p:cNvPr>
@@ -8722,7 +8722,7 @@
           <p:cNvPr id="9" name="core-no-1">
             <a:extLst xmlns:a="http://schemas.openxmlformats.org/drawingml/2006/main">
               <a:ext uri="{FF2B5EF4-FFF2-40B4-BE49-F238E27FC236}">
-                <a16:creationId xmlns:a16="http://schemas.microsoft.com/office/drawing/2014/main" id="{7D2C3892-B102-4939-B5BA-D11AFBC9B478}"/>
+                <a16:creationId xmlns:a16="http://schemas.microsoft.com/office/drawing/2014/main" id="{0B98D85F-0AFF-4C0B-A6FA-48E63BD4B4A8}"/>
               </a:ext>
             </a:extLst>
           </p:cNvPr>
@@ -8780,7 +8780,7 @@
           <p:cNvPr id="10" name="core-body-1">
             <a:extLst xmlns:a="http://schemas.openxmlformats.org/drawingml/2006/main">
               <a:ext uri="{FF2B5EF4-FFF2-40B4-BE49-F238E27FC236}">
-                <a16:creationId xmlns:a16="http://schemas.microsoft.com/office/drawing/2014/main" id="{A7596855-093A-4B23-BA86-00E3DB879782}"/>
+                <a16:creationId xmlns:a16="http://schemas.microsoft.com/office/drawing/2014/main" id="{9E4D091D-BD38-4355-B25B-59068B896E52}"/>
               </a:ext>
             </a:extLst>
           </p:cNvPr>
@@ -8844,7 +8844,7 @@
           <p:cNvPr id="11" name="s6-takeaway-rule">
             <a:extLst xmlns:a="http://schemas.openxmlformats.org/drawingml/2006/main">
               <a:ext uri="{FF2B5EF4-FFF2-40B4-BE49-F238E27FC236}">
-                <a16:creationId xmlns:a16="http://schemas.microsoft.com/office/drawing/2014/main" id="{A8AF7098-F843-491A-872F-82BDE0EB14A2}"/>
+                <a16:creationId xmlns:a16="http://schemas.microsoft.com/office/drawing/2014/main" id="{F7B2B087-2693-4AAC-9A20-B29FBB225E6D}"/>
               </a:ext>
             </a:extLst>
           </p:cNvPr>
@@ -8877,7 +8877,7 @@
           <p:cNvPr id="12" name="s6-takeaway">
             <a:extLst xmlns:a="http://schemas.openxmlformats.org/drawingml/2006/main">
               <a:ext uri="{FF2B5EF4-FFF2-40B4-BE49-F238E27FC236}">
-                <a16:creationId xmlns:a16="http://schemas.microsoft.com/office/drawing/2014/main" id="{256FC2D8-E0B9-4F0D-9D18-0C83B6B087B4}"/>
+                <a16:creationId xmlns:a16="http://schemas.microsoft.com/office/drawing/2014/main" id="{903BAE8C-B9DA-4FCB-9852-5FA90C665CAB}"/>
               </a:ext>
             </a:extLst>
           </p:cNvPr>
@@ -8933,7 +8933,7 @@
     </p:spTree>
     <p:extLst>
       <p:ext uri="{BB962C8B-B14F-4D97-AF65-F5344CB8AC3E}">
-        <p14:creationId xmlns:p14="http://schemas.microsoft.com/office/powerpoint/2010/main" val="2052484003"/>
+        <p14:creationId xmlns:p14="http://schemas.microsoft.com/office/powerpoint/2010/main" val="1455417899"/>
       </p:ext>
     </p:extLst>
   </p:cSld>
@@ -8964,7 +8964,7 @@
           <p:cNvPr id="1" name="s7-rule">
             <a:extLst xmlns:a="http://schemas.openxmlformats.org/drawingml/2006/main">
               <a:ext uri="{FF2B5EF4-FFF2-40B4-BE49-F238E27FC236}">
-                <a16:creationId xmlns:a16="http://schemas.microsoft.com/office/drawing/2014/main" id="{32C05868-E6EE-4674-808B-5D774739E137}"/>
+                <a16:creationId xmlns:a16="http://schemas.microsoft.com/office/drawing/2014/main" id="{A330105E-3E4F-40D7-B205-5460A6DEBD87}"/>
               </a:ext>
             </a:extLst>
           </p:cNvPr>
@@ -8997,7 +8997,7 @@
           <p:cNvPr id="2" name="s7-eyebrow">
             <a:extLst xmlns:a="http://schemas.openxmlformats.org/drawingml/2006/main">
               <a:ext uri="{FF2B5EF4-FFF2-40B4-BE49-F238E27FC236}">
-                <a16:creationId xmlns:a16="http://schemas.microsoft.com/office/drawing/2014/main" id="{FB9E83B1-FD0D-4390-A60C-EB953CDD5C0D}"/>
+                <a16:creationId xmlns:a16="http://schemas.microsoft.com/office/drawing/2014/main" id="{7086DF69-AC62-4E17-B4A3-2BE833888B23}"/>
               </a:ext>
             </a:extLst>
           </p:cNvPr>
@@ -9055,7 +9055,7 @@
           <p:cNvPr id="3" name="s7-title">
             <a:extLst xmlns:a="http://schemas.openxmlformats.org/drawingml/2006/main">
               <a:ext uri="{FF2B5EF4-FFF2-40B4-BE49-F238E27FC236}">
-                <a16:creationId xmlns:a16="http://schemas.microsoft.com/office/drawing/2014/main" id="{73CC64EC-F116-4F74-A1DA-C6E071709C19}"/>
+                <a16:creationId xmlns:a16="http://schemas.microsoft.com/office/drawing/2014/main" id="{73817960-5C1E-4340-9462-F24199186592}"/>
               </a:ext>
             </a:extLst>
           </p:cNvPr>
@@ -9113,7 +9113,7 @@
           <p:cNvPr id="4" name="s7-footer">
             <a:extLst xmlns:a="http://schemas.openxmlformats.org/drawingml/2006/main">
               <a:ext uri="{FF2B5EF4-FFF2-40B4-BE49-F238E27FC236}">
-                <a16:creationId xmlns:a16="http://schemas.microsoft.com/office/drawing/2014/main" id="{F3BFFF7D-178F-4785-9473-8BD0CCE90D3D}"/>
+                <a16:creationId xmlns:a16="http://schemas.microsoft.com/office/drawing/2014/main" id="{895CB455-971D-4339-92FC-75B557412ED8}"/>
               </a:ext>
             </a:extLst>
           </p:cNvPr>
@@ -9144,7 +9144,7 @@
           <p:cNvPr id="5" name="s7-identity">
             <a:extLst xmlns:a="http://schemas.openxmlformats.org/drawingml/2006/main">
               <a:ext uri="{FF2B5EF4-FFF2-40B4-BE49-F238E27FC236}">
-                <a16:creationId xmlns:a16="http://schemas.microsoft.com/office/drawing/2014/main" id="{6897E520-D3DA-4B9E-BC9D-34465DC5C605}"/>
+                <a16:creationId xmlns:a16="http://schemas.microsoft.com/office/drawing/2014/main" id="{AF909C66-CB8F-4B50-8BE4-70F24BFB0E7D}"/>
               </a:ext>
             </a:extLst>
           </p:cNvPr>
@@ -9202,7 +9202,7 @@
           <p:cNvPr id="6" name="core-no-0">
             <a:extLst xmlns:a="http://schemas.openxmlformats.org/drawingml/2006/main">
               <a:ext uri="{FF2B5EF4-FFF2-40B4-BE49-F238E27FC236}">
-                <a16:creationId xmlns:a16="http://schemas.microsoft.com/office/drawing/2014/main" id="{CB6B08B7-E387-49AC-BF63-D9CCA65995F8}"/>
+                <a16:creationId xmlns:a16="http://schemas.microsoft.com/office/drawing/2014/main" id="{173ADE63-16B7-422C-BF17-EF7DFCCB37CE}"/>
               </a:ext>
             </a:extLst>
           </p:cNvPr>
@@ -9260,7 +9260,7 @@
           <p:cNvPr id="7" name="core-label-0">
             <a:extLst xmlns:a="http://schemas.openxmlformats.org/drawingml/2006/main">
               <a:ext uri="{FF2B5EF4-FFF2-40B4-BE49-F238E27FC236}">
-                <a16:creationId xmlns:a16="http://schemas.microsoft.com/office/drawing/2014/main" id="{2FEAA9C7-5ED6-4F7A-B1B2-9C46AB9AF92E}"/>
+                <a16:creationId xmlns:a16="http://schemas.microsoft.com/office/drawing/2014/main" id="{DA010A8F-B65C-4753-BD2F-5B4683EFBA4C}"/>
               </a:ext>
             </a:extLst>
           </p:cNvPr>
@@ -9318,7 +9318,7 @@
           <p:cNvPr id="8" name="core-body-0">
             <a:extLst xmlns:a="http://schemas.openxmlformats.org/drawingml/2006/main">
               <a:ext uri="{FF2B5EF4-FFF2-40B4-BE49-F238E27FC236}">
-                <a16:creationId xmlns:a16="http://schemas.microsoft.com/office/drawing/2014/main" id="{A9DB78C5-4A5C-4D3A-9F8A-CE293E51B207}"/>
+                <a16:creationId xmlns:a16="http://schemas.microsoft.com/office/drawing/2014/main" id="{5C249248-3119-47E1-869B-48389B44088F}"/>
               </a:ext>
             </a:extLst>
           </p:cNvPr>
@@ -9382,7 +9382,7 @@
           <p:cNvPr id="9" name="core-no-1">
             <a:extLst xmlns:a="http://schemas.openxmlformats.org/drawingml/2006/main">
               <a:ext uri="{FF2B5EF4-FFF2-40B4-BE49-F238E27FC236}">
-                <a16:creationId xmlns:a16="http://schemas.microsoft.com/office/drawing/2014/main" id="{C340660F-E6C5-41C5-9F31-59AEA86E2580}"/>
+                <a16:creationId xmlns:a16="http://schemas.microsoft.com/office/drawing/2014/main" id="{6468D6DF-2173-4766-8151-6E1A959A6B26}"/>
               </a:ext>
             </a:extLst>
           </p:cNvPr>
@@ -9440,7 +9440,7 @@
           <p:cNvPr id="10" name="core-body-1">
             <a:extLst xmlns:a="http://schemas.openxmlformats.org/drawingml/2006/main">
               <a:ext uri="{FF2B5EF4-FFF2-40B4-BE49-F238E27FC236}">
-                <a16:creationId xmlns:a16="http://schemas.microsoft.com/office/drawing/2014/main" id="{F6172F92-98E7-4D07-8DEC-23B459C25F7B}"/>
+                <a16:creationId xmlns:a16="http://schemas.microsoft.com/office/drawing/2014/main" id="{1974EEA5-FC22-4036-B09A-69CC2EB43296}"/>
               </a:ext>
             </a:extLst>
           </p:cNvPr>
@@ -9504,7 +9504,7 @@
           <p:cNvPr id="11" name="s7-takeaway-rule">
             <a:extLst xmlns:a="http://schemas.openxmlformats.org/drawingml/2006/main">
               <a:ext uri="{FF2B5EF4-FFF2-40B4-BE49-F238E27FC236}">
-                <a16:creationId xmlns:a16="http://schemas.microsoft.com/office/drawing/2014/main" id="{378A2A31-4C7A-4EEA-8490-5FEAEB8AF43E}"/>
+                <a16:creationId xmlns:a16="http://schemas.microsoft.com/office/drawing/2014/main" id="{3078677A-47BD-4231-9392-988C86C9E065}"/>
               </a:ext>
             </a:extLst>
           </p:cNvPr>
@@ -9537,7 +9537,7 @@
           <p:cNvPr id="12" name="s7-takeaway">
             <a:extLst xmlns:a="http://schemas.openxmlformats.org/drawingml/2006/main">
               <a:ext uri="{FF2B5EF4-FFF2-40B4-BE49-F238E27FC236}">
-                <a16:creationId xmlns:a16="http://schemas.microsoft.com/office/drawing/2014/main" id="{A9617D83-AE08-4DB7-BDBF-765D46B1F39F}"/>
+                <a16:creationId xmlns:a16="http://schemas.microsoft.com/office/drawing/2014/main" id="{8529D347-B309-4BF6-B119-489C2906C1CB}"/>
               </a:ext>
             </a:extLst>
           </p:cNvPr>
@@ -9593,7 +9593,7 @@
     </p:spTree>
     <p:extLst>
       <p:ext uri="{BB962C8B-B14F-4D97-AF65-F5344CB8AC3E}">
-        <p14:creationId xmlns:p14="http://schemas.microsoft.com/office/powerpoint/2010/main" val="797014853"/>
+        <p14:creationId xmlns:p14="http://schemas.microsoft.com/office/powerpoint/2010/main" val="1456983696"/>
       </p:ext>
     </p:extLst>
   </p:cSld>
@@ -9624,7 +9624,7 @@
           <p:cNvPr id="1" name="s8-rule">
             <a:extLst xmlns:a="http://schemas.openxmlformats.org/drawingml/2006/main">
               <a:ext uri="{FF2B5EF4-FFF2-40B4-BE49-F238E27FC236}">
-                <a16:creationId xmlns:a16="http://schemas.microsoft.com/office/drawing/2014/main" id="{32C8D795-0E2E-4761-A691-54EF64F44B96}"/>
+                <a16:creationId xmlns:a16="http://schemas.microsoft.com/office/drawing/2014/main" id="{CD5A4F26-5321-44FB-BD63-15397305E8DC}"/>
               </a:ext>
             </a:extLst>
           </p:cNvPr>
@@ -9657,7 +9657,7 @@
           <p:cNvPr id="2" name="s8-eyebrow">
             <a:extLst xmlns:a="http://schemas.openxmlformats.org/drawingml/2006/main">
               <a:ext uri="{FF2B5EF4-FFF2-40B4-BE49-F238E27FC236}">
-                <a16:creationId xmlns:a16="http://schemas.microsoft.com/office/drawing/2014/main" id="{F8C18FD0-CFE9-46D6-B4E2-7ECCC47EC150}"/>
+                <a16:creationId xmlns:a16="http://schemas.microsoft.com/office/drawing/2014/main" id="{C5DE6D36-AB0F-45E7-B653-C13A93080B1D}"/>
               </a:ext>
             </a:extLst>
           </p:cNvPr>
@@ -9715,7 +9715,7 @@
           <p:cNvPr id="3" name="s8-title">
             <a:extLst xmlns:a="http://schemas.openxmlformats.org/drawingml/2006/main">
               <a:ext uri="{FF2B5EF4-FFF2-40B4-BE49-F238E27FC236}">
-                <a16:creationId xmlns:a16="http://schemas.microsoft.com/office/drawing/2014/main" id="{1A488A12-788E-4B81-B3C3-4B2F31B9148D}"/>
+                <a16:creationId xmlns:a16="http://schemas.microsoft.com/office/drawing/2014/main" id="{E9684C3A-321F-4FB7-94E6-6D882A7CEFB4}"/>
               </a:ext>
             </a:extLst>
           </p:cNvPr>
@@ -9773,7 +9773,7 @@
           <p:cNvPr id="4" name="s8-footer">
             <a:extLst xmlns:a="http://schemas.openxmlformats.org/drawingml/2006/main">
               <a:ext uri="{FF2B5EF4-FFF2-40B4-BE49-F238E27FC236}">
-                <a16:creationId xmlns:a16="http://schemas.microsoft.com/office/drawing/2014/main" id="{3D5E6DB8-C4C7-4761-B5F6-7B7246FBD1E2}"/>
+                <a16:creationId xmlns:a16="http://schemas.microsoft.com/office/drawing/2014/main" id="{AFB5CB0C-6875-478E-BD1C-AFD5B6339618}"/>
               </a:ext>
             </a:extLst>
           </p:cNvPr>
@@ -9804,7 +9804,7 @@
           <p:cNvPr id="5" name="s8-identity">
             <a:extLst xmlns:a="http://schemas.openxmlformats.org/drawingml/2006/main">
               <a:ext uri="{FF2B5EF4-FFF2-40B4-BE49-F238E27FC236}">
-                <a16:creationId xmlns:a16="http://schemas.microsoft.com/office/drawing/2014/main" id="{481B30DB-18D0-44B5-A9B1-394AEA0306DA}"/>
+                <a16:creationId xmlns:a16="http://schemas.microsoft.com/office/drawing/2014/main" id="{AE35A801-66DF-4F6C-B1AE-34906B6BBBCA}"/>
               </a:ext>
             </a:extLst>
           </p:cNvPr>
@@ -9862,7 +9862,7 @@
           <p:cNvPr id="6" name="core-no-0">
             <a:extLst xmlns:a="http://schemas.openxmlformats.org/drawingml/2006/main">
               <a:ext uri="{FF2B5EF4-FFF2-40B4-BE49-F238E27FC236}">
-                <a16:creationId xmlns:a16="http://schemas.microsoft.com/office/drawing/2014/main" id="{91C32C6A-39D5-4F96-9553-1F64B492ACBF}"/>
+                <a16:creationId xmlns:a16="http://schemas.microsoft.com/office/drawing/2014/main" id="{E02CAB5F-1F75-430C-B2DD-D7A10B4D7377}"/>
               </a:ext>
             </a:extLst>
           </p:cNvPr>
@@ -9920,7 +9920,7 @@
           <p:cNvPr id="7" name="core-label-0">
             <a:extLst xmlns:a="http://schemas.openxmlformats.org/drawingml/2006/main">
               <a:ext uri="{FF2B5EF4-FFF2-40B4-BE49-F238E27FC236}">
-                <a16:creationId xmlns:a16="http://schemas.microsoft.com/office/drawing/2014/main" id="{430476DE-7273-494A-A67C-8357CBE46D15}"/>
+                <a16:creationId xmlns:a16="http://schemas.microsoft.com/office/drawing/2014/main" id="{5C23D5AA-FA0D-4744-82A1-D7BCD6B9F7DB}"/>
               </a:ext>
             </a:extLst>
           </p:cNvPr>
@@ -9978,7 +9978,7 @@
           <p:cNvPr id="8" name="core-body-0">
             <a:extLst xmlns:a="http://schemas.openxmlformats.org/drawingml/2006/main">
               <a:ext uri="{FF2B5EF4-FFF2-40B4-BE49-F238E27FC236}">
-                <a16:creationId xmlns:a16="http://schemas.microsoft.com/office/drawing/2014/main" id="{5CB29D2B-4CB0-43D6-830D-1FBFF3BC91DD}"/>
+                <a16:creationId xmlns:a16="http://schemas.microsoft.com/office/drawing/2014/main" id="{4ED7ABCF-A75D-477A-AF90-E3A0AF77CA47}"/>
               </a:ext>
             </a:extLst>
           </p:cNvPr>
@@ -10042,7 +10042,7 @@
           <p:cNvPr id="9" name="core-no-1">
             <a:extLst xmlns:a="http://schemas.openxmlformats.org/drawingml/2006/main">
               <a:ext uri="{FF2B5EF4-FFF2-40B4-BE49-F238E27FC236}">
-                <a16:creationId xmlns:a16="http://schemas.microsoft.com/office/drawing/2014/main" id="{EDCF5C9D-B120-4555-8026-BD9196F25E6F}"/>
+                <a16:creationId xmlns:a16="http://schemas.microsoft.com/office/drawing/2014/main" id="{CE454372-59D7-4984-A687-1ED2F6DB7E83}"/>
               </a:ext>
             </a:extLst>
           </p:cNvPr>
@@ -10100,7 +10100,7 @@
           <p:cNvPr id="10" name="core-body-1">
             <a:extLst xmlns:a="http://schemas.openxmlformats.org/drawingml/2006/main">
               <a:ext uri="{FF2B5EF4-FFF2-40B4-BE49-F238E27FC236}">
-                <a16:creationId xmlns:a16="http://schemas.microsoft.com/office/drawing/2014/main" id="{E4F763FF-BDA4-4B1F-8A1F-14298579B061}"/>
+                <a16:creationId xmlns:a16="http://schemas.microsoft.com/office/drawing/2014/main" id="{1D588D1D-A30F-490B-9463-93A8FA686DAC}"/>
               </a:ext>
             </a:extLst>
           </p:cNvPr>
@@ -10164,7 +10164,7 @@
           <p:cNvPr id="11" name="s8-takeaway-rule">
             <a:extLst xmlns:a="http://schemas.openxmlformats.org/drawingml/2006/main">
               <a:ext uri="{FF2B5EF4-FFF2-40B4-BE49-F238E27FC236}">
-                <a16:creationId xmlns:a16="http://schemas.microsoft.com/office/drawing/2014/main" id="{3A422834-D97C-45EC-B99E-76B081E1D925}"/>
+                <a16:creationId xmlns:a16="http://schemas.microsoft.com/office/drawing/2014/main" id="{90FAA6B5-8F7C-4C36-98A7-FC6C8A2E79CA}"/>
               </a:ext>
             </a:extLst>
           </p:cNvPr>
@@ -10197,7 +10197,7 @@
           <p:cNvPr id="12" name="s8-takeaway">
             <a:extLst xmlns:a="http://schemas.openxmlformats.org/drawingml/2006/main">
               <a:ext uri="{FF2B5EF4-FFF2-40B4-BE49-F238E27FC236}">
-                <a16:creationId xmlns:a16="http://schemas.microsoft.com/office/drawing/2014/main" id="{F807B896-1216-451B-BB70-20FD6E2ACA6B}"/>
+                <a16:creationId xmlns:a16="http://schemas.microsoft.com/office/drawing/2014/main" id="{D1DB0E3E-4077-4D4B-9B40-B77A656741FE}"/>
               </a:ext>
             </a:extLst>
           </p:cNvPr>
@@ -10253,7 +10253,7 @@
     </p:spTree>
     <p:extLst>
       <p:ext uri="{BB962C8B-B14F-4D97-AF65-F5344CB8AC3E}">
-        <p14:creationId xmlns:p14="http://schemas.microsoft.com/office/powerpoint/2010/main" val="1576025265"/>
+        <p14:creationId xmlns:p14="http://schemas.microsoft.com/office/powerpoint/2010/main" val="431256119"/>
       </p:ext>
     </p:extLst>
   </p:cSld>
@@ -10284,7 +10284,7 @@
           <p:cNvPr id="1" name="s9-rule">
             <a:extLst xmlns:a="http://schemas.openxmlformats.org/drawingml/2006/main">
               <a:ext uri="{FF2B5EF4-FFF2-40B4-BE49-F238E27FC236}">
-                <a16:creationId xmlns:a16="http://schemas.microsoft.com/office/drawing/2014/main" id="{66DD5158-1B4B-4916-9ABB-A3D10202B729}"/>
+                <a16:creationId xmlns:a16="http://schemas.microsoft.com/office/drawing/2014/main" id="{D5C2D9CE-1560-417A-A935-76C7E0BE5BAD}"/>
               </a:ext>
             </a:extLst>
           </p:cNvPr>
@@ -10317,7 +10317,7 @@
           <p:cNvPr id="2" name="s9-eyebrow">
             <a:extLst xmlns:a="http://schemas.openxmlformats.org/drawingml/2006/main">
               <a:ext uri="{FF2B5EF4-FFF2-40B4-BE49-F238E27FC236}">
-                <a16:creationId xmlns:a16="http://schemas.microsoft.com/office/drawing/2014/main" id="{2BDBB9F7-D843-4B8F-B796-566EBC87D177}"/>
+                <a16:creationId xmlns:a16="http://schemas.microsoft.com/office/drawing/2014/main" id="{1A42F3A0-B53E-40FF-B7C9-D640B3C7CC9C}"/>
               </a:ext>
             </a:extLst>
           </p:cNvPr>
@@ -10375,7 +10375,7 @@
           <p:cNvPr id="3" name="s9-title">
             <a:extLst xmlns:a="http://schemas.openxmlformats.org/drawingml/2006/main">
               <a:ext uri="{FF2B5EF4-FFF2-40B4-BE49-F238E27FC236}">
-                <a16:creationId xmlns:a16="http://schemas.microsoft.com/office/drawing/2014/main" id="{402D8BE0-EE79-424F-84E9-2036CF074B24}"/>
+                <a16:creationId xmlns:a16="http://schemas.microsoft.com/office/drawing/2014/main" id="{5314B574-D0B7-4874-8CDB-ABDA549E0F73}"/>
               </a:ext>
             </a:extLst>
           </p:cNvPr>
@@ -10433,7 +10433,7 @@
           <p:cNvPr id="4" name="s9-footer">
             <a:extLst xmlns:a="http://schemas.openxmlformats.org/drawingml/2006/main">
               <a:ext uri="{FF2B5EF4-FFF2-40B4-BE49-F238E27FC236}">
-                <a16:creationId xmlns:a16="http://schemas.microsoft.com/office/drawing/2014/main" id="{D935802A-3003-41A4-A7A5-1D41A44A9B22}"/>
+                <a16:creationId xmlns:a16="http://schemas.microsoft.com/office/drawing/2014/main" id="{568BE45B-A126-467D-BADF-76A1ED56E27E}"/>
               </a:ext>
             </a:extLst>
           </p:cNvPr>
@@ -10464,7 +10464,7 @@
           <p:cNvPr id="5" name="s9-identity">
             <a:extLst xmlns:a="http://schemas.openxmlformats.org/drawingml/2006/main">
               <a:ext uri="{FF2B5EF4-FFF2-40B4-BE49-F238E27FC236}">
-                <a16:creationId xmlns:a16="http://schemas.microsoft.com/office/drawing/2014/main" id="{A3557155-E2C9-463F-BBB8-94AC9B113AEC}"/>
+                <a16:creationId xmlns:a16="http://schemas.microsoft.com/office/drawing/2014/main" id="{BD4B1AD6-1C94-4237-ADDF-9A770F9A2008}"/>
               </a:ext>
             </a:extLst>
           </p:cNvPr>
@@ -10522,7 +10522,7 @@
           <p:cNvPr id="6" name="case-title">
             <a:extLst xmlns:a="http://schemas.openxmlformats.org/drawingml/2006/main">
               <a:ext uri="{FF2B5EF4-FFF2-40B4-BE49-F238E27FC236}">
-                <a16:creationId xmlns:a16="http://schemas.microsoft.com/office/drawing/2014/main" id="{ED3AA0A0-9378-48AC-A9FE-6B1D48F4D27C}"/>
+                <a16:creationId xmlns:a16="http://schemas.microsoft.com/office/drawing/2014/main" id="{0590709B-FEA1-40AA-8ACD-69D1D1C10BDA}"/>
               </a:ext>
             </a:extLst>
           </p:cNvPr>
@@ -10586,7 +10586,7 @@
           <p:cNvPr id="7" name="case-row-0">
             <a:extLst xmlns:a="http://schemas.openxmlformats.org/drawingml/2006/main">
               <a:ext uri="{FF2B5EF4-FFF2-40B4-BE49-F238E27FC236}">
-                <a16:creationId xmlns:a16="http://schemas.microsoft.com/office/drawing/2014/main" id="{E425D2D7-D65F-4003-8F08-3909892749FE}"/>
+                <a16:creationId xmlns:a16="http://schemas.microsoft.com/office/drawing/2014/main" id="{CF999994-A237-498A-83CE-8EAB5B0EBE90}"/>
               </a:ext>
             </a:extLst>
           </p:cNvPr>
@@ -10650,7 +10650,7 @@
           <p:cNvPr id="8" name="case-row-1">
             <a:extLst xmlns:a="http://schemas.openxmlformats.org/drawingml/2006/main">
               <a:ext uri="{FF2B5EF4-FFF2-40B4-BE49-F238E27FC236}">
-                <a16:creationId xmlns:a16="http://schemas.microsoft.com/office/drawing/2014/main" id="{1B58708B-33C7-4426-A791-3B496CCA3143}"/>
+                <a16:creationId xmlns:a16="http://schemas.microsoft.com/office/drawing/2014/main" id="{E87856F1-7B1F-4991-8B2E-9F0913AD8A96}"/>
               </a:ext>
             </a:extLst>
           </p:cNvPr>
@@ -10714,7 +10714,7 @@
           <p:cNvPr id="9" name="case-row-2">
             <a:extLst xmlns:a="http://schemas.openxmlformats.org/drawingml/2006/main">
               <a:ext uri="{FF2B5EF4-FFF2-40B4-BE49-F238E27FC236}">
-                <a16:creationId xmlns:a16="http://schemas.microsoft.com/office/drawing/2014/main" id="{F0FFD8F8-BA54-4BE9-91E7-5E85E1F94935}"/>
+                <a16:creationId xmlns:a16="http://schemas.microsoft.com/office/drawing/2014/main" id="{A6594B89-821A-4A1F-BBE9-169B8B164FF3}"/>
               </a:ext>
             </a:extLst>
           </p:cNvPr>
@@ -10778,7 +10778,7 @@
           <p:cNvPr id="10" name="case-row-3">
             <a:extLst xmlns:a="http://schemas.openxmlformats.org/drawingml/2006/main">
               <a:ext uri="{FF2B5EF4-FFF2-40B4-BE49-F238E27FC236}">
-                <a16:creationId xmlns:a16="http://schemas.microsoft.com/office/drawing/2014/main" id="{F1D8BE0C-D693-42E5-BEE4-00A1E044F105}"/>
+                <a16:creationId xmlns:a16="http://schemas.microsoft.com/office/drawing/2014/main" id="{7DA0BDAB-4E7D-4156-BA46-61297C8C5133}"/>
               </a:ext>
             </a:extLst>
           </p:cNvPr>
@@ -10842,7 +10842,7 @@
           <p:cNvPr id="11" name="s9-takeaway-rule">
             <a:extLst xmlns:a="http://schemas.openxmlformats.org/drawingml/2006/main">
               <a:ext uri="{FF2B5EF4-FFF2-40B4-BE49-F238E27FC236}">
-                <a16:creationId xmlns:a16="http://schemas.microsoft.com/office/drawing/2014/main" id="{29CE3A3B-5706-45F5-B782-0FABDC358789}"/>
+                <a16:creationId xmlns:a16="http://schemas.microsoft.com/office/drawing/2014/main" id="{92D01166-A324-4FAB-BE12-BE860C64B9AE}"/>
               </a:ext>
             </a:extLst>
           </p:cNvPr>
@@ -10875,7 +10875,7 @@
           <p:cNvPr id="12" name="s9-takeaway">
             <a:extLst xmlns:a="http://schemas.openxmlformats.org/drawingml/2006/main">
               <a:ext uri="{FF2B5EF4-FFF2-40B4-BE49-F238E27FC236}">
-                <a16:creationId xmlns:a16="http://schemas.microsoft.com/office/drawing/2014/main" id="{EE8BDBD0-085D-4745-BC72-969DD398766E}"/>
+                <a16:creationId xmlns:a16="http://schemas.microsoft.com/office/drawing/2014/main" id="{5B1F2FE6-F41E-4AE7-BA01-DC383660C764}"/>
               </a:ext>
             </a:extLst>
           </p:cNvPr>
@@ -10931,7 +10931,7 @@
     </p:spTree>
     <p:extLst>
       <p:ext uri="{BB962C8B-B14F-4D97-AF65-F5344CB8AC3E}">
-        <p14:creationId xmlns:p14="http://schemas.microsoft.com/office/powerpoint/2010/main" val="1450618927"/>
+        <p14:creationId xmlns:p14="http://schemas.microsoft.com/office/powerpoint/2010/main" val="765554325"/>
       </p:ext>
     </p:extLst>
   </p:cSld>

--- a/docs/public/course-assets/course-pptx/in-007.pptx
+++ b/docs/public/course-assets/course-pptx/in-007.pptx
@@ -2,25 +2,25 @@
 <file path=ppt/presentation.xml><?xml version="1.0" encoding="utf-8"?>
 <p:presentation xmlns:p="http://schemas.openxmlformats.org/presentationml/2006/main">
   <p:sldMasterIdLst>
-    <p:sldMasterId xmlns:r="http://schemas.openxmlformats.org/officeDocument/2006/relationships" id="2147483648" r:id="Rd055bc7731e9407f"/>
+    <p:sldMasterId xmlns:r="http://schemas.openxmlformats.org/officeDocument/2006/relationships" id="2147483648" r:id="Rf08127d07c6d4ba6"/>
   </p:sldMasterIdLst>
   <p:notesMasterIdLst>
-    <p:notesMasterId xmlns:r="http://schemas.openxmlformats.org/officeDocument/2006/relationships" r:id="R731686b1e1804987"/>
+    <p:notesMasterId xmlns:r="http://schemas.openxmlformats.org/officeDocument/2006/relationships" r:id="Rd288bc896bd84b34"/>
   </p:notesMasterIdLst>
   <p:sldIdLst>
-    <p:sldId xmlns:r="http://schemas.openxmlformats.org/officeDocument/2006/relationships" id="256" r:id="R69eda4879cd14997"/>
-    <p:sldId xmlns:r="http://schemas.openxmlformats.org/officeDocument/2006/relationships" id="257" r:id="R047acbfe00984f40"/>
-    <p:sldId xmlns:r="http://schemas.openxmlformats.org/officeDocument/2006/relationships" id="258" r:id="Rd4887ba569224819"/>
-    <p:sldId xmlns:r="http://schemas.openxmlformats.org/officeDocument/2006/relationships" id="259" r:id="R55de444514fe4126"/>
-    <p:sldId xmlns:r="http://schemas.openxmlformats.org/officeDocument/2006/relationships" id="260" r:id="R6b262a59c663408b"/>
-    <p:sldId xmlns:r="http://schemas.openxmlformats.org/officeDocument/2006/relationships" id="261" r:id="R504d6f36af544514"/>
-    <p:sldId xmlns:r="http://schemas.openxmlformats.org/officeDocument/2006/relationships" id="262" r:id="Ra474323502ea4752"/>
-    <p:sldId xmlns:r="http://schemas.openxmlformats.org/officeDocument/2006/relationships" id="263" r:id="R16851b450d634f41"/>
-    <p:sldId xmlns:r="http://schemas.openxmlformats.org/officeDocument/2006/relationships" id="264" r:id="Re29532358e814e80"/>
-    <p:sldId xmlns:r="http://schemas.openxmlformats.org/officeDocument/2006/relationships" id="265" r:id="Rb3e50e81ef6c4dc6"/>
-    <p:sldId xmlns:r="http://schemas.openxmlformats.org/officeDocument/2006/relationships" id="266" r:id="R067046a6ced14aaa"/>
-    <p:sldId xmlns:r="http://schemas.openxmlformats.org/officeDocument/2006/relationships" id="267" r:id="R44663af97e474162"/>
-    <p:sldId xmlns:r="http://schemas.openxmlformats.org/officeDocument/2006/relationships" id="268" r:id="Rbf801409bd4e4989"/>
+    <p:sldId xmlns:r="http://schemas.openxmlformats.org/officeDocument/2006/relationships" id="256" r:id="R3fd5e9a871444513"/>
+    <p:sldId xmlns:r="http://schemas.openxmlformats.org/officeDocument/2006/relationships" id="257" r:id="Re6843a9c6168478b"/>
+    <p:sldId xmlns:r="http://schemas.openxmlformats.org/officeDocument/2006/relationships" id="258" r:id="R9449ee46d47644e2"/>
+    <p:sldId xmlns:r="http://schemas.openxmlformats.org/officeDocument/2006/relationships" id="259" r:id="Rdd35c0dfa1dd4c34"/>
+    <p:sldId xmlns:r="http://schemas.openxmlformats.org/officeDocument/2006/relationships" id="260" r:id="R3807676f504f479b"/>
+    <p:sldId xmlns:r="http://schemas.openxmlformats.org/officeDocument/2006/relationships" id="261" r:id="Rff4b4dfff17d4260"/>
+    <p:sldId xmlns:r="http://schemas.openxmlformats.org/officeDocument/2006/relationships" id="262" r:id="R5617f7048fd94737"/>
+    <p:sldId xmlns:r="http://schemas.openxmlformats.org/officeDocument/2006/relationships" id="263" r:id="R8f29c8fa6cd94b56"/>
+    <p:sldId xmlns:r="http://schemas.openxmlformats.org/officeDocument/2006/relationships" id="264" r:id="R81e4e23ff2ed4718"/>
+    <p:sldId xmlns:r="http://schemas.openxmlformats.org/officeDocument/2006/relationships" id="265" r:id="Rc6a9c4ffdec64ed1"/>
+    <p:sldId xmlns:r="http://schemas.openxmlformats.org/officeDocument/2006/relationships" id="266" r:id="Rbaa0bbffefae4ba0"/>
+    <p:sldId xmlns:r="http://schemas.openxmlformats.org/officeDocument/2006/relationships" id="267" r:id="R1dc6d6018a784722"/>
+    <p:sldId xmlns:r="http://schemas.openxmlformats.org/officeDocument/2006/relationships" id="268" r:id="R6685d5293e4f4527"/>
   </p:sldIdLst>
   <p:sldSz cx="12192000" cy="6858000"/>
   <p:notesSz cx="6858000" cy="9144000"/>
@@ -1405,7 +1405,7 @@
   </p:cSld>
   <p:clrMap bg1="lt1" tx1="dk1" bg2="lt2" tx2="dk2" accent1="accent1" accent2="accent2" accent3="accent3" accent4="accent4" accent5="accent5" accent6="accent6" hlink="hlink" folHlink="folHlink"/>
   <p:sldLayoutIdLst>
-    <p:sldLayoutId xmlns:r="http://schemas.openxmlformats.org/officeDocument/2006/relationships" id="2147483649" r:id="Rfe6d05acd30546e0"/>
+    <p:sldLayoutId xmlns:r="http://schemas.openxmlformats.org/officeDocument/2006/relationships" id="2147483649" r:id="R5d38be9086094a88"/>
   </p:sldLayoutIdLst>
   <p:txStyles>
     <p:titleStyle>
@@ -1956,7 +1956,7 @@
           <p:cNvPr id="1" name="cover-rule">
             <a:extLst xmlns:a="http://schemas.openxmlformats.org/drawingml/2006/main">
               <a:ext uri="{FF2B5EF4-FFF2-40B4-BE49-F238E27FC236}">
-                <a16:creationId xmlns:a16="http://schemas.microsoft.com/office/drawing/2014/main" id="{66A43FAA-553D-4B53-BBAD-FFE0C7B5854B}"/>
+                <a16:creationId xmlns:a16="http://schemas.microsoft.com/office/drawing/2014/main" id="{2390395A-0F26-4EAD-B1FA-8D3B759F45BE}"/>
               </a:ext>
             </a:extLst>
           </p:cNvPr>
@@ -1989,7 +1989,7 @@
           <p:cNvPr id="2" name="cover-ring-1">
             <a:extLst xmlns:a="http://schemas.openxmlformats.org/drawingml/2006/main">
               <a:ext uri="{FF2B5EF4-FFF2-40B4-BE49-F238E27FC236}">
-                <a16:creationId xmlns:a16="http://schemas.microsoft.com/office/drawing/2014/main" id="{E55382D8-BF5A-4337-81DE-4CC5937B1E7A}"/>
+                <a16:creationId xmlns:a16="http://schemas.microsoft.com/office/drawing/2014/main" id="{C66D946C-78E1-497D-9560-035E68E5075D}"/>
               </a:ext>
             </a:extLst>
           </p:cNvPr>
@@ -2020,7 +2020,7 @@
           <p:cNvPr id="3" name="cover-ring-2">
             <a:extLst xmlns:a="http://schemas.openxmlformats.org/drawingml/2006/main">
               <a:ext uri="{FF2B5EF4-FFF2-40B4-BE49-F238E27FC236}">
-                <a16:creationId xmlns:a16="http://schemas.microsoft.com/office/drawing/2014/main" id="{4FF69F5C-C389-40F5-A091-06675C2C5043}"/>
+                <a16:creationId xmlns:a16="http://schemas.microsoft.com/office/drawing/2014/main" id="{D4D8EFBF-807E-4335-82B1-1EBE981BDF8A}"/>
               </a:ext>
             </a:extLst>
           </p:cNvPr>
@@ -2051,7 +2051,7 @@
           <p:cNvPr id="4" name="cover-core">
             <a:extLst xmlns:a="http://schemas.openxmlformats.org/drawingml/2006/main">
               <a:ext uri="{FF2B5EF4-FFF2-40B4-BE49-F238E27FC236}">
-                <a16:creationId xmlns:a16="http://schemas.microsoft.com/office/drawing/2014/main" id="{FC34ED9F-EEEE-43BF-94B4-7EE537BB877E}"/>
+                <a16:creationId xmlns:a16="http://schemas.microsoft.com/office/drawing/2014/main" id="{A85166A0-CABA-4AFE-B994-89970424EB1F}"/>
               </a:ext>
             </a:extLst>
           </p:cNvPr>
@@ -2084,7 +2084,7 @@
           <p:cNvPr id="5" name="cover-line-1">
             <a:extLst xmlns:a="http://schemas.openxmlformats.org/drawingml/2006/main">
               <a:ext uri="{FF2B5EF4-FFF2-40B4-BE49-F238E27FC236}">
-                <a16:creationId xmlns:a16="http://schemas.microsoft.com/office/drawing/2014/main" id="{3D8F4B5A-DB69-44F5-ABC8-8A51325E8C2D}"/>
+                <a16:creationId xmlns:a16="http://schemas.microsoft.com/office/drawing/2014/main" id="{212D1C89-8767-4981-8522-6BCF22EC823D}"/>
               </a:ext>
             </a:extLst>
           </p:cNvPr>
@@ -2115,7 +2115,7 @@
           <p:cNvPr id="6" name="cover-line-2">
             <a:extLst xmlns:a="http://schemas.openxmlformats.org/drawingml/2006/main">
               <a:ext uri="{FF2B5EF4-FFF2-40B4-BE49-F238E27FC236}">
-                <a16:creationId xmlns:a16="http://schemas.microsoft.com/office/drawing/2014/main" id="{559ABDDE-3E9E-4132-8440-672DE10A669B}"/>
+                <a16:creationId xmlns:a16="http://schemas.microsoft.com/office/drawing/2014/main" id="{CF98A84F-7051-43BD-ACC8-D826ED76C170}"/>
               </a:ext>
             </a:extLst>
           </p:cNvPr>
@@ -2146,7 +2146,7 @@
           <p:cNvPr id="7" name="cover-eyebrow">
             <a:extLst xmlns:a="http://schemas.openxmlformats.org/drawingml/2006/main">
               <a:ext uri="{FF2B5EF4-FFF2-40B4-BE49-F238E27FC236}">
-                <a16:creationId xmlns:a16="http://schemas.microsoft.com/office/drawing/2014/main" id="{87D19195-759C-4C1C-A996-A4B208ACEE75}"/>
+                <a16:creationId xmlns:a16="http://schemas.microsoft.com/office/drawing/2014/main" id="{14E8522F-1492-45C6-BBFC-F42518A5179C}"/>
               </a:ext>
             </a:extLst>
           </p:cNvPr>
@@ -2204,7 +2204,7 @@
           <p:cNvPr id="8" name="cover-title">
             <a:extLst xmlns:a="http://schemas.openxmlformats.org/drawingml/2006/main">
               <a:ext uri="{FF2B5EF4-FFF2-40B4-BE49-F238E27FC236}">
-                <a16:creationId xmlns:a16="http://schemas.microsoft.com/office/drawing/2014/main" id="{547FF459-DAC0-4CB9-9D2E-584B056C7E40}"/>
+                <a16:creationId xmlns:a16="http://schemas.microsoft.com/office/drawing/2014/main" id="{2EBCD9A2-0193-40A9-93C6-C36C79426C3D}"/>
               </a:ext>
             </a:extLst>
           </p:cNvPr>
@@ -2262,7 +2262,7 @@
           <p:cNvPr id="9" name="cover-subtitle">
             <a:extLst xmlns:a="http://schemas.openxmlformats.org/drawingml/2006/main">
               <a:ext uri="{FF2B5EF4-FFF2-40B4-BE49-F238E27FC236}">
-                <a16:creationId xmlns:a16="http://schemas.microsoft.com/office/drawing/2014/main" id="{18B2AE95-800D-4A8A-AE4B-4C01247A3344}"/>
+                <a16:creationId xmlns:a16="http://schemas.microsoft.com/office/drawing/2014/main" id="{D8ED14E0-72B0-4B1B-9CBA-C0F234A8A923}"/>
               </a:ext>
             </a:extLst>
           </p:cNvPr>
@@ -2324,7 +2324,7 @@
           <p:cNvPr id="10" name="cover-lead">
             <a:extLst xmlns:a="http://schemas.openxmlformats.org/drawingml/2006/main">
               <a:ext uri="{FF2B5EF4-FFF2-40B4-BE49-F238E27FC236}">
-                <a16:creationId xmlns:a16="http://schemas.microsoft.com/office/drawing/2014/main" id="{900AE851-D897-4878-BC45-8A8C60194348}"/>
+                <a16:creationId xmlns:a16="http://schemas.microsoft.com/office/drawing/2014/main" id="{BF9D5A5C-AF85-4BD4-BA97-91C757D80DF2}"/>
               </a:ext>
             </a:extLst>
           </p:cNvPr>
@@ -2382,7 +2382,7 @@
           <p:cNvPr id="11" name="cover-course">
             <a:extLst xmlns:a="http://schemas.openxmlformats.org/drawingml/2006/main">
               <a:ext uri="{FF2B5EF4-FFF2-40B4-BE49-F238E27FC236}">
-                <a16:creationId xmlns:a16="http://schemas.microsoft.com/office/drawing/2014/main" id="{FA74DC26-3E4B-4DD2-AC37-F43B1E36682B}"/>
+                <a16:creationId xmlns:a16="http://schemas.microsoft.com/office/drawing/2014/main" id="{15499082-2703-430F-B739-857E035B0A55}"/>
               </a:ext>
             </a:extLst>
           </p:cNvPr>
@@ -2440,7 +2440,7 @@
           <p:cNvPr id="12" name="cover-id">
             <a:extLst xmlns:a="http://schemas.openxmlformats.org/drawingml/2006/main">
               <a:ext uri="{FF2B5EF4-FFF2-40B4-BE49-F238E27FC236}">
-                <a16:creationId xmlns:a16="http://schemas.microsoft.com/office/drawing/2014/main" id="{47D77E87-D400-4945-8B8D-975DD77E2869}"/>
+                <a16:creationId xmlns:a16="http://schemas.microsoft.com/office/drawing/2014/main" id="{2305C87C-6636-4DC2-AAF5-D63CE569839C}"/>
               </a:ext>
             </a:extLst>
           </p:cNvPr>
@@ -2496,7 +2496,7 @@
     </p:spTree>
     <p:extLst>
       <p:ext uri="{BB962C8B-B14F-4D97-AF65-F5344CB8AC3E}">
-        <p14:creationId xmlns:p14="http://schemas.microsoft.com/office/powerpoint/2010/main" val="521987869"/>
+        <p14:creationId xmlns:p14="http://schemas.microsoft.com/office/powerpoint/2010/main" val="1518518796"/>
       </p:ext>
     </p:extLst>
   </p:cSld>
@@ -2527,7 +2527,7 @@
           <p:cNvPr id="1" name="s10-rule">
             <a:extLst xmlns:a="http://schemas.openxmlformats.org/drawingml/2006/main">
               <a:ext uri="{FF2B5EF4-FFF2-40B4-BE49-F238E27FC236}">
-                <a16:creationId xmlns:a16="http://schemas.microsoft.com/office/drawing/2014/main" id="{40836A4B-9359-4E1B-A5B9-2228371B5D31}"/>
+                <a16:creationId xmlns:a16="http://schemas.microsoft.com/office/drawing/2014/main" id="{14080950-7347-49AF-86A5-57713C2DD1B7}"/>
               </a:ext>
             </a:extLst>
           </p:cNvPr>
@@ -2560,7 +2560,7 @@
           <p:cNvPr id="2" name="s10-eyebrow">
             <a:extLst xmlns:a="http://schemas.openxmlformats.org/drawingml/2006/main">
               <a:ext uri="{FF2B5EF4-FFF2-40B4-BE49-F238E27FC236}">
-                <a16:creationId xmlns:a16="http://schemas.microsoft.com/office/drawing/2014/main" id="{66088AC1-4153-4286-9DD4-232F334FDA97}"/>
+                <a16:creationId xmlns:a16="http://schemas.microsoft.com/office/drawing/2014/main" id="{82172572-7765-4D3D-8D78-ACEF7441BACA}"/>
               </a:ext>
             </a:extLst>
           </p:cNvPr>
@@ -2618,7 +2618,7 @@
           <p:cNvPr id="3" name="s10-title">
             <a:extLst xmlns:a="http://schemas.openxmlformats.org/drawingml/2006/main">
               <a:ext uri="{FF2B5EF4-FFF2-40B4-BE49-F238E27FC236}">
-                <a16:creationId xmlns:a16="http://schemas.microsoft.com/office/drawing/2014/main" id="{1349335B-A2F0-4895-8B0A-53438C4C7E46}"/>
+                <a16:creationId xmlns:a16="http://schemas.microsoft.com/office/drawing/2014/main" id="{08F0A676-1B7E-4A01-83F6-EF1C515FA924}"/>
               </a:ext>
             </a:extLst>
           </p:cNvPr>
@@ -2676,7 +2676,7 @@
           <p:cNvPr id="4" name="s10-footer">
             <a:extLst xmlns:a="http://schemas.openxmlformats.org/drawingml/2006/main">
               <a:ext uri="{FF2B5EF4-FFF2-40B4-BE49-F238E27FC236}">
-                <a16:creationId xmlns:a16="http://schemas.microsoft.com/office/drawing/2014/main" id="{DE971FBC-85D9-4DC3-BDBF-4DF718B9D97E}"/>
+                <a16:creationId xmlns:a16="http://schemas.microsoft.com/office/drawing/2014/main" id="{6DBB9EF1-F7CE-436F-BF7E-F740B1FCEE0B}"/>
               </a:ext>
             </a:extLst>
           </p:cNvPr>
@@ -2707,7 +2707,7 @@
           <p:cNvPr id="5" name="s10-identity">
             <a:extLst xmlns:a="http://schemas.openxmlformats.org/drawingml/2006/main">
               <a:ext uri="{FF2B5EF4-FFF2-40B4-BE49-F238E27FC236}">
-                <a16:creationId xmlns:a16="http://schemas.microsoft.com/office/drawing/2014/main" id="{7F71E4F0-0044-4DAF-81FD-2AD6FDF6A5D4}"/>
+                <a16:creationId xmlns:a16="http://schemas.microsoft.com/office/drawing/2014/main" id="{0EE13EBF-CDFA-4661-BE2B-B39E936911F1}"/>
               </a:ext>
             </a:extLst>
           </p:cNvPr>
@@ -2765,7 +2765,7 @@
           <p:cNvPr id="6" name="case-title">
             <a:extLst xmlns:a="http://schemas.openxmlformats.org/drawingml/2006/main">
               <a:ext uri="{FF2B5EF4-FFF2-40B4-BE49-F238E27FC236}">
-                <a16:creationId xmlns:a16="http://schemas.microsoft.com/office/drawing/2014/main" id="{51F280FA-C8D5-4AB6-B39B-D993C69210A4}"/>
+                <a16:creationId xmlns:a16="http://schemas.microsoft.com/office/drawing/2014/main" id="{DD76E8C1-DC0E-44EE-A53B-B511A794E2C4}"/>
               </a:ext>
             </a:extLst>
           </p:cNvPr>
@@ -2829,7 +2829,7 @@
           <p:cNvPr id="7" name="case-row-0">
             <a:extLst xmlns:a="http://schemas.openxmlformats.org/drawingml/2006/main">
               <a:ext uri="{FF2B5EF4-FFF2-40B4-BE49-F238E27FC236}">
-                <a16:creationId xmlns:a16="http://schemas.microsoft.com/office/drawing/2014/main" id="{4BAA34F3-B7EC-4C31-BA03-F7E35CB10CDA}"/>
+                <a16:creationId xmlns:a16="http://schemas.microsoft.com/office/drawing/2014/main" id="{FE5666DF-FD74-4CB7-89FF-7D6FD39F5248}"/>
               </a:ext>
             </a:extLst>
           </p:cNvPr>
@@ -2893,7 +2893,7 @@
           <p:cNvPr id="8" name="case-row-1">
             <a:extLst xmlns:a="http://schemas.openxmlformats.org/drawingml/2006/main">
               <a:ext uri="{FF2B5EF4-FFF2-40B4-BE49-F238E27FC236}">
-                <a16:creationId xmlns:a16="http://schemas.microsoft.com/office/drawing/2014/main" id="{675C7957-2D4D-4A3B-AAE2-638B2E8C4E71}"/>
+                <a16:creationId xmlns:a16="http://schemas.microsoft.com/office/drawing/2014/main" id="{153CCEA7-51D6-4781-BF01-0AAFB9ED409E}"/>
               </a:ext>
             </a:extLst>
           </p:cNvPr>
@@ -2957,7 +2957,7 @@
           <p:cNvPr id="9" name="case-row-2">
             <a:extLst xmlns:a="http://schemas.openxmlformats.org/drawingml/2006/main">
               <a:ext uri="{FF2B5EF4-FFF2-40B4-BE49-F238E27FC236}">
-                <a16:creationId xmlns:a16="http://schemas.microsoft.com/office/drawing/2014/main" id="{160DFF53-7037-48AA-8B89-418C4EE969A6}"/>
+                <a16:creationId xmlns:a16="http://schemas.microsoft.com/office/drawing/2014/main" id="{BF0E340A-82F5-4492-B2DD-29BAAEFCD727}"/>
               </a:ext>
             </a:extLst>
           </p:cNvPr>
@@ -3021,7 +3021,7 @@
           <p:cNvPr id="10" name="s10-takeaway-rule">
             <a:extLst xmlns:a="http://schemas.openxmlformats.org/drawingml/2006/main">
               <a:ext uri="{FF2B5EF4-FFF2-40B4-BE49-F238E27FC236}">
-                <a16:creationId xmlns:a16="http://schemas.microsoft.com/office/drawing/2014/main" id="{EA2B8B16-754D-48DF-AA8B-19725E8E9E9C}"/>
+                <a16:creationId xmlns:a16="http://schemas.microsoft.com/office/drawing/2014/main" id="{04CCFB26-216C-478F-845A-C96FAF71612F}"/>
               </a:ext>
             </a:extLst>
           </p:cNvPr>
@@ -3054,7 +3054,7 @@
           <p:cNvPr id="11" name="s10-takeaway">
             <a:extLst xmlns:a="http://schemas.openxmlformats.org/drawingml/2006/main">
               <a:ext uri="{FF2B5EF4-FFF2-40B4-BE49-F238E27FC236}">
-                <a16:creationId xmlns:a16="http://schemas.microsoft.com/office/drawing/2014/main" id="{5E3297AD-C6D7-496E-A555-08CC5C91F6FF}"/>
+                <a16:creationId xmlns:a16="http://schemas.microsoft.com/office/drawing/2014/main" id="{15C58B92-5430-4F17-AD74-F62E907BCF1D}"/>
               </a:ext>
             </a:extLst>
           </p:cNvPr>
@@ -3110,7 +3110,7 @@
     </p:spTree>
     <p:extLst>
       <p:ext uri="{BB962C8B-B14F-4D97-AF65-F5344CB8AC3E}">
-        <p14:creationId xmlns:p14="http://schemas.microsoft.com/office/powerpoint/2010/main" val="1254543212"/>
+        <p14:creationId xmlns:p14="http://schemas.microsoft.com/office/powerpoint/2010/main" val="834306513"/>
       </p:ext>
     </p:extLst>
   </p:cSld>
@@ -3141,7 +3141,7 @@
           <p:cNvPr id="1" name="s11-rule">
             <a:extLst xmlns:a="http://schemas.openxmlformats.org/drawingml/2006/main">
               <a:ext uri="{FF2B5EF4-FFF2-40B4-BE49-F238E27FC236}">
-                <a16:creationId xmlns:a16="http://schemas.microsoft.com/office/drawing/2014/main" id="{E178C7D4-A4C6-41D9-832C-FE646BA6F21B}"/>
+                <a16:creationId xmlns:a16="http://schemas.microsoft.com/office/drawing/2014/main" id="{957BEA23-EF22-42D2-8D88-E163B841C1C7}"/>
               </a:ext>
             </a:extLst>
           </p:cNvPr>
@@ -3174,7 +3174,7 @@
           <p:cNvPr id="2" name="s11-eyebrow">
             <a:extLst xmlns:a="http://schemas.openxmlformats.org/drawingml/2006/main">
               <a:ext uri="{FF2B5EF4-FFF2-40B4-BE49-F238E27FC236}">
-                <a16:creationId xmlns:a16="http://schemas.microsoft.com/office/drawing/2014/main" id="{842DFB4C-2676-4441-8012-814B5DE2E440}"/>
+                <a16:creationId xmlns:a16="http://schemas.microsoft.com/office/drawing/2014/main" id="{FD8EF6B0-CC3C-4B26-9C27-D8B7FC36AEEB}"/>
               </a:ext>
             </a:extLst>
           </p:cNvPr>
@@ -3232,7 +3232,7 @@
           <p:cNvPr id="3" name="s11-title">
             <a:extLst xmlns:a="http://schemas.openxmlformats.org/drawingml/2006/main">
               <a:ext uri="{FF2B5EF4-FFF2-40B4-BE49-F238E27FC236}">
-                <a16:creationId xmlns:a16="http://schemas.microsoft.com/office/drawing/2014/main" id="{11C178DD-BC19-4C7B-A912-4C67906A536D}"/>
+                <a16:creationId xmlns:a16="http://schemas.microsoft.com/office/drawing/2014/main" id="{251B9041-DBF2-462D-9DA8-29237556E974}"/>
               </a:ext>
             </a:extLst>
           </p:cNvPr>
@@ -3290,7 +3290,7 @@
           <p:cNvPr id="4" name="s11-footer">
             <a:extLst xmlns:a="http://schemas.openxmlformats.org/drawingml/2006/main">
               <a:ext uri="{FF2B5EF4-FFF2-40B4-BE49-F238E27FC236}">
-                <a16:creationId xmlns:a16="http://schemas.microsoft.com/office/drawing/2014/main" id="{B0684A78-52FF-4E71-B007-C8BF38A2C2F9}"/>
+                <a16:creationId xmlns:a16="http://schemas.microsoft.com/office/drawing/2014/main" id="{665DF8E9-F7C9-4E19-A1CC-AFFD41B4CB5F}"/>
               </a:ext>
             </a:extLst>
           </p:cNvPr>
@@ -3321,7 +3321,7 @@
           <p:cNvPr id="5" name="s11-identity">
             <a:extLst xmlns:a="http://schemas.openxmlformats.org/drawingml/2006/main">
               <a:ext uri="{FF2B5EF4-FFF2-40B4-BE49-F238E27FC236}">
-                <a16:creationId xmlns:a16="http://schemas.microsoft.com/office/drawing/2014/main" id="{C536AE5C-F882-4C59-AE94-82AE00FAA09E}"/>
+                <a16:creationId xmlns:a16="http://schemas.microsoft.com/office/drawing/2014/main" id="{28C0F208-73D4-4AC3-AB74-E5C0198B74F0}"/>
               </a:ext>
             </a:extLst>
           </p:cNvPr>
@@ -3379,7 +3379,7 @@
           <p:cNvPr id="6" name="practice-circle-0">
             <a:extLst xmlns:a="http://schemas.openxmlformats.org/drawingml/2006/main">
               <a:ext uri="{FF2B5EF4-FFF2-40B4-BE49-F238E27FC236}">
-                <a16:creationId xmlns:a16="http://schemas.microsoft.com/office/drawing/2014/main" id="{CEF0C33D-9849-4F56-AE8C-9F159296E927}"/>
+                <a16:creationId xmlns:a16="http://schemas.microsoft.com/office/drawing/2014/main" id="{EF99A399-5E31-422F-B8AB-995F4B8BBAC0}"/>
               </a:ext>
             </a:extLst>
           </p:cNvPr>
@@ -3412,7 +3412,7 @@
           <p:cNvPr id="7" name="practice-number-0">
             <a:extLst xmlns:a="http://schemas.openxmlformats.org/drawingml/2006/main">
               <a:ext uri="{FF2B5EF4-FFF2-40B4-BE49-F238E27FC236}">
-                <a16:creationId xmlns:a16="http://schemas.microsoft.com/office/drawing/2014/main" id="{3FC68463-58C2-4DE7-A87E-679DCA64B6E3}"/>
+                <a16:creationId xmlns:a16="http://schemas.microsoft.com/office/drawing/2014/main" id="{F30E4AB8-5103-4E2F-AD5B-A6311852C3B1}"/>
               </a:ext>
             </a:extLst>
           </p:cNvPr>
@@ -3470,7 +3470,7 @@
           <p:cNvPr id="8" name="practice-item-0">
             <a:extLst xmlns:a="http://schemas.openxmlformats.org/drawingml/2006/main">
               <a:ext uri="{FF2B5EF4-FFF2-40B4-BE49-F238E27FC236}">
-                <a16:creationId xmlns:a16="http://schemas.microsoft.com/office/drawing/2014/main" id="{702424C7-3ECA-4D86-9DD9-285AB2AB0A2D}"/>
+                <a16:creationId xmlns:a16="http://schemas.microsoft.com/office/drawing/2014/main" id="{FDF53E34-D7CF-4955-BEEB-4A1850C2725B}"/>
               </a:ext>
             </a:extLst>
           </p:cNvPr>
@@ -3534,7 +3534,7 @@
           <p:cNvPr id="9" name="practice-connector-0">
             <a:extLst xmlns:a="http://schemas.openxmlformats.org/drawingml/2006/main">
               <a:ext uri="{FF2B5EF4-FFF2-40B4-BE49-F238E27FC236}">
-                <a16:creationId xmlns:a16="http://schemas.microsoft.com/office/drawing/2014/main" id="{55254519-40C8-4DCE-8B73-31E1E6623333}"/>
+                <a16:creationId xmlns:a16="http://schemas.microsoft.com/office/drawing/2014/main" id="{0D0857F8-E75C-430F-8A3E-63D82935E1A0}"/>
               </a:ext>
             </a:extLst>
           </p:cNvPr>
@@ -3565,7 +3565,7 @@
           <p:cNvPr id="10" name="practice-circle-1">
             <a:extLst xmlns:a="http://schemas.openxmlformats.org/drawingml/2006/main">
               <a:ext uri="{FF2B5EF4-FFF2-40B4-BE49-F238E27FC236}">
-                <a16:creationId xmlns:a16="http://schemas.microsoft.com/office/drawing/2014/main" id="{34312F95-419E-4A09-AEE9-91906873F819}"/>
+                <a16:creationId xmlns:a16="http://schemas.microsoft.com/office/drawing/2014/main" id="{97A5B654-7C61-4E59-9585-3CA7C5DF6FEA}"/>
               </a:ext>
             </a:extLst>
           </p:cNvPr>
@@ -3598,7 +3598,7 @@
           <p:cNvPr id="11" name="practice-number-1">
             <a:extLst xmlns:a="http://schemas.openxmlformats.org/drawingml/2006/main">
               <a:ext uri="{FF2B5EF4-FFF2-40B4-BE49-F238E27FC236}">
-                <a16:creationId xmlns:a16="http://schemas.microsoft.com/office/drawing/2014/main" id="{1CCEF89E-C8F3-4E1D-ACA1-C8C04E9906E8}"/>
+                <a16:creationId xmlns:a16="http://schemas.microsoft.com/office/drawing/2014/main" id="{B0F960D3-61AE-403F-A85D-C1F77C4EBC47}"/>
               </a:ext>
             </a:extLst>
           </p:cNvPr>
@@ -3656,7 +3656,7 @@
           <p:cNvPr id="12" name="practice-item-1">
             <a:extLst xmlns:a="http://schemas.openxmlformats.org/drawingml/2006/main">
               <a:ext uri="{FF2B5EF4-FFF2-40B4-BE49-F238E27FC236}">
-                <a16:creationId xmlns:a16="http://schemas.microsoft.com/office/drawing/2014/main" id="{459237E2-F8F8-4553-AD90-1D36E370D4D8}"/>
+                <a16:creationId xmlns:a16="http://schemas.microsoft.com/office/drawing/2014/main" id="{1341D45C-8D06-42F9-9DDB-068ECFF83225}"/>
               </a:ext>
             </a:extLst>
           </p:cNvPr>
@@ -3720,7 +3720,7 @@
           <p:cNvPr id="13" name="practice-connector-1">
             <a:extLst xmlns:a="http://schemas.openxmlformats.org/drawingml/2006/main">
               <a:ext uri="{FF2B5EF4-FFF2-40B4-BE49-F238E27FC236}">
-                <a16:creationId xmlns:a16="http://schemas.microsoft.com/office/drawing/2014/main" id="{98585AA0-C323-4A3D-B691-6332FE8DD0A7}"/>
+                <a16:creationId xmlns:a16="http://schemas.microsoft.com/office/drawing/2014/main" id="{7B92CA42-6A09-468C-A3BF-9B89DE323284}"/>
               </a:ext>
             </a:extLst>
           </p:cNvPr>
@@ -3751,7 +3751,7 @@
           <p:cNvPr id="14" name="practice-circle-2">
             <a:extLst xmlns:a="http://schemas.openxmlformats.org/drawingml/2006/main">
               <a:ext uri="{FF2B5EF4-FFF2-40B4-BE49-F238E27FC236}">
-                <a16:creationId xmlns:a16="http://schemas.microsoft.com/office/drawing/2014/main" id="{4429F6BF-D5EC-41F0-A6E5-441CF52C8501}"/>
+                <a16:creationId xmlns:a16="http://schemas.microsoft.com/office/drawing/2014/main" id="{2D77DFF5-BE7B-4D6D-AAA0-9A5173C10DF9}"/>
               </a:ext>
             </a:extLst>
           </p:cNvPr>
@@ -3784,7 +3784,7 @@
           <p:cNvPr id="15" name="practice-number-2">
             <a:extLst xmlns:a="http://schemas.openxmlformats.org/drawingml/2006/main">
               <a:ext uri="{FF2B5EF4-FFF2-40B4-BE49-F238E27FC236}">
-                <a16:creationId xmlns:a16="http://schemas.microsoft.com/office/drawing/2014/main" id="{84ACC647-E1E1-4CA7-891E-F93BBE813896}"/>
+                <a16:creationId xmlns:a16="http://schemas.microsoft.com/office/drawing/2014/main" id="{73E4A53C-E63C-4BF2-A208-C34957661F1E}"/>
               </a:ext>
             </a:extLst>
           </p:cNvPr>
@@ -3842,7 +3842,7 @@
           <p:cNvPr id="16" name="practice-item-2">
             <a:extLst xmlns:a="http://schemas.openxmlformats.org/drawingml/2006/main">
               <a:ext uri="{FF2B5EF4-FFF2-40B4-BE49-F238E27FC236}">
-                <a16:creationId xmlns:a16="http://schemas.microsoft.com/office/drawing/2014/main" id="{33E0D4B5-3DD7-4F93-B6B7-8893F8F55420}"/>
+                <a16:creationId xmlns:a16="http://schemas.microsoft.com/office/drawing/2014/main" id="{514D9972-6491-46D2-9709-45F9C4C7E86B}"/>
               </a:ext>
             </a:extLst>
           </p:cNvPr>
@@ -3904,7 +3904,7 @@
     </p:spTree>
     <p:extLst>
       <p:ext uri="{BB962C8B-B14F-4D97-AF65-F5344CB8AC3E}">
-        <p14:creationId xmlns:p14="http://schemas.microsoft.com/office/powerpoint/2010/main" val="1947542321"/>
+        <p14:creationId xmlns:p14="http://schemas.microsoft.com/office/powerpoint/2010/main" val="715136515"/>
       </p:ext>
     </p:extLst>
   </p:cSld>
@@ -3935,7 +3935,7 @@
           <p:cNvPr id="1" name="s12-rule">
             <a:extLst xmlns:a="http://schemas.openxmlformats.org/drawingml/2006/main">
               <a:ext uri="{FF2B5EF4-FFF2-40B4-BE49-F238E27FC236}">
-                <a16:creationId xmlns:a16="http://schemas.microsoft.com/office/drawing/2014/main" id="{44A790FD-FC76-413D-B9A6-B5E7D92DD8B6}"/>
+                <a16:creationId xmlns:a16="http://schemas.microsoft.com/office/drawing/2014/main" id="{EE19A422-FF09-401F-A05F-3A34DC4D8C87}"/>
               </a:ext>
             </a:extLst>
           </p:cNvPr>
@@ -3968,7 +3968,7 @@
           <p:cNvPr id="2" name="s12-eyebrow">
             <a:extLst xmlns:a="http://schemas.openxmlformats.org/drawingml/2006/main">
               <a:ext uri="{FF2B5EF4-FFF2-40B4-BE49-F238E27FC236}">
-                <a16:creationId xmlns:a16="http://schemas.microsoft.com/office/drawing/2014/main" id="{66798D57-9424-4AB5-82C2-2597B87251CA}"/>
+                <a16:creationId xmlns:a16="http://schemas.microsoft.com/office/drawing/2014/main" id="{A1DF8381-8FEE-4AEF-80C4-46D3D77FEF3A}"/>
               </a:ext>
             </a:extLst>
           </p:cNvPr>
@@ -4026,7 +4026,7 @@
           <p:cNvPr id="3" name="s12-title">
             <a:extLst xmlns:a="http://schemas.openxmlformats.org/drawingml/2006/main">
               <a:ext uri="{FF2B5EF4-FFF2-40B4-BE49-F238E27FC236}">
-                <a16:creationId xmlns:a16="http://schemas.microsoft.com/office/drawing/2014/main" id="{A3AB164E-7A9B-4C48-BD37-16F43FA3BE90}"/>
+                <a16:creationId xmlns:a16="http://schemas.microsoft.com/office/drawing/2014/main" id="{71037534-5F4C-42D0-BAFD-92E1C996929E}"/>
               </a:ext>
             </a:extLst>
           </p:cNvPr>
@@ -4084,7 +4084,7 @@
           <p:cNvPr id="4" name="s12-footer">
             <a:extLst xmlns:a="http://schemas.openxmlformats.org/drawingml/2006/main">
               <a:ext uri="{FF2B5EF4-FFF2-40B4-BE49-F238E27FC236}">
-                <a16:creationId xmlns:a16="http://schemas.microsoft.com/office/drawing/2014/main" id="{18519D85-5996-4B0A-B9F6-AE04A8781A62}"/>
+                <a16:creationId xmlns:a16="http://schemas.microsoft.com/office/drawing/2014/main" id="{CCC8D1B7-29F7-4DE6-8F19-FC0591F9C8B2}"/>
               </a:ext>
             </a:extLst>
           </p:cNvPr>
@@ -4115,7 +4115,7 @@
           <p:cNvPr id="5" name="s12-identity">
             <a:extLst xmlns:a="http://schemas.openxmlformats.org/drawingml/2006/main">
               <a:ext uri="{FF2B5EF4-FFF2-40B4-BE49-F238E27FC236}">
-                <a16:creationId xmlns:a16="http://schemas.microsoft.com/office/drawing/2014/main" id="{54095003-1873-4715-9F69-A8220B8C3568}"/>
+                <a16:creationId xmlns:a16="http://schemas.microsoft.com/office/drawing/2014/main" id="{13B6F3EC-AFB7-4E5A-94BC-B36F946987BA}"/>
               </a:ext>
             </a:extLst>
           </p:cNvPr>
@@ -4173,7 +4173,7 @@
           <p:cNvPr id="6" name="recap-circle-0">
             <a:extLst xmlns:a="http://schemas.openxmlformats.org/drawingml/2006/main">
               <a:ext uri="{FF2B5EF4-FFF2-40B4-BE49-F238E27FC236}">
-                <a16:creationId xmlns:a16="http://schemas.microsoft.com/office/drawing/2014/main" id="{23768B9B-2E70-48E1-AF26-0A9793C8BBE3}"/>
+                <a16:creationId xmlns:a16="http://schemas.microsoft.com/office/drawing/2014/main" id="{65AAB714-B946-46D9-BCC9-CAEAB5479AA3}"/>
               </a:ext>
             </a:extLst>
           </p:cNvPr>
@@ -4206,7 +4206,7 @@
           <p:cNvPr id="7" name="recap-number-0">
             <a:extLst xmlns:a="http://schemas.openxmlformats.org/drawingml/2006/main">
               <a:ext uri="{FF2B5EF4-FFF2-40B4-BE49-F238E27FC236}">
-                <a16:creationId xmlns:a16="http://schemas.microsoft.com/office/drawing/2014/main" id="{B4342F6E-AC07-484B-A845-6F08DA27950F}"/>
+                <a16:creationId xmlns:a16="http://schemas.microsoft.com/office/drawing/2014/main" id="{DF7F96CE-FC33-4BF6-AF45-00BE066FD83E}"/>
               </a:ext>
             </a:extLst>
           </p:cNvPr>
@@ -4264,7 +4264,7 @@
           <p:cNvPr id="8" name="recap-item-0">
             <a:extLst xmlns:a="http://schemas.openxmlformats.org/drawingml/2006/main">
               <a:ext uri="{FF2B5EF4-FFF2-40B4-BE49-F238E27FC236}">
-                <a16:creationId xmlns:a16="http://schemas.microsoft.com/office/drawing/2014/main" id="{9A3783DF-10C2-4BC6-9B0F-ECD2FA23359E}"/>
+                <a16:creationId xmlns:a16="http://schemas.microsoft.com/office/drawing/2014/main" id="{F89BEBF6-50A6-4CDE-A2CD-8E6B8E319B2A}"/>
               </a:ext>
             </a:extLst>
           </p:cNvPr>
@@ -4328,7 +4328,7 @@
           <p:cNvPr id="9" name="recap-connector-0">
             <a:extLst xmlns:a="http://schemas.openxmlformats.org/drawingml/2006/main">
               <a:ext uri="{FF2B5EF4-FFF2-40B4-BE49-F238E27FC236}">
-                <a16:creationId xmlns:a16="http://schemas.microsoft.com/office/drawing/2014/main" id="{5A632A45-D872-43EE-9AD9-68D73B6DE44F}"/>
+                <a16:creationId xmlns:a16="http://schemas.microsoft.com/office/drawing/2014/main" id="{5C2147B6-2E77-4871-AFDD-1A536F688D70}"/>
               </a:ext>
             </a:extLst>
           </p:cNvPr>
@@ -4359,7 +4359,7 @@
           <p:cNvPr id="10" name="recap-circle-1">
             <a:extLst xmlns:a="http://schemas.openxmlformats.org/drawingml/2006/main">
               <a:ext uri="{FF2B5EF4-FFF2-40B4-BE49-F238E27FC236}">
-                <a16:creationId xmlns:a16="http://schemas.microsoft.com/office/drawing/2014/main" id="{1D5A5255-B714-4C9F-A10C-CA79688B071F}"/>
+                <a16:creationId xmlns:a16="http://schemas.microsoft.com/office/drawing/2014/main" id="{055C4C39-3527-4CDF-A29C-D63DA3214ADF}"/>
               </a:ext>
             </a:extLst>
           </p:cNvPr>
@@ -4392,7 +4392,7 @@
           <p:cNvPr id="11" name="recap-number-1">
             <a:extLst xmlns:a="http://schemas.openxmlformats.org/drawingml/2006/main">
               <a:ext uri="{FF2B5EF4-FFF2-40B4-BE49-F238E27FC236}">
-                <a16:creationId xmlns:a16="http://schemas.microsoft.com/office/drawing/2014/main" id="{8E5BB373-26BA-4423-BF10-B0710DC83FE2}"/>
+                <a16:creationId xmlns:a16="http://schemas.microsoft.com/office/drawing/2014/main" id="{6E4D0FB3-2990-41BE-BE1D-365832E5651D}"/>
               </a:ext>
             </a:extLst>
           </p:cNvPr>
@@ -4450,7 +4450,7 @@
           <p:cNvPr id="12" name="recap-item-1">
             <a:extLst xmlns:a="http://schemas.openxmlformats.org/drawingml/2006/main">
               <a:ext uri="{FF2B5EF4-FFF2-40B4-BE49-F238E27FC236}">
-                <a16:creationId xmlns:a16="http://schemas.microsoft.com/office/drawing/2014/main" id="{10174014-3846-401A-9271-15705CA296BC}"/>
+                <a16:creationId xmlns:a16="http://schemas.microsoft.com/office/drawing/2014/main" id="{0903F561-2EE6-4642-983F-562C30EDA3A1}"/>
               </a:ext>
             </a:extLst>
           </p:cNvPr>
@@ -4514,7 +4514,7 @@
           <p:cNvPr id="13" name="recap-connector-1">
             <a:extLst xmlns:a="http://schemas.openxmlformats.org/drawingml/2006/main">
               <a:ext uri="{FF2B5EF4-FFF2-40B4-BE49-F238E27FC236}">
-                <a16:creationId xmlns:a16="http://schemas.microsoft.com/office/drawing/2014/main" id="{48448536-2A31-4745-95B0-AB364A4329BC}"/>
+                <a16:creationId xmlns:a16="http://schemas.microsoft.com/office/drawing/2014/main" id="{CA137F88-8161-458F-A35D-445CAFA1D534}"/>
               </a:ext>
             </a:extLst>
           </p:cNvPr>
@@ -4545,7 +4545,7 @@
           <p:cNvPr id="14" name="recap-circle-2">
             <a:extLst xmlns:a="http://schemas.openxmlformats.org/drawingml/2006/main">
               <a:ext uri="{FF2B5EF4-FFF2-40B4-BE49-F238E27FC236}">
-                <a16:creationId xmlns:a16="http://schemas.microsoft.com/office/drawing/2014/main" id="{EBB8662B-A0B5-4AC7-9B1C-4E640CAFCAF4}"/>
+                <a16:creationId xmlns:a16="http://schemas.microsoft.com/office/drawing/2014/main" id="{DF3B20DB-A051-4B7F-8C6B-0FFD67BA3CA5}"/>
               </a:ext>
             </a:extLst>
           </p:cNvPr>
@@ -4578,7 +4578,7 @@
           <p:cNvPr id="15" name="recap-number-2">
             <a:extLst xmlns:a="http://schemas.openxmlformats.org/drawingml/2006/main">
               <a:ext uri="{FF2B5EF4-FFF2-40B4-BE49-F238E27FC236}">
-                <a16:creationId xmlns:a16="http://schemas.microsoft.com/office/drawing/2014/main" id="{9666C7C9-F1B9-4ABF-9226-1A6D6C8586B7}"/>
+                <a16:creationId xmlns:a16="http://schemas.microsoft.com/office/drawing/2014/main" id="{74899015-4D01-45AE-B9D0-C2010E6A1C80}"/>
               </a:ext>
             </a:extLst>
           </p:cNvPr>
@@ -4636,7 +4636,7 @@
           <p:cNvPr id="16" name="recap-item-2">
             <a:extLst xmlns:a="http://schemas.openxmlformats.org/drawingml/2006/main">
               <a:ext uri="{FF2B5EF4-FFF2-40B4-BE49-F238E27FC236}">
-                <a16:creationId xmlns:a16="http://schemas.microsoft.com/office/drawing/2014/main" id="{D1D2F281-3A67-4879-BB1D-CE52098F330E}"/>
+                <a16:creationId xmlns:a16="http://schemas.microsoft.com/office/drawing/2014/main" id="{934878FE-3C1C-458B-8E0D-A5235907F20E}"/>
               </a:ext>
             </a:extLst>
           </p:cNvPr>
@@ -4698,7 +4698,7 @@
     </p:spTree>
     <p:extLst>
       <p:ext uri="{BB962C8B-B14F-4D97-AF65-F5344CB8AC3E}">
-        <p14:creationId xmlns:p14="http://schemas.microsoft.com/office/powerpoint/2010/main" val="2040564062"/>
+        <p14:creationId xmlns:p14="http://schemas.microsoft.com/office/powerpoint/2010/main" val="1267476205"/>
       </p:ext>
     </p:extLst>
   </p:cSld>
@@ -4729,7 +4729,7 @@
           <p:cNvPr id="1" name="s13-rule">
             <a:extLst xmlns:a="http://schemas.openxmlformats.org/drawingml/2006/main">
               <a:ext uri="{FF2B5EF4-FFF2-40B4-BE49-F238E27FC236}">
-                <a16:creationId xmlns:a16="http://schemas.microsoft.com/office/drawing/2014/main" id="{46ECC264-A1BE-4B4D-BAEE-398BDC64DCB8}"/>
+                <a16:creationId xmlns:a16="http://schemas.microsoft.com/office/drawing/2014/main" id="{4CACE6AE-3181-435F-861E-BC1B8B55A68C}"/>
               </a:ext>
             </a:extLst>
           </p:cNvPr>
@@ -4762,7 +4762,7 @@
           <p:cNvPr id="2" name="s13-eyebrow">
             <a:extLst xmlns:a="http://schemas.openxmlformats.org/drawingml/2006/main">
               <a:ext uri="{FF2B5EF4-FFF2-40B4-BE49-F238E27FC236}">
-                <a16:creationId xmlns:a16="http://schemas.microsoft.com/office/drawing/2014/main" id="{22C6C075-AC29-4FA4-83F8-08F202B2D4BF}"/>
+                <a16:creationId xmlns:a16="http://schemas.microsoft.com/office/drawing/2014/main" id="{82840381-7F00-46B8-B79C-D4B68AE8B40F}"/>
               </a:ext>
             </a:extLst>
           </p:cNvPr>
@@ -4820,7 +4820,7 @@
           <p:cNvPr id="3" name="s13-title">
             <a:extLst xmlns:a="http://schemas.openxmlformats.org/drawingml/2006/main">
               <a:ext uri="{FF2B5EF4-FFF2-40B4-BE49-F238E27FC236}">
-                <a16:creationId xmlns:a16="http://schemas.microsoft.com/office/drawing/2014/main" id="{F8979948-758C-45C3-B75B-EB862923394C}"/>
+                <a16:creationId xmlns:a16="http://schemas.microsoft.com/office/drawing/2014/main" id="{D05EE7E5-667A-4158-B4BC-AE440A1778CF}"/>
               </a:ext>
             </a:extLst>
           </p:cNvPr>
@@ -4878,7 +4878,7 @@
           <p:cNvPr id="4" name="s13-footer">
             <a:extLst xmlns:a="http://schemas.openxmlformats.org/drawingml/2006/main">
               <a:ext uri="{FF2B5EF4-FFF2-40B4-BE49-F238E27FC236}">
-                <a16:creationId xmlns:a16="http://schemas.microsoft.com/office/drawing/2014/main" id="{0247A2A2-644C-4EC2-A024-4CB7F3460A10}"/>
+                <a16:creationId xmlns:a16="http://schemas.microsoft.com/office/drawing/2014/main" id="{43EB4E8A-032E-4839-A843-A514421B5669}"/>
               </a:ext>
             </a:extLst>
           </p:cNvPr>
@@ -4909,7 +4909,7 @@
           <p:cNvPr id="5" name="s13-identity">
             <a:extLst xmlns:a="http://schemas.openxmlformats.org/drawingml/2006/main">
               <a:ext uri="{FF2B5EF4-FFF2-40B4-BE49-F238E27FC236}">
-                <a16:creationId xmlns:a16="http://schemas.microsoft.com/office/drawing/2014/main" id="{38D91BCD-3F87-49BD-A926-DE2005DDDBB7}"/>
+                <a16:creationId xmlns:a16="http://schemas.microsoft.com/office/drawing/2014/main" id="{6DDE8789-1BEC-440A-BF5D-D27ECD7C6879}"/>
               </a:ext>
             </a:extLst>
           </p:cNvPr>
@@ -4967,7 +4967,7 @@
           <p:cNvPr id="6" name="source-0">
             <a:extLst xmlns:a="http://schemas.openxmlformats.org/drawingml/2006/main">
               <a:ext uri="{FF2B5EF4-FFF2-40B4-BE49-F238E27FC236}">
-                <a16:creationId xmlns:a16="http://schemas.microsoft.com/office/drawing/2014/main" id="{BC47DB9A-75EB-40D8-A0EE-F03A39E0F469}"/>
+                <a16:creationId xmlns:a16="http://schemas.microsoft.com/office/drawing/2014/main" id="{30878D80-F813-4222-8D3D-6163E945170D}"/>
               </a:ext>
             </a:extLst>
           </p:cNvPr>
@@ -5031,7 +5031,7 @@
           <p:cNvPr id="7" name="source-1">
             <a:extLst xmlns:a="http://schemas.openxmlformats.org/drawingml/2006/main">
               <a:ext uri="{FF2B5EF4-FFF2-40B4-BE49-F238E27FC236}">
-                <a16:creationId xmlns:a16="http://schemas.microsoft.com/office/drawing/2014/main" id="{5529C0FC-881E-4051-B663-FD06B5F8B3CE}"/>
+                <a16:creationId xmlns:a16="http://schemas.microsoft.com/office/drawing/2014/main" id="{B4B28D51-C18F-44ED-BC72-628C32A556CD}"/>
               </a:ext>
             </a:extLst>
           </p:cNvPr>
@@ -5095,7 +5095,7 @@
           <p:cNvPr id="8" name="source-2">
             <a:extLst xmlns:a="http://schemas.openxmlformats.org/drawingml/2006/main">
               <a:ext uri="{FF2B5EF4-FFF2-40B4-BE49-F238E27FC236}">
-                <a16:creationId xmlns:a16="http://schemas.microsoft.com/office/drawing/2014/main" id="{EA2552B5-A863-4F3A-A353-3FC620011AED}"/>
+                <a16:creationId xmlns:a16="http://schemas.microsoft.com/office/drawing/2014/main" id="{AD86F754-F544-48EA-9129-0218800E0D5F}"/>
               </a:ext>
             </a:extLst>
           </p:cNvPr>
@@ -5159,7 +5159,7 @@
           <p:cNvPr id="9" name="source-3">
             <a:extLst xmlns:a="http://schemas.openxmlformats.org/drawingml/2006/main">
               <a:ext uri="{FF2B5EF4-FFF2-40B4-BE49-F238E27FC236}">
-                <a16:creationId xmlns:a16="http://schemas.microsoft.com/office/drawing/2014/main" id="{5E382958-3AA2-4D96-8D75-9BF474A1C15F}"/>
+                <a16:creationId xmlns:a16="http://schemas.microsoft.com/office/drawing/2014/main" id="{9A9C3010-F197-43B6-8022-9426EF15ED8B}"/>
               </a:ext>
             </a:extLst>
           </p:cNvPr>
@@ -5223,7 +5223,7 @@
           <p:cNvPr id="10" name="s13-takeaway-rule">
             <a:extLst xmlns:a="http://schemas.openxmlformats.org/drawingml/2006/main">
               <a:ext uri="{FF2B5EF4-FFF2-40B4-BE49-F238E27FC236}">
-                <a16:creationId xmlns:a16="http://schemas.microsoft.com/office/drawing/2014/main" id="{D006659D-F784-49EE-990F-DA93D2DA776C}"/>
+                <a16:creationId xmlns:a16="http://schemas.microsoft.com/office/drawing/2014/main" id="{44FAC26E-4A78-4F91-AA20-1D4E5C76E371}"/>
               </a:ext>
             </a:extLst>
           </p:cNvPr>
@@ -5256,7 +5256,7 @@
           <p:cNvPr id="11" name="s13-takeaway">
             <a:extLst xmlns:a="http://schemas.openxmlformats.org/drawingml/2006/main">
               <a:ext uri="{FF2B5EF4-FFF2-40B4-BE49-F238E27FC236}">
-                <a16:creationId xmlns:a16="http://schemas.microsoft.com/office/drawing/2014/main" id="{73061E9F-244D-46C1-BEF4-668AE80F398C}"/>
+                <a16:creationId xmlns:a16="http://schemas.microsoft.com/office/drawing/2014/main" id="{7D79DE80-7C08-4259-942F-5F7F35B168CE}"/>
               </a:ext>
             </a:extLst>
           </p:cNvPr>
@@ -5281,7 +5281,7 @@
         </p:spPr>
         <p:txBody>
           <a:bodyPr xmlns:a="http://schemas.openxmlformats.org/drawingml/2006/main" lIns="0" tIns="0" rIns="0" bIns="0" anchor="ctr">
-            <a:normAutofit fontScale="95911"/>
+            <a:normAutofit fontScale="100000"/>
           </a:bodyPr>
           <a:lstStyle xmlns:a="http://schemas.openxmlformats.org/drawingml/2006/main"/>
           <a:p xmlns:a="http://schemas.openxmlformats.org/drawingml/2006/main">
@@ -5304,7 +5304,7 @@
                 <a:ea typeface="PingFang SC"/>
                 <a:cs typeface="PingFang SC"/>
               </a:rPr>
-              <a:t>课程精编页用于讲授主线；播放器中的“原课件”模式保留团队 PowerPoint 精选页、真实图片和可播放视频。</a:t>
+              <a:t>课程正文与幻灯片共享同一知识主线，图片和视频用于帮助理解本节概念与案例。</a:t>
             </a:r>
           </a:p>
         </p:txBody>
@@ -5312,7 +5312,7 @@
     </p:spTree>
     <p:extLst>
       <p:ext uri="{BB962C8B-B14F-4D97-AF65-F5344CB8AC3E}">
-        <p14:creationId xmlns:p14="http://schemas.microsoft.com/office/powerpoint/2010/main" val="1049902733"/>
+        <p14:creationId xmlns:p14="http://schemas.microsoft.com/office/powerpoint/2010/main" val="2071001207"/>
       </p:ext>
     </p:extLst>
   </p:cSld>
@@ -5343,7 +5343,7 @@
           <p:cNvPr id="1" name="s2-rule">
             <a:extLst xmlns:a="http://schemas.openxmlformats.org/drawingml/2006/main">
               <a:ext uri="{FF2B5EF4-FFF2-40B4-BE49-F238E27FC236}">
-                <a16:creationId xmlns:a16="http://schemas.microsoft.com/office/drawing/2014/main" id="{D4C89945-DA8A-4781-B9EF-EEA137CF15AD}"/>
+                <a16:creationId xmlns:a16="http://schemas.microsoft.com/office/drawing/2014/main" id="{A8D741E0-F7D3-4EDC-9883-54D8785ECFB3}"/>
               </a:ext>
             </a:extLst>
           </p:cNvPr>
@@ -5376,7 +5376,7 @@
           <p:cNvPr id="2" name="s2-eyebrow">
             <a:extLst xmlns:a="http://schemas.openxmlformats.org/drawingml/2006/main">
               <a:ext uri="{FF2B5EF4-FFF2-40B4-BE49-F238E27FC236}">
-                <a16:creationId xmlns:a16="http://schemas.microsoft.com/office/drawing/2014/main" id="{6B017284-FDAB-4A3B-9ADF-6E35E2BC8ACF}"/>
+                <a16:creationId xmlns:a16="http://schemas.microsoft.com/office/drawing/2014/main" id="{A60B2148-F341-47E9-89C2-9918400E184B}"/>
               </a:ext>
             </a:extLst>
           </p:cNvPr>
@@ -5434,7 +5434,7 @@
           <p:cNvPr id="3" name="s2-title">
             <a:extLst xmlns:a="http://schemas.openxmlformats.org/drawingml/2006/main">
               <a:ext uri="{FF2B5EF4-FFF2-40B4-BE49-F238E27FC236}">
-                <a16:creationId xmlns:a16="http://schemas.microsoft.com/office/drawing/2014/main" id="{0CC01FD2-DC21-459C-8D6C-FC3B3C00CAB1}"/>
+                <a16:creationId xmlns:a16="http://schemas.microsoft.com/office/drawing/2014/main" id="{39AE2EF1-F4B8-4C06-B52F-F3C35A9E6A6C}"/>
               </a:ext>
             </a:extLst>
           </p:cNvPr>
@@ -5492,7 +5492,7 @@
           <p:cNvPr id="4" name="s2-footer">
             <a:extLst xmlns:a="http://schemas.openxmlformats.org/drawingml/2006/main">
               <a:ext uri="{FF2B5EF4-FFF2-40B4-BE49-F238E27FC236}">
-                <a16:creationId xmlns:a16="http://schemas.microsoft.com/office/drawing/2014/main" id="{E2F846AF-6BC3-439F-9151-3A4C1B07F873}"/>
+                <a16:creationId xmlns:a16="http://schemas.microsoft.com/office/drawing/2014/main" id="{988AB57F-1605-4125-9C01-287B5869A17B}"/>
               </a:ext>
             </a:extLst>
           </p:cNvPr>
@@ -5523,7 +5523,7 @@
           <p:cNvPr id="5" name="s2-identity">
             <a:extLst xmlns:a="http://schemas.openxmlformats.org/drawingml/2006/main">
               <a:ext uri="{FF2B5EF4-FFF2-40B4-BE49-F238E27FC236}">
-                <a16:creationId xmlns:a16="http://schemas.microsoft.com/office/drawing/2014/main" id="{A34EF1B9-0176-4D07-B4D5-4A4C56EC694A}"/>
+                <a16:creationId xmlns:a16="http://schemas.microsoft.com/office/drawing/2014/main" id="{BEAA3DD8-F974-49B0-8B08-68876EA5184D}"/>
               </a:ext>
             </a:extLst>
           </p:cNvPr>
@@ -5581,7 +5581,7 @@
           <p:cNvPr id="6" name="objective-1">
             <a:extLst xmlns:a="http://schemas.openxmlformats.org/drawingml/2006/main">
               <a:ext uri="{FF2B5EF4-FFF2-40B4-BE49-F238E27FC236}">
-                <a16:creationId xmlns:a16="http://schemas.microsoft.com/office/drawing/2014/main" id="{5EB53291-DDAB-4A06-BA7B-263C07485A9D}"/>
+                <a16:creationId xmlns:a16="http://schemas.microsoft.com/office/drawing/2014/main" id="{D46DF38C-676D-4796-9F50-C1A33A28EB6F}"/>
               </a:ext>
             </a:extLst>
           </p:cNvPr>
@@ -5668,7 +5668,7 @@
           <p:cNvPr id="7" name="objective-2">
             <a:extLst xmlns:a="http://schemas.openxmlformats.org/drawingml/2006/main">
               <a:ext uri="{FF2B5EF4-FFF2-40B4-BE49-F238E27FC236}">
-                <a16:creationId xmlns:a16="http://schemas.microsoft.com/office/drawing/2014/main" id="{3BF5DEC7-C5FF-4302-9964-32099C5CA865}"/>
+                <a16:creationId xmlns:a16="http://schemas.microsoft.com/office/drawing/2014/main" id="{3DD2DF37-8428-44FE-B7FB-A16AE32AF1C4}"/>
               </a:ext>
             </a:extLst>
           </p:cNvPr>
@@ -5755,7 +5755,7 @@
           <p:cNvPr id="8" name="objective-3">
             <a:extLst xmlns:a="http://schemas.openxmlformats.org/drawingml/2006/main">
               <a:ext uri="{FF2B5EF4-FFF2-40B4-BE49-F238E27FC236}">
-                <a16:creationId xmlns:a16="http://schemas.microsoft.com/office/drawing/2014/main" id="{AFE15D78-51F7-4B2C-A38F-5E37E575C522}"/>
+                <a16:creationId xmlns:a16="http://schemas.microsoft.com/office/drawing/2014/main" id="{BAF5392A-A38D-4A74-929F-24215CDC8D9E}"/>
               </a:ext>
             </a:extLst>
           </p:cNvPr>
@@ -5842,7 +5842,7 @@
           <p:cNvPr id="9" name="objective-4">
             <a:extLst xmlns:a="http://schemas.openxmlformats.org/drawingml/2006/main">
               <a:ext uri="{FF2B5EF4-FFF2-40B4-BE49-F238E27FC236}">
-                <a16:creationId xmlns:a16="http://schemas.microsoft.com/office/drawing/2014/main" id="{6BBE103E-C19F-4E4F-A9EE-8B83F5A928FE}"/>
+                <a16:creationId xmlns:a16="http://schemas.microsoft.com/office/drawing/2014/main" id="{9662E976-65CB-48BE-B1FD-9E96FE2DF89E}"/>
               </a:ext>
             </a:extLst>
           </p:cNvPr>
@@ -5927,7 +5927,7 @@
     </p:spTree>
     <p:extLst>
       <p:ext uri="{BB962C8B-B14F-4D97-AF65-F5344CB8AC3E}">
-        <p14:creationId xmlns:p14="http://schemas.microsoft.com/office/powerpoint/2010/main" val="469943402"/>
+        <p14:creationId xmlns:p14="http://schemas.microsoft.com/office/powerpoint/2010/main" val="252427446"/>
       </p:ext>
     </p:extLst>
   </p:cSld>
@@ -5958,7 +5958,7 @@
           <p:cNvPr id="1" name="s3-rule">
             <a:extLst xmlns:a="http://schemas.openxmlformats.org/drawingml/2006/main">
               <a:ext uri="{FF2B5EF4-FFF2-40B4-BE49-F238E27FC236}">
-                <a16:creationId xmlns:a16="http://schemas.microsoft.com/office/drawing/2014/main" id="{683A7831-AE26-47CA-85B9-0638E7DC0CF9}"/>
+                <a16:creationId xmlns:a16="http://schemas.microsoft.com/office/drawing/2014/main" id="{C699AE8A-B1C3-41F6-879E-985F64424CAA}"/>
               </a:ext>
             </a:extLst>
           </p:cNvPr>
@@ -5991,7 +5991,7 @@
           <p:cNvPr id="2" name="s3-eyebrow">
             <a:extLst xmlns:a="http://schemas.openxmlformats.org/drawingml/2006/main">
               <a:ext uri="{FF2B5EF4-FFF2-40B4-BE49-F238E27FC236}">
-                <a16:creationId xmlns:a16="http://schemas.microsoft.com/office/drawing/2014/main" id="{61D16E35-117E-431F-B62F-208444F0673C}"/>
+                <a16:creationId xmlns:a16="http://schemas.microsoft.com/office/drawing/2014/main" id="{CA9E52AC-2635-4A79-BA04-2D4AB73821B8}"/>
               </a:ext>
             </a:extLst>
           </p:cNvPr>
@@ -6049,7 +6049,7 @@
           <p:cNvPr id="3" name="s3-title">
             <a:extLst xmlns:a="http://schemas.openxmlformats.org/drawingml/2006/main">
               <a:ext uri="{FF2B5EF4-FFF2-40B4-BE49-F238E27FC236}">
-                <a16:creationId xmlns:a16="http://schemas.microsoft.com/office/drawing/2014/main" id="{35C36E37-F349-4557-971B-CCE5D97499C8}"/>
+                <a16:creationId xmlns:a16="http://schemas.microsoft.com/office/drawing/2014/main" id="{75DD1963-EF87-47EC-B521-8869E492FB73}"/>
               </a:ext>
             </a:extLst>
           </p:cNvPr>
@@ -6107,7 +6107,7 @@
           <p:cNvPr id="4" name="s3-footer">
             <a:extLst xmlns:a="http://schemas.openxmlformats.org/drawingml/2006/main">
               <a:ext uri="{FF2B5EF4-FFF2-40B4-BE49-F238E27FC236}">
-                <a16:creationId xmlns:a16="http://schemas.microsoft.com/office/drawing/2014/main" id="{C8ADF6E7-F582-4981-9D78-667E4A0DEECD}"/>
+                <a16:creationId xmlns:a16="http://schemas.microsoft.com/office/drawing/2014/main" id="{9F63A53A-0A4A-4D31-B0B5-DF29FE31033B}"/>
               </a:ext>
             </a:extLst>
           </p:cNvPr>
@@ -6138,7 +6138,7 @@
           <p:cNvPr id="5" name="s3-identity">
             <a:extLst xmlns:a="http://schemas.openxmlformats.org/drawingml/2006/main">
               <a:ext uri="{FF2B5EF4-FFF2-40B4-BE49-F238E27FC236}">
-                <a16:creationId xmlns:a16="http://schemas.microsoft.com/office/drawing/2014/main" id="{61E84B42-3AB7-4DF1-A6D1-B08665488E42}"/>
+                <a16:creationId xmlns:a16="http://schemas.microsoft.com/office/drawing/2014/main" id="{DE5D6222-25CA-4253-BD7E-0F9EF372D8C1}"/>
               </a:ext>
             </a:extLst>
           </p:cNvPr>
@@ -6196,7 +6196,7 @@
           <p:cNvPr id="6" name="core-no-0">
             <a:extLst xmlns:a="http://schemas.openxmlformats.org/drawingml/2006/main">
               <a:ext uri="{FF2B5EF4-FFF2-40B4-BE49-F238E27FC236}">
-                <a16:creationId xmlns:a16="http://schemas.microsoft.com/office/drawing/2014/main" id="{6A6976FA-4764-4398-B2EF-60B7EBCB94AC}"/>
+                <a16:creationId xmlns:a16="http://schemas.microsoft.com/office/drawing/2014/main" id="{FEFF0966-E72A-438E-98A8-D1C52A91FCA6}"/>
               </a:ext>
             </a:extLst>
           </p:cNvPr>
@@ -6254,7 +6254,7 @@
           <p:cNvPr id="7" name="core-label-0">
             <a:extLst xmlns:a="http://schemas.openxmlformats.org/drawingml/2006/main">
               <a:ext uri="{FF2B5EF4-FFF2-40B4-BE49-F238E27FC236}">
-                <a16:creationId xmlns:a16="http://schemas.microsoft.com/office/drawing/2014/main" id="{8FF6495B-C2C0-49E5-A52B-B400789CF265}"/>
+                <a16:creationId xmlns:a16="http://schemas.microsoft.com/office/drawing/2014/main" id="{1BFD3897-3EF4-4789-9363-FA7BB2338FAD}"/>
               </a:ext>
             </a:extLst>
           </p:cNvPr>
@@ -6312,7 +6312,7 @@
           <p:cNvPr id="8" name="core-body-0">
             <a:extLst xmlns:a="http://schemas.openxmlformats.org/drawingml/2006/main">
               <a:ext uri="{FF2B5EF4-FFF2-40B4-BE49-F238E27FC236}">
-                <a16:creationId xmlns:a16="http://schemas.microsoft.com/office/drawing/2014/main" id="{306BDD0D-F3FC-43FA-BC2E-B02A74046498}"/>
+                <a16:creationId xmlns:a16="http://schemas.microsoft.com/office/drawing/2014/main" id="{DDE8642D-CD0E-4CAD-A553-45B9625CF2A1}"/>
               </a:ext>
             </a:extLst>
           </p:cNvPr>
@@ -6376,7 +6376,7 @@
           <p:cNvPr id="9" name="core-no-1">
             <a:extLst xmlns:a="http://schemas.openxmlformats.org/drawingml/2006/main">
               <a:ext uri="{FF2B5EF4-FFF2-40B4-BE49-F238E27FC236}">
-                <a16:creationId xmlns:a16="http://schemas.microsoft.com/office/drawing/2014/main" id="{61C1B24E-76C1-4836-9D0D-10609DF35A54}"/>
+                <a16:creationId xmlns:a16="http://schemas.microsoft.com/office/drawing/2014/main" id="{7C649295-6E8B-4D2B-ADD1-E592E1621CB2}"/>
               </a:ext>
             </a:extLst>
           </p:cNvPr>
@@ -6434,7 +6434,7 @@
           <p:cNvPr id="10" name="core-body-1">
             <a:extLst xmlns:a="http://schemas.openxmlformats.org/drawingml/2006/main">
               <a:ext uri="{FF2B5EF4-FFF2-40B4-BE49-F238E27FC236}">
-                <a16:creationId xmlns:a16="http://schemas.microsoft.com/office/drawing/2014/main" id="{195F6E22-FC1D-45E2-8E8A-DA7819B2340F}"/>
+                <a16:creationId xmlns:a16="http://schemas.microsoft.com/office/drawing/2014/main" id="{CCE3160E-1DE6-4793-B8DB-B1E8D9635786}"/>
               </a:ext>
             </a:extLst>
           </p:cNvPr>
@@ -6498,7 +6498,7 @@
           <p:cNvPr id="11" name="core-no-2">
             <a:extLst xmlns:a="http://schemas.openxmlformats.org/drawingml/2006/main">
               <a:ext uri="{FF2B5EF4-FFF2-40B4-BE49-F238E27FC236}">
-                <a16:creationId xmlns:a16="http://schemas.microsoft.com/office/drawing/2014/main" id="{600A4BC6-EC8D-4AE5-A106-823407BBA71E}"/>
+                <a16:creationId xmlns:a16="http://schemas.microsoft.com/office/drawing/2014/main" id="{F5640107-792C-40D4-A077-652CC84D38A6}"/>
               </a:ext>
             </a:extLst>
           </p:cNvPr>
@@ -6556,7 +6556,7 @@
           <p:cNvPr id="12" name="core-body-2">
             <a:extLst xmlns:a="http://schemas.openxmlformats.org/drawingml/2006/main">
               <a:ext uri="{FF2B5EF4-FFF2-40B4-BE49-F238E27FC236}">
-                <a16:creationId xmlns:a16="http://schemas.microsoft.com/office/drawing/2014/main" id="{7C84FB07-6AAA-4572-9001-682CFD89F0EA}"/>
+                <a16:creationId xmlns:a16="http://schemas.microsoft.com/office/drawing/2014/main" id="{581F6C95-CDEA-4C2E-9785-0DCDAF2BAFA2}"/>
               </a:ext>
             </a:extLst>
           </p:cNvPr>
@@ -6620,7 +6620,7 @@
           <p:cNvPr id="13" name="s3-takeaway-rule">
             <a:extLst xmlns:a="http://schemas.openxmlformats.org/drawingml/2006/main">
               <a:ext uri="{FF2B5EF4-FFF2-40B4-BE49-F238E27FC236}">
-                <a16:creationId xmlns:a16="http://schemas.microsoft.com/office/drawing/2014/main" id="{001725ED-5BDB-4C97-BA5C-B443D164F9C1}"/>
+                <a16:creationId xmlns:a16="http://schemas.microsoft.com/office/drawing/2014/main" id="{A99EAF8C-4B9C-455D-B0F3-754870F09AF6}"/>
               </a:ext>
             </a:extLst>
           </p:cNvPr>
@@ -6653,7 +6653,7 @@
           <p:cNvPr id="14" name="s3-takeaway">
             <a:extLst xmlns:a="http://schemas.openxmlformats.org/drawingml/2006/main">
               <a:ext uri="{FF2B5EF4-FFF2-40B4-BE49-F238E27FC236}">
-                <a16:creationId xmlns:a16="http://schemas.microsoft.com/office/drawing/2014/main" id="{55B8BAB1-3CB8-43D6-86E1-29C73B26FDE3}"/>
+                <a16:creationId xmlns:a16="http://schemas.microsoft.com/office/drawing/2014/main" id="{243B5868-90F8-4B2F-AED5-F9706780CCA3}"/>
               </a:ext>
             </a:extLst>
           </p:cNvPr>
@@ -6709,7 +6709,7 @@
     </p:spTree>
     <p:extLst>
       <p:ext uri="{BB962C8B-B14F-4D97-AF65-F5344CB8AC3E}">
-        <p14:creationId xmlns:p14="http://schemas.microsoft.com/office/powerpoint/2010/main" val="579959492"/>
+        <p14:creationId xmlns:p14="http://schemas.microsoft.com/office/powerpoint/2010/main" val="1578173036"/>
       </p:ext>
     </p:extLst>
   </p:cSld>
@@ -6740,7 +6740,7 @@
           <p:cNvPr id="1" name="s4-rule">
             <a:extLst xmlns:a="http://schemas.openxmlformats.org/drawingml/2006/main">
               <a:ext uri="{FF2B5EF4-FFF2-40B4-BE49-F238E27FC236}">
-                <a16:creationId xmlns:a16="http://schemas.microsoft.com/office/drawing/2014/main" id="{2509F538-FBA6-48A8-A9E6-6D6F05754C91}"/>
+                <a16:creationId xmlns:a16="http://schemas.microsoft.com/office/drawing/2014/main" id="{A75D9D11-1948-408A-A5CA-E0782176EBC1}"/>
               </a:ext>
             </a:extLst>
           </p:cNvPr>
@@ -6773,7 +6773,7 @@
           <p:cNvPr id="2" name="s4-eyebrow">
             <a:extLst xmlns:a="http://schemas.openxmlformats.org/drawingml/2006/main">
               <a:ext uri="{FF2B5EF4-FFF2-40B4-BE49-F238E27FC236}">
-                <a16:creationId xmlns:a16="http://schemas.microsoft.com/office/drawing/2014/main" id="{18DBF00E-2F59-4E2C-B9F2-4B5FAAAA6F18}"/>
+                <a16:creationId xmlns:a16="http://schemas.microsoft.com/office/drawing/2014/main" id="{C563E81E-313A-4256-96C4-E9C8E1BDBA97}"/>
               </a:ext>
             </a:extLst>
           </p:cNvPr>
@@ -6831,7 +6831,7 @@
           <p:cNvPr id="3" name="s4-title">
             <a:extLst xmlns:a="http://schemas.openxmlformats.org/drawingml/2006/main">
               <a:ext uri="{FF2B5EF4-FFF2-40B4-BE49-F238E27FC236}">
-                <a16:creationId xmlns:a16="http://schemas.microsoft.com/office/drawing/2014/main" id="{44E36AC7-0602-4AB2-B2A7-16A26EC693DA}"/>
+                <a16:creationId xmlns:a16="http://schemas.microsoft.com/office/drawing/2014/main" id="{8C0927BA-333E-4E49-BB7A-EC6E0DCE7D06}"/>
               </a:ext>
             </a:extLst>
           </p:cNvPr>
@@ -6889,7 +6889,7 @@
           <p:cNvPr id="4" name="s4-footer">
             <a:extLst xmlns:a="http://schemas.openxmlformats.org/drawingml/2006/main">
               <a:ext uri="{FF2B5EF4-FFF2-40B4-BE49-F238E27FC236}">
-                <a16:creationId xmlns:a16="http://schemas.microsoft.com/office/drawing/2014/main" id="{8C059569-851B-45E6-83D9-701B4334A7F8}"/>
+                <a16:creationId xmlns:a16="http://schemas.microsoft.com/office/drawing/2014/main" id="{B3AB730F-AE50-4DE3-B367-0CAFA089D25F}"/>
               </a:ext>
             </a:extLst>
           </p:cNvPr>
@@ -6920,7 +6920,7 @@
           <p:cNvPr id="5" name="s4-identity">
             <a:extLst xmlns:a="http://schemas.openxmlformats.org/drawingml/2006/main">
               <a:ext uri="{FF2B5EF4-FFF2-40B4-BE49-F238E27FC236}">
-                <a16:creationId xmlns:a16="http://schemas.microsoft.com/office/drawing/2014/main" id="{407E0E5B-B921-49FB-9632-85FDCDA45FC1}"/>
+                <a16:creationId xmlns:a16="http://schemas.microsoft.com/office/drawing/2014/main" id="{F8E71100-FFAF-4F5E-B50B-CB5E7CAF0B5C}"/>
               </a:ext>
             </a:extLst>
           </p:cNvPr>
@@ -6978,7 +6978,7 @@
           <p:cNvPr id="6" name="core-no-0">
             <a:extLst xmlns:a="http://schemas.openxmlformats.org/drawingml/2006/main">
               <a:ext uri="{FF2B5EF4-FFF2-40B4-BE49-F238E27FC236}">
-                <a16:creationId xmlns:a16="http://schemas.microsoft.com/office/drawing/2014/main" id="{B1239DFD-6EBB-4AB7-BBFC-C39F20E16D3E}"/>
+                <a16:creationId xmlns:a16="http://schemas.microsoft.com/office/drawing/2014/main" id="{2094C274-0949-48E4-88A5-0758DCF7A724}"/>
               </a:ext>
             </a:extLst>
           </p:cNvPr>
@@ -7036,7 +7036,7 @@
           <p:cNvPr id="7" name="core-label-0">
             <a:extLst xmlns:a="http://schemas.openxmlformats.org/drawingml/2006/main">
               <a:ext uri="{FF2B5EF4-FFF2-40B4-BE49-F238E27FC236}">
-                <a16:creationId xmlns:a16="http://schemas.microsoft.com/office/drawing/2014/main" id="{0FE936A8-0DAC-46E8-B85B-EB26CE3FB51F}"/>
+                <a16:creationId xmlns:a16="http://schemas.microsoft.com/office/drawing/2014/main" id="{34AF07C0-D0B0-4328-A2EF-B1166755DCE9}"/>
               </a:ext>
             </a:extLst>
           </p:cNvPr>
@@ -7094,7 +7094,7 @@
           <p:cNvPr id="8" name="core-body-0">
             <a:extLst xmlns:a="http://schemas.openxmlformats.org/drawingml/2006/main">
               <a:ext uri="{FF2B5EF4-FFF2-40B4-BE49-F238E27FC236}">
-                <a16:creationId xmlns:a16="http://schemas.microsoft.com/office/drawing/2014/main" id="{98B17069-32EC-4E17-A761-E35BB31D3201}"/>
+                <a16:creationId xmlns:a16="http://schemas.microsoft.com/office/drawing/2014/main" id="{79C88441-43A3-41BB-BDEE-4781F8B1F7D1}"/>
               </a:ext>
             </a:extLst>
           </p:cNvPr>
@@ -7158,7 +7158,7 @@
           <p:cNvPr id="9" name="core-no-1">
             <a:extLst xmlns:a="http://schemas.openxmlformats.org/drawingml/2006/main">
               <a:ext uri="{FF2B5EF4-FFF2-40B4-BE49-F238E27FC236}">
-                <a16:creationId xmlns:a16="http://schemas.microsoft.com/office/drawing/2014/main" id="{E2B74B3E-24BE-4EEC-9AAA-A4A376CED91C}"/>
+                <a16:creationId xmlns:a16="http://schemas.microsoft.com/office/drawing/2014/main" id="{18869A86-55FB-4144-886E-323EBB98D5FA}"/>
               </a:ext>
             </a:extLst>
           </p:cNvPr>
@@ -7216,7 +7216,7 @@
           <p:cNvPr id="10" name="core-body-1">
             <a:extLst xmlns:a="http://schemas.openxmlformats.org/drawingml/2006/main">
               <a:ext uri="{FF2B5EF4-FFF2-40B4-BE49-F238E27FC236}">
-                <a16:creationId xmlns:a16="http://schemas.microsoft.com/office/drawing/2014/main" id="{8DAC47D4-B884-481A-92FD-8254084BF922}"/>
+                <a16:creationId xmlns:a16="http://schemas.microsoft.com/office/drawing/2014/main" id="{777893F3-1430-411E-945A-3FAC24007115}"/>
               </a:ext>
             </a:extLst>
           </p:cNvPr>
@@ -7280,7 +7280,7 @@
           <p:cNvPr id="11" name="core-no-2">
             <a:extLst xmlns:a="http://schemas.openxmlformats.org/drawingml/2006/main">
               <a:ext uri="{FF2B5EF4-FFF2-40B4-BE49-F238E27FC236}">
-                <a16:creationId xmlns:a16="http://schemas.microsoft.com/office/drawing/2014/main" id="{8E3FB378-8F83-4B41-BB4A-1211B5B795E6}"/>
+                <a16:creationId xmlns:a16="http://schemas.microsoft.com/office/drawing/2014/main" id="{564D8A32-871A-40F1-8360-F46C10C36ABF}"/>
               </a:ext>
             </a:extLst>
           </p:cNvPr>
@@ -7338,7 +7338,7 @@
           <p:cNvPr id="12" name="core-body-2">
             <a:extLst xmlns:a="http://schemas.openxmlformats.org/drawingml/2006/main">
               <a:ext uri="{FF2B5EF4-FFF2-40B4-BE49-F238E27FC236}">
-                <a16:creationId xmlns:a16="http://schemas.microsoft.com/office/drawing/2014/main" id="{42F1B84F-635A-4AE9-8A94-4C4CE00BA183}"/>
+                <a16:creationId xmlns:a16="http://schemas.microsoft.com/office/drawing/2014/main" id="{6488BF49-CA40-4A8B-AA3A-496D4E6A2F18}"/>
               </a:ext>
             </a:extLst>
           </p:cNvPr>
@@ -7402,7 +7402,7 @@
           <p:cNvPr id="13" name="s4-takeaway-rule">
             <a:extLst xmlns:a="http://schemas.openxmlformats.org/drawingml/2006/main">
               <a:ext uri="{FF2B5EF4-FFF2-40B4-BE49-F238E27FC236}">
-                <a16:creationId xmlns:a16="http://schemas.microsoft.com/office/drawing/2014/main" id="{03E8D1AB-ACE1-4387-9608-AE6B1CD4F636}"/>
+                <a16:creationId xmlns:a16="http://schemas.microsoft.com/office/drawing/2014/main" id="{EC35BBE6-9FB2-40C8-92D5-D24064CD785C}"/>
               </a:ext>
             </a:extLst>
           </p:cNvPr>
@@ -7435,7 +7435,7 @@
           <p:cNvPr id="14" name="s4-takeaway">
             <a:extLst xmlns:a="http://schemas.openxmlformats.org/drawingml/2006/main">
               <a:ext uri="{FF2B5EF4-FFF2-40B4-BE49-F238E27FC236}">
-                <a16:creationId xmlns:a16="http://schemas.microsoft.com/office/drawing/2014/main" id="{2A4659F3-7E46-4FBB-9824-A1CD822FFAC9}"/>
+                <a16:creationId xmlns:a16="http://schemas.microsoft.com/office/drawing/2014/main" id="{60890BC6-8D3E-4CF8-A837-87CEA27649D3}"/>
               </a:ext>
             </a:extLst>
           </p:cNvPr>
@@ -7491,7 +7491,7 @@
     </p:spTree>
     <p:extLst>
       <p:ext uri="{BB962C8B-B14F-4D97-AF65-F5344CB8AC3E}">
-        <p14:creationId xmlns:p14="http://schemas.microsoft.com/office/powerpoint/2010/main" val="737765194"/>
+        <p14:creationId xmlns:p14="http://schemas.microsoft.com/office/powerpoint/2010/main" val="719079607"/>
       </p:ext>
     </p:extLst>
   </p:cSld>
@@ -7522,7 +7522,7 @@
           <p:cNvPr id="1" name="s5-rule">
             <a:extLst xmlns:a="http://schemas.openxmlformats.org/drawingml/2006/main">
               <a:ext uri="{FF2B5EF4-FFF2-40B4-BE49-F238E27FC236}">
-                <a16:creationId xmlns:a16="http://schemas.microsoft.com/office/drawing/2014/main" id="{518E1F10-94BC-420C-B55A-2191D7B196C2}"/>
+                <a16:creationId xmlns:a16="http://schemas.microsoft.com/office/drawing/2014/main" id="{823B4972-892D-4136-AEAC-F900E6B9D369}"/>
               </a:ext>
             </a:extLst>
           </p:cNvPr>
@@ -7555,7 +7555,7 @@
           <p:cNvPr id="2" name="s5-eyebrow">
             <a:extLst xmlns:a="http://schemas.openxmlformats.org/drawingml/2006/main">
               <a:ext uri="{FF2B5EF4-FFF2-40B4-BE49-F238E27FC236}">
-                <a16:creationId xmlns:a16="http://schemas.microsoft.com/office/drawing/2014/main" id="{150689A9-8E37-4CDC-A640-2D3E41DCC30E}"/>
+                <a16:creationId xmlns:a16="http://schemas.microsoft.com/office/drawing/2014/main" id="{7DF054F2-54F7-489B-9B93-8F0E227A90DF}"/>
               </a:ext>
             </a:extLst>
           </p:cNvPr>
@@ -7613,7 +7613,7 @@
           <p:cNvPr id="3" name="s5-title">
             <a:extLst xmlns:a="http://schemas.openxmlformats.org/drawingml/2006/main">
               <a:ext uri="{FF2B5EF4-FFF2-40B4-BE49-F238E27FC236}">
-                <a16:creationId xmlns:a16="http://schemas.microsoft.com/office/drawing/2014/main" id="{AB9461A1-ED92-4F62-BDD9-3C0CB1720645}"/>
+                <a16:creationId xmlns:a16="http://schemas.microsoft.com/office/drawing/2014/main" id="{A545639F-D50E-46AE-BC94-89658A165643}"/>
               </a:ext>
             </a:extLst>
           </p:cNvPr>
@@ -7671,7 +7671,7 @@
           <p:cNvPr id="4" name="s5-footer">
             <a:extLst xmlns:a="http://schemas.openxmlformats.org/drawingml/2006/main">
               <a:ext uri="{FF2B5EF4-FFF2-40B4-BE49-F238E27FC236}">
-                <a16:creationId xmlns:a16="http://schemas.microsoft.com/office/drawing/2014/main" id="{2FEF9942-C569-4823-9A8D-AD8AC3B5CA0F}"/>
+                <a16:creationId xmlns:a16="http://schemas.microsoft.com/office/drawing/2014/main" id="{52004AE9-7EA0-463B-B3A3-63197D2D5CA9}"/>
               </a:ext>
             </a:extLst>
           </p:cNvPr>
@@ -7702,7 +7702,7 @@
           <p:cNvPr id="5" name="s5-identity">
             <a:extLst xmlns:a="http://schemas.openxmlformats.org/drawingml/2006/main">
               <a:ext uri="{FF2B5EF4-FFF2-40B4-BE49-F238E27FC236}">
-                <a16:creationId xmlns:a16="http://schemas.microsoft.com/office/drawing/2014/main" id="{6DD5B527-C5A9-42C6-837A-5CAB2E735C06}"/>
+                <a16:creationId xmlns:a16="http://schemas.microsoft.com/office/drawing/2014/main" id="{E388A7B4-C35B-43FA-BA0E-7C8A68A61B0A}"/>
               </a:ext>
             </a:extLst>
           </p:cNvPr>
@@ -7760,7 +7760,7 @@
           <p:cNvPr id="6" name="core-no-0">
             <a:extLst xmlns:a="http://schemas.openxmlformats.org/drawingml/2006/main">
               <a:ext uri="{FF2B5EF4-FFF2-40B4-BE49-F238E27FC236}">
-                <a16:creationId xmlns:a16="http://schemas.microsoft.com/office/drawing/2014/main" id="{A1D8B50B-1E2F-47F8-874C-0079F39CF087}"/>
+                <a16:creationId xmlns:a16="http://schemas.microsoft.com/office/drawing/2014/main" id="{9D20B9C8-1F98-4145-8162-616652C5731E}"/>
               </a:ext>
             </a:extLst>
           </p:cNvPr>
@@ -7818,7 +7818,7 @@
           <p:cNvPr id="7" name="core-label-0">
             <a:extLst xmlns:a="http://schemas.openxmlformats.org/drawingml/2006/main">
               <a:ext uri="{FF2B5EF4-FFF2-40B4-BE49-F238E27FC236}">
-                <a16:creationId xmlns:a16="http://schemas.microsoft.com/office/drawing/2014/main" id="{BA3E5125-54CA-4060-90EB-A30B96B71C8E}"/>
+                <a16:creationId xmlns:a16="http://schemas.microsoft.com/office/drawing/2014/main" id="{57FDBC33-2827-419D-984A-0A4E435A2D07}"/>
               </a:ext>
             </a:extLst>
           </p:cNvPr>
@@ -7876,7 +7876,7 @@
           <p:cNvPr id="8" name="core-body-0">
             <a:extLst xmlns:a="http://schemas.openxmlformats.org/drawingml/2006/main">
               <a:ext uri="{FF2B5EF4-FFF2-40B4-BE49-F238E27FC236}">
-                <a16:creationId xmlns:a16="http://schemas.microsoft.com/office/drawing/2014/main" id="{588F29C2-D2E2-471F-AFFE-91E25B54908A}"/>
+                <a16:creationId xmlns:a16="http://schemas.microsoft.com/office/drawing/2014/main" id="{B1745558-8864-494D-BF6B-E9C14B623F69}"/>
               </a:ext>
             </a:extLst>
           </p:cNvPr>
@@ -7940,7 +7940,7 @@
           <p:cNvPr id="9" name="core-no-1">
             <a:extLst xmlns:a="http://schemas.openxmlformats.org/drawingml/2006/main">
               <a:ext uri="{FF2B5EF4-FFF2-40B4-BE49-F238E27FC236}">
-                <a16:creationId xmlns:a16="http://schemas.microsoft.com/office/drawing/2014/main" id="{E0B600E2-4CC4-4602-950C-198E22AEBAF7}"/>
+                <a16:creationId xmlns:a16="http://schemas.microsoft.com/office/drawing/2014/main" id="{77A04959-8A58-4BEB-9A8B-053B12410612}"/>
               </a:ext>
             </a:extLst>
           </p:cNvPr>
@@ -7998,7 +7998,7 @@
           <p:cNvPr id="10" name="core-body-1">
             <a:extLst xmlns:a="http://schemas.openxmlformats.org/drawingml/2006/main">
               <a:ext uri="{FF2B5EF4-FFF2-40B4-BE49-F238E27FC236}">
-                <a16:creationId xmlns:a16="http://schemas.microsoft.com/office/drawing/2014/main" id="{0E46B13D-4389-48FE-92FE-35DEF0D1C381}"/>
+                <a16:creationId xmlns:a16="http://schemas.microsoft.com/office/drawing/2014/main" id="{25DC3A93-C20B-4D6E-B850-A16958F30E4D}"/>
               </a:ext>
             </a:extLst>
           </p:cNvPr>
@@ -8062,7 +8062,7 @@
           <p:cNvPr id="11" name="core-no-2">
             <a:extLst xmlns:a="http://schemas.openxmlformats.org/drawingml/2006/main">
               <a:ext uri="{FF2B5EF4-FFF2-40B4-BE49-F238E27FC236}">
-                <a16:creationId xmlns:a16="http://schemas.microsoft.com/office/drawing/2014/main" id="{514D963C-143D-45CB-ACDF-BBA21A62BB34}"/>
+                <a16:creationId xmlns:a16="http://schemas.microsoft.com/office/drawing/2014/main" id="{B33E379F-A986-43C9-9B06-79D9A2FA9F32}"/>
               </a:ext>
             </a:extLst>
           </p:cNvPr>
@@ -8120,7 +8120,7 @@
           <p:cNvPr id="12" name="core-body-2">
             <a:extLst xmlns:a="http://schemas.openxmlformats.org/drawingml/2006/main">
               <a:ext uri="{FF2B5EF4-FFF2-40B4-BE49-F238E27FC236}">
-                <a16:creationId xmlns:a16="http://schemas.microsoft.com/office/drawing/2014/main" id="{B9F32DC7-5FF4-4917-9211-2AD4E62E4960}"/>
+                <a16:creationId xmlns:a16="http://schemas.microsoft.com/office/drawing/2014/main" id="{33594411-AE35-41F6-9D6B-BB18C78681C4}"/>
               </a:ext>
             </a:extLst>
           </p:cNvPr>
@@ -8184,7 +8184,7 @@
           <p:cNvPr id="13" name="s5-takeaway-rule">
             <a:extLst xmlns:a="http://schemas.openxmlformats.org/drawingml/2006/main">
               <a:ext uri="{FF2B5EF4-FFF2-40B4-BE49-F238E27FC236}">
-                <a16:creationId xmlns:a16="http://schemas.microsoft.com/office/drawing/2014/main" id="{5F8ACC17-7511-4702-9BB2-21C4626BBF4D}"/>
+                <a16:creationId xmlns:a16="http://schemas.microsoft.com/office/drawing/2014/main" id="{998A38A3-5672-4900-B46D-8A83FC6D8FA6}"/>
               </a:ext>
             </a:extLst>
           </p:cNvPr>
@@ -8217,7 +8217,7 @@
           <p:cNvPr id="14" name="s5-takeaway">
             <a:extLst xmlns:a="http://schemas.openxmlformats.org/drawingml/2006/main">
               <a:ext uri="{FF2B5EF4-FFF2-40B4-BE49-F238E27FC236}">
-                <a16:creationId xmlns:a16="http://schemas.microsoft.com/office/drawing/2014/main" id="{B2D0230D-AF0C-4AF5-8DA8-0D4BB1196F05}"/>
+                <a16:creationId xmlns:a16="http://schemas.microsoft.com/office/drawing/2014/main" id="{EC62E63D-F6F4-4BFE-B00E-5D17A6FFDBAE}"/>
               </a:ext>
             </a:extLst>
           </p:cNvPr>
@@ -8273,7 +8273,7 @@
     </p:spTree>
     <p:extLst>
       <p:ext uri="{BB962C8B-B14F-4D97-AF65-F5344CB8AC3E}">
-        <p14:creationId xmlns:p14="http://schemas.microsoft.com/office/powerpoint/2010/main" val="676032961"/>
+        <p14:creationId xmlns:p14="http://schemas.microsoft.com/office/powerpoint/2010/main" val="2023819204"/>
       </p:ext>
     </p:extLst>
   </p:cSld>
@@ -8304,7 +8304,7 @@
           <p:cNvPr id="1" name="s6-rule">
             <a:extLst xmlns:a="http://schemas.openxmlformats.org/drawingml/2006/main">
               <a:ext uri="{FF2B5EF4-FFF2-40B4-BE49-F238E27FC236}">
-                <a16:creationId xmlns:a16="http://schemas.microsoft.com/office/drawing/2014/main" id="{5437260C-CDD5-429A-8474-62F31D01B4B6}"/>
+                <a16:creationId xmlns:a16="http://schemas.microsoft.com/office/drawing/2014/main" id="{3D421919-40CE-4415-8B0C-0324A4E5F057}"/>
               </a:ext>
             </a:extLst>
           </p:cNvPr>
@@ -8337,7 +8337,7 @@
           <p:cNvPr id="2" name="s6-eyebrow">
             <a:extLst xmlns:a="http://schemas.openxmlformats.org/drawingml/2006/main">
               <a:ext uri="{FF2B5EF4-FFF2-40B4-BE49-F238E27FC236}">
-                <a16:creationId xmlns:a16="http://schemas.microsoft.com/office/drawing/2014/main" id="{10D30776-082B-4C65-B44B-B2A8965D6E56}"/>
+                <a16:creationId xmlns:a16="http://schemas.microsoft.com/office/drawing/2014/main" id="{3B457E9D-39E4-46F8-9484-FDA41A593E73}"/>
               </a:ext>
             </a:extLst>
           </p:cNvPr>
@@ -8395,7 +8395,7 @@
           <p:cNvPr id="3" name="s6-title">
             <a:extLst xmlns:a="http://schemas.openxmlformats.org/drawingml/2006/main">
               <a:ext uri="{FF2B5EF4-FFF2-40B4-BE49-F238E27FC236}">
-                <a16:creationId xmlns:a16="http://schemas.microsoft.com/office/drawing/2014/main" id="{BC863C86-71BC-4AD9-AB10-82B0DEB2B87F}"/>
+                <a16:creationId xmlns:a16="http://schemas.microsoft.com/office/drawing/2014/main" id="{A07CCF97-E6B3-4818-9149-EE5BE6775AAA}"/>
               </a:ext>
             </a:extLst>
           </p:cNvPr>
@@ -8453,7 +8453,7 @@
           <p:cNvPr id="4" name="s6-footer">
             <a:extLst xmlns:a="http://schemas.openxmlformats.org/drawingml/2006/main">
               <a:ext uri="{FF2B5EF4-FFF2-40B4-BE49-F238E27FC236}">
-                <a16:creationId xmlns:a16="http://schemas.microsoft.com/office/drawing/2014/main" id="{C9C16B2D-BDB8-48FF-8BB0-344699575FA3}"/>
+                <a16:creationId xmlns:a16="http://schemas.microsoft.com/office/drawing/2014/main" id="{D09C1DD4-B328-4BBD-98C0-7E58780C773C}"/>
               </a:ext>
             </a:extLst>
           </p:cNvPr>
@@ -8484,7 +8484,7 @@
           <p:cNvPr id="5" name="s6-identity">
             <a:extLst xmlns:a="http://schemas.openxmlformats.org/drawingml/2006/main">
               <a:ext uri="{FF2B5EF4-FFF2-40B4-BE49-F238E27FC236}">
-                <a16:creationId xmlns:a16="http://schemas.microsoft.com/office/drawing/2014/main" id="{F6524161-F360-43D8-AC86-FFC1E5FDB55F}"/>
+                <a16:creationId xmlns:a16="http://schemas.microsoft.com/office/drawing/2014/main" id="{BE6BA2D4-8306-4E55-A843-919076CEB3CC}"/>
               </a:ext>
             </a:extLst>
           </p:cNvPr>
@@ -8542,7 +8542,7 @@
           <p:cNvPr id="6" name="core-no-0">
             <a:extLst xmlns:a="http://schemas.openxmlformats.org/drawingml/2006/main">
               <a:ext uri="{FF2B5EF4-FFF2-40B4-BE49-F238E27FC236}">
-                <a16:creationId xmlns:a16="http://schemas.microsoft.com/office/drawing/2014/main" id="{8330CAD9-BFFB-4B6A-A90B-31039CF9D027}"/>
+                <a16:creationId xmlns:a16="http://schemas.microsoft.com/office/drawing/2014/main" id="{B9ABE3D1-BAF9-4458-9530-D9E4AE127023}"/>
               </a:ext>
             </a:extLst>
           </p:cNvPr>
@@ -8600,7 +8600,7 @@
           <p:cNvPr id="7" name="core-label-0">
             <a:extLst xmlns:a="http://schemas.openxmlformats.org/drawingml/2006/main">
               <a:ext uri="{FF2B5EF4-FFF2-40B4-BE49-F238E27FC236}">
-                <a16:creationId xmlns:a16="http://schemas.microsoft.com/office/drawing/2014/main" id="{AFD167ED-9914-4BA9-BC6E-C82C943180FD}"/>
+                <a16:creationId xmlns:a16="http://schemas.microsoft.com/office/drawing/2014/main" id="{86058B5B-92F5-4BA3-B848-C60467EE530F}"/>
               </a:ext>
             </a:extLst>
           </p:cNvPr>
@@ -8658,7 +8658,7 @@
           <p:cNvPr id="8" name="core-body-0">
             <a:extLst xmlns:a="http://schemas.openxmlformats.org/drawingml/2006/main">
               <a:ext uri="{FF2B5EF4-FFF2-40B4-BE49-F238E27FC236}">
-                <a16:creationId xmlns:a16="http://schemas.microsoft.com/office/drawing/2014/main" id="{DDE0F7F9-230C-4A80-9E1F-860B6F1211EB}"/>
+                <a16:creationId xmlns:a16="http://schemas.microsoft.com/office/drawing/2014/main" id="{8CBF41D5-F299-4464-A4D9-345160938957}"/>
               </a:ext>
             </a:extLst>
           </p:cNvPr>
@@ -8722,7 +8722,7 @@
           <p:cNvPr id="9" name="core-no-1">
             <a:extLst xmlns:a="http://schemas.openxmlformats.org/drawingml/2006/main">
               <a:ext uri="{FF2B5EF4-FFF2-40B4-BE49-F238E27FC236}">
-                <a16:creationId xmlns:a16="http://schemas.microsoft.com/office/drawing/2014/main" id="{0B98D85F-0AFF-4C0B-A6FA-48E63BD4B4A8}"/>
+                <a16:creationId xmlns:a16="http://schemas.microsoft.com/office/drawing/2014/main" id="{5DA489CF-5FD9-4A5A-8FAD-C589FAD36F4C}"/>
               </a:ext>
             </a:extLst>
           </p:cNvPr>
@@ -8780,7 +8780,7 @@
           <p:cNvPr id="10" name="core-body-1">
             <a:extLst xmlns:a="http://schemas.openxmlformats.org/drawingml/2006/main">
               <a:ext uri="{FF2B5EF4-FFF2-40B4-BE49-F238E27FC236}">
-                <a16:creationId xmlns:a16="http://schemas.microsoft.com/office/drawing/2014/main" id="{9E4D091D-BD38-4355-B25B-59068B896E52}"/>
+                <a16:creationId xmlns:a16="http://schemas.microsoft.com/office/drawing/2014/main" id="{96E680A7-B80F-43C0-8037-7F65C65B7958}"/>
               </a:ext>
             </a:extLst>
           </p:cNvPr>
@@ -8844,7 +8844,7 @@
           <p:cNvPr id="11" name="s6-takeaway-rule">
             <a:extLst xmlns:a="http://schemas.openxmlformats.org/drawingml/2006/main">
               <a:ext uri="{FF2B5EF4-FFF2-40B4-BE49-F238E27FC236}">
-                <a16:creationId xmlns:a16="http://schemas.microsoft.com/office/drawing/2014/main" id="{F7B2B087-2693-4AAC-9A20-B29FBB225E6D}"/>
+                <a16:creationId xmlns:a16="http://schemas.microsoft.com/office/drawing/2014/main" id="{70B6986D-FBD9-44AB-8269-7547B1CCACA6}"/>
               </a:ext>
             </a:extLst>
           </p:cNvPr>
@@ -8877,7 +8877,7 @@
           <p:cNvPr id="12" name="s6-takeaway">
             <a:extLst xmlns:a="http://schemas.openxmlformats.org/drawingml/2006/main">
               <a:ext uri="{FF2B5EF4-FFF2-40B4-BE49-F238E27FC236}">
-                <a16:creationId xmlns:a16="http://schemas.microsoft.com/office/drawing/2014/main" id="{903BAE8C-B9DA-4FCB-9852-5FA90C665CAB}"/>
+                <a16:creationId xmlns:a16="http://schemas.microsoft.com/office/drawing/2014/main" id="{EA46F419-5AC8-4B93-BE4C-EC1528671442}"/>
               </a:ext>
             </a:extLst>
           </p:cNvPr>
@@ -8933,7 +8933,7 @@
     </p:spTree>
     <p:extLst>
       <p:ext uri="{BB962C8B-B14F-4D97-AF65-F5344CB8AC3E}">
-        <p14:creationId xmlns:p14="http://schemas.microsoft.com/office/powerpoint/2010/main" val="1455417899"/>
+        <p14:creationId xmlns:p14="http://schemas.microsoft.com/office/powerpoint/2010/main" val="934744587"/>
       </p:ext>
     </p:extLst>
   </p:cSld>
@@ -8964,7 +8964,7 @@
           <p:cNvPr id="1" name="s7-rule">
             <a:extLst xmlns:a="http://schemas.openxmlformats.org/drawingml/2006/main">
               <a:ext uri="{FF2B5EF4-FFF2-40B4-BE49-F238E27FC236}">
-                <a16:creationId xmlns:a16="http://schemas.microsoft.com/office/drawing/2014/main" id="{A330105E-3E4F-40D7-B205-5460A6DEBD87}"/>
+                <a16:creationId xmlns:a16="http://schemas.microsoft.com/office/drawing/2014/main" id="{1334B5B8-38C0-4942-9770-D27B08A9DB3A}"/>
               </a:ext>
             </a:extLst>
           </p:cNvPr>
@@ -8997,7 +8997,7 @@
           <p:cNvPr id="2" name="s7-eyebrow">
             <a:extLst xmlns:a="http://schemas.openxmlformats.org/drawingml/2006/main">
               <a:ext uri="{FF2B5EF4-FFF2-40B4-BE49-F238E27FC236}">
-                <a16:creationId xmlns:a16="http://schemas.microsoft.com/office/drawing/2014/main" id="{7086DF69-AC62-4E17-B4A3-2BE833888B23}"/>
+                <a16:creationId xmlns:a16="http://schemas.microsoft.com/office/drawing/2014/main" id="{967B2ACB-166C-412C-BFDB-A5ED3CD043D7}"/>
               </a:ext>
             </a:extLst>
           </p:cNvPr>
@@ -9055,7 +9055,7 @@
           <p:cNvPr id="3" name="s7-title">
             <a:extLst xmlns:a="http://schemas.openxmlformats.org/drawingml/2006/main">
               <a:ext uri="{FF2B5EF4-FFF2-40B4-BE49-F238E27FC236}">
-                <a16:creationId xmlns:a16="http://schemas.microsoft.com/office/drawing/2014/main" id="{73817960-5C1E-4340-9462-F24199186592}"/>
+                <a16:creationId xmlns:a16="http://schemas.microsoft.com/office/drawing/2014/main" id="{AD0C1FDB-0F65-4D2D-8FD3-338C07A3F9B7}"/>
               </a:ext>
             </a:extLst>
           </p:cNvPr>
@@ -9113,7 +9113,7 @@
           <p:cNvPr id="4" name="s7-footer">
             <a:extLst xmlns:a="http://schemas.openxmlformats.org/drawingml/2006/main">
               <a:ext uri="{FF2B5EF4-FFF2-40B4-BE49-F238E27FC236}">
-                <a16:creationId xmlns:a16="http://schemas.microsoft.com/office/drawing/2014/main" id="{895CB455-971D-4339-92FC-75B557412ED8}"/>
+                <a16:creationId xmlns:a16="http://schemas.microsoft.com/office/drawing/2014/main" id="{837043FC-D761-497E-ACF5-613D76FF8F5C}"/>
               </a:ext>
             </a:extLst>
           </p:cNvPr>
@@ -9144,7 +9144,7 @@
           <p:cNvPr id="5" name="s7-identity">
             <a:extLst xmlns:a="http://schemas.openxmlformats.org/drawingml/2006/main">
               <a:ext uri="{FF2B5EF4-FFF2-40B4-BE49-F238E27FC236}">
-                <a16:creationId xmlns:a16="http://schemas.microsoft.com/office/drawing/2014/main" id="{AF909C66-CB8F-4B50-8BE4-70F24BFB0E7D}"/>
+                <a16:creationId xmlns:a16="http://schemas.microsoft.com/office/drawing/2014/main" id="{70C17A95-B9F3-487D-898D-71C84095EEA9}"/>
               </a:ext>
             </a:extLst>
           </p:cNvPr>
@@ -9202,7 +9202,7 @@
           <p:cNvPr id="6" name="core-no-0">
             <a:extLst xmlns:a="http://schemas.openxmlformats.org/drawingml/2006/main">
               <a:ext uri="{FF2B5EF4-FFF2-40B4-BE49-F238E27FC236}">
-                <a16:creationId xmlns:a16="http://schemas.microsoft.com/office/drawing/2014/main" id="{173ADE63-16B7-422C-BF17-EF7DFCCB37CE}"/>
+                <a16:creationId xmlns:a16="http://schemas.microsoft.com/office/drawing/2014/main" id="{E6D409A5-59FE-47D5-8234-22233F777C2A}"/>
               </a:ext>
             </a:extLst>
           </p:cNvPr>
@@ -9260,7 +9260,7 @@
           <p:cNvPr id="7" name="core-label-0">
             <a:extLst xmlns:a="http://schemas.openxmlformats.org/drawingml/2006/main">
               <a:ext uri="{FF2B5EF4-FFF2-40B4-BE49-F238E27FC236}">
-                <a16:creationId xmlns:a16="http://schemas.microsoft.com/office/drawing/2014/main" id="{DA010A8F-B65C-4753-BD2F-5B4683EFBA4C}"/>
+                <a16:creationId xmlns:a16="http://schemas.microsoft.com/office/drawing/2014/main" id="{D9D43098-6282-4F71-A0FA-C7197BB05063}"/>
               </a:ext>
             </a:extLst>
           </p:cNvPr>
@@ -9318,7 +9318,7 @@
           <p:cNvPr id="8" name="core-body-0">
             <a:extLst xmlns:a="http://schemas.openxmlformats.org/drawingml/2006/main">
               <a:ext uri="{FF2B5EF4-FFF2-40B4-BE49-F238E27FC236}">
-                <a16:creationId xmlns:a16="http://schemas.microsoft.com/office/drawing/2014/main" id="{5C249248-3119-47E1-869B-48389B44088F}"/>
+                <a16:creationId xmlns:a16="http://schemas.microsoft.com/office/drawing/2014/main" id="{658E5F4A-2B58-4715-9215-24F09A87EEF3}"/>
               </a:ext>
             </a:extLst>
           </p:cNvPr>
@@ -9382,7 +9382,7 @@
           <p:cNvPr id="9" name="core-no-1">
             <a:extLst xmlns:a="http://schemas.openxmlformats.org/drawingml/2006/main">
               <a:ext uri="{FF2B5EF4-FFF2-40B4-BE49-F238E27FC236}">
-                <a16:creationId xmlns:a16="http://schemas.microsoft.com/office/drawing/2014/main" id="{6468D6DF-2173-4766-8151-6E1A959A6B26}"/>
+                <a16:creationId xmlns:a16="http://schemas.microsoft.com/office/drawing/2014/main" id="{66BCC0B5-96F2-47FE-8502-683598319453}"/>
               </a:ext>
             </a:extLst>
           </p:cNvPr>
@@ -9440,7 +9440,7 @@
           <p:cNvPr id="10" name="core-body-1">
             <a:extLst xmlns:a="http://schemas.openxmlformats.org/drawingml/2006/main">
               <a:ext uri="{FF2B5EF4-FFF2-40B4-BE49-F238E27FC236}">
-                <a16:creationId xmlns:a16="http://schemas.microsoft.com/office/drawing/2014/main" id="{1974EEA5-FC22-4036-B09A-69CC2EB43296}"/>
+                <a16:creationId xmlns:a16="http://schemas.microsoft.com/office/drawing/2014/main" id="{BD1D0461-148F-4274-A626-F29B326E12CF}"/>
               </a:ext>
             </a:extLst>
           </p:cNvPr>
@@ -9504,7 +9504,7 @@
           <p:cNvPr id="11" name="s7-takeaway-rule">
             <a:extLst xmlns:a="http://schemas.openxmlformats.org/drawingml/2006/main">
               <a:ext uri="{FF2B5EF4-FFF2-40B4-BE49-F238E27FC236}">
-                <a16:creationId xmlns:a16="http://schemas.microsoft.com/office/drawing/2014/main" id="{3078677A-47BD-4231-9392-988C86C9E065}"/>
+                <a16:creationId xmlns:a16="http://schemas.microsoft.com/office/drawing/2014/main" id="{756D9D04-2EB2-4F68-97B5-AFB135ADFB68}"/>
               </a:ext>
             </a:extLst>
           </p:cNvPr>
@@ -9537,7 +9537,7 @@
           <p:cNvPr id="12" name="s7-takeaway">
             <a:extLst xmlns:a="http://schemas.openxmlformats.org/drawingml/2006/main">
               <a:ext uri="{FF2B5EF4-FFF2-40B4-BE49-F238E27FC236}">
-                <a16:creationId xmlns:a16="http://schemas.microsoft.com/office/drawing/2014/main" id="{8529D347-B309-4BF6-B119-489C2906C1CB}"/>
+                <a16:creationId xmlns:a16="http://schemas.microsoft.com/office/drawing/2014/main" id="{FF9413BF-738C-4670-A0B5-205833BD0A6E}"/>
               </a:ext>
             </a:extLst>
           </p:cNvPr>
@@ -9593,7 +9593,7 @@
     </p:spTree>
     <p:extLst>
       <p:ext uri="{BB962C8B-B14F-4D97-AF65-F5344CB8AC3E}">
-        <p14:creationId xmlns:p14="http://schemas.microsoft.com/office/powerpoint/2010/main" val="1456983696"/>
+        <p14:creationId xmlns:p14="http://schemas.microsoft.com/office/powerpoint/2010/main" val="2075962247"/>
       </p:ext>
     </p:extLst>
   </p:cSld>
@@ -9624,7 +9624,7 @@
           <p:cNvPr id="1" name="s8-rule">
             <a:extLst xmlns:a="http://schemas.openxmlformats.org/drawingml/2006/main">
               <a:ext uri="{FF2B5EF4-FFF2-40B4-BE49-F238E27FC236}">
-                <a16:creationId xmlns:a16="http://schemas.microsoft.com/office/drawing/2014/main" id="{CD5A4F26-5321-44FB-BD63-15397305E8DC}"/>
+                <a16:creationId xmlns:a16="http://schemas.microsoft.com/office/drawing/2014/main" id="{B3726A33-B4D0-42BB-8EF1-47D5DEF1652A}"/>
               </a:ext>
             </a:extLst>
           </p:cNvPr>
@@ -9657,7 +9657,7 @@
           <p:cNvPr id="2" name="s8-eyebrow">
             <a:extLst xmlns:a="http://schemas.openxmlformats.org/drawingml/2006/main">
               <a:ext uri="{FF2B5EF4-FFF2-40B4-BE49-F238E27FC236}">
-                <a16:creationId xmlns:a16="http://schemas.microsoft.com/office/drawing/2014/main" id="{C5DE6D36-AB0F-45E7-B653-C13A93080B1D}"/>
+                <a16:creationId xmlns:a16="http://schemas.microsoft.com/office/drawing/2014/main" id="{EE94280C-1208-41E1-809E-5F610E8421E4}"/>
               </a:ext>
             </a:extLst>
           </p:cNvPr>
@@ -9715,7 +9715,7 @@
           <p:cNvPr id="3" name="s8-title">
             <a:extLst xmlns:a="http://schemas.openxmlformats.org/drawingml/2006/main">
               <a:ext uri="{FF2B5EF4-FFF2-40B4-BE49-F238E27FC236}">
-                <a16:creationId xmlns:a16="http://schemas.microsoft.com/office/drawing/2014/main" id="{E9684C3A-321F-4FB7-94E6-6D882A7CEFB4}"/>
+                <a16:creationId xmlns:a16="http://schemas.microsoft.com/office/drawing/2014/main" id="{693C43E4-57D0-4A87-B4D6-54A46D43538C}"/>
               </a:ext>
             </a:extLst>
           </p:cNvPr>
@@ -9773,7 +9773,7 @@
           <p:cNvPr id="4" name="s8-footer">
             <a:extLst xmlns:a="http://schemas.openxmlformats.org/drawingml/2006/main">
               <a:ext uri="{FF2B5EF4-FFF2-40B4-BE49-F238E27FC236}">
-                <a16:creationId xmlns:a16="http://schemas.microsoft.com/office/drawing/2014/main" id="{AFB5CB0C-6875-478E-BD1C-AFD5B6339618}"/>
+                <a16:creationId xmlns:a16="http://schemas.microsoft.com/office/drawing/2014/main" id="{EA48A152-F25B-4D79-8B1C-9DE76E2A1354}"/>
               </a:ext>
             </a:extLst>
           </p:cNvPr>
@@ -9804,7 +9804,7 @@
           <p:cNvPr id="5" name="s8-identity">
             <a:extLst xmlns:a="http://schemas.openxmlformats.org/drawingml/2006/main">
               <a:ext uri="{FF2B5EF4-FFF2-40B4-BE49-F238E27FC236}">
-                <a16:creationId xmlns:a16="http://schemas.microsoft.com/office/drawing/2014/main" id="{AE35A801-66DF-4F6C-B1AE-34906B6BBBCA}"/>
+                <a16:creationId xmlns:a16="http://schemas.microsoft.com/office/drawing/2014/main" id="{86077912-CD02-4FD2-B51F-08780F1DA3E2}"/>
               </a:ext>
             </a:extLst>
           </p:cNvPr>
@@ -9862,7 +9862,7 @@
           <p:cNvPr id="6" name="core-no-0">
             <a:extLst xmlns:a="http://schemas.openxmlformats.org/drawingml/2006/main">
               <a:ext uri="{FF2B5EF4-FFF2-40B4-BE49-F238E27FC236}">
-                <a16:creationId xmlns:a16="http://schemas.microsoft.com/office/drawing/2014/main" id="{E02CAB5F-1F75-430C-B2DD-D7A10B4D7377}"/>
+                <a16:creationId xmlns:a16="http://schemas.microsoft.com/office/drawing/2014/main" id="{4966B952-0136-4CA2-8EB6-F3F003EC33AD}"/>
               </a:ext>
             </a:extLst>
           </p:cNvPr>
@@ -9920,7 +9920,7 @@
           <p:cNvPr id="7" name="core-label-0">
             <a:extLst xmlns:a="http://schemas.openxmlformats.org/drawingml/2006/main">
               <a:ext uri="{FF2B5EF4-FFF2-40B4-BE49-F238E27FC236}">
-                <a16:creationId xmlns:a16="http://schemas.microsoft.com/office/drawing/2014/main" id="{5C23D5AA-FA0D-4744-82A1-D7BCD6B9F7DB}"/>
+                <a16:creationId xmlns:a16="http://schemas.microsoft.com/office/drawing/2014/main" id="{183227AB-63BA-4041-A890-9A799D5105C8}"/>
               </a:ext>
             </a:extLst>
           </p:cNvPr>
@@ -9978,7 +9978,7 @@
           <p:cNvPr id="8" name="core-body-0">
             <a:extLst xmlns:a="http://schemas.openxmlformats.org/drawingml/2006/main">
               <a:ext uri="{FF2B5EF4-FFF2-40B4-BE49-F238E27FC236}">
-                <a16:creationId xmlns:a16="http://schemas.microsoft.com/office/drawing/2014/main" id="{4ED7ABCF-A75D-477A-AF90-E3A0AF77CA47}"/>
+                <a16:creationId xmlns:a16="http://schemas.microsoft.com/office/drawing/2014/main" id="{B9B3F1FF-5F0B-42E7-BEB2-E29BEA061C74}"/>
               </a:ext>
             </a:extLst>
           </p:cNvPr>
@@ -10042,7 +10042,7 @@
           <p:cNvPr id="9" name="core-no-1">
             <a:extLst xmlns:a="http://schemas.openxmlformats.org/drawingml/2006/main">
               <a:ext uri="{FF2B5EF4-FFF2-40B4-BE49-F238E27FC236}">
-                <a16:creationId xmlns:a16="http://schemas.microsoft.com/office/drawing/2014/main" id="{CE454372-59D7-4984-A687-1ED2F6DB7E83}"/>
+                <a16:creationId xmlns:a16="http://schemas.microsoft.com/office/drawing/2014/main" id="{FFAF44AA-D33A-4054-B5D7-26F09485E3E3}"/>
               </a:ext>
             </a:extLst>
           </p:cNvPr>
@@ -10100,7 +10100,7 @@
           <p:cNvPr id="10" name="core-body-1">
             <a:extLst xmlns:a="http://schemas.openxmlformats.org/drawingml/2006/main">
               <a:ext uri="{FF2B5EF4-FFF2-40B4-BE49-F238E27FC236}">
-                <a16:creationId xmlns:a16="http://schemas.microsoft.com/office/drawing/2014/main" id="{1D588D1D-A30F-490B-9463-93A8FA686DAC}"/>
+                <a16:creationId xmlns:a16="http://schemas.microsoft.com/office/drawing/2014/main" id="{DFCC3C26-143D-45AE-B895-B4333D25F6F0}"/>
               </a:ext>
             </a:extLst>
           </p:cNvPr>
@@ -10164,7 +10164,7 @@
           <p:cNvPr id="11" name="s8-takeaway-rule">
             <a:extLst xmlns:a="http://schemas.openxmlformats.org/drawingml/2006/main">
               <a:ext uri="{FF2B5EF4-FFF2-40B4-BE49-F238E27FC236}">
-                <a16:creationId xmlns:a16="http://schemas.microsoft.com/office/drawing/2014/main" id="{90FAA6B5-8F7C-4C36-98A7-FC6C8A2E79CA}"/>
+                <a16:creationId xmlns:a16="http://schemas.microsoft.com/office/drawing/2014/main" id="{CE26A0CC-4E0D-4993-9110-2B18C890F225}"/>
               </a:ext>
             </a:extLst>
           </p:cNvPr>
@@ -10197,7 +10197,7 @@
           <p:cNvPr id="12" name="s8-takeaway">
             <a:extLst xmlns:a="http://schemas.openxmlformats.org/drawingml/2006/main">
               <a:ext uri="{FF2B5EF4-FFF2-40B4-BE49-F238E27FC236}">
-                <a16:creationId xmlns:a16="http://schemas.microsoft.com/office/drawing/2014/main" id="{D1DB0E3E-4077-4D4B-9B40-B77A656741FE}"/>
+                <a16:creationId xmlns:a16="http://schemas.microsoft.com/office/drawing/2014/main" id="{7E1D40BB-0766-469C-86C5-4525600A5B40}"/>
               </a:ext>
             </a:extLst>
           </p:cNvPr>
@@ -10253,7 +10253,7 @@
     </p:spTree>
     <p:extLst>
       <p:ext uri="{BB962C8B-B14F-4D97-AF65-F5344CB8AC3E}">
-        <p14:creationId xmlns:p14="http://schemas.microsoft.com/office/powerpoint/2010/main" val="431256119"/>
+        <p14:creationId xmlns:p14="http://schemas.microsoft.com/office/powerpoint/2010/main" val="1017255440"/>
       </p:ext>
     </p:extLst>
   </p:cSld>
@@ -10284,7 +10284,7 @@
           <p:cNvPr id="1" name="s9-rule">
             <a:extLst xmlns:a="http://schemas.openxmlformats.org/drawingml/2006/main">
               <a:ext uri="{FF2B5EF4-FFF2-40B4-BE49-F238E27FC236}">
-                <a16:creationId xmlns:a16="http://schemas.microsoft.com/office/drawing/2014/main" id="{D5C2D9CE-1560-417A-A935-76C7E0BE5BAD}"/>
+                <a16:creationId xmlns:a16="http://schemas.microsoft.com/office/drawing/2014/main" id="{8FF21C75-0E3F-4B7C-86C1-8997346724F2}"/>
               </a:ext>
             </a:extLst>
           </p:cNvPr>
@@ -10317,7 +10317,7 @@
           <p:cNvPr id="2" name="s9-eyebrow">
             <a:extLst xmlns:a="http://schemas.openxmlformats.org/drawingml/2006/main">
               <a:ext uri="{FF2B5EF4-FFF2-40B4-BE49-F238E27FC236}">
-                <a16:creationId xmlns:a16="http://schemas.microsoft.com/office/drawing/2014/main" id="{1A42F3A0-B53E-40FF-B7C9-D640B3C7CC9C}"/>
+                <a16:creationId xmlns:a16="http://schemas.microsoft.com/office/drawing/2014/main" id="{4B3B4914-6E23-4571-B5A3-71A59A3F8401}"/>
               </a:ext>
             </a:extLst>
           </p:cNvPr>
@@ -10375,7 +10375,7 @@
           <p:cNvPr id="3" name="s9-title">
             <a:extLst xmlns:a="http://schemas.openxmlformats.org/drawingml/2006/main">
               <a:ext uri="{FF2B5EF4-FFF2-40B4-BE49-F238E27FC236}">
-                <a16:creationId xmlns:a16="http://schemas.microsoft.com/office/drawing/2014/main" id="{5314B574-D0B7-4874-8CDB-ABDA549E0F73}"/>
+                <a16:creationId xmlns:a16="http://schemas.microsoft.com/office/drawing/2014/main" id="{316D96C9-F52D-4710-A858-FD08E698857F}"/>
               </a:ext>
             </a:extLst>
           </p:cNvPr>
@@ -10433,7 +10433,7 @@
           <p:cNvPr id="4" name="s9-footer">
             <a:extLst xmlns:a="http://schemas.openxmlformats.org/drawingml/2006/main">
               <a:ext uri="{FF2B5EF4-FFF2-40B4-BE49-F238E27FC236}">
-                <a16:creationId xmlns:a16="http://schemas.microsoft.com/office/drawing/2014/main" id="{568BE45B-A126-467D-BADF-76A1ED56E27E}"/>
+                <a16:creationId xmlns:a16="http://schemas.microsoft.com/office/drawing/2014/main" id="{375770F0-5557-47E5-B7A2-EE21550140B3}"/>
               </a:ext>
             </a:extLst>
           </p:cNvPr>
@@ -10464,7 +10464,7 @@
           <p:cNvPr id="5" name="s9-identity">
             <a:extLst xmlns:a="http://schemas.openxmlformats.org/drawingml/2006/main">
               <a:ext uri="{FF2B5EF4-FFF2-40B4-BE49-F238E27FC236}">
-                <a16:creationId xmlns:a16="http://schemas.microsoft.com/office/drawing/2014/main" id="{BD4B1AD6-1C94-4237-ADDF-9A770F9A2008}"/>
+                <a16:creationId xmlns:a16="http://schemas.microsoft.com/office/drawing/2014/main" id="{8BDB88B3-B262-4A26-8114-2FDEF75256D4}"/>
               </a:ext>
             </a:extLst>
           </p:cNvPr>
@@ -10522,7 +10522,7 @@
           <p:cNvPr id="6" name="case-title">
             <a:extLst xmlns:a="http://schemas.openxmlformats.org/drawingml/2006/main">
               <a:ext uri="{FF2B5EF4-FFF2-40B4-BE49-F238E27FC236}">
-                <a16:creationId xmlns:a16="http://schemas.microsoft.com/office/drawing/2014/main" id="{0590709B-FEA1-40AA-8ACD-69D1D1C10BDA}"/>
+                <a16:creationId xmlns:a16="http://schemas.microsoft.com/office/drawing/2014/main" id="{407C604D-7874-4D9C-85C4-EFE94E3BBB58}"/>
               </a:ext>
             </a:extLst>
           </p:cNvPr>
@@ -10586,7 +10586,7 @@
           <p:cNvPr id="7" name="case-row-0">
             <a:extLst xmlns:a="http://schemas.openxmlformats.org/drawingml/2006/main">
               <a:ext uri="{FF2B5EF4-FFF2-40B4-BE49-F238E27FC236}">
-                <a16:creationId xmlns:a16="http://schemas.microsoft.com/office/drawing/2014/main" id="{CF999994-A237-498A-83CE-8EAB5B0EBE90}"/>
+                <a16:creationId xmlns:a16="http://schemas.microsoft.com/office/drawing/2014/main" id="{30E1058B-0364-41D3-BD67-CB6969D485A4}"/>
               </a:ext>
             </a:extLst>
           </p:cNvPr>
@@ -10650,7 +10650,7 @@
           <p:cNvPr id="8" name="case-row-1">
             <a:extLst xmlns:a="http://schemas.openxmlformats.org/drawingml/2006/main">
               <a:ext uri="{FF2B5EF4-FFF2-40B4-BE49-F238E27FC236}">
-                <a16:creationId xmlns:a16="http://schemas.microsoft.com/office/drawing/2014/main" id="{E87856F1-7B1F-4991-8B2E-9F0913AD8A96}"/>
+                <a16:creationId xmlns:a16="http://schemas.microsoft.com/office/drawing/2014/main" id="{1EA86549-FEC5-4801-B8AB-861759A75E3C}"/>
               </a:ext>
             </a:extLst>
           </p:cNvPr>
@@ -10714,7 +10714,7 @@
           <p:cNvPr id="9" name="case-row-2">
             <a:extLst xmlns:a="http://schemas.openxmlformats.org/drawingml/2006/main">
               <a:ext uri="{FF2B5EF4-FFF2-40B4-BE49-F238E27FC236}">
-                <a16:creationId xmlns:a16="http://schemas.microsoft.com/office/drawing/2014/main" id="{A6594B89-821A-4A1F-BBE9-169B8B164FF3}"/>
+                <a16:creationId xmlns:a16="http://schemas.microsoft.com/office/drawing/2014/main" id="{99C9F3A9-875B-4723-8848-950B1F8682A4}"/>
               </a:ext>
             </a:extLst>
           </p:cNvPr>
@@ -10778,7 +10778,7 @@
           <p:cNvPr id="10" name="case-row-3">
             <a:extLst xmlns:a="http://schemas.openxmlformats.org/drawingml/2006/main">
               <a:ext uri="{FF2B5EF4-FFF2-40B4-BE49-F238E27FC236}">
-                <a16:creationId xmlns:a16="http://schemas.microsoft.com/office/drawing/2014/main" id="{7DA0BDAB-4E7D-4156-BA46-61297C8C5133}"/>
+                <a16:creationId xmlns:a16="http://schemas.microsoft.com/office/drawing/2014/main" id="{48617280-6DD6-40DA-8B69-CE67AC69A953}"/>
               </a:ext>
             </a:extLst>
           </p:cNvPr>
@@ -10842,7 +10842,7 @@
           <p:cNvPr id="11" name="s9-takeaway-rule">
             <a:extLst xmlns:a="http://schemas.openxmlformats.org/drawingml/2006/main">
               <a:ext uri="{FF2B5EF4-FFF2-40B4-BE49-F238E27FC236}">
-                <a16:creationId xmlns:a16="http://schemas.microsoft.com/office/drawing/2014/main" id="{92D01166-A324-4FAB-BE12-BE860C64B9AE}"/>
+                <a16:creationId xmlns:a16="http://schemas.microsoft.com/office/drawing/2014/main" id="{76EAD127-980C-4B5D-95D1-F7F66CBAB0BD}"/>
               </a:ext>
             </a:extLst>
           </p:cNvPr>
@@ -10875,7 +10875,7 @@
           <p:cNvPr id="12" name="s9-takeaway">
             <a:extLst xmlns:a="http://schemas.openxmlformats.org/drawingml/2006/main">
               <a:ext uri="{FF2B5EF4-FFF2-40B4-BE49-F238E27FC236}">
-                <a16:creationId xmlns:a16="http://schemas.microsoft.com/office/drawing/2014/main" id="{5B1F2FE6-F41E-4AE7-BA01-DC383660C764}"/>
+                <a16:creationId xmlns:a16="http://schemas.microsoft.com/office/drawing/2014/main" id="{D2FCF557-822F-46CC-B195-E5A2BD2DE885}"/>
               </a:ext>
             </a:extLst>
           </p:cNvPr>
@@ -10931,7 +10931,7 @@
     </p:spTree>
     <p:extLst>
       <p:ext uri="{BB962C8B-B14F-4D97-AF65-F5344CB8AC3E}">
-        <p14:creationId xmlns:p14="http://schemas.microsoft.com/office/powerpoint/2010/main" val="765554325"/>
+        <p14:creationId xmlns:p14="http://schemas.microsoft.com/office/powerpoint/2010/main" val="154417776"/>
       </p:ext>
     </p:extLst>
   </p:cSld>
